--- a/slides/03-agentic-tool-loop.pptx
+++ b/slides/03-agentic-tool-loop.pptx
@@ -13,6 +13,9 @@
     <p:sldId id="261" r:id="rId12"/>
     <p:sldId id="262" r:id="rId13"/>
     <p:sldId id="263" r:id="rId14"/>
+    <p:sldId id="264" r:id="rId15"/>
+    <p:sldId id="265" r:id="rId16"/>
+    <p:sldId id="266" r:id="rId17"/>
   </p:sldIdLst>
   <p:sldSz cx="9144000" cy="5143500" type="screen4x3"/>
   <p:notesSz cx="6858000" cy="9144000"/>
@@ -3483,6 +3486,2299 @@
 </p:sld>
 </file>
 
+<file path=ppt/slides/slide10.xml><?xml version="1.0" encoding="utf-8"?>
+<p:sld xmlns:a="http://schemas.openxmlformats.org/drawingml/2006/main" xmlns:p="http://schemas.openxmlformats.org/presentationml/2006/main" xmlns:r="http://schemas.openxmlformats.org/officeDocument/2006/relationships">
+  <p:cSld>
+    <p:spTree>
+      <p:nvGrpSpPr>
+        <p:cNvPr id="1" name=""/>
+        <p:cNvGrpSpPr/>
+        <p:nvPr/>
+      </p:nvGrpSpPr>
+      <p:grpSpPr/>
+      <p:sp>
+        <p:nvSpPr>
+          <p:cNvPr id="2" name="Rectangle 1"/>
+          <p:cNvSpPr/>
+          <p:nvPr/>
+        </p:nvSpPr>
+        <p:spPr>
+          <a:xfrm>
+            <a:off x="0" y="0"/>
+            <a:ext cx="9144000" cy="5143500"/>
+          </a:xfrm>
+          <a:prstGeom prst="rect">
+            <a:avLst/>
+          </a:prstGeom>
+          <a:solidFill>
+            <a:srgbClr val="0F1429"/>
+          </a:solidFill>
+          <a:ln>
+            <a:noFill/>
+          </a:ln>
+        </p:spPr>
+        <p:style>
+          <a:lnRef idx="1">
+            <a:schemeClr val="accent1"/>
+          </a:lnRef>
+          <a:fillRef idx="3">
+            <a:schemeClr val="accent1"/>
+          </a:fillRef>
+          <a:effectRef idx="2">
+            <a:schemeClr val="accent1"/>
+          </a:effectRef>
+          <a:fontRef idx="minor">
+            <a:schemeClr val="lt1"/>
+          </a:fontRef>
+        </p:style>
+        <p:txBody>
+          <a:bodyPr rtlCol="0" anchor="ctr"/>
+          <a:lstStyle/>
+          <a:p>
+            <a:pPr algn="ctr"/>
+          </a:p>
+        </p:txBody>
+      </p:sp>
+      <p:sp>
+        <p:nvSpPr>
+          <p:cNvPr id="3" name="Oval 2"/>
+          <p:cNvSpPr/>
+          <p:nvPr/>
+        </p:nvSpPr>
+        <p:spPr>
+          <a:xfrm>
+            <a:off x="445769" y="240030"/>
+            <a:ext cx="274320" cy="274320"/>
+          </a:xfrm>
+          <a:prstGeom prst="ellipse">
+            <a:avLst/>
+          </a:prstGeom>
+          <a:solidFill>
+            <a:srgbClr val="FB7048"/>
+          </a:solidFill>
+          <a:ln>
+            <a:noFill/>
+          </a:ln>
+          <a:effectLst/>
+        </p:spPr>
+        <p:style>
+          <a:lnRef idx="1">
+            <a:schemeClr val="accent1"/>
+          </a:lnRef>
+          <a:fillRef idx="3">
+            <a:schemeClr val="accent1"/>
+          </a:fillRef>
+          <a:effectRef idx="2">
+            <a:schemeClr val="accent1"/>
+          </a:effectRef>
+          <a:fontRef idx="minor">
+            <a:schemeClr val="lt1"/>
+          </a:fontRef>
+        </p:style>
+        <p:txBody>
+          <a:bodyPr rtlCol="0" anchor="ctr"/>
+          <a:lstStyle/>
+          <a:p>
+            <a:pPr algn="ctr"/>
+          </a:p>
+        </p:txBody>
+      </p:sp>
+      <p:sp>
+        <p:nvSpPr>
+          <p:cNvPr id="4" name="TextBox 3"/>
+          <p:cNvSpPr txBox="1"/>
+          <p:nvPr/>
+        </p:nvSpPr>
+        <p:spPr>
+          <a:xfrm>
+            <a:off x="822959" y="205739"/>
+            <a:ext cx="8229600" cy="377190"/>
+          </a:xfrm>
+          <a:prstGeom prst="rect">
+            <a:avLst/>
+          </a:prstGeom>
+          <a:noFill/>
+        </p:spPr>
+        <p:txBody>
+          <a:bodyPr wrap="square" lIns="27432" rIns="27432" tIns="13716" bIns="13716" anchor="ctr">
+            <a:spAutoFit/>
+          </a:bodyPr>
+          <a:lstStyle/>
+          <a:p>
+            <a:pPr algn="l"/>
+            <a:r>
+              <a:rPr sz="1050" b="1" i="0">
+                <a:solidFill>
+                  <a:srgbClr val="CBD5E1"/>
+                </a:solidFill>
+                <a:latin typeface="Calibri"/>
+              </a:rPr>
+              <a:t>04   L I V E   D E M O</a:t>
+            </a:r>
+          </a:p>
+        </p:txBody>
+      </p:sp>
+      <p:sp>
+        <p:nvSpPr>
+          <p:cNvPr id="5" name="TextBox 4"/>
+          <p:cNvSpPr txBox="1"/>
+          <p:nvPr/>
+        </p:nvSpPr>
+        <p:spPr>
+          <a:xfrm>
+            <a:off x="582930" y="720090"/>
+            <a:ext cx="8229600" cy="582930"/>
+          </a:xfrm>
+          <a:prstGeom prst="rect">
+            <a:avLst/>
+          </a:prstGeom>
+          <a:noFill/>
+        </p:spPr>
+        <p:txBody>
+          <a:bodyPr wrap="square" lIns="27432" rIns="27432" tIns="13716" bIns="13716" anchor="t">
+            <a:spAutoFit/>
+          </a:bodyPr>
+          <a:lstStyle/>
+          <a:p>
+            <a:pPr algn="l"/>
+            <a:r>
+              <a:rPr sz="3300" b="1" i="0">
+                <a:solidFill>
+                  <a:srgbClr val="FB7048"/>
+                </a:solidFill>
+                <a:latin typeface="Arial Black"/>
+              </a:rPr>
+              <a:t>▶  切換到 Live Demo</a:t>
+            </a:r>
+          </a:p>
+        </p:txBody>
+      </p:sp>
+      <p:sp>
+        <p:nvSpPr>
+          <p:cNvPr id="6" name="TextBox 5"/>
+          <p:cNvSpPr txBox="1"/>
+          <p:nvPr/>
+        </p:nvSpPr>
+        <p:spPr>
+          <a:xfrm>
+            <a:off x="582930" y="1405889"/>
+            <a:ext cx="8229600" cy="308610"/>
+          </a:xfrm>
+          <a:prstGeom prst="rect">
+            <a:avLst/>
+          </a:prstGeom>
+          <a:noFill/>
+        </p:spPr>
+        <p:txBody>
+          <a:bodyPr wrap="square" lIns="27432" rIns="27432" tIns="13716" bIns="13716" anchor="t">
+            <a:spAutoFit/>
+          </a:bodyPr>
+          <a:lstStyle/>
+          <a:p>
+            <a:pPr algn="l"/>
+            <a:r>
+              <a:rPr sz="1350" b="0" i="1">
+                <a:solidFill>
+                  <a:srgbClr val="CBD5E1"/>
+                </a:solidFill>
+                <a:latin typeface="Calibri"/>
+              </a:rPr>
+              <a:t>25 分鐘 · 興大 AI 學伴實機</a:t>
+            </a:r>
+          </a:p>
+        </p:txBody>
+      </p:sp>
+      <p:sp>
+        <p:nvSpPr>
+          <p:cNvPr id="7" name="TextBox 6"/>
+          <p:cNvSpPr txBox="1"/>
+          <p:nvPr/>
+        </p:nvSpPr>
+        <p:spPr>
+          <a:xfrm>
+            <a:off x="582930" y="1851660"/>
+            <a:ext cx="8229600" cy="274320"/>
+          </a:xfrm>
+          <a:prstGeom prst="rect">
+            <a:avLst/>
+          </a:prstGeom>
+          <a:noFill/>
+        </p:spPr>
+        <p:txBody>
+          <a:bodyPr wrap="square" lIns="27432" rIns="27432" tIns="13716" bIns="13716" anchor="t">
+            <a:spAutoFit/>
+          </a:bodyPr>
+          <a:lstStyle/>
+          <a:p>
+            <a:pPr algn="l"/>
+            <a:r>
+              <a:rPr sz="1050" b="1" i="0">
+                <a:solidFill>
+                  <a:srgbClr val="EEE8FF"/>
+                </a:solidFill>
+                <a:latin typeface="Calibri"/>
+              </a:rPr>
+              <a:t>5 個示範問題(從淺到深,完整腳本見 03-live-demo-script.md)</a:t>
+            </a:r>
+          </a:p>
+        </p:txBody>
+      </p:sp>
+      <p:sp>
+        <p:nvSpPr>
+          <p:cNvPr id="8" name="Rounded Rectangle 7"/>
+          <p:cNvSpPr/>
+          <p:nvPr/>
+        </p:nvSpPr>
+        <p:spPr>
+          <a:xfrm>
+            <a:off x="685800" y="2194560"/>
+            <a:ext cx="8126729" cy="445770"/>
+          </a:xfrm>
+          <a:prstGeom prst="roundRect">
+            <a:avLst>
+              <a:gd name="adj" fmla="val 10000"/>
+            </a:avLst>
+          </a:prstGeom>
+          <a:solidFill>
+            <a:srgbClr val="242A44"/>
+          </a:solidFill>
+          <a:ln w="14287">
+            <a:solidFill>
+              <a:srgbClr val="0EA594"/>
+            </a:solidFill>
+          </a:ln>
+          <a:effectLst/>
+        </p:spPr>
+        <p:style>
+          <a:lnRef idx="1">
+            <a:schemeClr val="accent1"/>
+          </a:lnRef>
+          <a:fillRef idx="3">
+            <a:schemeClr val="accent1"/>
+          </a:fillRef>
+          <a:effectRef idx="2">
+            <a:schemeClr val="accent1"/>
+          </a:effectRef>
+          <a:fontRef idx="minor">
+            <a:schemeClr val="lt1"/>
+          </a:fontRef>
+        </p:style>
+        <p:txBody>
+          <a:bodyPr rtlCol="0" anchor="ctr"/>
+          <a:lstStyle/>
+          <a:p>
+            <a:pPr algn="ctr"/>
+          </a:p>
+        </p:txBody>
+      </p:sp>
+      <p:sp>
+        <p:nvSpPr>
+          <p:cNvPr id="9" name="TextBox 8"/>
+          <p:cNvSpPr txBox="1"/>
+          <p:nvPr/>
+        </p:nvSpPr>
+        <p:spPr>
+          <a:xfrm>
+            <a:off x="822959" y="2194560"/>
+            <a:ext cx="480059" cy="445770"/>
+          </a:xfrm>
+          <a:prstGeom prst="rect">
+            <a:avLst/>
+          </a:prstGeom>
+          <a:noFill/>
+        </p:spPr>
+        <p:txBody>
+          <a:bodyPr wrap="square" lIns="27432" rIns="27432" tIns="13716" bIns="13716" anchor="ctr">
+            <a:spAutoFit/>
+          </a:bodyPr>
+          <a:lstStyle/>
+          <a:p>
+            <a:pPr algn="l"/>
+            <a:r>
+              <a:rPr sz="1050" b="1" i="0">
+                <a:solidFill>
+                  <a:srgbClr val="0EA594"/>
+                </a:solidFill>
+                <a:latin typeface="Consolas"/>
+              </a:rPr>
+              <a:t>Q1</a:t>
+            </a:r>
+          </a:p>
+        </p:txBody>
+      </p:sp>
+      <p:sp>
+        <p:nvSpPr>
+          <p:cNvPr id="10" name="TextBox 9"/>
+          <p:cNvSpPr txBox="1"/>
+          <p:nvPr/>
+        </p:nvSpPr>
+        <p:spPr>
+          <a:xfrm>
+            <a:off x="1337310" y="2194560"/>
+            <a:ext cx="3086100" cy="445770"/>
+          </a:xfrm>
+          <a:prstGeom prst="rect">
+            <a:avLst/>
+          </a:prstGeom>
+          <a:noFill/>
+        </p:spPr>
+        <p:txBody>
+          <a:bodyPr wrap="square" lIns="27432" rIns="27432" tIns="13716" bIns="13716" anchor="ctr">
+            <a:spAutoFit/>
+          </a:bodyPr>
+          <a:lstStyle/>
+          <a:p>
+            <a:pPr algn="l"/>
+            <a:r>
+              <a:rPr sz="1125" b="1" i="0">
+                <a:solidFill>
+                  <a:srgbClr val="E5E7EB"/>
+                </a:solidFill>
+                <a:latin typeface="Calibri"/>
+              </a:rPr>
+              <a:t>圖書館 AI 書多少</a:t>
+            </a:r>
+          </a:p>
+        </p:txBody>
+      </p:sp>
+      <p:sp>
+        <p:nvSpPr>
+          <p:cNvPr id="11" name="TextBox 10"/>
+          <p:cNvSpPr txBox="1"/>
+          <p:nvPr/>
+        </p:nvSpPr>
+        <p:spPr>
+          <a:xfrm>
+            <a:off x="4457700" y="2194560"/>
+            <a:ext cx="2331720" cy="445770"/>
+          </a:xfrm>
+          <a:prstGeom prst="rect">
+            <a:avLst/>
+          </a:prstGeom>
+          <a:noFill/>
+        </p:spPr>
+        <p:txBody>
+          <a:bodyPr wrap="square" lIns="27432" rIns="27432" tIns="13716" bIns="13716" anchor="ctr">
+            <a:spAutoFit/>
+          </a:bodyPr>
+          <a:lstStyle/>
+          <a:p>
+            <a:pPr algn="l"/>
+            <a:r>
+              <a:rPr sz="937" b="0" i="1">
+                <a:solidFill>
+                  <a:srgbClr val="9CA3AF"/>
+                </a:solidFill>
+                <a:latin typeface="Calibri"/>
+              </a:rPr>
+              <a:t>single tool</a:t>
+            </a:r>
+          </a:p>
+        </p:txBody>
+      </p:sp>
+      <p:sp>
+        <p:nvSpPr>
+          <p:cNvPr id="12" name="TextBox 11"/>
+          <p:cNvSpPr txBox="1"/>
+          <p:nvPr/>
+        </p:nvSpPr>
+        <p:spPr>
+          <a:xfrm>
+            <a:off x="6858000" y="2194560"/>
+            <a:ext cx="1062990" cy="445770"/>
+          </a:xfrm>
+          <a:prstGeom prst="rect">
+            <a:avLst/>
+          </a:prstGeom>
+          <a:noFill/>
+        </p:spPr>
+        <p:txBody>
+          <a:bodyPr wrap="square" lIns="27432" rIns="27432" tIns="13716" bIns="13716" anchor="ctr">
+            <a:spAutoFit/>
+          </a:bodyPr>
+          <a:lstStyle/>
+          <a:p>
+            <a:pPr algn="ctr"/>
+            <a:r>
+              <a:rPr sz="1050" b="1" i="0">
+                <a:solidFill>
+                  <a:srgbClr val="0EA594"/>
+                </a:solidFill>
+                <a:latin typeface="Calibri"/>
+              </a:rPr>
+              <a:t>★</a:t>
+            </a:r>
+          </a:p>
+        </p:txBody>
+      </p:sp>
+      <p:sp>
+        <p:nvSpPr>
+          <p:cNvPr id="13" name="TextBox 12"/>
+          <p:cNvSpPr txBox="1"/>
+          <p:nvPr/>
+        </p:nvSpPr>
+        <p:spPr>
+          <a:xfrm>
+            <a:off x="7920990" y="2194560"/>
+            <a:ext cx="857250" cy="445770"/>
+          </a:xfrm>
+          <a:prstGeom prst="rect">
+            <a:avLst/>
+          </a:prstGeom>
+          <a:noFill/>
+        </p:spPr>
+        <p:txBody>
+          <a:bodyPr wrap="square" lIns="27432" rIns="27432" tIns="13716" bIns="13716" anchor="ctr">
+            <a:spAutoFit/>
+          </a:bodyPr>
+          <a:lstStyle/>
+          <a:p>
+            <a:pPr algn="r"/>
+            <a:r>
+              <a:rPr sz="825" b="0" i="0">
+                <a:solidFill>
+                  <a:srgbClr val="9CA3AF"/>
+                </a:solidFill>
+                <a:latin typeface="Consolas"/>
+              </a:rPr>
+              <a:t>~30s</a:t>
+            </a:r>
+          </a:p>
+        </p:txBody>
+      </p:sp>
+      <p:sp>
+        <p:nvSpPr>
+          <p:cNvPr id="14" name="Rounded Rectangle 13"/>
+          <p:cNvSpPr/>
+          <p:nvPr/>
+        </p:nvSpPr>
+        <p:spPr>
+          <a:xfrm>
+            <a:off x="685800" y="2695194"/>
+            <a:ext cx="8126729" cy="445770"/>
+          </a:xfrm>
+          <a:prstGeom prst="roundRect">
+            <a:avLst>
+              <a:gd name="adj" fmla="val 10000"/>
+            </a:avLst>
+          </a:prstGeom>
+          <a:solidFill>
+            <a:srgbClr val="242A44"/>
+          </a:solidFill>
+          <a:ln w="14287">
+            <a:solidFill>
+              <a:srgbClr val="0EA594"/>
+            </a:solidFill>
+          </a:ln>
+          <a:effectLst/>
+        </p:spPr>
+        <p:style>
+          <a:lnRef idx="1">
+            <a:schemeClr val="accent1"/>
+          </a:lnRef>
+          <a:fillRef idx="3">
+            <a:schemeClr val="accent1"/>
+          </a:fillRef>
+          <a:effectRef idx="2">
+            <a:schemeClr val="accent1"/>
+          </a:effectRef>
+          <a:fontRef idx="minor">
+            <a:schemeClr val="lt1"/>
+          </a:fontRef>
+        </p:style>
+        <p:txBody>
+          <a:bodyPr rtlCol="0" anchor="ctr"/>
+          <a:lstStyle/>
+          <a:p>
+            <a:pPr algn="ctr"/>
+          </a:p>
+        </p:txBody>
+      </p:sp>
+      <p:sp>
+        <p:nvSpPr>
+          <p:cNvPr id="15" name="TextBox 14"/>
+          <p:cNvSpPr txBox="1"/>
+          <p:nvPr/>
+        </p:nvSpPr>
+        <p:spPr>
+          <a:xfrm>
+            <a:off x="822959" y="2695194"/>
+            <a:ext cx="480059" cy="445770"/>
+          </a:xfrm>
+          <a:prstGeom prst="rect">
+            <a:avLst/>
+          </a:prstGeom>
+          <a:noFill/>
+        </p:spPr>
+        <p:txBody>
+          <a:bodyPr wrap="square" lIns="27432" rIns="27432" tIns="13716" bIns="13716" anchor="ctr">
+            <a:spAutoFit/>
+          </a:bodyPr>
+          <a:lstStyle/>
+          <a:p>
+            <a:pPr algn="l"/>
+            <a:r>
+              <a:rPr sz="1050" b="1" i="0">
+                <a:solidFill>
+                  <a:srgbClr val="0EA594"/>
+                </a:solidFill>
+                <a:latin typeface="Consolas"/>
+              </a:rPr>
+              <a:t>Q2</a:t>
+            </a:r>
+          </a:p>
+        </p:txBody>
+      </p:sp>
+      <p:sp>
+        <p:nvSpPr>
+          <p:cNvPr id="16" name="TextBox 15"/>
+          <p:cNvSpPr txBox="1"/>
+          <p:nvPr/>
+        </p:nvSpPr>
+        <p:spPr>
+          <a:xfrm>
+            <a:off x="1337310" y="2695194"/>
+            <a:ext cx="3086100" cy="445770"/>
+          </a:xfrm>
+          <a:prstGeom prst="rect">
+            <a:avLst/>
+          </a:prstGeom>
+          <a:noFill/>
+        </p:spPr>
+        <p:txBody>
+          <a:bodyPr wrap="square" lIns="27432" rIns="27432" tIns="13716" bIns="13716" anchor="ctr">
+            <a:spAutoFit/>
+          </a:bodyPr>
+          <a:lstStyle/>
+          <a:p>
+            <a:pPr algn="l"/>
+            <a:r>
+              <a:rPr sz="1125" b="1" i="0">
+                <a:solidFill>
+                  <a:srgbClr val="E5E7EB"/>
+                </a:solidFill>
+                <a:latin typeface="Calibri"/>
+              </a:rPr>
+              <a:t>資工系深度學習老師</a:t>
+            </a:r>
+          </a:p>
+        </p:txBody>
+      </p:sp>
+      <p:sp>
+        <p:nvSpPr>
+          <p:cNvPr id="17" name="TextBox 16"/>
+          <p:cNvSpPr txBox="1"/>
+          <p:nvPr/>
+        </p:nvSpPr>
+        <p:spPr>
+          <a:xfrm>
+            <a:off x="4457700" y="2695194"/>
+            <a:ext cx="2331720" cy="445770"/>
+          </a:xfrm>
+          <a:prstGeom prst="rect">
+            <a:avLst/>
+          </a:prstGeom>
+          <a:noFill/>
+        </p:spPr>
+        <p:txBody>
+          <a:bodyPr wrap="square" lIns="27432" rIns="27432" tIns="13716" bIns="13716" anchor="ctr">
+            <a:spAutoFit/>
+          </a:bodyPr>
+          <a:lstStyle/>
+          <a:p>
+            <a:pPr algn="l"/>
+            <a:r>
+              <a:rPr sz="937" b="0" i="1">
+                <a:solidFill>
+                  <a:srgbClr val="9CA3AF"/>
+                </a:solidFill>
+                <a:latin typeface="Calibri"/>
+              </a:rPr>
+              <a:t>single tool + 參數</a:t>
+            </a:r>
+          </a:p>
+        </p:txBody>
+      </p:sp>
+      <p:sp>
+        <p:nvSpPr>
+          <p:cNvPr id="18" name="TextBox 17"/>
+          <p:cNvSpPr txBox="1"/>
+          <p:nvPr/>
+        </p:nvSpPr>
+        <p:spPr>
+          <a:xfrm>
+            <a:off x="6858000" y="2695194"/>
+            <a:ext cx="1062990" cy="445770"/>
+          </a:xfrm>
+          <a:prstGeom prst="rect">
+            <a:avLst/>
+          </a:prstGeom>
+          <a:noFill/>
+        </p:spPr>
+        <p:txBody>
+          <a:bodyPr wrap="square" lIns="27432" rIns="27432" tIns="13716" bIns="13716" anchor="ctr">
+            <a:spAutoFit/>
+          </a:bodyPr>
+          <a:lstStyle/>
+          <a:p>
+            <a:pPr algn="ctr"/>
+            <a:r>
+              <a:rPr sz="1050" b="1" i="0">
+                <a:solidFill>
+                  <a:srgbClr val="0EA594"/>
+                </a:solidFill>
+                <a:latin typeface="Calibri"/>
+              </a:rPr>
+              <a:t>★</a:t>
+            </a:r>
+          </a:p>
+        </p:txBody>
+      </p:sp>
+      <p:sp>
+        <p:nvSpPr>
+          <p:cNvPr id="19" name="TextBox 18"/>
+          <p:cNvSpPr txBox="1"/>
+          <p:nvPr/>
+        </p:nvSpPr>
+        <p:spPr>
+          <a:xfrm>
+            <a:off x="7920990" y="2695194"/>
+            <a:ext cx="857250" cy="445770"/>
+          </a:xfrm>
+          <a:prstGeom prst="rect">
+            <a:avLst/>
+          </a:prstGeom>
+          <a:noFill/>
+        </p:spPr>
+        <p:txBody>
+          <a:bodyPr wrap="square" lIns="27432" rIns="27432" tIns="13716" bIns="13716" anchor="ctr">
+            <a:spAutoFit/>
+          </a:bodyPr>
+          <a:lstStyle/>
+          <a:p>
+            <a:pPr algn="r"/>
+            <a:r>
+              <a:rPr sz="825" b="0" i="0">
+                <a:solidFill>
+                  <a:srgbClr val="9CA3AF"/>
+                </a:solidFill>
+                <a:latin typeface="Consolas"/>
+              </a:rPr>
+              <a:t>~30s</a:t>
+            </a:r>
+          </a:p>
+        </p:txBody>
+      </p:sp>
+      <p:sp>
+        <p:nvSpPr>
+          <p:cNvPr id="20" name="Rounded Rectangle 19"/>
+          <p:cNvSpPr/>
+          <p:nvPr/>
+        </p:nvSpPr>
+        <p:spPr>
+          <a:xfrm>
+            <a:off x="685800" y="3195828"/>
+            <a:ext cx="8126729" cy="445770"/>
+          </a:xfrm>
+          <a:prstGeom prst="roundRect">
+            <a:avLst>
+              <a:gd name="adj" fmla="val 10000"/>
+            </a:avLst>
+          </a:prstGeom>
+          <a:solidFill>
+            <a:srgbClr val="242A44"/>
+          </a:solidFill>
+          <a:ln w="14287">
+            <a:solidFill>
+              <a:srgbClr val="7B5CF5"/>
+            </a:solidFill>
+          </a:ln>
+          <a:effectLst/>
+        </p:spPr>
+        <p:style>
+          <a:lnRef idx="1">
+            <a:schemeClr val="accent1"/>
+          </a:lnRef>
+          <a:fillRef idx="3">
+            <a:schemeClr val="accent1"/>
+          </a:fillRef>
+          <a:effectRef idx="2">
+            <a:schemeClr val="accent1"/>
+          </a:effectRef>
+          <a:fontRef idx="minor">
+            <a:schemeClr val="lt1"/>
+          </a:fontRef>
+        </p:style>
+        <p:txBody>
+          <a:bodyPr rtlCol="0" anchor="ctr"/>
+          <a:lstStyle/>
+          <a:p>
+            <a:pPr algn="ctr"/>
+          </a:p>
+        </p:txBody>
+      </p:sp>
+      <p:sp>
+        <p:nvSpPr>
+          <p:cNvPr id="21" name="TextBox 20"/>
+          <p:cNvSpPr txBox="1"/>
+          <p:nvPr/>
+        </p:nvSpPr>
+        <p:spPr>
+          <a:xfrm>
+            <a:off x="822959" y="3195828"/>
+            <a:ext cx="480059" cy="445770"/>
+          </a:xfrm>
+          <a:prstGeom prst="rect">
+            <a:avLst/>
+          </a:prstGeom>
+          <a:noFill/>
+        </p:spPr>
+        <p:txBody>
+          <a:bodyPr wrap="square" lIns="27432" rIns="27432" tIns="13716" bIns="13716" anchor="ctr">
+            <a:spAutoFit/>
+          </a:bodyPr>
+          <a:lstStyle/>
+          <a:p>
+            <a:pPr algn="l"/>
+            <a:r>
+              <a:rPr sz="1050" b="1" i="0">
+                <a:solidFill>
+                  <a:srgbClr val="7B5CF5"/>
+                </a:solidFill>
+                <a:latin typeface="Consolas"/>
+              </a:rPr>
+              <a:t>Q3</a:t>
+            </a:r>
+          </a:p>
+        </p:txBody>
+      </p:sp>
+      <p:sp>
+        <p:nvSpPr>
+          <p:cNvPr id="22" name="TextBox 21"/>
+          <p:cNvSpPr txBox="1"/>
+          <p:nvPr/>
+        </p:nvSpPr>
+        <p:spPr>
+          <a:xfrm>
+            <a:off x="1337310" y="3195828"/>
+            <a:ext cx="3086100" cy="445770"/>
+          </a:xfrm>
+          <a:prstGeom prst="rect">
+            <a:avLst/>
+          </a:prstGeom>
+          <a:noFill/>
+        </p:spPr>
+        <p:txBody>
+          <a:bodyPr wrap="square" lIns="27432" rIns="27432" tIns="13716" bIns="13716" anchor="ctr">
+            <a:spAutoFit/>
+          </a:bodyPr>
+          <a:lstStyle/>
+          <a:p>
+            <a:pPr algn="l"/>
+            <a:r>
+              <a:rPr sz="1125" b="1" i="0">
+                <a:solidFill>
+                  <a:srgbClr val="E5E7EB"/>
+                </a:solidFill>
+                <a:latin typeface="Calibri"/>
+              </a:rPr>
+              <a:t>AI 課程 + 教授介紹</a:t>
+            </a:r>
+          </a:p>
+        </p:txBody>
+      </p:sp>
+      <p:sp>
+        <p:nvSpPr>
+          <p:cNvPr id="23" name="TextBox 22"/>
+          <p:cNvSpPr txBox="1"/>
+          <p:nvPr/>
+        </p:nvSpPr>
+        <p:spPr>
+          <a:xfrm>
+            <a:off x="4457700" y="3195828"/>
+            <a:ext cx="2331720" cy="445770"/>
+          </a:xfrm>
+          <a:prstGeom prst="rect">
+            <a:avLst/>
+          </a:prstGeom>
+          <a:noFill/>
+        </p:spPr>
+        <p:txBody>
+          <a:bodyPr wrap="square" lIns="27432" rIns="27432" tIns="13716" bIns="13716" anchor="ctr">
+            <a:spAutoFit/>
+          </a:bodyPr>
+          <a:lstStyle/>
+          <a:p>
+            <a:pPr algn="l"/>
+            <a:r>
+              <a:rPr sz="937" b="0" i="1">
+                <a:solidFill>
+                  <a:srgbClr val="9CA3AF"/>
+                </a:solidFill>
+                <a:latin typeface="Calibri"/>
+              </a:rPr>
+              <a:t>multi-turn 主菜</a:t>
+            </a:r>
+          </a:p>
+        </p:txBody>
+      </p:sp>
+      <p:sp>
+        <p:nvSpPr>
+          <p:cNvPr id="24" name="TextBox 23"/>
+          <p:cNvSpPr txBox="1"/>
+          <p:nvPr/>
+        </p:nvSpPr>
+        <p:spPr>
+          <a:xfrm>
+            <a:off x="6858000" y="3195828"/>
+            <a:ext cx="1062990" cy="445770"/>
+          </a:xfrm>
+          <a:prstGeom prst="rect">
+            <a:avLst/>
+          </a:prstGeom>
+          <a:noFill/>
+        </p:spPr>
+        <p:txBody>
+          <a:bodyPr wrap="square" lIns="27432" rIns="27432" tIns="13716" bIns="13716" anchor="ctr">
+            <a:spAutoFit/>
+          </a:bodyPr>
+          <a:lstStyle/>
+          <a:p>
+            <a:pPr algn="ctr"/>
+            <a:r>
+              <a:rPr sz="1050" b="1" i="0">
+                <a:solidFill>
+                  <a:srgbClr val="7B5CF5"/>
+                </a:solidFill>
+                <a:latin typeface="Calibri"/>
+              </a:rPr>
+              <a:t>★★</a:t>
+            </a:r>
+          </a:p>
+        </p:txBody>
+      </p:sp>
+      <p:sp>
+        <p:nvSpPr>
+          <p:cNvPr id="25" name="TextBox 24"/>
+          <p:cNvSpPr txBox="1"/>
+          <p:nvPr/>
+        </p:nvSpPr>
+        <p:spPr>
+          <a:xfrm>
+            <a:off x="7920990" y="3195828"/>
+            <a:ext cx="857250" cy="445770"/>
+          </a:xfrm>
+          <a:prstGeom prst="rect">
+            <a:avLst/>
+          </a:prstGeom>
+          <a:noFill/>
+        </p:spPr>
+        <p:txBody>
+          <a:bodyPr wrap="square" lIns="27432" rIns="27432" tIns="13716" bIns="13716" anchor="ctr">
+            <a:spAutoFit/>
+          </a:bodyPr>
+          <a:lstStyle/>
+          <a:p>
+            <a:pPr algn="r"/>
+            <a:r>
+              <a:rPr sz="825" b="0" i="0">
+                <a:solidFill>
+                  <a:srgbClr val="9CA3AF"/>
+                </a:solidFill>
+                <a:latin typeface="Consolas"/>
+              </a:rPr>
+              <a:t>~60-90s</a:t>
+            </a:r>
+          </a:p>
+        </p:txBody>
+      </p:sp>
+      <p:sp>
+        <p:nvSpPr>
+          <p:cNvPr id="26" name="Rounded Rectangle 25"/>
+          <p:cNvSpPr/>
+          <p:nvPr/>
+        </p:nvSpPr>
+        <p:spPr>
+          <a:xfrm>
+            <a:off x="685800" y="3696462"/>
+            <a:ext cx="8126729" cy="445770"/>
+          </a:xfrm>
+          <a:prstGeom prst="roundRect">
+            <a:avLst>
+              <a:gd name="adj" fmla="val 10000"/>
+            </a:avLst>
+          </a:prstGeom>
+          <a:solidFill>
+            <a:srgbClr val="242A44"/>
+          </a:solidFill>
+          <a:ln w="14287">
+            <a:solidFill>
+              <a:srgbClr val="FB7048"/>
+            </a:solidFill>
+          </a:ln>
+          <a:effectLst/>
+        </p:spPr>
+        <p:style>
+          <a:lnRef idx="1">
+            <a:schemeClr val="accent1"/>
+          </a:lnRef>
+          <a:fillRef idx="3">
+            <a:schemeClr val="accent1"/>
+          </a:fillRef>
+          <a:effectRef idx="2">
+            <a:schemeClr val="accent1"/>
+          </a:effectRef>
+          <a:fontRef idx="minor">
+            <a:schemeClr val="lt1"/>
+          </a:fontRef>
+        </p:style>
+        <p:txBody>
+          <a:bodyPr rtlCol="0" anchor="ctr"/>
+          <a:lstStyle/>
+          <a:p>
+            <a:pPr algn="ctr"/>
+          </a:p>
+        </p:txBody>
+      </p:sp>
+      <p:sp>
+        <p:nvSpPr>
+          <p:cNvPr id="27" name="TextBox 26"/>
+          <p:cNvSpPr txBox="1"/>
+          <p:nvPr/>
+        </p:nvSpPr>
+        <p:spPr>
+          <a:xfrm>
+            <a:off x="822959" y="3696462"/>
+            <a:ext cx="480059" cy="445770"/>
+          </a:xfrm>
+          <a:prstGeom prst="rect">
+            <a:avLst/>
+          </a:prstGeom>
+          <a:noFill/>
+        </p:spPr>
+        <p:txBody>
+          <a:bodyPr wrap="square" lIns="27432" rIns="27432" tIns="13716" bIns="13716" anchor="ctr">
+            <a:spAutoFit/>
+          </a:bodyPr>
+          <a:lstStyle/>
+          <a:p>
+            <a:pPr algn="l"/>
+            <a:r>
+              <a:rPr sz="1050" b="1" i="0">
+                <a:solidFill>
+                  <a:srgbClr val="FB7048"/>
+                </a:solidFill>
+                <a:latin typeface="Consolas"/>
+              </a:rPr>
+              <a:t>Q4</a:t>
+            </a:r>
+          </a:p>
+        </p:txBody>
+      </p:sp>
+      <p:sp>
+        <p:nvSpPr>
+          <p:cNvPr id="28" name="TextBox 27"/>
+          <p:cNvSpPr txBox="1"/>
+          <p:nvPr/>
+        </p:nvSpPr>
+        <p:spPr>
+          <a:xfrm>
+            <a:off x="1337310" y="3696462"/>
+            <a:ext cx="3086100" cy="445770"/>
+          </a:xfrm>
+          <a:prstGeom prst="rect">
+            <a:avLst/>
+          </a:prstGeom>
+          <a:noFill/>
+        </p:spPr>
+        <p:txBody>
+          <a:bodyPr wrap="square" lIns="27432" rIns="27432" tIns="13716" bIns="13716" anchor="ctr">
+            <a:spAutoFit/>
+          </a:bodyPr>
+          <a:lstStyle/>
+          <a:p>
+            <a:pPr algn="l"/>
+            <a:r>
+              <a:rPr sz="1125" b="1" i="0">
+                <a:solidFill>
+                  <a:srgbClr val="E5E7EB"/>
+                </a:solidFill>
+                <a:latin typeface="Calibri"/>
+              </a:rPr>
+              <a:t>新書 + 天氣</a:t>
+            </a:r>
+          </a:p>
+        </p:txBody>
+      </p:sp>
+      <p:sp>
+        <p:nvSpPr>
+          <p:cNvPr id="29" name="TextBox 28"/>
+          <p:cNvSpPr txBox="1"/>
+          <p:nvPr/>
+        </p:nvSpPr>
+        <p:spPr>
+          <a:xfrm>
+            <a:off x="4457700" y="3696462"/>
+            <a:ext cx="2331720" cy="445770"/>
+          </a:xfrm>
+          <a:prstGeom prst="rect">
+            <a:avLst/>
+          </a:prstGeom>
+          <a:noFill/>
+        </p:spPr>
+        <p:txBody>
+          <a:bodyPr wrap="square" lIns="27432" rIns="27432" tIns="13716" bIns="13716" anchor="ctr">
+            <a:spAutoFit/>
+          </a:bodyPr>
+          <a:lstStyle/>
+          <a:p>
+            <a:pPr algn="l"/>
+            <a:r>
+              <a:rPr sz="937" b="0" i="1">
+                <a:solidFill>
+                  <a:srgbClr val="9CA3AF"/>
+                </a:solidFill>
+                <a:latin typeface="Calibri"/>
+              </a:rPr>
+              <a:t>parallel call</a:t>
+            </a:r>
+          </a:p>
+        </p:txBody>
+      </p:sp>
+      <p:sp>
+        <p:nvSpPr>
+          <p:cNvPr id="30" name="TextBox 29"/>
+          <p:cNvSpPr txBox="1"/>
+          <p:nvPr/>
+        </p:nvSpPr>
+        <p:spPr>
+          <a:xfrm>
+            <a:off x="6858000" y="3696462"/>
+            <a:ext cx="1062990" cy="445770"/>
+          </a:xfrm>
+          <a:prstGeom prst="rect">
+            <a:avLst/>
+          </a:prstGeom>
+          <a:noFill/>
+        </p:spPr>
+        <p:txBody>
+          <a:bodyPr wrap="square" lIns="27432" rIns="27432" tIns="13716" bIns="13716" anchor="ctr">
+            <a:spAutoFit/>
+          </a:bodyPr>
+          <a:lstStyle/>
+          <a:p>
+            <a:pPr algn="ctr"/>
+            <a:r>
+              <a:rPr sz="1050" b="1" i="0">
+                <a:solidFill>
+                  <a:srgbClr val="FB7048"/>
+                </a:solidFill>
+                <a:latin typeface="Calibri"/>
+              </a:rPr>
+              <a:t>★★</a:t>
+            </a:r>
+          </a:p>
+        </p:txBody>
+      </p:sp>
+      <p:sp>
+        <p:nvSpPr>
+          <p:cNvPr id="31" name="TextBox 30"/>
+          <p:cNvSpPr txBox="1"/>
+          <p:nvPr/>
+        </p:nvSpPr>
+        <p:spPr>
+          <a:xfrm>
+            <a:off x="7920990" y="3696462"/>
+            <a:ext cx="857250" cy="445770"/>
+          </a:xfrm>
+          <a:prstGeom prst="rect">
+            <a:avLst/>
+          </a:prstGeom>
+          <a:noFill/>
+        </p:spPr>
+        <p:txBody>
+          <a:bodyPr wrap="square" lIns="27432" rIns="27432" tIns="13716" bIns="13716" anchor="ctr">
+            <a:spAutoFit/>
+          </a:bodyPr>
+          <a:lstStyle/>
+          <a:p>
+            <a:pPr algn="r"/>
+            <a:r>
+              <a:rPr sz="825" b="0" i="0">
+                <a:solidFill>
+                  <a:srgbClr val="9CA3AF"/>
+                </a:solidFill>
+                <a:latin typeface="Consolas"/>
+              </a:rPr>
+              <a:t>~45s</a:t>
+            </a:r>
+          </a:p>
+        </p:txBody>
+      </p:sp>
+      <p:sp>
+        <p:nvSpPr>
+          <p:cNvPr id="32" name="Rounded Rectangle 31"/>
+          <p:cNvSpPr/>
+          <p:nvPr/>
+        </p:nvSpPr>
+        <p:spPr>
+          <a:xfrm>
+            <a:off x="685800" y="4197096"/>
+            <a:ext cx="8126729" cy="445770"/>
+          </a:xfrm>
+          <a:prstGeom prst="roundRect">
+            <a:avLst>
+              <a:gd name="adj" fmla="val 10000"/>
+            </a:avLst>
+          </a:prstGeom>
+          <a:solidFill>
+            <a:srgbClr val="242A44"/>
+          </a:solidFill>
+          <a:ln w="14287">
+            <a:solidFill>
+              <a:srgbClr val="EF4444"/>
+            </a:solidFill>
+          </a:ln>
+          <a:effectLst/>
+        </p:spPr>
+        <p:style>
+          <a:lnRef idx="1">
+            <a:schemeClr val="accent1"/>
+          </a:lnRef>
+          <a:fillRef idx="3">
+            <a:schemeClr val="accent1"/>
+          </a:fillRef>
+          <a:effectRef idx="2">
+            <a:schemeClr val="accent1"/>
+          </a:effectRef>
+          <a:fontRef idx="minor">
+            <a:schemeClr val="lt1"/>
+          </a:fontRef>
+        </p:style>
+        <p:txBody>
+          <a:bodyPr rtlCol="0" anchor="ctr"/>
+          <a:lstStyle/>
+          <a:p>
+            <a:pPr algn="ctr"/>
+          </a:p>
+        </p:txBody>
+      </p:sp>
+      <p:sp>
+        <p:nvSpPr>
+          <p:cNvPr id="33" name="TextBox 32"/>
+          <p:cNvSpPr txBox="1"/>
+          <p:nvPr/>
+        </p:nvSpPr>
+        <p:spPr>
+          <a:xfrm>
+            <a:off x="822959" y="4197096"/>
+            <a:ext cx="480059" cy="445770"/>
+          </a:xfrm>
+          <a:prstGeom prst="rect">
+            <a:avLst/>
+          </a:prstGeom>
+          <a:noFill/>
+        </p:spPr>
+        <p:txBody>
+          <a:bodyPr wrap="square" lIns="27432" rIns="27432" tIns="13716" bIns="13716" anchor="ctr">
+            <a:spAutoFit/>
+          </a:bodyPr>
+          <a:lstStyle/>
+          <a:p>
+            <a:pPr algn="l"/>
+            <a:r>
+              <a:rPr sz="1050" b="1" i="0">
+                <a:solidFill>
+                  <a:srgbClr val="EF4444"/>
+                </a:solidFill>
+                <a:latin typeface="Consolas"/>
+              </a:rPr>
+              <a:t>Q5</a:t>
+            </a:r>
+          </a:p>
+        </p:txBody>
+      </p:sp>
+      <p:sp>
+        <p:nvSpPr>
+          <p:cNvPr id="34" name="TextBox 33"/>
+          <p:cNvSpPr txBox="1"/>
+          <p:nvPr/>
+        </p:nvSpPr>
+        <p:spPr>
+          <a:xfrm>
+            <a:off x="1337310" y="4197096"/>
+            <a:ext cx="3086100" cy="445770"/>
+          </a:xfrm>
+          <a:prstGeom prst="rect">
+            <a:avLst/>
+          </a:prstGeom>
+          <a:noFill/>
+        </p:spPr>
+        <p:txBody>
+          <a:bodyPr wrap="square" lIns="27432" rIns="27432" tIns="13716" bIns="13716" anchor="ctr">
+            <a:spAutoFit/>
+          </a:bodyPr>
+          <a:lstStyle/>
+          <a:p>
+            <a:pPr algn="l"/>
+            <a:r>
+              <a:rPr sz="1125" b="1" i="0">
+                <a:solidFill>
+                  <a:srgbClr val="E5E7EB"/>
+                </a:solidFill>
+                <a:latin typeface="Calibri"/>
+              </a:rPr>
+              <a:t>課程 + 論文 + 推薦</a:t>
+            </a:r>
+          </a:p>
+        </p:txBody>
+      </p:sp>
+      <p:sp>
+        <p:nvSpPr>
+          <p:cNvPr id="35" name="TextBox 34"/>
+          <p:cNvSpPr txBox="1"/>
+          <p:nvPr/>
+        </p:nvSpPr>
+        <p:spPr>
+          <a:xfrm>
+            <a:off x="4457700" y="4197096"/>
+            <a:ext cx="2331720" cy="445770"/>
+          </a:xfrm>
+          <a:prstGeom prst="rect">
+            <a:avLst/>
+          </a:prstGeom>
+          <a:noFill/>
+        </p:spPr>
+        <p:txBody>
+          <a:bodyPr wrap="square" lIns="27432" rIns="27432" tIns="13716" bIns="13716" anchor="ctr">
+            <a:spAutoFit/>
+          </a:bodyPr>
+          <a:lstStyle/>
+          <a:p>
+            <a:pPr algn="l"/>
+            <a:r>
+              <a:rPr sz="937" b="0" i="1">
+                <a:solidFill>
+                  <a:srgbClr val="9CA3AF"/>
+                </a:solidFill>
+                <a:latin typeface="Calibri"/>
+              </a:rPr>
+              <a:t>maxIter 挑戰</a:t>
+            </a:r>
+          </a:p>
+        </p:txBody>
+      </p:sp>
+      <p:sp>
+        <p:nvSpPr>
+          <p:cNvPr id="36" name="TextBox 35"/>
+          <p:cNvSpPr txBox="1"/>
+          <p:nvPr/>
+        </p:nvSpPr>
+        <p:spPr>
+          <a:xfrm>
+            <a:off x="6858000" y="4197096"/>
+            <a:ext cx="1062990" cy="445770"/>
+          </a:xfrm>
+          <a:prstGeom prst="rect">
+            <a:avLst/>
+          </a:prstGeom>
+          <a:noFill/>
+        </p:spPr>
+        <p:txBody>
+          <a:bodyPr wrap="square" lIns="27432" rIns="27432" tIns="13716" bIns="13716" anchor="ctr">
+            <a:spAutoFit/>
+          </a:bodyPr>
+          <a:lstStyle/>
+          <a:p>
+            <a:pPr algn="ctr"/>
+            <a:r>
+              <a:rPr sz="1050" b="1" i="0">
+                <a:solidFill>
+                  <a:srgbClr val="EF4444"/>
+                </a:solidFill>
+                <a:latin typeface="Calibri"/>
+              </a:rPr>
+              <a:t>★★★</a:t>
+            </a:r>
+          </a:p>
+        </p:txBody>
+      </p:sp>
+      <p:sp>
+        <p:nvSpPr>
+          <p:cNvPr id="37" name="TextBox 36"/>
+          <p:cNvSpPr txBox="1"/>
+          <p:nvPr/>
+        </p:nvSpPr>
+        <p:spPr>
+          <a:xfrm>
+            <a:off x="7920990" y="4197096"/>
+            <a:ext cx="857250" cy="445770"/>
+          </a:xfrm>
+          <a:prstGeom prst="rect">
+            <a:avLst/>
+          </a:prstGeom>
+          <a:noFill/>
+        </p:spPr>
+        <p:txBody>
+          <a:bodyPr wrap="square" lIns="27432" rIns="27432" tIns="13716" bIns="13716" anchor="ctr">
+            <a:spAutoFit/>
+          </a:bodyPr>
+          <a:lstStyle/>
+          <a:p>
+            <a:pPr algn="r"/>
+            <a:r>
+              <a:rPr sz="825" b="0" i="0">
+                <a:solidFill>
+                  <a:srgbClr val="9CA3AF"/>
+                </a:solidFill>
+                <a:latin typeface="Consolas"/>
+              </a:rPr>
+              <a:t>~90-120s</a:t>
+            </a:r>
+          </a:p>
+        </p:txBody>
+      </p:sp>
+      <p:sp>
+        <p:nvSpPr>
+          <p:cNvPr id="38" name="TextBox 37"/>
+          <p:cNvSpPr txBox="1"/>
+          <p:nvPr/>
+        </p:nvSpPr>
+        <p:spPr>
+          <a:xfrm>
+            <a:off x="7543800" y="4800600"/>
+            <a:ext cx="1371600" cy="274320"/>
+          </a:xfrm>
+          <a:prstGeom prst="rect">
+            <a:avLst/>
+          </a:prstGeom>
+          <a:noFill/>
+        </p:spPr>
+        <p:txBody>
+          <a:bodyPr wrap="square" lIns="27432" rIns="27432" tIns="13716" bIns="13716" anchor="t">
+            <a:spAutoFit/>
+          </a:bodyPr>
+          <a:lstStyle/>
+          <a:p>
+            <a:pPr algn="r"/>
+            <a:r>
+              <a:rPr sz="900" b="0" i="0">
+                <a:solidFill>
+                  <a:srgbClr val="CBD5E1"/>
+                </a:solidFill>
+                <a:latin typeface="Consolas"/>
+              </a:rPr>
+              <a:t>7 / 8</a:t>
+            </a:r>
+          </a:p>
+        </p:txBody>
+      </p:sp>
+    </p:spTree>
+  </p:cSld>
+  <p:clrMapOvr>
+    <a:masterClrMapping/>
+  </p:clrMapOvr>
+</p:sld>
+</file>
+
+<file path=ppt/slides/slide11.xml><?xml version="1.0" encoding="utf-8"?>
+<p:sld xmlns:a="http://schemas.openxmlformats.org/drawingml/2006/main" xmlns:p="http://schemas.openxmlformats.org/presentationml/2006/main" xmlns:r="http://schemas.openxmlformats.org/officeDocument/2006/relationships">
+  <p:cSld>
+    <p:spTree>
+      <p:nvGrpSpPr>
+        <p:cNvPr id="1" name=""/>
+        <p:cNvGrpSpPr/>
+        <p:nvPr/>
+      </p:nvGrpSpPr>
+      <p:grpSpPr/>
+      <p:sp>
+        <p:nvSpPr>
+          <p:cNvPr id="2" name="Rectangle 1"/>
+          <p:cNvSpPr/>
+          <p:nvPr/>
+        </p:nvSpPr>
+        <p:spPr>
+          <a:xfrm>
+            <a:off x="0" y="0"/>
+            <a:ext cx="9144000" cy="5143500"/>
+          </a:xfrm>
+          <a:prstGeom prst="rect">
+            <a:avLst/>
+          </a:prstGeom>
+          <a:solidFill>
+            <a:srgbClr val="FFFFFF"/>
+          </a:solidFill>
+          <a:ln>
+            <a:noFill/>
+          </a:ln>
+        </p:spPr>
+        <p:style>
+          <a:lnRef idx="1">
+            <a:schemeClr val="accent1"/>
+          </a:lnRef>
+          <a:fillRef idx="3">
+            <a:schemeClr val="accent1"/>
+          </a:fillRef>
+          <a:effectRef idx="2">
+            <a:schemeClr val="accent1"/>
+          </a:effectRef>
+          <a:fontRef idx="minor">
+            <a:schemeClr val="lt1"/>
+          </a:fontRef>
+        </p:style>
+        <p:txBody>
+          <a:bodyPr rtlCol="0" anchor="ctr"/>
+          <a:lstStyle/>
+          <a:p>
+            <a:pPr algn="ctr"/>
+          </a:p>
+        </p:txBody>
+      </p:sp>
+      <p:sp>
+        <p:nvSpPr>
+          <p:cNvPr id="3" name="Oval 2"/>
+          <p:cNvSpPr/>
+          <p:nvPr/>
+        </p:nvSpPr>
+        <p:spPr>
+          <a:xfrm>
+            <a:off x="445769" y="240030"/>
+            <a:ext cx="274320" cy="274320"/>
+          </a:xfrm>
+          <a:prstGeom prst="ellipse">
+            <a:avLst/>
+          </a:prstGeom>
+          <a:solidFill>
+            <a:srgbClr val="7B5CF5"/>
+          </a:solidFill>
+          <a:ln>
+            <a:noFill/>
+          </a:ln>
+          <a:effectLst/>
+        </p:spPr>
+        <p:style>
+          <a:lnRef idx="1">
+            <a:schemeClr val="accent1"/>
+          </a:lnRef>
+          <a:fillRef idx="3">
+            <a:schemeClr val="accent1"/>
+          </a:fillRef>
+          <a:effectRef idx="2">
+            <a:schemeClr val="accent1"/>
+          </a:effectRef>
+          <a:fontRef idx="minor">
+            <a:schemeClr val="lt1"/>
+          </a:fontRef>
+        </p:style>
+        <p:txBody>
+          <a:bodyPr rtlCol="0" anchor="ctr"/>
+          <a:lstStyle/>
+          <a:p>
+            <a:pPr algn="ctr"/>
+          </a:p>
+        </p:txBody>
+      </p:sp>
+      <p:sp>
+        <p:nvSpPr>
+          <p:cNvPr id="4" name="TextBox 3"/>
+          <p:cNvSpPr txBox="1"/>
+          <p:nvPr/>
+        </p:nvSpPr>
+        <p:spPr>
+          <a:xfrm>
+            <a:off x="822959" y="205739"/>
+            <a:ext cx="8229600" cy="377190"/>
+          </a:xfrm>
+          <a:prstGeom prst="rect">
+            <a:avLst/>
+          </a:prstGeom>
+          <a:noFill/>
+        </p:spPr>
+        <p:txBody>
+          <a:bodyPr wrap="square" lIns="27432" rIns="27432" tIns="13716" bIns="13716" anchor="ctr">
+            <a:spAutoFit/>
+          </a:bodyPr>
+          <a:lstStyle/>
+          <a:p>
+            <a:pPr algn="l"/>
+            <a:r>
+              <a:rPr sz="1125" b="1" i="0">
+                <a:solidFill>
+                  <a:srgbClr val="9CA3AF"/>
+                </a:solidFill>
+                <a:latin typeface="Calibri"/>
+              </a:rPr>
+              <a:t>05 · ①   S T R A T E G I E S · 回看</a:t>
+            </a:r>
+          </a:p>
+        </p:txBody>
+      </p:sp>
+      <p:sp>
+        <p:nvSpPr>
+          <p:cNvPr id="5" name="TextBox 4"/>
+          <p:cNvSpPr txBox="1"/>
+          <p:nvPr/>
+        </p:nvSpPr>
+        <p:spPr>
+          <a:xfrm>
+            <a:off x="582930" y="651509"/>
+            <a:ext cx="8229600" cy="651509"/>
+          </a:xfrm>
+          <a:prstGeom prst="rect">
+            <a:avLst/>
+          </a:prstGeom>
+          <a:noFill/>
+        </p:spPr>
+        <p:txBody>
+          <a:bodyPr wrap="square" lIns="27432" rIns="27432" tIns="13716" bIns="13716" anchor="t">
+            <a:spAutoFit/>
+          </a:bodyPr>
+          <a:lstStyle/>
+          <a:p>
+            <a:pPr algn="l"/>
+            <a:r>
+              <a:rPr sz="2100" b="1" i="0">
+                <a:solidFill>
+                  <a:srgbClr val="1F2937"/>
+                </a:solidFill>
+                <a:latin typeface="Arial Black"/>
+              </a:rPr>
+              <a:t>回頭看三種策略 — Agentic Loop 站在哪</a:t>
+            </a:r>
+          </a:p>
+        </p:txBody>
+      </p:sp>
+      <p:sp>
+        <p:nvSpPr>
+          <p:cNvPr id="6" name="TextBox 5"/>
+          <p:cNvSpPr txBox="1"/>
+          <p:nvPr/>
+        </p:nvSpPr>
+        <p:spPr>
+          <a:xfrm>
+            <a:off x="582930" y="1268730"/>
+            <a:ext cx="8229600" cy="377190"/>
+          </a:xfrm>
+          <a:prstGeom prst="rect">
+            <a:avLst/>
+          </a:prstGeom>
+          <a:noFill/>
+        </p:spPr>
+        <p:txBody>
+          <a:bodyPr wrap="square" lIns="27432" rIns="27432" tIns="13716" bIns="13716" anchor="t">
+            <a:spAutoFit/>
+          </a:bodyPr>
+          <a:lstStyle/>
+          <a:p>
+            <a:pPr algn="l"/>
+            <a:r>
+              <a:rPr sz="1500" b="0" i="1">
+                <a:solidFill>
+                  <a:srgbClr val="6B7280"/>
+                </a:solidFill>
+                <a:latin typeface="Calibri"/>
+              </a:rPr>
+              <a:t>Segment 1 介紹的三條路,Agentic Loop 是其中能力最完整的一條</a:t>
+            </a:r>
+          </a:p>
+        </p:txBody>
+      </p:sp>
+      <p:sp>
+        <p:nvSpPr>
+          <p:cNvPr id="7" name="Rounded Rectangle 6"/>
+          <p:cNvSpPr/>
+          <p:nvPr/>
+        </p:nvSpPr>
+        <p:spPr>
+          <a:xfrm>
+            <a:off x="377190" y="1851660"/>
+            <a:ext cx="2708910" cy="2743200"/>
+          </a:xfrm>
+          <a:prstGeom prst="roundRect">
+            <a:avLst>
+              <a:gd name="adj" fmla="val 10000"/>
+            </a:avLst>
+          </a:prstGeom>
+          <a:solidFill>
+            <a:srgbClr val="DBEAFE"/>
+          </a:solidFill>
+          <a:ln w="19050">
+            <a:solidFill>
+              <a:srgbClr val="3B82F6"/>
+            </a:solidFill>
+          </a:ln>
+          <a:effectLst/>
+        </p:spPr>
+        <p:style>
+          <a:lnRef idx="1">
+            <a:schemeClr val="accent1"/>
+          </a:lnRef>
+          <a:fillRef idx="3">
+            <a:schemeClr val="accent1"/>
+          </a:fillRef>
+          <a:effectRef idx="2">
+            <a:schemeClr val="accent1"/>
+          </a:effectRef>
+          <a:fontRef idx="minor">
+            <a:schemeClr val="lt1"/>
+          </a:fontRef>
+        </p:style>
+        <p:txBody>
+          <a:bodyPr rtlCol="0" anchor="ctr"/>
+          <a:lstStyle/>
+          <a:p>
+            <a:pPr algn="ctr"/>
+          </a:p>
+        </p:txBody>
+      </p:sp>
+      <p:sp>
+        <p:nvSpPr>
+          <p:cNvPr id="8" name="TextBox 7"/>
+          <p:cNvSpPr txBox="1"/>
+          <p:nvPr/>
+        </p:nvSpPr>
+        <p:spPr>
+          <a:xfrm>
+            <a:off x="548640" y="1988819"/>
+            <a:ext cx="2366010" cy="377190"/>
+          </a:xfrm>
+          <a:prstGeom prst="rect">
+            <a:avLst/>
+          </a:prstGeom>
+          <a:noFill/>
+        </p:spPr>
+        <p:txBody>
+          <a:bodyPr wrap="square" lIns="27432" rIns="27432" tIns="13716" bIns="13716" anchor="t">
+            <a:spAutoFit/>
+          </a:bodyPr>
+          <a:lstStyle/>
+          <a:p>
+            <a:pPr algn="l"/>
+            <a:r>
+              <a:rPr sz="1650" b="1" i="0">
+                <a:solidFill>
+                  <a:srgbClr val="3B82F6"/>
+                </a:solidFill>
+                <a:latin typeface="Arial Black"/>
+              </a:rPr>
+              <a:t>RAG</a:t>
+            </a:r>
+          </a:p>
+        </p:txBody>
+      </p:sp>
+      <p:sp>
+        <p:nvSpPr>
+          <p:cNvPr id="9" name="TextBox 8"/>
+          <p:cNvSpPr txBox="1"/>
+          <p:nvPr/>
+        </p:nvSpPr>
+        <p:spPr>
+          <a:xfrm>
+            <a:off x="548640" y="2434589"/>
+            <a:ext cx="2366010" cy="274320"/>
+          </a:xfrm>
+          <a:prstGeom prst="rect">
+            <a:avLst/>
+          </a:prstGeom>
+          <a:noFill/>
+        </p:spPr>
+        <p:txBody>
+          <a:bodyPr wrap="square" lIns="27432" rIns="27432" tIns="13716" bIns="13716" anchor="t">
+            <a:spAutoFit/>
+          </a:bodyPr>
+          <a:lstStyle/>
+          <a:p>
+            <a:pPr algn="l"/>
+            <a:r>
+              <a:rPr sz="975" b="0" i="1">
+                <a:solidFill>
+                  <a:srgbClr val="9CA3AF"/>
+                </a:solidFill>
+                <a:latin typeface="Calibri"/>
+              </a:rPr>
+              <a:t>檢索增強生成</a:t>
+            </a:r>
+          </a:p>
+        </p:txBody>
+      </p:sp>
+      <p:sp>
+        <p:nvSpPr>
+          <p:cNvPr id="10" name="TextBox 9"/>
+          <p:cNvSpPr txBox="1"/>
+          <p:nvPr/>
+        </p:nvSpPr>
+        <p:spPr>
+          <a:xfrm>
+            <a:off x="548640" y="2846070"/>
+            <a:ext cx="2366010" cy="1028700"/>
+          </a:xfrm>
+          <a:prstGeom prst="rect">
+            <a:avLst/>
+          </a:prstGeom>
+          <a:noFill/>
+        </p:spPr>
+        <p:txBody>
+          <a:bodyPr wrap="square" lIns="27432" rIns="27432" tIns="13716" bIns="13716" anchor="t">
+            <a:spAutoFit/>
+          </a:bodyPr>
+          <a:lstStyle/>
+          <a:p>
+            <a:pPr algn="l"/>
+            <a:r>
+              <a:rPr sz="975" b="0" i="0">
+                <a:solidFill>
+                  <a:srgbClr val="1F2937"/>
+                </a:solidFill>
+                <a:latin typeface="Calibri"/>
+              </a:rPr>
+              <a:t>✓ 解知識截止
+✓ 讀私有文件</a:t>
+            </a:r>
+          </a:p>
+        </p:txBody>
+      </p:sp>
+      <p:sp>
+        <p:nvSpPr>
+          <p:cNvPr id="11" name="TextBox 10"/>
+          <p:cNvSpPr txBox="1"/>
+          <p:nvPr/>
+        </p:nvSpPr>
+        <p:spPr>
+          <a:xfrm>
+            <a:off x="548640" y="3943350"/>
+            <a:ext cx="2366010" cy="685800"/>
+          </a:xfrm>
+          <a:prstGeom prst="rect">
+            <a:avLst/>
+          </a:prstGeom>
+          <a:noFill/>
+        </p:spPr>
+        <p:txBody>
+          <a:bodyPr wrap="square" lIns="27432" rIns="27432" tIns="13716" bIns="13716" anchor="t">
+            <a:spAutoFit/>
+          </a:bodyPr>
+          <a:lstStyle/>
+          <a:p>
+            <a:pPr algn="l"/>
+            <a:r>
+              <a:rPr sz="975" b="0" i="0">
+                <a:solidFill>
+                  <a:srgbClr val="B91C1C"/>
+                </a:solidFill>
+                <a:latin typeface="Calibri"/>
+              </a:rPr>
+              <a:t>✗ 不能執行動作
+✗ 單輪</a:t>
+            </a:r>
+          </a:p>
+        </p:txBody>
+      </p:sp>
+      <p:sp>
+        <p:nvSpPr>
+          <p:cNvPr id="12" name="Rounded Rectangle 11"/>
+          <p:cNvSpPr/>
+          <p:nvPr/>
+        </p:nvSpPr>
+        <p:spPr>
+          <a:xfrm>
+            <a:off x="3223260" y="1851660"/>
+            <a:ext cx="2708910" cy="2743200"/>
+          </a:xfrm>
+          <a:prstGeom prst="roundRect">
+            <a:avLst>
+              <a:gd name="adj" fmla="val 10000"/>
+            </a:avLst>
+          </a:prstGeom>
+          <a:solidFill>
+            <a:srgbClr val="FFE7DB"/>
+          </a:solidFill>
+          <a:ln w="19050">
+            <a:solidFill>
+              <a:srgbClr val="FB7048"/>
+            </a:solidFill>
+          </a:ln>
+          <a:effectLst/>
+        </p:spPr>
+        <p:style>
+          <a:lnRef idx="1">
+            <a:schemeClr val="accent1"/>
+          </a:lnRef>
+          <a:fillRef idx="3">
+            <a:schemeClr val="accent1"/>
+          </a:fillRef>
+          <a:effectRef idx="2">
+            <a:schemeClr val="accent1"/>
+          </a:effectRef>
+          <a:fontRef idx="minor">
+            <a:schemeClr val="lt1"/>
+          </a:fontRef>
+        </p:style>
+        <p:txBody>
+          <a:bodyPr rtlCol="0" anchor="ctr"/>
+          <a:lstStyle/>
+          <a:p>
+            <a:pPr algn="ctr"/>
+          </a:p>
+        </p:txBody>
+      </p:sp>
+      <p:sp>
+        <p:nvSpPr>
+          <p:cNvPr id="13" name="TextBox 12"/>
+          <p:cNvSpPr txBox="1"/>
+          <p:nvPr/>
+        </p:nvSpPr>
+        <p:spPr>
+          <a:xfrm>
+            <a:off x="3394710" y="1988819"/>
+            <a:ext cx="2366010" cy="377190"/>
+          </a:xfrm>
+          <a:prstGeom prst="rect">
+            <a:avLst/>
+          </a:prstGeom>
+          <a:noFill/>
+        </p:spPr>
+        <p:txBody>
+          <a:bodyPr wrap="square" lIns="27432" rIns="27432" tIns="13716" bIns="13716" anchor="t">
+            <a:spAutoFit/>
+          </a:bodyPr>
+          <a:lstStyle/>
+          <a:p>
+            <a:pPr algn="l"/>
+            <a:r>
+              <a:rPr sz="1650" b="1" i="0">
+                <a:solidFill>
+                  <a:srgbClr val="FB7048"/>
+                </a:solidFill>
+                <a:latin typeface="Arial Black"/>
+              </a:rPr>
+              <a:t>Tool Use</a:t>
+            </a:r>
+          </a:p>
+        </p:txBody>
+      </p:sp>
+      <p:sp>
+        <p:nvSpPr>
+          <p:cNvPr id="14" name="TextBox 13"/>
+          <p:cNvSpPr txBox="1"/>
+          <p:nvPr/>
+        </p:nvSpPr>
+        <p:spPr>
+          <a:xfrm>
+            <a:off x="3394710" y="2434589"/>
+            <a:ext cx="2366010" cy="274320"/>
+          </a:xfrm>
+          <a:prstGeom prst="rect">
+            <a:avLst/>
+          </a:prstGeom>
+          <a:noFill/>
+        </p:spPr>
+        <p:txBody>
+          <a:bodyPr wrap="square" lIns="27432" rIns="27432" tIns="13716" bIns="13716" anchor="t">
+            <a:spAutoFit/>
+          </a:bodyPr>
+          <a:lstStyle/>
+          <a:p>
+            <a:pPr algn="l"/>
+            <a:r>
+              <a:rPr sz="975" b="0" i="1">
+                <a:solidFill>
+                  <a:srgbClr val="9CA3AF"/>
+                </a:solidFill>
+                <a:latin typeface="Calibri"/>
+              </a:rPr>
+              <a:t>工具呼叫</a:t>
+            </a:r>
+          </a:p>
+        </p:txBody>
+      </p:sp>
+      <p:sp>
+        <p:nvSpPr>
+          <p:cNvPr id="15" name="TextBox 14"/>
+          <p:cNvSpPr txBox="1"/>
+          <p:nvPr/>
+        </p:nvSpPr>
+        <p:spPr>
+          <a:xfrm>
+            <a:off x="3394710" y="2846070"/>
+            <a:ext cx="2366010" cy="1028700"/>
+          </a:xfrm>
+          <a:prstGeom prst="rect">
+            <a:avLst/>
+          </a:prstGeom>
+          <a:noFill/>
+        </p:spPr>
+        <p:txBody>
+          <a:bodyPr wrap="square" lIns="27432" rIns="27432" tIns="13716" bIns="13716" anchor="t">
+            <a:spAutoFit/>
+          </a:bodyPr>
+          <a:lstStyle/>
+          <a:p>
+            <a:pPr algn="l"/>
+            <a:r>
+              <a:rPr sz="975" b="0" i="0">
+                <a:solidFill>
+                  <a:srgbClr val="1F2937"/>
+                </a:solidFill>
+                <a:latin typeface="Calibri"/>
+              </a:rPr>
+              <a:t>✓ 能執行動作
+✓ 接 API</a:t>
+            </a:r>
+          </a:p>
+        </p:txBody>
+      </p:sp>
+      <p:sp>
+        <p:nvSpPr>
+          <p:cNvPr id="16" name="TextBox 15"/>
+          <p:cNvSpPr txBox="1"/>
+          <p:nvPr/>
+        </p:nvSpPr>
+        <p:spPr>
+          <a:xfrm>
+            <a:off x="3394710" y="3943350"/>
+            <a:ext cx="2366010" cy="685800"/>
+          </a:xfrm>
+          <a:prstGeom prst="rect">
+            <a:avLst/>
+          </a:prstGeom>
+          <a:noFill/>
+        </p:spPr>
+        <p:txBody>
+          <a:bodyPr wrap="square" lIns="27432" rIns="27432" tIns="13716" bIns="13716" anchor="t">
+            <a:spAutoFit/>
+          </a:bodyPr>
+          <a:lstStyle/>
+          <a:p>
+            <a:pPr algn="l"/>
+            <a:r>
+              <a:rPr sz="975" b="0" i="0">
+                <a:solidFill>
+                  <a:srgbClr val="B91C1C"/>
+                </a:solidFill>
+                <a:latin typeface="Calibri"/>
+              </a:rPr>
+              <a:t>✗ 典型 1-2 輪
+✗ 不主動拆解</a:t>
+            </a:r>
+          </a:p>
+        </p:txBody>
+      </p:sp>
+      <p:sp>
+        <p:nvSpPr>
+          <p:cNvPr id="17" name="Rounded Rectangle 16"/>
+          <p:cNvSpPr/>
+          <p:nvPr/>
+        </p:nvSpPr>
+        <p:spPr>
+          <a:xfrm>
+            <a:off x="6069330" y="1851660"/>
+            <a:ext cx="2708910" cy="2743200"/>
+          </a:xfrm>
+          <a:prstGeom prst="roundRect">
+            <a:avLst>
+              <a:gd name="adj" fmla="val 10000"/>
+            </a:avLst>
+          </a:prstGeom>
+          <a:solidFill>
+            <a:srgbClr val="EEE8FF"/>
+          </a:solidFill>
+          <a:ln w="19050">
+            <a:solidFill>
+              <a:srgbClr val="7B5CF5"/>
+            </a:solidFill>
+          </a:ln>
+          <a:effectLst/>
+        </p:spPr>
+        <p:style>
+          <a:lnRef idx="1">
+            <a:schemeClr val="accent1"/>
+          </a:lnRef>
+          <a:fillRef idx="3">
+            <a:schemeClr val="accent1"/>
+          </a:fillRef>
+          <a:effectRef idx="2">
+            <a:schemeClr val="accent1"/>
+          </a:effectRef>
+          <a:fontRef idx="minor">
+            <a:schemeClr val="lt1"/>
+          </a:fontRef>
+        </p:style>
+        <p:txBody>
+          <a:bodyPr rtlCol="0" anchor="ctr"/>
+          <a:lstStyle/>
+          <a:p>
+            <a:pPr algn="ctr"/>
+          </a:p>
+        </p:txBody>
+      </p:sp>
+      <p:sp>
+        <p:nvSpPr>
+          <p:cNvPr id="18" name="TextBox 17"/>
+          <p:cNvSpPr txBox="1"/>
+          <p:nvPr/>
+        </p:nvSpPr>
+        <p:spPr>
+          <a:xfrm>
+            <a:off x="6240780" y="1988819"/>
+            <a:ext cx="2366010" cy="377190"/>
+          </a:xfrm>
+          <a:prstGeom prst="rect">
+            <a:avLst/>
+          </a:prstGeom>
+          <a:noFill/>
+        </p:spPr>
+        <p:txBody>
+          <a:bodyPr wrap="square" lIns="27432" rIns="27432" tIns="13716" bIns="13716" anchor="t">
+            <a:spAutoFit/>
+          </a:bodyPr>
+          <a:lstStyle/>
+          <a:p>
+            <a:pPr algn="l"/>
+            <a:r>
+              <a:rPr sz="1650" b="1" i="0">
+                <a:solidFill>
+                  <a:srgbClr val="7B5CF5"/>
+                </a:solidFill>
+                <a:latin typeface="Arial Black"/>
+              </a:rPr>
+              <a:t>Agentic Loop</a:t>
+            </a:r>
+          </a:p>
+        </p:txBody>
+      </p:sp>
+      <p:sp>
+        <p:nvSpPr>
+          <p:cNvPr id="19" name="TextBox 18"/>
+          <p:cNvSpPr txBox="1"/>
+          <p:nvPr/>
+        </p:nvSpPr>
+        <p:spPr>
+          <a:xfrm>
+            <a:off x="6240780" y="2434589"/>
+            <a:ext cx="2366010" cy="274320"/>
+          </a:xfrm>
+          <a:prstGeom prst="rect">
+            <a:avLst/>
+          </a:prstGeom>
+          <a:noFill/>
+        </p:spPr>
+        <p:txBody>
+          <a:bodyPr wrap="square" lIns="27432" rIns="27432" tIns="13716" bIns="13716" anchor="t">
+            <a:spAutoFit/>
+          </a:bodyPr>
+          <a:lstStyle/>
+          <a:p>
+            <a:pPr algn="l"/>
+            <a:r>
+              <a:rPr sz="975" b="0" i="1">
+                <a:solidFill>
+                  <a:srgbClr val="9CA3AF"/>
+                </a:solidFill>
+                <a:latin typeface="Calibri"/>
+              </a:rPr>
+              <a:t>多輪迭代</a:t>
+            </a:r>
+          </a:p>
+        </p:txBody>
+      </p:sp>
+      <p:sp>
+        <p:nvSpPr>
+          <p:cNvPr id="20" name="TextBox 19"/>
+          <p:cNvSpPr txBox="1"/>
+          <p:nvPr/>
+        </p:nvSpPr>
+        <p:spPr>
+          <a:xfrm>
+            <a:off x="6240780" y="2846070"/>
+            <a:ext cx="2366010" cy="1028700"/>
+          </a:xfrm>
+          <a:prstGeom prst="rect">
+            <a:avLst/>
+          </a:prstGeom>
+          <a:noFill/>
+        </p:spPr>
+        <p:txBody>
+          <a:bodyPr wrap="square" lIns="27432" rIns="27432" tIns="13716" bIns="13716" anchor="t">
+            <a:spAutoFit/>
+          </a:bodyPr>
+          <a:lstStyle/>
+          <a:p>
+            <a:pPr algn="l"/>
+            <a:r>
+              <a:rPr sz="975" b="0" i="0">
+                <a:solidFill>
+                  <a:srgbClr val="1F2937"/>
+                </a:solidFill>
+                <a:latin typeface="Calibri"/>
+              </a:rPr>
+              <a:t>✓ 自己拆解問題
+✓ 多輪 + 結果驅動
+✓ Tool Use 完整版</a:t>
+            </a:r>
+          </a:p>
+        </p:txBody>
+      </p:sp>
+      <p:sp>
+        <p:nvSpPr>
+          <p:cNvPr id="21" name="TextBox 20"/>
+          <p:cNvSpPr txBox="1"/>
+          <p:nvPr/>
+        </p:nvSpPr>
+        <p:spPr>
+          <a:xfrm>
+            <a:off x="6240780" y="3943350"/>
+            <a:ext cx="2366010" cy="685800"/>
+          </a:xfrm>
+          <a:prstGeom prst="rect">
+            <a:avLst/>
+          </a:prstGeom>
+          <a:noFill/>
+        </p:spPr>
+        <p:txBody>
+          <a:bodyPr wrap="square" lIns="27432" rIns="27432" tIns="13716" bIns="13716" anchor="t">
+            <a:spAutoFit/>
+          </a:bodyPr>
+          <a:lstStyle/>
+          <a:p>
+            <a:pPr algn="l"/>
+            <a:r>
+              <a:rPr sz="975" b="0" i="0">
+                <a:solidFill>
+                  <a:srgbClr val="FB7048"/>
+                </a:solidFill>
+                <a:latin typeface="Calibri"/>
+              </a:rPr>
+              <a:t>△  成本最高、難 debug</a:t>
+            </a:r>
+          </a:p>
+        </p:txBody>
+      </p:sp>
+      <p:sp>
+        <p:nvSpPr>
+          <p:cNvPr id="22" name="Rounded Rectangle 21"/>
+          <p:cNvSpPr/>
+          <p:nvPr/>
+        </p:nvSpPr>
+        <p:spPr>
+          <a:xfrm>
+            <a:off x="582930" y="4766310"/>
+            <a:ext cx="8229600" cy="377190"/>
+          </a:xfrm>
+          <a:prstGeom prst="roundRect">
+            <a:avLst>
+              <a:gd name="adj" fmla="val 10000"/>
+            </a:avLst>
+          </a:prstGeom>
+          <a:solidFill>
+            <a:srgbClr val="FFE7DB"/>
+          </a:solidFill>
+          <a:ln w="19050">
+            <a:solidFill>
+              <a:srgbClr val="FB7048"/>
+            </a:solidFill>
+          </a:ln>
+          <a:effectLst/>
+        </p:spPr>
+        <p:style>
+          <a:lnRef idx="1">
+            <a:schemeClr val="accent1"/>
+          </a:lnRef>
+          <a:fillRef idx="3">
+            <a:schemeClr val="accent1"/>
+          </a:fillRef>
+          <a:effectRef idx="2">
+            <a:schemeClr val="accent1"/>
+          </a:effectRef>
+          <a:fontRef idx="minor">
+            <a:schemeClr val="lt1"/>
+          </a:fontRef>
+        </p:style>
+        <p:txBody>
+          <a:bodyPr rtlCol="0" anchor="ctr"/>
+          <a:lstStyle/>
+          <a:p>
+            <a:pPr algn="ctr"/>
+          </a:p>
+        </p:txBody>
+      </p:sp>
+      <p:sp>
+        <p:nvSpPr>
+          <p:cNvPr id="23" name="TextBox 22"/>
+          <p:cNvSpPr txBox="1"/>
+          <p:nvPr/>
+        </p:nvSpPr>
+        <p:spPr>
+          <a:xfrm>
+            <a:off x="788669" y="4766310"/>
+            <a:ext cx="7818120" cy="377190"/>
+          </a:xfrm>
+          <a:prstGeom prst="rect">
+            <a:avLst/>
+          </a:prstGeom>
+          <a:noFill/>
+        </p:spPr>
+        <p:txBody>
+          <a:bodyPr wrap="square" lIns="27432" rIns="27432" tIns="13716" bIns="13716" anchor="ctr">
+            <a:spAutoFit/>
+          </a:bodyPr>
+          <a:lstStyle/>
+          <a:p>
+            <a:pPr algn="l"/>
+            <a:r>
+              <a:rPr sz="1050" b="1" i="0">
+                <a:solidFill>
+                  <a:srgbClr val="FB7048"/>
+                </a:solidFill>
+                <a:latin typeface="Calibri"/>
+              </a:rPr>
+              <a:t>▶  從『單輪答話』到『多輪自主』 —— Segment 4 你會親手跑一個 mini-project</a:t>
+            </a:r>
+          </a:p>
+        </p:txBody>
+      </p:sp>
+      <p:sp>
+        <p:nvSpPr>
+          <p:cNvPr id="24" name="TextBox 23"/>
+          <p:cNvSpPr txBox="1"/>
+          <p:nvPr/>
+        </p:nvSpPr>
+        <p:spPr>
+          <a:xfrm>
+            <a:off x="7955279" y="4766310"/>
+            <a:ext cx="1028700" cy="240029"/>
+          </a:xfrm>
+          <a:prstGeom prst="rect">
+            <a:avLst/>
+          </a:prstGeom>
+          <a:noFill/>
+        </p:spPr>
+        <p:txBody>
+          <a:bodyPr wrap="square" lIns="27432" rIns="27432" tIns="13716" bIns="13716" anchor="t">
+            <a:spAutoFit/>
+          </a:bodyPr>
+          <a:lstStyle/>
+          <a:p>
+            <a:pPr algn="r"/>
+            <a:r>
+              <a:rPr sz="1050" b="0" i="0">
+                <a:solidFill>
+                  <a:srgbClr val="9CA3AF"/>
+                </a:solidFill>
+                <a:latin typeface="Calibri"/>
+              </a:rPr>
+              <a:t>11 / 11</a:t>
+            </a:r>
+          </a:p>
+        </p:txBody>
+      </p:sp>
+    </p:spTree>
+  </p:cSld>
+  <p:clrMapOvr>
+    <a:masterClrMapping/>
+  </p:clrMapOvr>
+</p:sld>
+</file>
+
 <file path=ppt/slides/slide2.xml><?xml version="1.0" encoding="utf-8"?>
 <p:sld xmlns:a="http://schemas.openxmlformats.org/drawingml/2006/main" xmlns:p="http://schemas.openxmlformats.org/presentationml/2006/main" xmlns:r="http://schemas.openxmlformats.org/officeDocument/2006/relationships">
   <p:cSld>
@@ -4477,7 +6773,7 @@
                 </a:solidFill>
                 <a:latin typeface="Calibri"/>
               </a:rPr>
-              <a:t>2 / 8</a:t>
+              <a:t>2 / 11</a:t>
             </a:r>
           </a:p>
         </p:txBody>
@@ -5264,7 +7560,7 @@
                 </a:solidFill>
                 <a:latin typeface="Calibri"/>
               </a:rPr>
-              <a:t>3 / 8</a:t>
+              <a:t>3 / 11</a:t>
             </a:r>
           </a:p>
         </p:txBody>
@@ -6444,7 +8740,7 @@
                 </a:solidFill>
                 <a:latin typeface="Calibri"/>
               </a:rPr>
-              <a:t>4 / 8</a:t>
+              <a:t>4 / 11</a:t>
             </a:r>
           </a:p>
         </p:txBody>
@@ -7520,7 +9816,7 @@
                 </a:solidFill>
                 <a:latin typeface="Calibri"/>
               </a:rPr>
-              <a:t>5 / 8</a:t>
+              <a:t>5 / 11</a:t>
             </a:r>
           </a:p>
         </p:txBody>
@@ -7601,7 +9897,7 @@
             <a:avLst/>
           </a:prstGeom>
           <a:solidFill>
-            <a:srgbClr val="0EA594"/>
+            <a:srgbClr val="FB7048"/>
           </a:solidFill>
           <a:ln>
             <a:noFill/>
@@ -7660,7 +9956,7 @@
                 </a:solidFill>
                 <a:latin typeface="Calibri"/>
               </a:rPr>
-              <a:t>03 · ①   M A X _ I T E R A T I O N S · 強制回覆</a:t>
+              <a:t>01 · ②   A G E N T I C   L O O P · 實 例 走 查</a:t>
             </a:r>
           </a:p>
         </p:txBody>
@@ -7689,13 +9985,13 @@
           <a:p>
             <a:pPr algn="l"/>
             <a:r>
-              <a:rPr sz="3150" b="1" i="0">
+              <a:rPr sz="2400" b="1" i="0">
                 <a:solidFill>
                   <a:srgbClr val="1F2937"/>
                 </a:solidFill>
                 <a:latin typeface="Arial Black"/>
               </a:rPr>
-              <a:t>maxIterations 與強制回覆機制</a:t>
+              <a:t>走一遍:一個查詢跑完整個 loop</a:t>
             </a:r>
           </a:p>
         </p:txBody>
@@ -7730,7 +10026,7 @@
                 </a:solidFill>
                 <a:latin typeface="Calibri"/>
               </a:rPr>
-              <a:t>避免 LLM 無限呼叫工具 —— 設上限 + 最後一輪強制總結</a:t>
+              <a:t>「資工系深度學習的課,授課老師最近有什麼論文?」</a:t>
             </a:r>
           </a:p>
         </p:txBody>
@@ -7743,8 +10039,8 @@
         </p:nvSpPr>
         <p:spPr>
           <a:xfrm>
-            <a:off x="582930" y="1851660"/>
-            <a:ext cx="4080510" cy="2743200"/>
+            <a:off x="582930" y="1748789"/>
+            <a:ext cx="8229600" cy="857250"/>
           </a:xfrm>
           <a:prstGeom prst="roundRect">
             <a:avLst>
@@ -7752,11 +10048,11 @@
             </a:avLst>
           </a:prstGeom>
           <a:solidFill>
-            <a:srgbClr val="FEE2E2"/>
+            <a:srgbClr val="EEE8FF"/>
           </a:solidFill>
           <a:ln w="19050">
             <a:solidFill>
-              <a:srgbClr val="EF4444"/>
+              <a:srgbClr val="7B5CF5"/>
             </a:solidFill>
           </a:ln>
           <a:effectLst/>
@@ -7785,136 +10081,368 @@
       </p:sp>
       <p:sp>
         <p:nvSpPr>
-          <p:cNvPr id="8" name="TextBox 7"/>
-          <p:cNvSpPr txBox="1"/>
-          <p:nvPr/>
-        </p:nvSpPr>
-        <p:spPr>
-          <a:xfrm>
-            <a:off x="754380" y="1975104"/>
-            <a:ext cx="3737610" cy="377190"/>
-          </a:xfrm>
-          <a:prstGeom prst="rect">
-            <a:avLst/>
-          </a:prstGeom>
-          <a:noFill/>
-        </p:spPr>
-        <p:txBody>
-          <a:bodyPr wrap="square" lIns="27432" rIns="27432" tIns="13716" bIns="13716" anchor="t">
+          <p:cNvPr id="8" name="Rounded Rectangle 7"/>
+          <p:cNvSpPr/>
+          <p:nvPr/>
+        </p:nvSpPr>
+        <p:spPr>
+          <a:xfrm>
+            <a:off x="720090" y="1885950"/>
+            <a:ext cx="1028700" cy="582930"/>
+          </a:xfrm>
+          <a:prstGeom prst="roundRect">
+            <a:avLst>
+              <a:gd name="adj" fmla="val 10000"/>
+            </a:avLst>
+          </a:prstGeom>
+          <a:solidFill>
+            <a:srgbClr val="7B5CF5"/>
+          </a:solidFill>
+          <a:ln>
+            <a:solidFill>
+              <a:srgbClr val="7B5CF5"/>
+            </a:solidFill>
+          </a:ln>
+          <a:effectLst/>
+        </p:spPr>
+        <p:style>
+          <a:lnRef idx="1">
+            <a:schemeClr val="accent1"/>
+          </a:lnRef>
+          <a:fillRef idx="3">
+            <a:schemeClr val="accent1"/>
+          </a:fillRef>
+          <a:effectRef idx="2">
+            <a:schemeClr val="accent1"/>
+          </a:effectRef>
+          <a:fontRef idx="minor">
+            <a:schemeClr val="lt1"/>
+          </a:fontRef>
+        </p:style>
+        <p:txBody>
+          <a:bodyPr rtlCol="0" anchor="ctr"/>
+          <a:lstStyle/>
+          <a:p>
+            <a:pPr algn="ctr"/>
+          </a:p>
+        </p:txBody>
+      </p:sp>
+      <p:sp>
+        <p:nvSpPr>
+          <p:cNvPr id="9" name="TextBox 8"/>
+          <p:cNvSpPr txBox="1"/>
+          <p:nvPr/>
+        </p:nvSpPr>
+        <p:spPr>
+          <a:xfrm>
+            <a:off x="720090" y="1885950"/>
+            <a:ext cx="1028700" cy="582930"/>
+          </a:xfrm>
+          <a:prstGeom prst="rect">
+            <a:avLst/>
+          </a:prstGeom>
+          <a:noFill/>
+        </p:spPr>
+        <p:txBody>
+          <a:bodyPr wrap="square" lIns="27432" rIns="27432" tIns="13716" bIns="13716" anchor="ctr">
+            <a:spAutoFit/>
+          </a:bodyPr>
+          <a:lstStyle/>
+          <a:p>
+            <a:pPr algn="ctr"/>
+            <a:r>
+              <a:rPr sz="1125" b="1" i="0">
+                <a:solidFill>
+                  <a:srgbClr val="FFFFFF"/>
+                </a:solidFill>
+                <a:latin typeface="Arial Black"/>
+              </a:rPr>
+              <a:t>Round 1</a:t>
+            </a:r>
+          </a:p>
+        </p:txBody>
+      </p:sp>
+      <p:sp>
+        <p:nvSpPr>
+          <p:cNvPr id="10" name="TextBox 9"/>
+          <p:cNvSpPr txBox="1"/>
+          <p:nvPr/>
+        </p:nvSpPr>
+        <p:spPr>
+          <a:xfrm>
+            <a:off x="1920239" y="1858517"/>
+            <a:ext cx="6789420" cy="342900"/>
+          </a:xfrm>
+          <a:prstGeom prst="rect">
+            <a:avLst/>
+          </a:prstGeom>
+          <a:noFill/>
+        </p:spPr>
+        <p:txBody>
+          <a:bodyPr wrap="square" lIns="27432" rIns="27432" tIns="13716" bIns="13716" anchor="ctr">
             <a:spAutoFit/>
           </a:bodyPr>
           <a:lstStyle/>
           <a:p>
             <a:pPr algn="l"/>
             <a:r>
-              <a:rPr sz="1650" b="1" i="0">
-                <a:solidFill>
-                  <a:srgbClr val="EF4444"/>
+              <a:rPr sz="1125" b="1" i="0">
+                <a:solidFill>
+                  <a:srgbClr val="1F2937"/>
+                </a:solidFill>
+                <a:latin typeface="Calibri"/>
+              </a:rPr>
+              <a:t>「先查課」  + tool_use  search_courses(深度學習, 系所=資工)</a:t>
+            </a:r>
+          </a:p>
+        </p:txBody>
+      </p:sp>
+      <p:sp>
+        <p:nvSpPr>
+          <p:cNvPr id="11" name="TextBox 10"/>
+          <p:cNvSpPr txBox="1"/>
+          <p:nvPr/>
+        </p:nvSpPr>
+        <p:spPr>
+          <a:xfrm>
+            <a:off x="1920239" y="2201418"/>
+            <a:ext cx="6789420" cy="308610"/>
+          </a:xfrm>
+          <a:prstGeom prst="rect">
+            <a:avLst/>
+          </a:prstGeom>
+          <a:noFill/>
+        </p:spPr>
+        <p:txBody>
+          <a:bodyPr wrap="square" lIns="27432" rIns="27432" tIns="13716" bIns="13716" anchor="ctr">
+            <a:spAutoFit/>
+          </a:bodyPr>
+          <a:lstStyle/>
+          <a:p>
+            <a:pPr algn="l"/>
+            <a:r>
+              <a:rPr sz="975" b="0" i="1">
+                <a:solidFill>
+                  <a:srgbClr val="374151"/>
+                </a:solidFill>
+                <a:latin typeface="Calibri"/>
+              </a:rPr>
+              <a:t>→  tool_result:5 門課,授課老師:范、林、王…</a:t>
+            </a:r>
+          </a:p>
+        </p:txBody>
+      </p:sp>
+      <p:sp>
+        <p:nvSpPr>
+          <p:cNvPr id="12" name="Rounded Rectangle 11"/>
+          <p:cNvSpPr/>
+          <p:nvPr/>
+        </p:nvSpPr>
+        <p:spPr>
+          <a:xfrm>
+            <a:off x="582930" y="2729483"/>
+            <a:ext cx="8229600" cy="857250"/>
+          </a:xfrm>
+          <a:prstGeom prst="roundRect">
+            <a:avLst>
+              <a:gd name="adj" fmla="val 10000"/>
+            </a:avLst>
+          </a:prstGeom>
+          <a:solidFill>
+            <a:srgbClr val="FFE7DB"/>
+          </a:solidFill>
+          <a:ln w="19050">
+            <a:solidFill>
+              <a:srgbClr val="FB7048"/>
+            </a:solidFill>
+          </a:ln>
+          <a:effectLst/>
+        </p:spPr>
+        <p:style>
+          <a:lnRef idx="1">
+            <a:schemeClr val="accent1"/>
+          </a:lnRef>
+          <a:fillRef idx="3">
+            <a:schemeClr val="accent1"/>
+          </a:fillRef>
+          <a:effectRef idx="2">
+            <a:schemeClr val="accent1"/>
+          </a:effectRef>
+          <a:fontRef idx="minor">
+            <a:schemeClr val="lt1"/>
+          </a:fontRef>
+        </p:style>
+        <p:txBody>
+          <a:bodyPr rtlCol="0" anchor="ctr"/>
+          <a:lstStyle/>
+          <a:p>
+            <a:pPr algn="ctr"/>
+          </a:p>
+        </p:txBody>
+      </p:sp>
+      <p:sp>
+        <p:nvSpPr>
+          <p:cNvPr id="13" name="Rounded Rectangle 12"/>
+          <p:cNvSpPr/>
+          <p:nvPr/>
+        </p:nvSpPr>
+        <p:spPr>
+          <a:xfrm>
+            <a:off x="720090" y="2866644"/>
+            <a:ext cx="1028700" cy="582930"/>
+          </a:xfrm>
+          <a:prstGeom prst="roundRect">
+            <a:avLst>
+              <a:gd name="adj" fmla="val 10000"/>
+            </a:avLst>
+          </a:prstGeom>
+          <a:solidFill>
+            <a:srgbClr val="FB7048"/>
+          </a:solidFill>
+          <a:ln>
+            <a:solidFill>
+              <a:srgbClr val="FB7048"/>
+            </a:solidFill>
+          </a:ln>
+          <a:effectLst/>
+        </p:spPr>
+        <p:style>
+          <a:lnRef idx="1">
+            <a:schemeClr val="accent1"/>
+          </a:lnRef>
+          <a:fillRef idx="3">
+            <a:schemeClr val="accent1"/>
+          </a:fillRef>
+          <a:effectRef idx="2">
+            <a:schemeClr val="accent1"/>
+          </a:effectRef>
+          <a:fontRef idx="minor">
+            <a:schemeClr val="lt1"/>
+          </a:fontRef>
+        </p:style>
+        <p:txBody>
+          <a:bodyPr rtlCol="0" anchor="ctr"/>
+          <a:lstStyle/>
+          <a:p>
+            <a:pPr algn="ctr"/>
+          </a:p>
+        </p:txBody>
+      </p:sp>
+      <p:sp>
+        <p:nvSpPr>
+          <p:cNvPr id="14" name="TextBox 13"/>
+          <p:cNvSpPr txBox="1"/>
+          <p:nvPr/>
+        </p:nvSpPr>
+        <p:spPr>
+          <a:xfrm>
+            <a:off x="720090" y="2866644"/>
+            <a:ext cx="1028700" cy="582930"/>
+          </a:xfrm>
+          <a:prstGeom prst="rect">
+            <a:avLst/>
+          </a:prstGeom>
+          <a:noFill/>
+        </p:spPr>
+        <p:txBody>
+          <a:bodyPr wrap="square" lIns="27432" rIns="27432" tIns="13716" bIns="13716" anchor="ctr">
+            <a:spAutoFit/>
+          </a:bodyPr>
+          <a:lstStyle/>
+          <a:p>
+            <a:pPr algn="ctr"/>
+            <a:r>
+              <a:rPr sz="1125" b="1" i="0">
+                <a:solidFill>
+                  <a:srgbClr val="FFFFFF"/>
                 </a:solidFill>
                 <a:latin typeface="Arial Black"/>
               </a:rPr>
-              <a:t>問題:無限迴圈風險</a:t>
-            </a:r>
-          </a:p>
-        </p:txBody>
-      </p:sp>
-      <p:sp>
-        <p:nvSpPr>
-          <p:cNvPr id="9" name="TextBox 8"/>
-          <p:cNvSpPr txBox="1"/>
-          <p:nvPr/>
-        </p:nvSpPr>
-        <p:spPr>
-          <a:xfrm>
-            <a:off x="754380" y="2263139"/>
-            <a:ext cx="3771900" cy="2263139"/>
-          </a:xfrm>
-          <a:prstGeom prst="rect">
-            <a:avLst/>
-          </a:prstGeom>
-          <a:noFill/>
-        </p:spPr>
-        <p:txBody>
-          <a:bodyPr wrap="square" lIns="27432" rIns="27432" tIns="13716" bIns="13716" anchor="t">
-            <a:spAutoFit/>
-          </a:bodyPr>
-          <a:lstStyle/>
-          <a:p>
-            <a:pPr algn="l">
-              <a:spcAft>
-                <a:spcPts val="750"/>
-              </a:spcAft>
-            </a:pPr>
-            <a:r>
-              <a:rPr sz="1050" b="0" i="0">
+              <a:t>Round 2</a:t>
+            </a:r>
+          </a:p>
+        </p:txBody>
+      </p:sp>
+      <p:sp>
+        <p:nvSpPr>
+          <p:cNvPr id="15" name="TextBox 14"/>
+          <p:cNvSpPr txBox="1"/>
+          <p:nvPr/>
+        </p:nvSpPr>
+        <p:spPr>
+          <a:xfrm>
+            <a:off x="1920239" y="2839211"/>
+            <a:ext cx="6789420" cy="342900"/>
+          </a:xfrm>
+          <a:prstGeom prst="rect">
+            <a:avLst/>
+          </a:prstGeom>
+          <a:noFill/>
+        </p:spPr>
+        <p:txBody>
+          <a:bodyPr wrap="square" lIns="27432" rIns="27432" tIns="13716" bIns="13716" anchor="ctr">
+            <a:spAutoFit/>
+          </a:bodyPr>
+          <a:lstStyle/>
+          <a:p>
+            <a:pPr algn="l"/>
+            <a:r>
+              <a:rPr sz="1125" b="1" i="0">
                 <a:solidFill>
                   <a:srgbClr val="1F2937"/>
                 </a:solidFill>
                 <a:latin typeface="Calibri"/>
               </a:rPr>
-              <a:t>LLM 可能不斷呼叫工具而永遠不回覆使用者,造成:</a:t>
-            </a:r>
-          </a:p>
-          <a:p>
-            <a:pPr algn="l">
-              <a:spcAft>
-                <a:spcPts val="450"/>
-              </a:spcAft>
-            </a:pPr>
-            <a:r>
-              <a:rPr sz="1050" b="0" i="0">
-                <a:solidFill>
-                  <a:srgbClr val="B91C1C"/>
+              <a:t>「查老師論文」  + tool_use  search_arxiv(范教授)</a:t>
+            </a:r>
+          </a:p>
+        </p:txBody>
+      </p:sp>
+      <p:sp>
+        <p:nvSpPr>
+          <p:cNvPr id="16" name="TextBox 15"/>
+          <p:cNvSpPr txBox="1"/>
+          <p:nvPr/>
+        </p:nvSpPr>
+        <p:spPr>
+          <a:xfrm>
+            <a:off x="1920239" y="3182111"/>
+            <a:ext cx="6789420" cy="308610"/>
+          </a:xfrm>
+          <a:prstGeom prst="rect">
+            <a:avLst/>
+          </a:prstGeom>
+          <a:noFill/>
+        </p:spPr>
+        <p:txBody>
+          <a:bodyPr wrap="square" lIns="27432" rIns="27432" tIns="13716" bIns="13716" anchor="ctr">
+            <a:spAutoFit/>
+          </a:bodyPr>
+          <a:lstStyle/>
+          <a:p>
+            <a:pPr algn="l"/>
+            <a:r>
+              <a:rPr sz="975" b="0" i="1">
+                <a:solidFill>
+                  <a:srgbClr val="374151"/>
                 </a:solidFill>
                 <a:latin typeface="Calibri"/>
               </a:rPr>
-              <a:t>✗  Token 成本無限增長</a:t>
-            </a:r>
-          </a:p>
-          <a:p>
-            <a:pPr algn="l">
-              <a:spcAft>
-                <a:spcPts val="450"/>
-              </a:spcAft>
-            </a:pPr>
-            <a:r>
-              <a:rPr sz="1050" b="0" i="0">
-                <a:solidFill>
-                  <a:srgbClr val="B91C1C"/>
-                </a:solidFill>
-                <a:latin typeface="Calibri"/>
-              </a:rPr>
-              <a:t>✗  回應時間過長</a:t>
-            </a:r>
-          </a:p>
-          <a:p>
-            <a:pPr algn="l">
-              <a:spcAft>
-                <a:spcPts val="0"/>
-              </a:spcAft>
-            </a:pPr>
-            <a:r>
-              <a:rPr sz="1050" b="0" i="0">
-                <a:solidFill>
-                  <a:srgbClr val="B91C1C"/>
-                </a:solidFill>
-                <a:latin typeface="Calibri"/>
-              </a:rPr>
-              <a:t>✗  使用者體驗極差</a:t>
-            </a:r>
-          </a:p>
-        </p:txBody>
-      </p:sp>
-      <p:sp>
-        <p:nvSpPr>
-          <p:cNvPr id="10" name="Rounded Rectangle 9"/>
+              <a:t>→  tool_result:近期 3 篇論文(LLM 評測、低資源生成…)</a:t>
+            </a:r>
+          </a:p>
+        </p:txBody>
+      </p:sp>
+      <p:sp>
+        <p:nvSpPr>
+          <p:cNvPr id="17" name="Rounded Rectangle 16"/>
           <p:cNvSpPr/>
           <p:nvPr/>
         </p:nvSpPr>
         <p:spPr>
           <a:xfrm>
-            <a:off x="4834890" y="1851660"/>
-            <a:ext cx="4011929" cy="2743200"/>
+            <a:off x="582930" y="3710178"/>
+            <a:ext cx="8229600" cy="857250"/>
           </a:xfrm>
           <a:prstGeom prst="roundRect">
             <a:avLst>
@@ -7955,161 +10483,243 @@
       </p:sp>
       <p:sp>
         <p:nvSpPr>
-          <p:cNvPr id="11" name="TextBox 10"/>
-          <p:cNvSpPr txBox="1"/>
-          <p:nvPr/>
-        </p:nvSpPr>
-        <p:spPr>
-          <a:xfrm>
-            <a:off x="5006340" y="1975104"/>
-            <a:ext cx="3669029" cy="377190"/>
-          </a:xfrm>
-          <a:prstGeom prst="rect">
-            <a:avLst/>
-          </a:prstGeom>
-          <a:noFill/>
-        </p:spPr>
-        <p:txBody>
-          <a:bodyPr wrap="square" lIns="27432" rIns="27432" tIns="13716" bIns="13716" anchor="t">
+          <p:cNvPr id="18" name="Rounded Rectangle 17"/>
+          <p:cNvSpPr/>
+          <p:nvPr/>
+        </p:nvSpPr>
+        <p:spPr>
+          <a:xfrm>
+            <a:off x="720090" y="3847338"/>
+            <a:ext cx="1028700" cy="582930"/>
+          </a:xfrm>
+          <a:prstGeom prst="roundRect">
+            <a:avLst>
+              <a:gd name="adj" fmla="val 10000"/>
+            </a:avLst>
+          </a:prstGeom>
+          <a:solidFill>
+            <a:srgbClr val="0EA594"/>
+          </a:solidFill>
+          <a:ln>
+            <a:solidFill>
+              <a:srgbClr val="0EA594"/>
+            </a:solidFill>
+          </a:ln>
+          <a:effectLst/>
+        </p:spPr>
+        <p:style>
+          <a:lnRef idx="1">
+            <a:schemeClr val="accent1"/>
+          </a:lnRef>
+          <a:fillRef idx="3">
+            <a:schemeClr val="accent1"/>
+          </a:fillRef>
+          <a:effectRef idx="2">
+            <a:schemeClr val="accent1"/>
+          </a:effectRef>
+          <a:fontRef idx="minor">
+            <a:schemeClr val="lt1"/>
+          </a:fontRef>
+        </p:style>
+        <p:txBody>
+          <a:bodyPr rtlCol="0" anchor="ctr"/>
+          <a:lstStyle/>
+          <a:p>
+            <a:pPr algn="ctr"/>
+          </a:p>
+        </p:txBody>
+      </p:sp>
+      <p:sp>
+        <p:nvSpPr>
+          <p:cNvPr id="19" name="TextBox 18"/>
+          <p:cNvSpPr txBox="1"/>
+          <p:nvPr/>
+        </p:nvSpPr>
+        <p:spPr>
+          <a:xfrm>
+            <a:off x="720090" y="3847338"/>
+            <a:ext cx="1028700" cy="582930"/>
+          </a:xfrm>
+          <a:prstGeom prst="rect">
+            <a:avLst/>
+          </a:prstGeom>
+          <a:noFill/>
+        </p:spPr>
+        <p:txBody>
+          <a:bodyPr wrap="square" lIns="27432" rIns="27432" tIns="13716" bIns="13716" anchor="ctr">
+            <a:spAutoFit/>
+          </a:bodyPr>
+          <a:lstStyle/>
+          <a:p>
+            <a:pPr algn="ctr"/>
+            <a:r>
+              <a:rPr sz="1125" b="1" i="0">
+                <a:solidFill>
+                  <a:srgbClr val="FFFFFF"/>
+                </a:solidFill>
+                <a:latin typeface="Arial Black"/>
+              </a:rPr>
+              <a:t>Round 3</a:t>
+            </a:r>
+          </a:p>
+        </p:txBody>
+      </p:sp>
+      <p:sp>
+        <p:nvSpPr>
+          <p:cNvPr id="20" name="TextBox 19"/>
+          <p:cNvSpPr txBox="1"/>
+          <p:nvPr/>
+        </p:nvSpPr>
+        <p:spPr>
+          <a:xfrm>
+            <a:off x="1920239" y="3819906"/>
+            <a:ext cx="6789420" cy="342900"/>
+          </a:xfrm>
+          <a:prstGeom prst="rect">
+            <a:avLst/>
+          </a:prstGeom>
+          <a:noFill/>
+        </p:spPr>
+        <p:txBody>
+          <a:bodyPr wrap="square" lIns="27432" rIns="27432" tIns="13716" bIns="13716" anchor="ctr">
             <a:spAutoFit/>
           </a:bodyPr>
           <a:lstStyle/>
           <a:p>
             <a:pPr algn="l"/>
             <a:r>
-              <a:rPr sz="1650" b="1" i="0">
-                <a:solidFill>
-                  <a:srgbClr val="0EA594"/>
-                </a:solidFill>
-                <a:latin typeface="Arial Black"/>
-              </a:rPr>
-              <a:t>解法:maxIterations = 7</a:t>
-            </a:r>
-          </a:p>
-        </p:txBody>
-      </p:sp>
-      <p:sp>
-        <p:nvSpPr>
-          <p:cNvPr id="12" name="TextBox 11"/>
-          <p:cNvSpPr txBox="1"/>
-          <p:nvPr/>
-        </p:nvSpPr>
-        <p:spPr>
-          <a:xfrm>
-            <a:off x="5006340" y="2263139"/>
-            <a:ext cx="3703320" cy="2263139"/>
-          </a:xfrm>
-          <a:prstGeom prst="rect">
-            <a:avLst/>
-          </a:prstGeom>
-          <a:noFill/>
-        </p:spPr>
-        <p:txBody>
-          <a:bodyPr wrap="square" lIns="27432" rIns="27432" tIns="13716" bIns="13716" anchor="t">
-            <a:spAutoFit/>
-          </a:bodyPr>
-          <a:lstStyle/>
-          <a:p>
-            <a:pPr algn="l">
-              <a:spcAft>
-                <a:spcPts val="450"/>
-              </a:spcAft>
-            </a:pPr>
-            <a:r>
-              <a:rPr sz="1050" b="0" i="0">
+              <a:rPr sz="1125" b="1" i="0">
                 <a:solidFill>
                   <a:srgbClr val="1F2937"/>
                 </a:solidFill>
                 <a:latin typeface="Calibri"/>
               </a:rPr>
-              <a:t>✓  設定最大迭代次數上限</a:t>
-            </a:r>
-          </a:p>
-          <a:p>
-            <a:pPr algn="l">
-              <a:spcAft>
-                <a:spcPts val="150"/>
-              </a:spcAft>
-            </a:pPr>
-            <a:r>
-              <a:rPr sz="1050" b="0" i="0">
-                <a:solidFill>
-                  <a:srgbClr val="1F2937"/>
+              <a:t>「整合 5 個結果」  ✓ stop_reason = end_turn</a:t>
+            </a:r>
+          </a:p>
+        </p:txBody>
+      </p:sp>
+      <p:sp>
+        <p:nvSpPr>
+          <p:cNvPr id="21" name="TextBox 20"/>
+          <p:cNvSpPr txBox="1"/>
+          <p:nvPr/>
+        </p:nvSpPr>
+        <p:spPr>
+          <a:xfrm>
+            <a:off x="1920239" y="4162806"/>
+            <a:ext cx="6789420" cy="308610"/>
+          </a:xfrm>
+          <a:prstGeom prst="rect">
+            <a:avLst/>
+          </a:prstGeom>
+          <a:noFill/>
+        </p:spPr>
+        <p:txBody>
+          <a:bodyPr wrap="square" lIns="27432" rIns="27432" tIns="13716" bIns="13716" anchor="ctr">
+            <a:spAutoFit/>
+          </a:bodyPr>
+          <a:lstStyle/>
+          <a:p>
+            <a:pPr algn="l"/>
+            <a:r>
+              <a:rPr sz="975" b="0" i="1">
+                <a:solidFill>
+                  <a:srgbClr val="374151"/>
                 </a:solidFill>
                 <a:latin typeface="Calibri"/>
               </a:rPr>
-              <a:t>✓  第 7 輪(最後一輪)時注入臨時</a:t>
-            </a:r>
-          </a:p>
-          <a:p>
-            <a:pPr algn="l">
-              <a:spcAft>
-                <a:spcPts val="150"/>
-              </a:spcAft>
-            </a:pPr>
-            <a:r>
-              <a:rPr sz="1050" b="0" i="0">
-                <a:solidFill>
-                  <a:srgbClr val="1F2937"/>
+              <a:t>→  「你可修這門,范教授近期在做 LLM 評測,最對你胃口…」</a:t>
+            </a:r>
+          </a:p>
+        </p:txBody>
+      </p:sp>
+      <p:sp>
+        <p:nvSpPr>
+          <p:cNvPr id="22" name="Rounded Rectangle 21"/>
+          <p:cNvSpPr/>
+          <p:nvPr/>
+        </p:nvSpPr>
+        <p:spPr>
+          <a:xfrm>
+            <a:off x="582930" y="4766310"/>
+            <a:ext cx="8229600" cy="274320"/>
+          </a:xfrm>
+          <a:prstGeom prst="roundRect">
+            <a:avLst>
+              <a:gd name="adj" fmla="val 10000"/>
+            </a:avLst>
+          </a:prstGeom>
+          <a:solidFill>
+            <a:srgbClr val="EEE8FF"/>
+          </a:solidFill>
+          <a:ln w="19050">
+            <a:solidFill>
+              <a:srgbClr val="7B5CF5"/>
+            </a:solidFill>
+          </a:ln>
+          <a:effectLst/>
+        </p:spPr>
+        <p:style>
+          <a:lnRef idx="1">
+            <a:schemeClr val="accent1"/>
+          </a:lnRef>
+          <a:fillRef idx="3">
+            <a:schemeClr val="accent1"/>
+          </a:fillRef>
+          <a:effectRef idx="2">
+            <a:schemeClr val="accent1"/>
+          </a:effectRef>
+          <a:fontRef idx="minor">
+            <a:schemeClr val="lt1"/>
+          </a:fontRef>
+        </p:style>
+        <p:txBody>
+          <a:bodyPr rtlCol="0" anchor="ctr"/>
+          <a:lstStyle/>
+          <a:p>
+            <a:pPr algn="ctr"/>
+          </a:p>
+        </p:txBody>
+      </p:sp>
+      <p:sp>
+        <p:nvSpPr>
+          <p:cNvPr id="23" name="TextBox 22"/>
+          <p:cNvSpPr txBox="1"/>
+          <p:nvPr/>
+        </p:nvSpPr>
+        <p:spPr>
+          <a:xfrm>
+            <a:off x="788669" y="4766310"/>
+            <a:ext cx="7818120" cy="274320"/>
+          </a:xfrm>
+          <a:prstGeom prst="rect">
+            <a:avLst/>
+          </a:prstGeom>
+          <a:noFill/>
+        </p:spPr>
+        <p:txBody>
+          <a:bodyPr wrap="square" lIns="27432" rIns="27432" tIns="13716" bIns="13716" anchor="ctr">
+            <a:spAutoFit/>
+          </a:bodyPr>
+          <a:lstStyle/>
+          <a:p>
+            <a:pPr algn="l"/>
+            <a:r>
+              <a:rPr sz="975" b="1" i="0">
+                <a:solidFill>
+                  <a:srgbClr val="7B5CF5"/>
                 </a:solidFill>
                 <a:latin typeface="Calibri"/>
               </a:rPr>
-              <a:t>    user message 強制模型停止使用</a:t>
-            </a:r>
-          </a:p>
-          <a:p>
-            <a:pPr algn="l">
-              <a:spcAft>
-                <a:spcPts val="1050"/>
-              </a:spcAft>
-            </a:pPr>
-            <a:r>
-              <a:rPr sz="1050" b="0" i="0">
-                <a:solidFill>
-                  <a:srgbClr val="1F2937"/>
-                </a:solidFill>
-                <a:latin typeface="Calibri"/>
-              </a:rPr>
-              <a:t>    工具,直接整理回覆</a:t>
-            </a:r>
-          </a:p>
-          <a:p>
-            <a:pPr algn="l">
-              <a:spcAft>
-                <a:spcPts val="150"/>
-              </a:spcAft>
-            </a:pPr>
-            <a:r>
-              <a:rPr sz="975" b="0" i="1">
-                <a:solidFill>
-                  <a:srgbClr val="0F766E"/>
-                </a:solidFill>
-                <a:latin typeface="Calibri"/>
-              </a:rPr>
-              <a:t>「請不要再使用任何工具,</a:t>
-            </a:r>
-          </a:p>
-          <a:p>
-            <a:pPr algn="l">
-              <a:spcAft>
-                <a:spcPts val="0"/>
-              </a:spcAft>
-            </a:pPr>
-            <a:r>
-              <a:rPr sz="975" b="0" i="1">
-                <a:solidFill>
-                  <a:srgbClr val="0F766E"/>
-                </a:solidFill>
-                <a:latin typeface="Calibri"/>
-              </a:rPr>
-              <a:t>  直接根據工具回傳的資料整理 Markdown 回覆。」</a:t>
-            </a:r>
-          </a:p>
-        </p:txBody>
-      </p:sp>
-      <p:sp>
-        <p:nvSpPr>
-          <p:cNvPr id="13" name="TextBox 12"/>
+              <a:t>▶  每一輪 LLM 都看著上一輪的 tool_result,自己決定下一步 —— 你沒寫任何流程控制</a:t>
+            </a:r>
+          </a:p>
+        </p:txBody>
+      </p:sp>
+      <p:sp>
+        <p:nvSpPr>
+          <p:cNvPr id="24" name="TextBox 23"/>
           <p:cNvSpPr txBox="1"/>
           <p:nvPr/>
         </p:nvSpPr>
@@ -8137,7 +10747,7 @@
                 </a:solidFill>
                 <a:latin typeface="Calibri"/>
               </a:rPr>
-              <a:t>6 / 8</a:t>
+              <a:t>6 / 11</a:t>
             </a:r>
           </a:p>
         </p:txBody>
@@ -8175,7 +10785,7 @@
             <a:avLst/>
           </a:prstGeom>
           <a:solidFill>
-            <a:srgbClr val="0F1429"/>
+            <a:srgbClr val="FFFFFF"/>
           </a:solidFill>
           <a:ln>
             <a:noFill/>
@@ -8218,7 +10828,7 @@
             <a:avLst/>
           </a:prstGeom>
           <a:solidFill>
-            <a:srgbClr val="FB7048"/>
+            <a:srgbClr val="7B5CF5"/>
           </a:solidFill>
           <a:ln>
             <a:noFill/>
@@ -8271,13 +10881,13 @@
           <a:p>
             <a:pPr algn="l"/>
             <a:r>
-              <a:rPr sz="1050" b="1" i="0">
-                <a:solidFill>
-                  <a:srgbClr val="CBD5E1"/>
+              <a:rPr sz="1125" b="1" i="0">
+                <a:solidFill>
+                  <a:srgbClr val="9CA3AF"/>
                 </a:solidFill>
                 <a:latin typeface="Calibri"/>
               </a:rPr>
-              <a:t>04   L I V E   D E M O</a:t>
+              <a:t>01 · ③   M E S S A G E S   陣 列</a:t>
             </a:r>
           </a:p>
         </p:txBody>
@@ -8290,8 +10900,8 @@
         </p:nvSpPr>
         <p:spPr>
           <a:xfrm>
-            <a:off x="582930" y="720090"/>
-            <a:ext cx="8229600" cy="582930"/>
+            <a:off x="582930" y="651509"/>
+            <a:ext cx="8229600" cy="651509"/>
           </a:xfrm>
           <a:prstGeom prst="rect">
             <a:avLst/>
@@ -8306,13 +10916,13 @@
           <a:p>
             <a:pPr algn="l"/>
             <a:r>
-              <a:rPr sz="3300" b="1" i="0">
-                <a:solidFill>
-                  <a:srgbClr val="FB7048"/>
+              <a:rPr sz="3150" b="1" i="0">
+                <a:solidFill>
+                  <a:srgbClr val="1F2937"/>
                 </a:solidFill>
                 <a:latin typeface="Arial Black"/>
               </a:rPr>
-              <a:t>▶  切換到 Live Demo</a:t>
+              <a:t>messages 陣列怎麼長大</a:t>
             </a:r>
           </a:p>
         </p:txBody>
@@ -8325,8 +10935,8 @@
         </p:nvSpPr>
         <p:spPr>
           <a:xfrm>
-            <a:off x="582930" y="1405889"/>
-            <a:ext cx="8229600" cy="308610"/>
+            <a:off x="582930" y="1268730"/>
+            <a:ext cx="8229600" cy="377190"/>
           </a:xfrm>
           <a:prstGeom prst="rect">
             <a:avLst/>
@@ -8341,62 +10951,27 @@
           <a:p>
             <a:pPr algn="l"/>
             <a:r>
-              <a:rPr sz="1350" b="0" i="1">
-                <a:solidFill>
-                  <a:srgbClr val="CBD5E1"/>
+              <a:rPr sz="1500" b="0" i="1">
+                <a:solidFill>
+                  <a:srgbClr val="6B7280"/>
                 </a:solidFill>
                 <a:latin typeface="Calibri"/>
               </a:rPr>
-              <a:t>25 分鐘 · 興大 AI 學伴實機</a:t>
-            </a:r>
-          </a:p>
-        </p:txBody>
-      </p:sp>
-      <p:sp>
-        <p:nvSpPr>
-          <p:cNvPr id="7" name="TextBox 6"/>
-          <p:cNvSpPr txBox="1"/>
-          <p:nvPr/>
-        </p:nvSpPr>
-        <p:spPr>
-          <a:xfrm>
-            <a:off x="582930" y="1851660"/>
-            <a:ext cx="8229600" cy="274320"/>
-          </a:xfrm>
-          <a:prstGeom prst="rect">
-            <a:avLst/>
-          </a:prstGeom>
-          <a:noFill/>
-        </p:spPr>
-        <p:txBody>
-          <a:bodyPr wrap="square" lIns="27432" rIns="27432" tIns="13716" bIns="13716" anchor="t">
-            <a:spAutoFit/>
-          </a:bodyPr>
-          <a:lstStyle/>
-          <a:p>
-            <a:pPr algn="l"/>
-            <a:r>
-              <a:rPr sz="1050" b="1" i="0">
-                <a:solidFill>
-                  <a:srgbClr val="EEE8FF"/>
-                </a:solidFill>
-                <a:latin typeface="Calibri"/>
-              </a:rPr>
-              <a:t>5 個示範問題(從淺到深,完整腳本見 03-live-demo-script.md)</a:t>
-            </a:r>
-          </a:p>
-        </p:txBody>
-      </p:sp>
-      <p:sp>
-        <p:nvSpPr>
-          <p:cNvPr id="8" name="Rounded Rectangle 7"/>
+              <a:t>loop 的「記憶」就在這個一直變長的陣列 —— LLM 每輪都看到完整脈絡</a:t>
+            </a:r>
+          </a:p>
+        </p:txBody>
+      </p:sp>
+      <p:sp>
+        <p:nvSpPr>
+          <p:cNvPr id="7" name="Rounded Rectangle 6"/>
           <p:cNvSpPr/>
           <p:nvPr/>
         </p:nvSpPr>
         <p:spPr>
           <a:xfrm>
-            <a:off x="685800" y="2194560"/>
-            <a:ext cx="8126729" cy="445770"/>
+            <a:off x="582930" y="1748789"/>
+            <a:ext cx="8229600" cy="384048"/>
           </a:xfrm>
           <a:prstGeom prst="roundRect">
             <a:avLst>
@@ -8404,7 +10979,313 @@
             </a:avLst>
           </a:prstGeom>
           <a:solidFill>
-            <a:srgbClr val="242A44"/>
+            <a:srgbClr val="DBEAFE"/>
+          </a:solidFill>
+          <a:ln w="14287">
+            <a:solidFill>
+              <a:srgbClr val="3B82F6"/>
+            </a:solidFill>
+          </a:ln>
+          <a:effectLst/>
+        </p:spPr>
+        <p:style>
+          <a:lnRef idx="1">
+            <a:schemeClr val="accent1"/>
+          </a:lnRef>
+          <a:fillRef idx="3">
+            <a:schemeClr val="accent1"/>
+          </a:fillRef>
+          <a:effectRef idx="2">
+            <a:schemeClr val="accent1"/>
+          </a:effectRef>
+          <a:fontRef idx="minor">
+            <a:schemeClr val="lt1"/>
+          </a:fontRef>
+        </p:style>
+        <p:txBody>
+          <a:bodyPr rtlCol="0" anchor="ctr"/>
+          <a:lstStyle/>
+          <a:p>
+            <a:pPr algn="ctr"/>
+          </a:p>
+        </p:txBody>
+      </p:sp>
+      <p:sp>
+        <p:nvSpPr>
+          <p:cNvPr id="8" name="TextBox 7"/>
+          <p:cNvSpPr txBox="1"/>
+          <p:nvPr/>
+        </p:nvSpPr>
+        <p:spPr>
+          <a:xfrm>
+            <a:off x="720090" y="1748789"/>
+            <a:ext cx="617220" cy="384048"/>
+          </a:xfrm>
+          <a:prstGeom prst="rect">
+            <a:avLst/>
+          </a:prstGeom>
+          <a:noFill/>
+        </p:spPr>
+        <p:txBody>
+          <a:bodyPr wrap="square" lIns="27432" rIns="27432" tIns="13716" bIns="13716" anchor="ctr">
+            <a:spAutoFit/>
+          </a:bodyPr>
+          <a:lstStyle/>
+          <a:p>
+            <a:pPr algn="l"/>
+            <a:r>
+              <a:rPr sz="1050" b="1" i="0">
+                <a:solidFill>
+                  <a:srgbClr val="3B82F6"/>
+                </a:solidFill>
+                <a:latin typeface="Consolas"/>
+              </a:rPr>
+              <a:t>[0]</a:t>
+            </a:r>
+          </a:p>
+        </p:txBody>
+      </p:sp>
+      <p:sp>
+        <p:nvSpPr>
+          <p:cNvPr id="9" name="TextBox 8"/>
+          <p:cNvSpPr txBox="1"/>
+          <p:nvPr/>
+        </p:nvSpPr>
+        <p:spPr>
+          <a:xfrm>
+            <a:off x="1371600" y="1748789"/>
+            <a:ext cx="1508760" cy="384048"/>
+          </a:xfrm>
+          <a:prstGeom prst="rect">
+            <a:avLst/>
+          </a:prstGeom>
+          <a:noFill/>
+        </p:spPr>
+        <p:txBody>
+          <a:bodyPr wrap="square" lIns="27432" rIns="27432" tIns="13716" bIns="13716" anchor="ctr">
+            <a:spAutoFit/>
+          </a:bodyPr>
+          <a:lstStyle/>
+          <a:p>
+            <a:pPr algn="l"/>
+            <a:r>
+              <a:rPr sz="1050" b="1" i="0">
+                <a:solidFill>
+                  <a:srgbClr val="3B82F6"/>
+                </a:solidFill>
+                <a:latin typeface="Consolas"/>
+              </a:rPr>
+              <a:t>user</a:t>
+            </a:r>
+          </a:p>
+        </p:txBody>
+      </p:sp>
+      <p:sp>
+        <p:nvSpPr>
+          <p:cNvPr id="10" name="TextBox 9"/>
+          <p:cNvSpPr txBox="1"/>
+          <p:nvPr/>
+        </p:nvSpPr>
+        <p:spPr>
+          <a:xfrm>
+            <a:off x="2948939" y="1748789"/>
+            <a:ext cx="5760720" cy="384048"/>
+          </a:xfrm>
+          <a:prstGeom prst="rect">
+            <a:avLst/>
+          </a:prstGeom>
+          <a:noFill/>
+        </p:spPr>
+        <p:txBody>
+          <a:bodyPr wrap="square" lIns="27432" rIns="27432" tIns="13716" bIns="13716" anchor="ctr">
+            <a:spAutoFit/>
+          </a:bodyPr>
+          <a:lstStyle/>
+          <a:p>
+            <a:pPr algn="l"/>
+            <a:r>
+              <a:rPr sz="1050" b="0" i="0">
+                <a:solidFill>
+                  <a:srgbClr val="1F2937"/>
+                </a:solidFill>
+                <a:latin typeface="Calibri"/>
+              </a:rPr>
+              <a:t>「資工系深度學習的課,老師論文?」</a:t>
+            </a:r>
+          </a:p>
+        </p:txBody>
+      </p:sp>
+      <p:sp>
+        <p:nvSpPr>
+          <p:cNvPr id="11" name="Rounded Rectangle 10"/>
+          <p:cNvSpPr/>
+          <p:nvPr/>
+        </p:nvSpPr>
+        <p:spPr>
+          <a:xfrm>
+            <a:off x="582930" y="2173986"/>
+            <a:ext cx="8229600" cy="384048"/>
+          </a:xfrm>
+          <a:prstGeom prst="roundRect">
+            <a:avLst>
+              <a:gd name="adj" fmla="val 10000"/>
+            </a:avLst>
+          </a:prstGeom>
+          <a:solidFill>
+            <a:srgbClr val="EEE8FF"/>
+          </a:solidFill>
+          <a:ln w="14287">
+            <a:solidFill>
+              <a:srgbClr val="7B5CF5"/>
+            </a:solidFill>
+          </a:ln>
+          <a:effectLst/>
+        </p:spPr>
+        <p:style>
+          <a:lnRef idx="1">
+            <a:schemeClr val="accent1"/>
+          </a:lnRef>
+          <a:fillRef idx="3">
+            <a:schemeClr val="accent1"/>
+          </a:fillRef>
+          <a:effectRef idx="2">
+            <a:schemeClr val="accent1"/>
+          </a:effectRef>
+          <a:fontRef idx="minor">
+            <a:schemeClr val="lt1"/>
+          </a:fontRef>
+        </p:style>
+        <p:txBody>
+          <a:bodyPr rtlCol="0" anchor="ctr"/>
+          <a:lstStyle/>
+          <a:p>
+            <a:pPr algn="ctr"/>
+          </a:p>
+        </p:txBody>
+      </p:sp>
+      <p:sp>
+        <p:nvSpPr>
+          <p:cNvPr id="12" name="TextBox 11"/>
+          <p:cNvSpPr txBox="1"/>
+          <p:nvPr/>
+        </p:nvSpPr>
+        <p:spPr>
+          <a:xfrm>
+            <a:off x="720090" y="2173986"/>
+            <a:ext cx="617220" cy="384048"/>
+          </a:xfrm>
+          <a:prstGeom prst="rect">
+            <a:avLst/>
+          </a:prstGeom>
+          <a:noFill/>
+        </p:spPr>
+        <p:txBody>
+          <a:bodyPr wrap="square" lIns="27432" rIns="27432" tIns="13716" bIns="13716" anchor="ctr">
+            <a:spAutoFit/>
+          </a:bodyPr>
+          <a:lstStyle/>
+          <a:p>
+            <a:pPr algn="l"/>
+            <a:r>
+              <a:rPr sz="1050" b="1" i="0">
+                <a:solidFill>
+                  <a:srgbClr val="7B5CF5"/>
+                </a:solidFill>
+                <a:latin typeface="Consolas"/>
+              </a:rPr>
+              <a:t>[1]</a:t>
+            </a:r>
+          </a:p>
+        </p:txBody>
+      </p:sp>
+      <p:sp>
+        <p:nvSpPr>
+          <p:cNvPr id="13" name="TextBox 12"/>
+          <p:cNvSpPr txBox="1"/>
+          <p:nvPr/>
+        </p:nvSpPr>
+        <p:spPr>
+          <a:xfrm>
+            <a:off x="1371600" y="2173986"/>
+            <a:ext cx="1508760" cy="384048"/>
+          </a:xfrm>
+          <a:prstGeom prst="rect">
+            <a:avLst/>
+          </a:prstGeom>
+          <a:noFill/>
+        </p:spPr>
+        <p:txBody>
+          <a:bodyPr wrap="square" lIns="27432" rIns="27432" tIns="13716" bIns="13716" anchor="ctr">
+            <a:spAutoFit/>
+          </a:bodyPr>
+          <a:lstStyle/>
+          <a:p>
+            <a:pPr algn="l"/>
+            <a:r>
+              <a:rPr sz="1050" b="1" i="0">
+                <a:solidFill>
+                  <a:srgbClr val="7B5CF5"/>
+                </a:solidFill>
+                <a:latin typeface="Consolas"/>
+              </a:rPr>
+              <a:t>assistant</a:t>
+            </a:r>
+          </a:p>
+        </p:txBody>
+      </p:sp>
+      <p:sp>
+        <p:nvSpPr>
+          <p:cNvPr id="14" name="TextBox 13"/>
+          <p:cNvSpPr txBox="1"/>
+          <p:nvPr/>
+        </p:nvSpPr>
+        <p:spPr>
+          <a:xfrm>
+            <a:off x="2948939" y="2173986"/>
+            <a:ext cx="5760720" cy="384048"/>
+          </a:xfrm>
+          <a:prstGeom prst="rect">
+            <a:avLst/>
+          </a:prstGeom>
+          <a:noFill/>
+        </p:spPr>
+        <p:txBody>
+          <a:bodyPr wrap="square" lIns="27432" rIns="27432" tIns="13716" bIns="13716" anchor="ctr">
+            <a:spAutoFit/>
+          </a:bodyPr>
+          <a:lstStyle/>
+          <a:p>
+            <a:pPr algn="l"/>
+            <a:r>
+              <a:rPr sz="1050" b="0" i="0">
+                <a:solidFill>
+                  <a:srgbClr val="1F2937"/>
+                </a:solidFill>
+                <a:latin typeface="Calibri"/>
+              </a:rPr>
+              <a:t>tool_use  search_courses(...)</a:t>
+            </a:r>
+          </a:p>
+        </p:txBody>
+      </p:sp>
+      <p:sp>
+        <p:nvSpPr>
+          <p:cNvPr id="15" name="Rounded Rectangle 14"/>
+          <p:cNvSpPr/>
+          <p:nvPr/>
+        </p:nvSpPr>
+        <p:spPr>
+          <a:xfrm>
+            <a:off x="582930" y="2599182"/>
+            <a:ext cx="8229600" cy="384048"/>
+          </a:xfrm>
+          <a:prstGeom prst="roundRect">
+            <a:avLst>
+              <a:gd name="adj" fmla="val 10000"/>
+            </a:avLst>
+          </a:prstGeom>
+          <a:solidFill>
+            <a:srgbClr val="D4F7F0"/>
           </a:solidFill>
           <a:ln w="14287">
             <a:solidFill>
@@ -8437,14 +11318,14 @@
       </p:sp>
       <p:sp>
         <p:nvSpPr>
-          <p:cNvPr id="9" name="TextBox 8"/>
-          <p:cNvSpPr txBox="1"/>
-          <p:nvPr/>
-        </p:nvSpPr>
-        <p:spPr>
-          <a:xfrm>
-            <a:off x="822959" y="2194560"/>
-            <a:ext cx="480059" cy="445770"/>
+          <p:cNvPr id="16" name="TextBox 15"/>
+          <p:cNvSpPr txBox="1"/>
+          <p:nvPr/>
+        </p:nvSpPr>
+        <p:spPr>
+          <a:xfrm>
+            <a:off x="720090" y="2599182"/>
+            <a:ext cx="617220" cy="384048"/>
           </a:xfrm>
           <a:prstGeom prst="rect">
             <a:avLst/>
@@ -8465,21 +11346,21 @@
                 </a:solidFill>
                 <a:latin typeface="Consolas"/>
               </a:rPr>
-              <a:t>Q1</a:t>
-            </a:r>
-          </a:p>
-        </p:txBody>
-      </p:sp>
-      <p:sp>
-        <p:nvSpPr>
-          <p:cNvPr id="10" name="TextBox 9"/>
-          <p:cNvSpPr txBox="1"/>
-          <p:nvPr/>
-        </p:nvSpPr>
-        <p:spPr>
-          <a:xfrm>
-            <a:off x="1337310" y="2194560"/>
-            <a:ext cx="3086100" cy="445770"/>
+              <a:t>[2]</a:t>
+            </a:r>
+          </a:p>
+        </p:txBody>
+      </p:sp>
+      <p:sp>
+        <p:nvSpPr>
+          <p:cNvPr id="17" name="TextBox 16"/>
+          <p:cNvSpPr txBox="1"/>
+          <p:nvPr/>
+        </p:nvSpPr>
+        <p:spPr>
+          <a:xfrm>
+            <a:off x="1371600" y="2599182"/>
+            <a:ext cx="1508760" cy="384048"/>
           </a:xfrm>
           <a:prstGeom prst="rect">
             <a:avLst/>
@@ -8494,132 +11375,62 @@
           <a:p>
             <a:pPr algn="l"/>
             <a:r>
-              <a:rPr sz="1125" b="1" i="0">
-                <a:solidFill>
-                  <a:srgbClr val="E5E7EB"/>
+              <a:rPr sz="1050" b="1" i="0">
+                <a:solidFill>
+                  <a:srgbClr val="0EA594"/>
+                </a:solidFill>
+                <a:latin typeface="Consolas"/>
+              </a:rPr>
+              <a:t>user</a:t>
+            </a:r>
+          </a:p>
+        </p:txBody>
+      </p:sp>
+      <p:sp>
+        <p:nvSpPr>
+          <p:cNvPr id="18" name="TextBox 17"/>
+          <p:cNvSpPr txBox="1"/>
+          <p:nvPr/>
+        </p:nvSpPr>
+        <p:spPr>
+          <a:xfrm>
+            <a:off x="2948939" y="2599182"/>
+            <a:ext cx="5760720" cy="384048"/>
+          </a:xfrm>
+          <a:prstGeom prst="rect">
+            <a:avLst/>
+          </a:prstGeom>
+          <a:noFill/>
+        </p:spPr>
+        <p:txBody>
+          <a:bodyPr wrap="square" lIns="27432" rIns="27432" tIns="13716" bIns="13716" anchor="ctr">
+            <a:spAutoFit/>
+          </a:bodyPr>
+          <a:lstStyle/>
+          <a:p>
+            <a:pPr algn="l"/>
+            <a:r>
+              <a:rPr sz="1050" b="0" i="0">
+                <a:solidFill>
+                  <a:srgbClr val="1F2937"/>
                 </a:solidFill>
                 <a:latin typeface="Calibri"/>
               </a:rPr>
-              <a:t>圖書館 AI 書多少</a:t>
-            </a:r>
-          </a:p>
-        </p:txBody>
-      </p:sp>
-      <p:sp>
-        <p:nvSpPr>
-          <p:cNvPr id="11" name="TextBox 10"/>
-          <p:cNvSpPr txBox="1"/>
-          <p:nvPr/>
-        </p:nvSpPr>
-        <p:spPr>
-          <a:xfrm>
-            <a:off x="4457700" y="2194560"/>
-            <a:ext cx="2331720" cy="445770"/>
-          </a:xfrm>
-          <a:prstGeom prst="rect">
-            <a:avLst/>
-          </a:prstGeom>
-          <a:noFill/>
-        </p:spPr>
-        <p:txBody>
-          <a:bodyPr wrap="square" lIns="27432" rIns="27432" tIns="13716" bIns="13716" anchor="ctr">
-            <a:spAutoFit/>
-          </a:bodyPr>
-          <a:lstStyle/>
-          <a:p>
-            <a:pPr algn="l"/>
-            <a:r>
-              <a:rPr sz="937" b="0" i="1">
-                <a:solidFill>
-                  <a:srgbClr val="9CA3AF"/>
-                </a:solidFill>
-                <a:latin typeface="Calibri"/>
-              </a:rPr>
-              <a:t>single tool</a:t>
-            </a:r>
-          </a:p>
-        </p:txBody>
-      </p:sp>
-      <p:sp>
-        <p:nvSpPr>
-          <p:cNvPr id="12" name="TextBox 11"/>
-          <p:cNvSpPr txBox="1"/>
-          <p:nvPr/>
-        </p:nvSpPr>
-        <p:spPr>
-          <a:xfrm>
-            <a:off x="6858000" y="2194560"/>
-            <a:ext cx="1062990" cy="445770"/>
-          </a:xfrm>
-          <a:prstGeom prst="rect">
-            <a:avLst/>
-          </a:prstGeom>
-          <a:noFill/>
-        </p:spPr>
-        <p:txBody>
-          <a:bodyPr wrap="square" lIns="27432" rIns="27432" tIns="13716" bIns="13716" anchor="ctr">
-            <a:spAutoFit/>
-          </a:bodyPr>
-          <a:lstStyle/>
-          <a:p>
-            <a:pPr algn="ctr"/>
-            <a:r>
-              <a:rPr sz="1050" b="1" i="0">
-                <a:solidFill>
-                  <a:srgbClr val="0EA594"/>
-                </a:solidFill>
-                <a:latin typeface="Calibri"/>
-              </a:rPr>
-              <a:t>★</a:t>
-            </a:r>
-          </a:p>
-        </p:txBody>
-      </p:sp>
-      <p:sp>
-        <p:nvSpPr>
-          <p:cNvPr id="13" name="TextBox 12"/>
-          <p:cNvSpPr txBox="1"/>
-          <p:nvPr/>
-        </p:nvSpPr>
-        <p:spPr>
-          <a:xfrm>
-            <a:off x="7920990" y="2194560"/>
-            <a:ext cx="857250" cy="445770"/>
-          </a:xfrm>
-          <a:prstGeom prst="rect">
-            <a:avLst/>
-          </a:prstGeom>
-          <a:noFill/>
-        </p:spPr>
-        <p:txBody>
-          <a:bodyPr wrap="square" lIns="27432" rIns="27432" tIns="13716" bIns="13716" anchor="ctr">
-            <a:spAutoFit/>
-          </a:bodyPr>
-          <a:lstStyle/>
-          <a:p>
-            <a:pPr algn="r"/>
-            <a:r>
-              <a:rPr sz="825" b="0" i="0">
-                <a:solidFill>
-                  <a:srgbClr val="9CA3AF"/>
-                </a:solidFill>
-                <a:latin typeface="Consolas"/>
-              </a:rPr>
-              <a:t>~30s</a:t>
-            </a:r>
-          </a:p>
-        </p:txBody>
-      </p:sp>
-      <p:sp>
-        <p:nvSpPr>
-          <p:cNvPr id="14" name="Rounded Rectangle 13"/>
+              <a:t>tool_result  「5 門課,老師:范…」</a:t>
+            </a:r>
+          </a:p>
+        </p:txBody>
+      </p:sp>
+      <p:sp>
+        <p:nvSpPr>
+          <p:cNvPr id="19" name="Rounded Rectangle 18"/>
           <p:cNvSpPr/>
           <p:nvPr/>
         </p:nvSpPr>
         <p:spPr>
           <a:xfrm>
-            <a:off x="685800" y="2695194"/>
-            <a:ext cx="8126729" cy="445770"/>
+            <a:off x="582930" y="3024378"/>
+            <a:ext cx="8229600" cy="384048"/>
           </a:xfrm>
           <a:prstGeom prst="roundRect">
             <a:avLst>
@@ -8627,7 +11438,160 @@
             </a:avLst>
           </a:prstGeom>
           <a:solidFill>
-            <a:srgbClr val="242A44"/>
+            <a:srgbClr val="EEE8FF"/>
+          </a:solidFill>
+          <a:ln w="14287">
+            <a:solidFill>
+              <a:srgbClr val="7B5CF5"/>
+            </a:solidFill>
+          </a:ln>
+          <a:effectLst/>
+        </p:spPr>
+        <p:style>
+          <a:lnRef idx="1">
+            <a:schemeClr val="accent1"/>
+          </a:lnRef>
+          <a:fillRef idx="3">
+            <a:schemeClr val="accent1"/>
+          </a:fillRef>
+          <a:effectRef idx="2">
+            <a:schemeClr val="accent1"/>
+          </a:effectRef>
+          <a:fontRef idx="minor">
+            <a:schemeClr val="lt1"/>
+          </a:fontRef>
+        </p:style>
+        <p:txBody>
+          <a:bodyPr rtlCol="0" anchor="ctr"/>
+          <a:lstStyle/>
+          <a:p>
+            <a:pPr algn="ctr"/>
+          </a:p>
+        </p:txBody>
+      </p:sp>
+      <p:sp>
+        <p:nvSpPr>
+          <p:cNvPr id="20" name="TextBox 19"/>
+          <p:cNvSpPr txBox="1"/>
+          <p:nvPr/>
+        </p:nvSpPr>
+        <p:spPr>
+          <a:xfrm>
+            <a:off x="720090" y="3024378"/>
+            <a:ext cx="617220" cy="384048"/>
+          </a:xfrm>
+          <a:prstGeom prst="rect">
+            <a:avLst/>
+          </a:prstGeom>
+          <a:noFill/>
+        </p:spPr>
+        <p:txBody>
+          <a:bodyPr wrap="square" lIns="27432" rIns="27432" tIns="13716" bIns="13716" anchor="ctr">
+            <a:spAutoFit/>
+          </a:bodyPr>
+          <a:lstStyle/>
+          <a:p>
+            <a:pPr algn="l"/>
+            <a:r>
+              <a:rPr sz="1050" b="1" i="0">
+                <a:solidFill>
+                  <a:srgbClr val="7B5CF5"/>
+                </a:solidFill>
+                <a:latin typeface="Consolas"/>
+              </a:rPr>
+              <a:t>[3]</a:t>
+            </a:r>
+          </a:p>
+        </p:txBody>
+      </p:sp>
+      <p:sp>
+        <p:nvSpPr>
+          <p:cNvPr id="21" name="TextBox 20"/>
+          <p:cNvSpPr txBox="1"/>
+          <p:nvPr/>
+        </p:nvSpPr>
+        <p:spPr>
+          <a:xfrm>
+            <a:off x="1371600" y="3024378"/>
+            <a:ext cx="1508760" cy="384048"/>
+          </a:xfrm>
+          <a:prstGeom prst="rect">
+            <a:avLst/>
+          </a:prstGeom>
+          <a:noFill/>
+        </p:spPr>
+        <p:txBody>
+          <a:bodyPr wrap="square" lIns="27432" rIns="27432" tIns="13716" bIns="13716" anchor="ctr">
+            <a:spAutoFit/>
+          </a:bodyPr>
+          <a:lstStyle/>
+          <a:p>
+            <a:pPr algn="l"/>
+            <a:r>
+              <a:rPr sz="1050" b="1" i="0">
+                <a:solidFill>
+                  <a:srgbClr val="7B5CF5"/>
+                </a:solidFill>
+                <a:latin typeface="Consolas"/>
+              </a:rPr>
+              <a:t>assistant</a:t>
+            </a:r>
+          </a:p>
+        </p:txBody>
+      </p:sp>
+      <p:sp>
+        <p:nvSpPr>
+          <p:cNvPr id="22" name="TextBox 21"/>
+          <p:cNvSpPr txBox="1"/>
+          <p:nvPr/>
+        </p:nvSpPr>
+        <p:spPr>
+          <a:xfrm>
+            <a:off x="2948939" y="3024378"/>
+            <a:ext cx="5760720" cy="384048"/>
+          </a:xfrm>
+          <a:prstGeom prst="rect">
+            <a:avLst/>
+          </a:prstGeom>
+          <a:noFill/>
+        </p:spPr>
+        <p:txBody>
+          <a:bodyPr wrap="square" lIns="27432" rIns="27432" tIns="13716" bIns="13716" anchor="ctr">
+            <a:spAutoFit/>
+          </a:bodyPr>
+          <a:lstStyle/>
+          <a:p>
+            <a:pPr algn="l"/>
+            <a:r>
+              <a:rPr sz="1050" b="0" i="0">
+                <a:solidFill>
+                  <a:srgbClr val="1F2937"/>
+                </a:solidFill>
+                <a:latin typeface="Calibri"/>
+              </a:rPr>
+              <a:t>tool_use  search_arxiv(范)</a:t>
+            </a:r>
+          </a:p>
+        </p:txBody>
+      </p:sp>
+      <p:sp>
+        <p:nvSpPr>
+          <p:cNvPr id="23" name="Rounded Rectangle 22"/>
+          <p:cNvSpPr/>
+          <p:nvPr/>
+        </p:nvSpPr>
+        <p:spPr>
+          <a:xfrm>
+            <a:off x="582930" y="3449574"/>
+            <a:ext cx="8229600" cy="384048"/>
+          </a:xfrm>
+          <a:prstGeom prst="roundRect">
+            <a:avLst>
+              <a:gd name="adj" fmla="val 10000"/>
+            </a:avLst>
+          </a:prstGeom>
+          <a:solidFill>
+            <a:srgbClr val="D4F7F0"/>
           </a:solidFill>
           <a:ln w="14287">
             <a:solidFill>
@@ -8660,14 +11624,14 @@
       </p:sp>
       <p:sp>
         <p:nvSpPr>
-          <p:cNvPr id="15" name="TextBox 14"/>
-          <p:cNvSpPr txBox="1"/>
-          <p:nvPr/>
-        </p:nvSpPr>
-        <p:spPr>
-          <a:xfrm>
-            <a:off x="822959" y="2695194"/>
-            <a:ext cx="480059" cy="445770"/>
+          <p:cNvPr id="24" name="TextBox 23"/>
+          <p:cNvSpPr txBox="1"/>
+          <p:nvPr/>
+        </p:nvSpPr>
+        <p:spPr>
+          <a:xfrm>
+            <a:off x="720090" y="3449574"/>
+            <a:ext cx="617220" cy="384048"/>
           </a:xfrm>
           <a:prstGeom prst="rect">
             <a:avLst/>
@@ -8688,21 +11652,21 @@
                 </a:solidFill>
                 <a:latin typeface="Consolas"/>
               </a:rPr>
-              <a:t>Q2</a:t>
-            </a:r>
-          </a:p>
-        </p:txBody>
-      </p:sp>
-      <p:sp>
-        <p:nvSpPr>
-          <p:cNvPr id="16" name="TextBox 15"/>
-          <p:cNvSpPr txBox="1"/>
-          <p:nvPr/>
-        </p:nvSpPr>
-        <p:spPr>
-          <a:xfrm>
-            <a:off x="1337310" y="2695194"/>
-            <a:ext cx="3086100" cy="445770"/>
+              <a:t>[4]</a:t>
+            </a:r>
+          </a:p>
+        </p:txBody>
+      </p:sp>
+      <p:sp>
+        <p:nvSpPr>
+          <p:cNvPr id="25" name="TextBox 24"/>
+          <p:cNvSpPr txBox="1"/>
+          <p:nvPr/>
+        </p:nvSpPr>
+        <p:spPr>
+          <a:xfrm>
+            <a:off x="1371600" y="3449574"/>
+            <a:ext cx="1508760" cy="384048"/>
           </a:xfrm>
           <a:prstGeom prst="rect">
             <a:avLst/>
@@ -8717,132 +11681,62 @@
           <a:p>
             <a:pPr algn="l"/>
             <a:r>
-              <a:rPr sz="1125" b="1" i="0">
-                <a:solidFill>
-                  <a:srgbClr val="E5E7EB"/>
+              <a:rPr sz="1050" b="1" i="0">
+                <a:solidFill>
+                  <a:srgbClr val="0EA594"/>
+                </a:solidFill>
+                <a:latin typeface="Consolas"/>
+              </a:rPr>
+              <a:t>user</a:t>
+            </a:r>
+          </a:p>
+        </p:txBody>
+      </p:sp>
+      <p:sp>
+        <p:nvSpPr>
+          <p:cNvPr id="26" name="TextBox 25"/>
+          <p:cNvSpPr txBox="1"/>
+          <p:nvPr/>
+        </p:nvSpPr>
+        <p:spPr>
+          <a:xfrm>
+            <a:off x="2948939" y="3449574"/>
+            <a:ext cx="5760720" cy="384048"/>
+          </a:xfrm>
+          <a:prstGeom prst="rect">
+            <a:avLst/>
+          </a:prstGeom>
+          <a:noFill/>
+        </p:spPr>
+        <p:txBody>
+          <a:bodyPr wrap="square" lIns="27432" rIns="27432" tIns="13716" bIns="13716" anchor="ctr">
+            <a:spAutoFit/>
+          </a:bodyPr>
+          <a:lstStyle/>
+          <a:p>
+            <a:pPr algn="l"/>
+            <a:r>
+              <a:rPr sz="1050" b="0" i="0">
+                <a:solidFill>
+                  <a:srgbClr val="1F2937"/>
                 </a:solidFill>
                 <a:latin typeface="Calibri"/>
               </a:rPr>
-              <a:t>資工系深度學習老師</a:t>
-            </a:r>
-          </a:p>
-        </p:txBody>
-      </p:sp>
-      <p:sp>
-        <p:nvSpPr>
-          <p:cNvPr id="17" name="TextBox 16"/>
-          <p:cNvSpPr txBox="1"/>
-          <p:nvPr/>
-        </p:nvSpPr>
-        <p:spPr>
-          <a:xfrm>
-            <a:off x="4457700" y="2695194"/>
-            <a:ext cx="2331720" cy="445770"/>
-          </a:xfrm>
-          <a:prstGeom prst="rect">
-            <a:avLst/>
-          </a:prstGeom>
-          <a:noFill/>
-        </p:spPr>
-        <p:txBody>
-          <a:bodyPr wrap="square" lIns="27432" rIns="27432" tIns="13716" bIns="13716" anchor="ctr">
-            <a:spAutoFit/>
-          </a:bodyPr>
-          <a:lstStyle/>
-          <a:p>
-            <a:pPr algn="l"/>
-            <a:r>
-              <a:rPr sz="937" b="0" i="1">
-                <a:solidFill>
-                  <a:srgbClr val="9CA3AF"/>
-                </a:solidFill>
-                <a:latin typeface="Calibri"/>
-              </a:rPr>
-              <a:t>single tool + 參數</a:t>
-            </a:r>
-          </a:p>
-        </p:txBody>
-      </p:sp>
-      <p:sp>
-        <p:nvSpPr>
-          <p:cNvPr id="18" name="TextBox 17"/>
-          <p:cNvSpPr txBox="1"/>
-          <p:nvPr/>
-        </p:nvSpPr>
-        <p:spPr>
-          <a:xfrm>
-            <a:off x="6858000" y="2695194"/>
-            <a:ext cx="1062990" cy="445770"/>
-          </a:xfrm>
-          <a:prstGeom prst="rect">
-            <a:avLst/>
-          </a:prstGeom>
-          <a:noFill/>
-        </p:spPr>
-        <p:txBody>
-          <a:bodyPr wrap="square" lIns="27432" rIns="27432" tIns="13716" bIns="13716" anchor="ctr">
-            <a:spAutoFit/>
-          </a:bodyPr>
-          <a:lstStyle/>
-          <a:p>
-            <a:pPr algn="ctr"/>
-            <a:r>
-              <a:rPr sz="1050" b="1" i="0">
-                <a:solidFill>
-                  <a:srgbClr val="0EA594"/>
-                </a:solidFill>
-                <a:latin typeface="Calibri"/>
-              </a:rPr>
-              <a:t>★</a:t>
-            </a:r>
-          </a:p>
-        </p:txBody>
-      </p:sp>
-      <p:sp>
-        <p:nvSpPr>
-          <p:cNvPr id="19" name="TextBox 18"/>
-          <p:cNvSpPr txBox="1"/>
-          <p:nvPr/>
-        </p:nvSpPr>
-        <p:spPr>
-          <a:xfrm>
-            <a:off x="7920990" y="2695194"/>
-            <a:ext cx="857250" cy="445770"/>
-          </a:xfrm>
-          <a:prstGeom prst="rect">
-            <a:avLst/>
-          </a:prstGeom>
-          <a:noFill/>
-        </p:spPr>
-        <p:txBody>
-          <a:bodyPr wrap="square" lIns="27432" rIns="27432" tIns="13716" bIns="13716" anchor="ctr">
-            <a:spAutoFit/>
-          </a:bodyPr>
-          <a:lstStyle/>
-          <a:p>
-            <a:pPr algn="r"/>
-            <a:r>
-              <a:rPr sz="825" b="0" i="0">
-                <a:solidFill>
-                  <a:srgbClr val="9CA3AF"/>
-                </a:solidFill>
-                <a:latin typeface="Consolas"/>
-              </a:rPr>
-              <a:t>~30s</a:t>
-            </a:r>
-          </a:p>
-        </p:txBody>
-      </p:sp>
-      <p:sp>
-        <p:nvSpPr>
-          <p:cNvPr id="20" name="Rounded Rectangle 19"/>
+              <a:t>tool_result  「3 篇論文…」</a:t>
+            </a:r>
+          </a:p>
+        </p:txBody>
+      </p:sp>
+      <p:sp>
+        <p:nvSpPr>
+          <p:cNvPr id="27" name="Rounded Rectangle 26"/>
           <p:cNvSpPr/>
           <p:nvPr/>
         </p:nvSpPr>
         <p:spPr>
           <a:xfrm>
-            <a:off x="685800" y="3195828"/>
-            <a:ext cx="8126729" cy="445770"/>
+            <a:off x="582930" y="3874770"/>
+            <a:ext cx="8229600" cy="384048"/>
           </a:xfrm>
           <a:prstGeom prst="roundRect">
             <a:avLst>
@@ -8850,230 +11744,7 @@
             </a:avLst>
           </a:prstGeom>
           <a:solidFill>
-            <a:srgbClr val="242A44"/>
-          </a:solidFill>
-          <a:ln w="14287">
-            <a:solidFill>
-              <a:srgbClr val="7B5CF5"/>
-            </a:solidFill>
-          </a:ln>
-          <a:effectLst/>
-        </p:spPr>
-        <p:style>
-          <a:lnRef idx="1">
-            <a:schemeClr val="accent1"/>
-          </a:lnRef>
-          <a:fillRef idx="3">
-            <a:schemeClr val="accent1"/>
-          </a:fillRef>
-          <a:effectRef idx="2">
-            <a:schemeClr val="accent1"/>
-          </a:effectRef>
-          <a:fontRef idx="minor">
-            <a:schemeClr val="lt1"/>
-          </a:fontRef>
-        </p:style>
-        <p:txBody>
-          <a:bodyPr rtlCol="0" anchor="ctr"/>
-          <a:lstStyle/>
-          <a:p>
-            <a:pPr algn="ctr"/>
-          </a:p>
-        </p:txBody>
-      </p:sp>
-      <p:sp>
-        <p:nvSpPr>
-          <p:cNvPr id="21" name="TextBox 20"/>
-          <p:cNvSpPr txBox="1"/>
-          <p:nvPr/>
-        </p:nvSpPr>
-        <p:spPr>
-          <a:xfrm>
-            <a:off x="822959" y="3195828"/>
-            <a:ext cx="480059" cy="445770"/>
-          </a:xfrm>
-          <a:prstGeom prst="rect">
-            <a:avLst/>
-          </a:prstGeom>
-          <a:noFill/>
-        </p:spPr>
-        <p:txBody>
-          <a:bodyPr wrap="square" lIns="27432" rIns="27432" tIns="13716" bIns="13716" anchor="ctr">
-            <a:spAutoFit/>
-          </a:bodyPr>
-          <a:lstStyle/>
-          <a:p>
-            <a:pPr algn="l"/>
-            <a:r>
-              <a:rPr sz="1050" b="1" i="0">
-                <a:solidFill>
-                  <a:srgbClr val="7B5CF5"/>
-                </a:solidFill>
-                <a:latin typeface="Consolas"/>
-              </a:rPr>
-              <a:t>Q3</a:t>
-            </a:r>
-          </a:p>
-        </p:txBody>
-      </p:sp>
-      <p:sp>
-        <p:nvSpPr>
-          <p:cNvPr id="22" name="TextBox 21"/>
-          <p:cNvSpPr txBox="1"/>
-          <p:nvPr/>
-        </p:nvSpPr>
-        <p:spPr>
-          <a:xfrm>
-            <a:off x="1337310" y="3195828"/>
-            <a:ext cx="3086100" cy="445770"/>
-          </a:xfrm>
-          <a:prstGeom prst="rect">
-            <a:avLst/>
-          </a:prstGeom>
-          <a:noFill/>
-        </p:spPr>
-        <p:txBody>
-          <a:bodyPr wrap="square" lIns="27432" rIns="27432" tIns="13716" bIns="13716" anchor="ctr">
-            <a:spAutoFit/>
-          </a:bodyPr>
-          <a:lstStyle/>
-          <a:p>
-            <a:pPr algn="l"/>
-            <a:r>
-              <a:rPr sz="1125" b="1" i="0">
-                <a:solidFill>
-                  <a:srgbClr val="E5E7EB"/>
-                </a:solidFill>
-                <a:latin typeface="Calibri"/>
-              </a:rPr>
-              <a:t>AI 課程 + 教授介紹</a:t>
-            </a:r>
-          </a:p>
-        </p:txBody>
-      </p:sp>
-      <p:sp>
-        <p:nvSpPr>
-          <p:cNvPr id="23" name="TextBox 22"/>
-          <p:cNvSpPr txBox="1"/>
-          <p:nvPr/>
-        </p:nvSpPr>
-        <p:spPr>
-          <a:xfrm>
-            <a:off x="4457700" y="3195828"/>
-            <a:ext cx="2331720" cy="445770"/>
-          </a:xfrm>
-          <a:prstGeom prst="rect">
-            <a:avLst/>
-          </a:prstGeom>
-          <a:noFill/>
-        </p:spPr>
-        <p:txBody>
-          <a:bodyPr wrap="square" lIns="27432" rIns="27432" tIns="13716" bIns="13716" anchor="ctr">
-            <a:spAutoFit/>
-          </a:bodyPr>
-          <a:lstStyle/>
-          <a:p>
-            <a:pPr algn="l"/>
-            <a:r>
-              <a:rPr sz="937" b="0" i="1">
-                <a:solidFill>
-                  <a:srgbClr val="9CA3AF"/>
-                </a:solidFill>
-                <a:latin typeface="Calibri"/>
-              </a:rPr>
-              <a:t>multi-turn 主菜</a:t>
-            </a:r>
-          </a:p>
-        </p:txBody>
-      </p:sp>
-      <p:sp>
-        <p:nvSpPr>
-          <p:cNvPr id="24" name="TextBox 23"/>
-          <p:cNvSpPr txBox="1"/>
-          <p:nvPr/>
-        </p:nvSpPr>
-        <p:spPr>
-          <a:xfrm>
-            <a:off x="6858000" y="3195828"/>
-            <a:ext cx="1062990" cy="445770"/>
-          </a:xfrm>
-          <a:prstGeom prst="rect">
-            <a:avLst/>
-          </a:prstGeom>
-          <a:noFill/>
-        </p:spPr>
-        <p:txBody>
-          <a:bodyPr wrap="square" lIns="27432" rIns="27432" tIns="13716" bIns="13716" anchor="ctr">
-            <a:spAutoFit/>
-          </a:bodyPr>
-          <a:lstStyle/>
-          <a:p>
-            <a:pPr algn="ctr"/>
-            <a:r>
-              <a:rPr sz="1050" b="1" i="0">
-                <a:solidFill>
-                  <a:srgbClr val="7B5CF5"/>
-                </a:solidFill>
-                <a:latin typeface="Calibri"/>
-              </a:rPr>
-              <a:t>★★</a:t>
-            </a:r>
-          </a:p>
-        </p:txBody>
-      </p:sp>
-      <p:sp>
-        <p:nvSpPr>
-          <p:cNvPr id="25" name="TextBox 24"/>
-          <p:cNvSpPr txBox="1"/>
-          <p:nvPr/>
-        </p:nvSpPr>
-        <p:spPr>
-          <a:xfrm>
-            <a:off x="7920990" y="3195828"/>
-            <a:ext cx="857250" cy="445770"/>
-          </a:xfrm>
-          <a:prstGeom prst="rect">
-            <a:avLst/>
-          </a:prstGeom>
-          <a:noFill/>
-        </p:spPr>
-        <p:txBody>
-          <a:bodyPr wrap="square" lIns="27432" rIns="27432" tIns="13716" bIns="13716" anchor="ctr">
-            <a:spAutoFit/>
-          </a:bodyPr>
-          <a:lstStyle/>
-          <a:p>
-            <a:pPr algn="r"/>
-            <a:r>
-              <a:rPr sz="825" b="0" i="0">
-                <a:solidFill>
-                  <a:srgbClr val="9CA3AF"/>
-                </a:solidFill>
-                <a:latin typeface="Consolas"/>
-              </a:rPr>
-              <a:t>~60-90s</a:t>
-            </a:r>
-          </a:p>
-        </p:txBody>
-      </p:sp>
-      <p:sp>
-        <p:nvSpPr>
-          <p:cNvPr id="26" name="Rounded Rectangle 25"/>
-          <p:cNvSpPr/>
-          <p:nvPr/>
-        </p:nvSpPr>
-        <p:spPr>
-          <a:xfrm>
-            <a:off x="685800" y="3696462"/>
-            <a:ext cx="8126729" cy="445770"/>
-          </a:xfrm>
-          <a:prstGeom prst="roundRect">
-            <a:avLst>
-              <a:gd name="adj" fmla="val 10000"/>
-            </a:avLst>
-          </a:prstGeom>
-          <a:solidFill>
-            <a:srgbClr val="242A44"/>
+            <a:srgbClr val="FFE7DB"/>
           </a:solidFill>
           <a:ln w="14287">
             <a:solidFill>
@@ -9106,14 +11777,14 @@
       </p:sp>
       <p:sp>
         <p:nvSpPr>
-          <p:cNvPr id="27" name="TextBox 26"/>
-          <p:cNvSpPr txBox="1"/>
-          <p:nvPr/>
-        </p:nvSpPr>
-        <p:spPr>
-          <a:xfrm>
-            <a:off x="822959" y="3696462"/>
-            <a:ext cx="480059" cy="445770"/>
+          <p:cNvPr id="28" name="TextBox 27"/>
+          <p:cNvSpPr txBox="1"/>
+          <p:nvPr/>
+        </p:nvSpPr>
+        <p:spPr>
+          <a:xfrm>
+            <a:off x="720090" y="3874770"/>
+            <a:ext cx="617220" cy="384048"/>
           </a:xfrm>
           <a:prstGeom prst="rect">
             <a:avLst/>
@@ -9134,21 +11805,21 @@
                 </a:solidFill>
                 <a:latin typeface="Consolas"/>
               </a:rPr>
-              <a:t>Q4</a:t>
-            </a:r>
-          </a:p>
-        </p:txBody>
-      </p:sp>
-      <p:sp>
-        <p:nvSpPr>
-          <p:cNvPr id="28" name="TextBox 27"/>
-          <p:cNvSpPr txBox="1"/>
-          <p:nvPr/>
-        </p:nvSpPr>
-        <p:spPr>
-          <a:xfrm>
-            <a:off x="1337310" y="3696462"/>
-            <a:ext cx="3086100" cy="445770"/>
+              <a:t>[5]</a:t>
+            </a:r>
+          </a:p>
+        </p:txBody>
+      </p:sp>
+      <p:sp>
+        <p:nvSpPr>
+          <p:cNvPr id="29" name="TextBox 28"/>
+          <p:cNvSpPr txBox="1"/>
+          <p:nvPr/>
+        </p:nvSpPr>
+        <p:spPr>
+          <a:xfrm>
+            <a:off x="1371600" y="3874770"/>
+            <a:ext cx="1508760" cy="384048"/>
           </a:xfrm>
           <a:prstGeom prst="rect">
             <a:avLst/>
@@ -9163,132 +11834,62 @@
           <a:p>
             <a:pPr algn="l"/>
             <a:r>
-              <a:rPr sz="1125" b="1" i="0">
-                <a:solidFill>
-                  <a:srgbClr val="E5E7EB"/>
+              <a:rPr sz="1050" b="1" i="0">
+                <a:solidFill>
+                  <a:srgbClr val="FB7048"/>
+                </a:solidFill>
+                <a:latin typeface="Consolas"/>
+              </a:rPr>
+              <a:t>assistant</a:t>
+            </a:r>
+          </a:p>
+        </p:txBody>
+      </p:sp>
+      <p:sp>
+        <p:nvSpPr>
+          <p:cNvPr id="30" name="TextBox 29"/>
+          <p:cNvSpPr txBox="1"/>
+          <p:nvPr/>
+        </p:nvSpPr>
+        <p:spPr>
+          <a:xfrm>
+            <a:off x="2948939" y="3874770"/>
+            <a:ext cx="5760720" cy="384048"/>
+          </a:xfrm>
+          <a:prstGeom prst="rect">
+            <a:avLst/>
+          </a:prstGeom>
+          <a:noFill/>
+        </p:spPr>
+        <p:txBody>
+          <a:bodyPr wrap="square" lIns="27432" rIns="27432" tIns="13716" bIns="13716" anchor="ctr">
+            <a:spAutoFit/>
+          </a:bodyPr>
+          <a:lstStyle/>
+          <a:p>
+            <a:pPr algn="l"/>
+            <a:r>
+              <a:rPr sz="1050" b="0" i="0">
+                <a:solidFill>
+                  <a:srgbClr val="1F2937"/>
                 </a:solidFill>
                 <a:latin typeface="Calibri"/>
               </a:rPr>
-              <a:t>新書 + 天氣</a:t>
-            </a:r>
-          </a:p>
-        </p:txBody>
-      </p:sp>
-      <p:sp>
-        <p:nvSpPr>
-          <p:cNvPr id="29" name="TextBox 28"/>
-          <p:cNvSpPr txBox="1"/>
-          <p:nvPr/>
-        </p:nvSpPr>
-        <p:spPr>
-          <a:xfrm>
-            <a:off x="4457700" y="3696462"/>
-            <a:ext cx="2331720" cy="445770"/>
-          </a:xfrm>
-          <a:prstGeom prst="rect">
-            <a:avLst/>
-          </a:prstGeom>
-          <a:noFill/>
-        </p:spPr>
-        <p:txBody>
-          <a:bodyPr wrap="square" lIns="27432" rIns="27432" tIns="13716" bIns="13716" anchor="ctr">
-            <a:spAutoFit/>
-          </a:bodyPr>
-          <a:lstStyle/>
-          <a:p>
-            <a:pPr algn="l"/>
-            <a:r>
-              <a:rPr sz="937" b="0" i="1">
-                <a:solidFill>
-                  <a:srgbClr val="9CA3AF"/>
-                </a:solidFill>
-                <a:latin typeface="Calibri"/>
-              </a:rPr>
-              <a:t>parallel call</a:t>
-            </a:r>
-          </a:p>
-        </p:txBody>
-      </p:sp>
-      <p:sp>
-        <p:nvSpPr>
-          <p:cNvPr id="30" name="TextBox 29"/>
-          <p:cNvSpPr txBox="1"/>
-          <p:nvPr/>
-        </p:nvSpPr>
-        <p:spPr>
-          <a:xfrm>
-            <a:off x="6858000" y="3696462"/>
-            <a:ext cx="1062990" cy="445770"/>
-          </a:xfrm>
-          <a:prstGeom prst="rect">
-            <a:avLst/>
-          </a:prstGeom>
-          <a:noFill/>
-        </p:spPr>
-        <p:txBody>
-          <a:bodyPr wrap="square" lIns="27432" rIns="27432" tIns="13716" bIns="13716" anchor="ctr">
-            <a:spAutoFit/>
-          </a:bodyPr>
-          <a:lstStyle/>
-          <a:p>
-            <a:pPr algn="ctr"/>
-            <a:r>
-              <a:rPr sz="1050" b="1" i="0">
-                <a:solidFill>
-                  <a:srgbClr val="FB7048"/>
-                </a:solidFill>
-                <a:latin typeface="Calibri"/>
-              </a:rPr>
-              <a:t>★★</a:t>
-            </a:r>
-          </a:p>
-        </p:txBody>
-      </p:sp>
-      <p:sp>
-        <p:nvSpPr>
-          <p:cNvPr id="31" name="TextBox 30"/>
-          <p:cNvSpPr txBox="1"/>
-          <p:nvPr/>
-        </p:nvSpPr>
-        <p:spPr>
-          <a:xfrm>
-            <a:off x="7920990" y="3696462"/>
-            <a:ext cx="857250" cy="445770"/>
-          </a:xfrm>
-          <a:prstGeom prst="rect">
-            <a:avLst/>
-          </a:prstGeom>
-          <a:noFill/>
-        </p:spPr>
-        <p:txBody>
-          <a:bodyPr wrap="square" lIns="27432" rIns="27432" tIns="13716" bIns="13716" anchor="ctr">
-            <a:spAutoFit/>
-          </a:bodyPr>
-          <a:lstStyle/>
-          <a:p>
-            <a:pPr algn="r"/>
-            <a:r>
-              <a:rPr sz="825" b="0" i="0">
-                <a:solidFill>
-                  <a:srgbClr val="9CA3AF"/>
-                </a:solidFill>
-                <a:latin typeface="Consolas"/>
-              </a:rPr>
-              <a:t>~45s</a:t>
-            </a:r>
-          </a:p>
-        </p:txBody>
-      </p:sp>
-      <p:sp>
-        <p:nvSpPr>
-          <p:cNvPr id="32" name="Rounded Rectangle 31"/>
+              <a:t>text  「你可修這門…」  ✓ end_turn</a:t>
+            </a:r>
+          </a:p>
+        </p:txBody>
+      </p:sp>
+      <p:sp>
+        <p:nvSpPr>
+          <p:cNvPr id="31" name="Rounded Rectangle 30"/>
           <p:cNvSpPr/>
           <p:nvPr/>
         </p:nvSpPr>
         <p:spPr>
           <a:xfrm>
-            <a:off x="685800" y="4197096"/>
-            <a:ext cx="8126729" cy="445770"/>
+            <a:off x="582930" y="4766310"/>
+            <a:ext cx="8229600" cy="274320"/>
           </a:xfrm>
           <a:prstGeom prst="roundRect">
             <a:avLst>
@@ -9296,11 +11897,11 @@
             </a:avLst>
           </a:prstGeom>
           <a:solidFill>
-            <a:srgbClr val="242A44"/>
+            <a:srgbClr val="EEE8FF"/>
           </a:solidFill>
-          <a:ln w="14287">
+          <a:ln w="19050">
             <a:solidFill>
-              <a:srgbClr val="EF4444"/>
+              <a:srgbClr val="7B5CF5"/>
             </a:solidFill>
           </a:ln>
           <a:effectLst/>
@@ -9329,210 +11930,70 @@
       </p:sp>
       <p:sp>
         <p:nvSpPr>
+          <p:cNvPr id="32" name="TextBox 31"/>
+          <p:cNvSpPr txBox="1"/>
+          <p:nvPr/>
+        </p:nvSpPr>
+        <p:spPr>
+          <a:xfrm>
+            <a:off x="788669" y="4766310"/>
+            <a:ext cx="7818120" cy="274320"/>
+          </a:xfrm>
+          <a:prstGeom prst="rect">
+            <a:avLst/>
+          </a:prstGeom>
+          <a:noFill/>
+        </p:spPr>
+        <p:txBody>
+          <a:bodyPr wrap="square" lIns="27432" rIns="27432" tIns="13716" bIns="13716" anchor="ctr">
+            <a:spAutoFit/>
+          </a:bodyPr>
+          <a:lstStyle/>
+          <a:p>
+            <a:pPr algn="l"/>
+            <a:r>
+              <a:rPr sz="975" b="1" i="0">
+                <a:solidFill>
+                  <a:srgbClr val="7B5CF5"/>
+                </a:solidFill>
+                <a:latin typeface="Calibri"/>
+              </a:rPr>
+              <a:t>▶  每輪把上一輪結果接在後面 → 陣列越來越長 → 這就是「多輪記憶」的全部祕密</a:t>
+            </a:r>
+          </a:p>
+        </p:txBody>
+      </p:sp>
+      <p:sp>
+        <p:nvSpPr>
           <p:cNvPr id="33" name="TextBox 32"/>
           <p:cNvSpPr txBox="1"/>
           <p:nvPr/>
         </p:nvSpPr>
         <p:spPr>
           <a:xfrm>
-            <a:off x="822959" y="4197096"/>
-            <a:ext cx="480059" cy="445770"/>
-          </a:xfrm>
-          <a:prstGeom prst="rect">
-            <a:avLst/>
-          </a:prstGeom>
-          <a:noFill/>
-        </p:spPr>
-        <p:txBody>
-          <a:bodyPr wrap="square" lIns="27432" rIns="27432" tIns="13716" bIns="13716" anchor="ctr">
-            <a:spAutoFit/>
-          </a:bodyPr>
-          <a:lstStyle/>
-          <a:p>
-            <a:pPr algn="l"/>
-            <a:r>
-              <a:rPr sz="1050" b="1" i="0">
-                <a:solidFill>
-                  <a:srgbClr val="EF4444"/>
-                </a:solidFill>
-                <a:latin typeface="Consolas"/>
-              </a:rPr>
-              <a:t>Q5</a:t>
-            </a:r>
-          </a:p>
-        </p:txBody>
-      </p:sp>
-      <p:sp>
-        <p:nvSpPr>
-          <p:cNvPr id="34" name="TextBox 33"/>
-          <p:cNvSpPr txBox="1"/>
-          <p:nvPr/>
-        </p:nvSpPr>
-        <p:spPr>
-          <a:xfrm>
-            <a:off x="1337310" y="4197096"/>
-            <a:ext cx="3086100" cy="445770"/>
-          </a:xfrm>
-          <a:prstGeom prst="rect">
-            <a:avLst/>
-          </a:prstGeom>
-          <a:noFill/>
-        </p:spPr>
-        <p:txBody>
-          <a:bodyPr wrap="square" lIns="27432" rIns="27432" tIns="13716" bIns="13716" anchor="ctr">
-            <a:spAutoFit/>
-          </a:bodyPr>
-          <a:lstStyle/>
-          <a:p>
-            <a:pPr algn="l"/>
-            <a:r>
-              <a:rPr sz="1125" b="1" i="0">
-                <a:solidFill>
-                  <a:srgbClr val="E5E7EB"/>
+            <a:off x="7955279" y="4766310"/>
+            <a:ext cx="1028700" cy="240029"/>
+          </a:xfrm>
+          <a:prstGeom prst="rect">
+            <a:avLst/>
+          </a:prstGeom>
+          <a:noFill/>
+        </p:spPr>
+        <p:txBody>
+          <a:bodyPr wrap="square" lIns="27432" rIns="27432" tIns="13716" bIns="13716" anchor="t">
+            <a:spAutoFit/>
+          </a:bodyPr>
+          <a:lstStyle/>
+          <a:p>
+            <a:pPr algn="r"/>
+            <a:r>
+              <a:rPr sz="1050" b="0" i="0">
+                <a:solidFill>
+                  <a:srgbClr val="9CA3AF"/>
                 </a:solidFill>
                 <a:latin typeface="Calibri"/>
               </a:rPr>
-              <a:t>課程 + 論文 + 推薦</a:t>
-            </a:r>
-          </a:p>
-        </p:txBody>
-      </p:sp>
-      <p:sp>
-        <p:nvSpPr>
-          <p:cNvPr id="35" name="TextBox 34"/>
-          <p:cNvSpPr txBox="1"/>
-          <p:nvPr/>
-        </p:nvSpPr>
-        <p:spPr>
-          <a:xfrm>
-            <a:off x="4457700" y="4197096"/>
-            <a:ext cx="2331720" cy="445770"/>
-          </a:xfrm>
-          <a:prstGeom prst="rect">
-            <a:avLst/>
-          </a:prstGeom>
-          <a:noFill/>
-        </p:spPr>
-        <p:txBody>
-          <a:bodyPr wrap="square" lIns="27432" rIns="27432" tIns="13716" bIns="13716" anchor="ctr">
-            <a:spAutoFit/>
-          </a:bodyPr>
-          <a:lstStyle/>
-          <a:p>
-            <a:pPr algn="l"/>
-            <a:r>
-              <a:rPr sz="937" b="0" i="1">
-                <a:solidFill>
-                  <a:srgbClr val="9CA3AF"/>
-                </a:solidFill>
-                <a:latin typeface="Calibri"/>
-              </a:rPr>
-              <a:t>maxIter 挑戰</a:t>
-            </a:r>
-          </a:p>
-        </p:txBody>
-      </p:sp>
-      <p:sp>
-        <p:nvSpPr>
-          <p:cNvPr id="36" name="TextBox 35"/>
-          <p:cNvSpPr txBox="1"/>
-          <p:nvPr/>
-        </p:nvSpPr>
-        <p:spPr>
-          <a:xfrm>
-            <a:off x="6858000" y="4197096"/>
-            <a:ext cx="1062990" cy="445770"/>
-          </a:xfrm>
-          <a:prstGeom prst="rect">
-            <a:avLst/>
-          </a:prstGeom>
-          <a:noFill/>
-        </p:spPr>
-        <p:txBody>
-          <a:bodyPr wrap="square" lIns="27432" rIns="27432" tIns="13716" bIns="13716" anchor="ctr">
-            <a:spAutoFit/>
-          </a:bodyPr>
-          <a:lstStyle/>
-          <a:p>
-            <a:pPr algn="ctr"/>
-            <a:r>
-              <a:rPr sz="1050" b="1" i="0">
-                <a:solidFill>
-                  <a:srgbClr val="EF4444"/>
-                </a:solidFill>
-                <a:latin typeface="Calibri"/>
-              </a:rPr>
-              <a:t>★★★</a:t>
-            </a:r>
-          </a:p>
-        </p:txBody>
-      </p:sp>
-      <p:sp>
-        <p:nvSpPr>
-          <p:cNvPr id="37" name="TextBox 36"/>
-          <p:cNvSpPr txBox="1"/>
-          <p:nvPr/>
-        </p:nvSpPr>
-        <p:spPr>
-          <a:xfrm>
-            <a:off x="7920990" y="4197096"/>
-            <a:ext cx="857250" cy="445770"/>
-          </a:xfrm>
-          <a:prstGeom prst="rect">
-            <a:avLst/>
-          </a:prstGeom>
-          <a:noFill/>
-        </p:spPr>
-        <p:txBody>
-          <a:bodyPr wrap="square" lIns="27432" rIns="27432" tIns="13716" bIns="13716" anchor="ctr">
-            <a:spAutoFit/>
-          </a:bodyPr>
-          <a:lstStyle/>
-          <a:p>
-            <a:pPr algn="r"/>
-            <a:r>
-              <a:rPr sz="825" b="0" i="0">
-                <a:solidFill>
-                  <a:srgbClr val="9CA3AF"/>
-                </a:solidFill>
-                <a:latin typeface="Consolas"/>
-              </a:rPr>
-              <a:t>~90-120s</a:t>
-            </a:r>
-          </a:p>
-        </p:txBody>
-      </p:sp>
-      <p:sp>
-        <p:nvSpPr>
-          <p:cNvPr id="38" name="TextBox 37"/>
-          <p:cNvSpPr txBox="1"/>
-          <p:nvPr/>
-        </p:nvSpPr>
-        <p:spPr>
-          <a:xfrm>
-            <a:off x="7543800" y="4800600"/>
-            <a:ext cx="1371600" cy="274320"/>
-          </a:xfrm>
-          <a:prstGeom prst="rect">
-            <a:avLst/>
-          </a:prstGeom>
-          <a:noFill/>
-        </p:spPr>
-        <p:txBody>
-          <a:bodyPr wrap="square" lIns="27432" rIns="27432" tIns="13716" bIns="13716" anchor="t">
-            <a:spAutoFit/>
-          </a:bodyPr>
-          <a:lstStyle/>
-          <a:p>
-            <a:pPr algn="r"/>
-            <a:r>
-              <a:rPr sz="900" b="0" i="0">
-                <a:solidFill>
-                  <a:srgbClr val="CBD5E1"/>
-                </a:solidFill>
-                <a:latin typeface="Consolas"/>
-              </a:rPr>
-              <a:t>7 / 8</a:t>
+              <a:t>7 / 11</a:t>
             </a:r>
           </a:p>
         </p:txBody>
@@ -9613,7 +12074,7 @@
             <a:avLst/>
           </a:prstGeom>
           <a:solidFill>
-            <a:srgbClr val="7B5CF5"/>
+            <a:srgbClr val="0EA594"/>
           </a:solidFill>
           <a:ln>
             <a:noFill/>
@@ -9672,7 +12133,7 @@
                 </a:solidFill>
                 <a:latin typeface="Calibri"/>
               </a:rPr>
-              <a:t>05 · ①   S T R A T E G I E S · 回看</a:t>
+              <a:t>01 · ④   P A R A L L E L   T O O L   C A L L S</a:t>
             </a:r>
           </a:p>
         </p:txBody>
@@ -9701,13 +12162,13 @@
           <a:p>
             <a:pPr algn="l"/>
             <a:r>
-              <a:rPr sz="2100" b="1" i="0">
+              <a:rPr sz="3150" b="1" i="0">
                 <a:solidFill>
                   <a:srgbClr val="1F2937"/>
                 </a:solidFill>
                 <a:latin typeface="Arial Black"/>
               </a:rPr>
-              <a:t>回頭看三種策略 — Agentic Loop 站在哪</a:t>
+              <a:t>一回合可以同時開多支工具</a:t>
             </a:r>
           </a:p>
         </p:txBody>
@@ -9742,7 +12203,7 @@
                 </a:solidFill>
                 <a:latin typeface="Calibri"/>
               </a:rPr>
-              <a:t>Segment 1 介紹的三條路,Agentic Loop 是其中能力最完整的一條</a:t>
+              <a:t>parallel tool calls —— 用 Promise.all 並行,不是一個接一個</a:t>
             </a:r>
           </a:p>
         </p:txBody>
@@ -9755,8 +12216,8 @@
         </p:nvSpPr>
         <p:spPr>
           <a:xfrm>
-            <a:off x="377190" y="1851660"/>
-            <a:ext cx="2708910" cy="2743200"/>
+            <a:off x="3086100" y="1783080"/>
+            <a:ext cx="2948939" cy="617220"/>
           </a:xfrm>
           <a:prstGeom prst="roundRect">
             <a:avLst>
@@ -9764,11 +12225,11 @@
             </a:avLst>
           </a:prstGeom>
           <a:solidFill>
-            <a:srgbClr val="DBEAFE"/>
+            <a:srgbClr val="EEE8FF"/>
           </a:solidFill>
           <a:ln w="19050">
             <a:solidFill>
-              <a:srgbClr val="3B82F6"/>
+              <a:srgbClr val="7B5CF5"/>
             </a:solidFill>
           </a:ln>
           <a:effectLst/>
@@ -9803,150 +12264,43 @@
         </p:nvSpPr>
         <p:spPr>
           <a:xfrm>
-            <a:off x="548640" y="1988819"/>
-            <a:ext cx="2366010" cy="377190"/>
-          </a:xfrm>
-          <a:prstGeom prst="rect">
-            <a:avLst/>
-          </a:prstGeom>
-          <a:noFill/>
-        </p:spPr>
-        <p:txBody>
-          <a:bodyPr wrap="square" lIns="27432" rIns="27432" tIns="13716" bIns="13716" anchor="t">
-            <a:spAutoFit/>
-          </a:bodyPr>
-          <a:lstStyle/>
-          <a:p>
-            <a:pPr algn="l"/>
-            <a:r>
-              <a:rPr sz="1650" b="1" i="0">
-                <a:solidFill>
-                  <a:srgbClr val="3B82F6"/>
-                </a:solidFill>
-                <a:latin typeface="Arial Black"/>
-              </a:rPr>
-              <a:t>RAG</a:t>
-            </a:r>
-          </a:p>
-        </p:txBody>
-      </p:sp>
-      <p:sp>
-        <p:nvSpPr>
-          <p:cNvPr id="9" name="TextBox 8"/>
-          <p:cNvSpPr txBox="1"/>
-          <p:nvPr/>
-        </p:nvSpPr>
-        <p:spPr>
-          <a:xfrm>
-            <a:off x="548640" y="2434589"/>
-            <a:ext cx="2366010" cy="274320"/>
-          </a:xfrm>
-          <a:prstGeom prst="rect">
-            <a:avLst/>
-          </a:prstGeom>
-          <a:noFill/>
-        </p:spPr>
-        <p:txBody>
-          <a:bodyPr wrap="square" lIns="27432" rIns="27432" tIns="13716" bIns="13716" anchor="t">
-            <a:spAutoFit/>
-          </a:bodyPr>
-          <a:lstStyle/>
-          <a:p>
-            <a:pPr algn="l"/>
-            <a:r>
-              <a:rPr sz="975" b="0" i="1">
-                <a:solidFill>
-                  <a:srgbClr val="9CA3AF"/>
+            <a:off x="3086100" y="1783080"/>
+            <a:ext cx="2948939" cy="617220"/>
+          </a:xfrm>
+          <a:prstGeom prst="rect">
+            <a:avLst/>
+          </a:prstGeom>
+          <a:noFill/>
+        </p:spPr>
+        <p:txBody>
+          <a:bodyPr wrap="square" lIns="27432" rIns="27432" tIns="13716" bIns="13716" anchor="ctr">
+            <a:spAutoFit/>
+          </a:bodyPr>
+          <a:lstStyle/>
+          <a:p>
+            <a:pPr algn="ctr"/>
+            <a:r>
+              <a:rPr sz="1125" b="1" i="0">
+                <a:solidFill>
+                  <a:srgbClr val="7B5CF5"/>
                 </a:solidFill>
                 <a:latin typeface="Calibri"/>
               </a:rPr>
-              <a:t>檢索增強生成</a:t>
-            </a:r>
-          </a:p>
-        </p:txBody>
-      </p:sp>
-      <p:sp>
-        <p:nvSpPr>
-          <p:cNvPr id="10" name="TextBox 9"/>
-          <p:cNvSpPr txBox="1"/>
-          <p:nvPr/>
-        </p:nvSpPr>
-        <p:spPr>
-          <a:xfrm>
-            <a:off x="548640" y="2846070"/>
-            <a:ext cx="2366010" cy="1028700"/>
-          </a:xfrm>
-          <a:prstGeom prst="rect">
-            <a:avLst/>
-          </a:prstGeom>
-          <a:noFill/>
-        </p:spPr>
-        <p:txBody>
-          <a:bodyPr wrap="square" lIns="27432" rIns="27432" tIns="13716" bIns="13716" anchor="t">
-            <a:spAutoFit/>
-          </a:bodyPr>
-          <a:lstStyle/>
-          <a:p>
-            <a:pPr algn="l"/>
-            <a:r>
-              <a:rPr sz="975" b="0" i="0">
-                <a:solidFill>
-                  <a:srgbClr val="1F2937"/>
-                </a:solidFill>
-                <a:latin typeface="Calibri"/>
-              </a:rPr>
-              <a:t>✓ 解知識截止
-✓ 讀私有文件</a:t>
-            </a:r>
-          </a:p>
-        </p:txBody>
-      </p:sp>
-      <p:sp>
-        <p:nvSpPr>
-          <p:cNvPr id="11" name="TextBox 10"/>
-          <p:cNvSpPr txBox="1"/>
-          <p:nvPr/>
-        </p:nvSpPr>
-        <p:spPr>
-          <a:xfrm>
-            <a:off x="548640" y="3943350"/>
-            <a:ext cx="2366010" cy="685800"/>
-          </a:xfrm>
-          <a:prstGeom prst="rect">
-            <a:avLst/>
-          </a:prstGeom>
-          <a:noFill/>
-        </p:spPr>
-        <p:txBody>
-          <a:bodyPr wrap="square" lIns="27432" rIns="27432" tIns="13716" bIns="13716" anchor="t">
-            <a:spAutoFit/>
-          </a:bodyPr>
-          <a:lstStyle/>
-          <a:p>
-            <a:pPr algn="l"/>
-            <a:r>
-              <a:rPr sz="975" b="0" i="0">
-                <a:solidFill>
-                  <a:srgbClr val="B91C1C"/>
-                </a:solidFill>
-                <a:latin typeface="Calibri"/>
-              </a:rPr>
-              <a:t>✗ 不能執行動作
-✗ 單輪</a:t>
-            </a:r>
-          </a:p>
-        </p:txBody>
-      </p:sp>
-      <p:sp>
-        <p:nvSpPr>
-          <p:cNvPr id="12" name="Rounded Rectangle 11"/>
+              <a:t>assistant:一次吐 5 個 tool_use</a:t>
+            </a:r>
+          </a:p>
+        </p:txBody>
+      </p:sp>
+      <p:sp>
+        <p:nvSpPr>
+          <p:cNvPr id="9" name="Rounded Rectangle 8"/>
           <p:cNvSpPr/>
           <p:nvPr/>
         </p:nvSpPr>
         <p:spPr>
           <a:xfrm>
-            <a:off x="3223260" y="1851660"/>
-            <a:ext cx="2708910" cy="2743200"/>
+            <a:off x="445770" y="2948939"/>
+            <a:ext cx="1508760" cy="582930"/>
           </a:xfrm>
           <a:prstGeom prst="roundRect">
             <a:avLst>
@@ -9987,14 +12341,49 @@
       </p:sp>
       <p:sp>
         <p:nvSpPr>
-          <p:cNvPr id="13" name="TextBox 12"/>
-          <p:cNvSpPr txBox="1"/>
-          <p:nvPr/>
-        </p:nvSpPr>
-        <p:spPr>
-          <a:xfrm>
-            <a:off x="3394710" y="1988819"/>
-            <a:ext cx="2366010" cy="377190"/>
+          <p:cNvPr id="10" name="TextBox 9"/>
+          <p:cNvSpPr txBox="1"/>
+          <p:nvPr/>
+        </p:nvSpPr>
+        <p:spPr>
+          <a:xfrm>
+            <a:off x="445770" y="2948939"/>
+            <a:ext cx="1508760" cy="582930"/>
+          </a:xfrm>
+          <a:prstGeom prst="rect">
+            <a:avLst/>
+          </a:prstGeom>
+          <a:noFill/>
+        </p:spPr>
+        <p:txBody>
+          <a:bodyPr wrap="square" lIns="27432" rIns="27432" tIns="13716" bIns="13716" anchor="ctr">
+            <a:spAutoFit/>
+          </a:bodyPr>
+          <a:lstStyle/>
+          <a:p>
+            <a:pPr algn="ctr"/>
+            <a:r>
+              <a:rPr sz="1050" b="1" i="0">
+                <a:solidFill>
+                  <a:srgbClr val="FB7048"/>
+                </a:solidFill>
+                <a:latin typeface="Consolas"/>
+              </a:rPr>
+              <a:t>arxiv(張)</a:t>
+            </a:r>
+          </a:p>
+        </p:txBody>
+      </p:sp>
+      <p:sp>
+        <p:nvSpPr>
+          <p:cNvPr id="11" name="TextBox 10"/>
+          <p:cNvSpPr txBox="1"/>
+          <p:nvPr/>
+        </p:nvSpPr>
+        <p:spPr>
+          <a:xfrm>
+            <a:off x="445770" y="2434589"/>
+            <a:ext cx="1508760" cy="411479"/>
           </a:xfrm>
           <a:prstGeom prst="rect">
             <a:avLst/>
@@ -10007,326 +12396,29 @@
           </a:bodyPr>
           <a:lstStyle/>
           <a:p>
-            <a:pPr algn="l"/>
-            <a:r>
-              <a:rPr sz="1650" b="1" i="0">
+            <a:pPr algn="ctr"/>
+            <a:r>
+              <a:rPr sz="1500" b="1" i="0">
                 <a:solidFill>
                   <a:srgbClr val="FB7048"/>
                 </a:solidFill>
                 <a:latin typeface="Arial Black"/>
               </a:rPr>
-              <a:t>Tool Use</a:t>
-            </a:r>
-          </a:p>
-        </p:txBody>
-      </p:sp>
-      <p:sp>
-        <p:nvSpPr>
-          <p:cNvPr id="14" name="TextBox 13"/>
-          <p:cNvSpPr txBox="1"/>
-          <p:nvPr/>
-        </p:nvSpPr>
-        <p:spPr>
-          <a:xfrm>
-            <a:off x="3394710" y="2434589"/>
-            <a:ext cx="2366010" cy="274320"/>
-          </a:xfrm>
-          <a:prstGeom prst="rect">
-            <a:avLst/>
-          </a:prstGeom>
-          <a:noFill/>
-        </p:spPr>
-        <p:txBody>
-          <a:bodyPr wrap="square" lIns="27432" rIns="27432" tIns="13716" bIns="13716" anchor="t">
-            <a:spAutoFit/>
-          </a:bodyPr>
-          <a:lstStyle/>
-          <a:p>
-            <a:pPr algn="l"/>
-            <a:r>
-              <a:rPr sz="975" b="0" i="1">
-                <a:solidFill>
-                  <a:srgbClr val="9CA3AF"/>
-                </a:solidFill>
-                <a:latin typeface="Calibri"/>
-              </a:rPr>
-              <a:t>工具呼叫</a:t>
-            </a:r>
-          </a:p>
-        </p:txBody>
-      </p:sp>
-      <p:sp>
-        <p:nvSpPr>
-          <p:cNvPr id="15" name="TextBox 14"/>
-          <p:cNvSpPr txBox="1"/>
-          <p:nvPr/>
-        </p:nvSpPr>
-        <p:spPr>
-          <a:xfrm>
-            <a:off x="3394710" y="2846070"/>
-            <a:ext cx="2366010" cy="1028700"/>
-          </a:xfrm>
-          <a:prstGeom prst="rect">
-            <a:avLst/>
-          </a:prstGeom>
-          <a:noFill/>
-        </p:spPr>
-        <p:txBody>
-          <a:bodyPr wrap="square" lIns="27432" rIns="27432" tIns="13716" bIns="13716" anchor="t">
-            <a:spAutoFit/>
-          </a:bodyPr>
-          <a:lstStyle/>
-          <a:p>
-            <a:pPr algn="l"/>
-            <a:r>
-              <a:rPr sz="975" b="0" i="0">
-                <a:solidFill>
-                  <a:srgbClr val="1F2937"/>
-                </a:solidFill>
-                <a:latin typeface="Calibri"/>
-              </a:rPr>
-              <a:t>✓ 能執行動作
-✓ 接 API</a:t>
-            </a:r>
-          </a:p>
-        </p:txBody>
-      </p:sp>
-      <p:sp>
-        <p:nvSpPr>
-          <p:cNvPr id="16" name="TextBox 15"/>
-          <p:cNvSpPr txBox="1"/>
-          <p:nvPr/>
-        </p:nvSpPr>
-        <p:spPr>
-          <a:xfrm>
-            <a:off x="3394710" y="3943350"/>
-            <a:ext cx="2366010" cy="685800"/>
-          </a:xfrm>
-          <a:prstGeom prst="rect">
-            <a:avLst/>
-          </a:prstGeom>
-          <a:noFill/>
-        </p:spPr>
-        <p:txBody>
-          <a:bodyPr wrap="square" lIns="27432" rIns="27432" tIns="13716" bIns="13716" anchor="t">
-            <a:spAutoFit/>
-          </a:bodyPr>
-          <a:lstStyle/>
-          <a:p>
-            <a:pPr algn="l"/>
-            <a:r>
-              <a:rPr sz="975" b="0" i="0">
-                <a:solidFill>
-                  <a:srgbClr val="B91C1C"/>
-                </a:solidFill>
-                <a:latin typeface="Calibri"/>
-              </a:rPr>
-              <a:t>✗ 典型 1-2 輪
-✗ 不主動拆解</a:t>
-            </a:r>
-          </a:p>
-        </p:txBody>
-      </p:sp>
-      <p:sp>
-        <p:nvSpPr>
-          <p:cNvPr id="17" name="Rounded Rectangle 16"/>
+              <a:t>↓</a:t>
+            </a:r>
+          </a:p>
+        </p:txBody>
+      </p:sp>
+      <p:sp>
+        <p:nvSpPr>
+          <p:cNvPr id="12" name="Rounded Rectangle 11"/>
           <p:cNvSpPr/>
           <p:nvPr/>
         </p:nvSpPr>
         <p:spPr>
           <a:xfrm>
-            <a:off x="6069330" y="1851660"/>
-            <a:ext cx="2708910" cy="2743200"/>
-          </a:xfrm>
-          <a:prstGeom prst="roundRect">
-            <a:avLst>
-              <a:gd name="adj" fmla="val 10000"/>
-            </a:avLst>
-          </a:prstGeom>
-          <a:solidFill>
-            <a:srgbClr val="EEE8FF"/>
-          </a:solidFill>
-          <a:ln w="19050">
-            <a:solidFill>
-              <a:srgbClr val="7B5CF5"/>
-            </a:solidFill>
-          </a:ln>
-          <a:effectLst/>
-        </p:spPr>
-        <p:style>
-          <a:lnRef idx="1">
-            <a:schemeClr val="accent1"/>
-          </a:lnRef>
-          <a:fillRef idx="3">
-            <a:schemeClr val="accent1"/>
-          </a:fillRef>
-          <a:effectRef idx="2">
-            <a:schemeClr val="accent1"/>
-          </a:effectRef>
-          <a:fontRef idx="minor">
-            <a:schemeClr val="lt1"/>
-          </a:fontRef>
-        </p:style>
-        <p:txBody>
-          <a:bodyPr rtlCol="0" anchor="ctr"/>
-          <a:lstStyle/>
-          <a:p>
-            <a:pPr algn="ctr"/>
-          </a:p>
-        </p:txBody>
-      </p:sp>
-      <p:sp>
-        <p:nvSpPr>
-          <p:cNvPr id="18" name="TextBox 17"/>
-          <p:cNvSpPr txBox="1"/>
-          <p:nvPr/>
-        </p:nvSpPr>
-        <p:spPr>
-          <a:xfrm>
-            <a:off x="6240780" y="1988819"/>
-            <a:ext cx="2366010" cy="377190"/>
-          </a:xfrm>
-          <a:prstGeom prst="rect">
-            <a:avLst/>
-          </a:prstGeom>
-          <a:noFill/>
-        </p:spPr>
-        <p:txBody>
-          <a:bodyPr wrap="square" lIns="27432" rIns="27432" tIns="13716" bIns="13716" anchor="t">
-            <a:spAutoFit/>
-          </a:bodyPr>
-          <a:lstStyle/>
-          <a:p>
-            <a:pPr algn="l"/>
-            <a:r>
-              <a:rPr sz="1650" b="1" i="0">
-                <a:solidFill>
-                  <a:srgbClr val="7B5CF5"/>
-                </a:solidFill>
-                <a:latin typeface="Arial Black"/>
-              </a:rPr>
-              <a:t>Agentic Loop</a:t>
-            </a:r>
-          </a:p>
-        </p:txBody>
-      </p:sp>
-      <p:sp>
-        <p:nvSpPr>
-          <p:cNvPr id="19" name="TextBox 18"/>
-          <p:cNvSpPr txBox="1"/>
-          <p:nvPr/>
-        </p:nvSpPr>
-        <p:spPr>
-          <a:xfrm>
-            <a:off x="6240780" y="2434589"/>
-            <a:ext cx="2366010" cy="274320"/>
-          </a:xfrm>
-          <a:prstGeom prst="rect">
-            <a:avLst/>
-          </a:prstGeom>
-          <a:noFill/>
-        </p:spPr>
-        <p:txBody>
-          <a:bodyPr wrap="square" lIns="27432" rIns="27432" tIns="13716" bIns="13716" anchor="t">
-            <a:spAutoFit/>
-          </a:bodyPr>
-          <a:lstStyle/>
-          <a:p>
-            <a:pPr algn="l"/>
-            <a:r>
-              <a:rPr sz="975" b="0" i="1">
-                <a:solidFill>
-                  <a:srgbClr val="9CA3AF"/>
-                </a:solidFill>
-                <a:latin typeface="Calibri"/>
-              </a:rPr>
-              <a:t>多輪迭代</a:t>
-            </a:r>
-          </a:p>
-        </p:txBody>
-      </p:sp>
-      <p:sp>
-        <p:nvSpPr>
-          <p:cNvPr id="20" name="TextBox 19"/>
-          <p:cNvSpPr txBox="1"/>
-          <p:nvPr/>
-        </p:nvSpPr>
-        <p:spPr>
-          <a:xfrm>
-            <a:off x="6240780" y="2846070"/>
-            <a:ext cx="2366010" cy="1028700"/>
-          </a:xfrm>
-          <a:prstGeom prst="rect">
-            <a:avLst/>
-          </a:prstGeom>
-          <a:noFill/>
-        </p:spPr>
-        <p:txBody>
-          <a:bodyPr wrap="square" lIns="27432" rIns="27432" tIns="13716" bIns="13716" anchor="t">
-            <a:spAutoFit/>
-          </a:bodyPr>
-          <a:lstStyle/>
-          <a:p>
-            <a:pPr algn="l"/>
-            <a:r>
-              <a:rPr sz="975" b="0" i="0">
-                <a:solidFill>
-                  <a:srgbClr val="1F2937"/>
-                </a:solidFill>
-                <a:latin typeface="Calibri"/>
-              </a:rPr>
-              <a:t>✓ 自己拆解問題
-✓ 多輪 + 結果驅動
-✓ Tool Use 完整版</a:t>
-            </a:r>
-          </a:p>
-        </p:txBody>
-      </p:sp>
-      <p:sp>
-        <p:nvSpPr>
-          <p:cNvPr id="21" name="TextBox 20"/>
-          <p:cNvSpPr txBox="1"/>
-          <p:nvPr/>
-        </p:nvSpPr>
-        <p:spPr>
-          <a:xfrm>
-            <a:off x="6240780" y="3943350"/>
-            <a:ext cx="2366010" cy="685800"/>
-          </a:xfrm>
-          <a:prstGeom prst="rect">
-            <a:avLst/>
-          </a:prstGeom>
-          <a:noFill/>
-        </p:spPr>
-        <p:txBody>
-          <a:bodyPr wrap="square" lIns="27432" rIns="27432" tIns="13716" bIns="13716" anchor="t">
-            <a:spAutoFit/>
-          </a:bodyPr>
-          <a:lstStyle/>
-          <a:p>
-            <a:pPr algn="l"/>
-            <a:r>
-              <a:rPr sz="975" b="0" i="0">
-                <a:solidFill>
-                  <a:srgbClr val="FB7048"/>
-                </a:solidFill>
-                <a:latin typeface="Calibri"/>
-              </a:rPr>
-              <a:t>△  成本最高、難 debug</a:t>
-            </a:r>
-          </a:p>
-        </p:txBody>
-      </p:sp>
-      <p:sp>
-        <p:nvSpPr>
-          <p:cNvPr id="22" name="Rounded Rectangle 21"/>
-          <p:cNvSpPr/>
-          <p:nvPr/>
-        </p:nvSpPr>
-        <p:spPr>
-          <a:xfrm>
-            <a:off x="582930" y="4766310"/>
-            <a:ext cx="8229600" cy="377190"/>
+            <a:off x="2077974" y="2948939"/>
+            <a:ext cx="1508760" cy="582930"/>
           </a:xfrm>
           <a:prstGeom prst="roundRect">
             <a:avLst>
@@ -10367,13 +12459,520 @@
       </p:sp>
       <p:sp>
         <p:nvSpPr>
+          <p:cNvPr id="13" name="TextBox 12"/>
+          <p:cNvSpPr txBox="1"/>
+          <p:nvPr/>
+        </p:nvSpPr>
+        <p:spPr>
+          <a:xfrm>
+            <a:off x="2077974" y="2948939"/>
+            <a:ext cx="1508760" cy="582930"/>
+          </a:xfrm>
+          <a:prstGeom prst="rect">
+            <a:avLst/>
+          </a:prstGeom>
+          <a:noFill/>
+        </p:spPr>
+        <p:txBody>
+          <a:bodyPr wrap="square" lIns="27432" rIns="27432" tIns="13716" bIns="13716" anchor="ctr">
+            <a:spAutoFit/>
+          </a:bodyPr>
+          <a:lstStyle/>
+          <a:p>
+            <a:pPr algn="ctr"/>
+            <a:r>
+              <a:rPr sz="1050" b="1" i="0">
+                <a:solidFill>
+                  <a:srgbClr val="FB7048"/>
+                </a:solidFill>
+                <a:latin typeface="Consolas"/>
+              </a:rPr>
+              <a:t>arxiv(李)</a:t>
+            </a:r>
+          </a:p>
+        </p:txBody>
+      </p:sp>
+      <p:sp>
+        <p:nvSpPr>
+          <p:cNvPr id="14" name="TextBox 13"/>
+          <p:cNvSpPr txBox="1"/>
+          <p:nvPr/>
+        </p:nvSpPr>
+        <p:spPr>
+          <a:xfrm>
+            <a:off x="2077974" y="2434589"/>
+            <a:ext cx="1508760" cy="411479"/>
+          </a:xfrm>
+          <a:prstGeom prst="rect">
+            <a:avLst/>
+          </a:prstGeom>
+          <a:noFill/>
+        </p:spPr>
+        <p:txBody>
+          <a:bodyPr wrap="square" lIns="27432" rIns="27432" tIns="13716" bIns="13716" anchor="t">
+            <a:spAutoFit/>
+          </a:bodyPr>
+          <a:lstStyle/>
+          <a:p>
+            <a:pPr algn="ctr"/>
+            <a:r>
+              <a:rPr sz="1500" b="1" i="0">
+                <a:solidFill>
+                  <a:srgbClr val="FB7048"/>
+                </a:solidFill>
+                <a:latin typeface="Arial Black"/>
+              </a:rPr>
+              <a:t>↓</a:t>
+            </a:r>
+          </a:p>
+        </p:txBody>
+      </p:sp>
+      <p:sp>
+        <p:nvSpPr>
+          <p:cNvPr id="15" name="Rounded Rectangle 14"/>
+          <p:cNvSpPr/>
+          <p:nvPr/>
+        </p:nvSpPr>
+        <p:spPr>
+          <a:xfrm>
+            <a:off x="3710178" y="2948939"/>
+            <a:ext cx="1508760" cy="582930"/>
+          </a:xfrm>
+          <a:prstGeom prst="roundRect">
+            <a:avLst>
+              <a:gd name="adj" fmla="val 10000"/>
+            </a:avLst>
+          </a:prstGeom>
+          <a:solidFill>
+            <a:srgbClr val="FFE7DB"/>
+          </a:solidFill>
+          <a:ln w="19050">
+            <a:solidFill>
+              <a:srgbClr val="FB7048"/>
+            </a:solidFill>
+          </a:ln>
+          <a:effectLst/>
+        </p:spPr>
+        <p:style>
+          <a:lnRef idx="1">
+            <a:schemeClr val="accent1"/>
+          </a:lnRef>
+          <a:fillRef idx="3">
+            <a:schemeClr val="accent1"/>
+          </a:fillRef>
+          <a:effectRef idx="2">
+            <a:schemeClr val="accent1"/>
+          </a:effectRef>
+          <a:fontRef idx="minor">
+            <a:schemeClr val="lt1"/>
+          </a:fontRef>
+        </p:style>
+        <p:txBody>
+          <a:bodyPr rtlCol="0" anchor="ctr"/>
+          <a:lstStyle/>
+          <a:p>
+            <a:pPr algn="ctr"/>
+          </a:p>
+        </p:txBody>
+      </p:sp>
+      <p:sp>
+        <p:nvSpPr>
+          <p:cNvPr id="16" name="TextBox 15"/>
+          <p:cNvSpPr txBox="1"/>
+          <p:nvPr/>
+        </p:nvSpPr>
+        <p:spPr>
+          <a:xfrm>
+            <a:off x="3710178" y="2948939"/>
+            <a:ext cx="1508760" cy="582930"/>
+          </a:xfrm>
+          <a:prstGeom prst="rect">
+            <a:avLst/>
+          </a:prstGeom>
+          <a:noFill/>
+        </p:spPr>
+        <p:txBody>
+          <a:bodyPr wrap="square" lIns="27432" rIns="27432" tIns="13716" bIns="13716" anchor="ctr">
+            <a:spAutoFit/>
+          </a:bodyPr>
+          <a:lstStyle/>
+          <a:p>
+            <a:pPr algn="ctr"/>
+            <a:r>
+              <a:rPr sz="1050" b="1" i="0">
+                <a:solidFill>
+                  <a:srgbClr val="FB7048"/>
+                </a:solidFill>
+                <a:latin typeface="Consolas"/>
+              </a:rPr>
+              <a:t>arxiv(范)</a:t>
+            </a:r>
+          </a:p>
+        </p:txBody>
+      </p:sp>
+      <p:sp>
+        <p:nvSpPr>
+          <p:cNvPr id="17" name="TextBox 16"/>
+          <p:cNvSpPr txBox="1"/>
+          <p:nvPr/>
+        </p:nvSpPr>
+        <p:spPr>
+          <a:xfrm>
+            <a:off x="3710178" y="2434589"/>
+            <a:ext cx="1508760" cy="411479"/>
+          </a:xfrm>
+          <a:prstGeom prst="rect">
+            <a:avLst/>
+          </a:prstGeom>
+          <a:noFill/>
+        </p:spPr>
+        <p:txBody>
+          <a:bodyPr wrap="square" lIns="27432" rIns="27432" tIns="13716" bIns="13716" anchor="t">
+            <a:spAutoFit/>
+          </a:bodyPr>
+          <a:lstStyle/>
+          <a:p>
+            <a:pPr algn="ctr"/>
+            <a:r>
+              <a:rPr sz="1500" b="1" i="0">
+                <a:solidFill>
+                  <a:srgbClr val="FB7048"/>
+                </a:solidFill>
+                <a:latin typeface="Arial Black"/>
+              </a:rPr>
+              <a:t>↓</a:t>
+            </a:r>
+          </a:p>
+        </p:txBody>
+      </p:sp>
+      <p:sp>
+        <p:nvSpPr>
+          <p:cNvPr id="18" name="Rounded Rectangle 17"/>
+          <p:cNvSpPr/>
+          <p:nvPr/>
+        </p:nvSpPr>
+        <p:spPr>
+          <a:xfrm>
+            <a:off x="5342382" y="2948939"/>
+            <a:ext cx="1508760" cy="582930"/>
+          </a:xfrm>
+          <a:prstGeom prst="roundRect">
+            <a:avLst>
+              <a:gd name="adj" fmla="val 10000"/>
+            </a:avLst>
+          </a:prstGeom>
+          <a:solidFill>
+            <a:srgbClr val="FFE7DB"/>
+          </a:solidFill>
+          <a:ln w="19050">
+            <a:solidFill>
+              <a:srgbClr val="FB7048"/>
+            </a:solidFill>
+          </a:ln>
+          <a:effectLst/>
+        </p:spPr>
+        <p:style>
+          <a:lnRef idx="1">
+            <a:schemeClr val="accent1"/>
+          </a:lnRef>
+          <a:fillRef idx="3">
+            <a:schemeClr val="accent1"/>
+          </a:fillRef>
+          <a:effectRef idx="2">
+            <a:schemeClr val="accent1"/>
+          </a:effectRef>
+          <a:fontRef idx="minor">
+            <a:schemeClr val="lt1"/>
+          </a:fontRef>
+        </p:style>
+        <p:txBody>
+          <a:bodyPr rtlCol="0" anchor="ctr"/>
+          <a:lstStyle/>
+          <a:p>
+            <a:pPr algn="ctr"/>
+          </a:p>
+        </p:txBody>
+      </p:sp>
+      <p:sp>
+        <p:nvSpPr>
+          <p:cNvPr id="19" name="TextBox 18"/>
+          <p:cNvSpPr txBox="1"/>
+          <p:nvPr/>
+        </p:nvSpPr>
+        <p:spPr>
+          <a:xfrm>
+            <a:off x="5342382" y="2948939"/>
+            <a:ext cx="1508760" cy="582930"/>
+          </a:xfrm>
+          <a:prstGeom prst="rect">
+            <a:avLst/>
+          </a:prstGeom>
+          <a:noFill/>
+        </p:spPr>
+        <p:txBody>
+          <a:bodyPr wrap="square" lIns="27432" rIns="27432" tIns="13716" bIns="13716" anchor="ctr">
+            <a:spAutoFit/>
+          </a:bodyPr>
+          <a:lstStyle/>
+          <a:p>
+            <a:pPr algn="ctr"/>
+            <a:r>
+              <a:rPr sz="1050" b="1" i="0">
+                <a:solidFill>
+                  <a:srgbClr val="FB7048"/>
+                </a:solidFill>
+                <a:latin typeface="Consolas"/>
+              </a:rPr>
+              <a:t>arxiv(林)</a:t>
+            </a:r>
+          </a:p>
+        </p:txBody>
+      </p:sp>
+      <p:sp>
+        <p:nvSpPr>
+          <p:cNvPr id="20" name="TextBox 19"/>
+          <p:cNvSpPr txBox="1"/>
+          <p:nvPr/>
+        </p:nvSpPr>
+        <p:spPr>
+          <a:xfrm>
+            <a:off x="5342382" y="2434589"/>
+            <a:ext cx="1508760" cy="411479"/>
+          </a:xfrm>
+          <a:prstGeom prst="rect">
+            <a:avLst/>
+          </a:prstGeom>
+          <a:noFill/>
+        </p:spPr>
+        <p:txBody>
+          <a:bodyPr wrap="square" lIns="27432" rIns="27432" tIns="13716" bIns="13716" anchor="t">
+            <a:spAutoFit/>
+          </a:bodyPr>
+          <a:lstStyle/>
+          <a:p>
+            <a:pPr algn="ctr"/>
+            <a:r>
+              <a:rPr sz="1500" b="1" i="0">
+                <a:solidFill>
+                  <a:srgbClr val="FB7048"/>
+                </a:solidFill>
+                <a:latin typeface="Arial Black"/>
+              </a:rPr>
+              <a:t>↓</a:t>
+            </a:r>
+          </a:p>
+        </p:txBody>
+      </p:sp>
+      <p:sp>
+        <p:nvSpPr>
+          <p:cNvPr id="21" name="Rounded Rectangle 20"/>
+          <p:cNvSpPr/>
+          <p:nvPr/>
+        </p:nvSpPr>
+        <p:spPr>
+          <a:xfrm>
+            <a:off x="6974586" y="2948939"/>
+            <a:ext cx="1508760" cy="582930"/>
+          </a:xfrm>
+          <a:prstGeom prst="roundRect">
+            <a:avLst>
+              <a:gd name="adj" fmla="val 10000"/>
+            </a:avLst>
+          </a:prstGeom>
+          <a:solidFill>
+            <a:srgbClr val="FFE7DB"/>
+          </a:solidFill>
+          <a:ln w="19050">
+            <a:solidFill>
+              <a:srgbClr val="FB7048"/>
+            </a:solidFill>
+          </a:ln>
+          <a:effectLst/>
+        </p:spPr>
+        <p:style>
+          <a:lnRef idx="1">
+            <a:schemeClr val="accent1"/>
+          </a:lnRef>
+          <a:fillRef idx="3">
+            <a:schemeClr val="accent1"/>
+          </a:fillRef>
+          <a:effectRef idx="2">
+            <a:schemeClr val="accent1"/>
+          </a:effectRef>
+          <a:fontRef idx="minor">
+            <a:schemeClr val="lt1"/>
+          </a:fontRef>
+        </p:style>
+        <p:txBody>
+          <a:bodyPr rtlCol="0" anchor="ctr"/>
+          <a:lstStyle/>
+          <a:p>
+            <a:pPr algn="ctr"/>
+          </a:p>
+        </p:txBody>
+      </p:sp>
+      <p:sp>
+        <p:nvSpPr>
+          <p:cNvPr id="22" name="TextBox 21"/>
+          <p:cNvSpPr txBox="1"/>
+          <p:nvPr/>
+        </p:nvSpPr>
+        <p:spPr>
+          <a:xfrm>
+            <a:off x="6974586" y="2948939"/>
+            <a:ext cx="1508760" cy="582930"/>
+          </a:xfrm>
+          <a:prstGeom prst="rect">
+            <a:avLst/>
+          </a:prstGeom>
+          <a:noFill/>
+        </p:spPr>
+        <p:txBody>
+          <a:bodyPr wrap="square" lIns="27432" rIns="27432" tIns="13716" bIns="13716" anchor="ctr">
+            <a:spAutoFit/>
+          </a:bodyPr>
+          <a:lstStyle/>
+          <a:p>
+            <a:pPr algn="ctr"/>
+            <a:r>
+              <a:rPr sz="1050" b="1" i="0">
+                <a:solidFill>
+                  <a:srgbClr val="FB7048"/>
+                </a:solidFill>
+                <a:latin typeface="Consolas"/>
+              </a:rPr>
+              <a:t>arxiv(王)</a:t>
+            </a:r>
+          </a:p>
+        </p:txBody>
+      </p:sp>
+      <p:sp>
+        <p:nvSpPr>
           <p:cNvPr id="23" name="TextBox 22"/>
           <p:cNvSpPr txBox="1"/>
           <p:nvPr/>
         </p:nvSpPr>
         <p:spPr>
           <a:xfrm>
-            <a:off x="788669" y="4766310"/>
+            <a:off x="6974586" y="2434589"/>
+            <a:ext cx="1508760" cy="411479"/>
+          </a:xfrm>
+          <a:prstGeom prst="rect">
+            <a:avLst/>
+          </a:prstGeom>
+          <a:noFill/>
+        </p:spPr>
+        <p:txBody>
+          <a:bodyPr wrap="square" lIns="27432" rIns="27432" tIns="13716" bIns="13716" anchor="t">
+            <a:spAutoFit/>
+          </a:bodyPr>
+          <a:lstStyle/>
+          <a:p>
+            <a:pPr algn="ctr"/>
+            <a:r>
+              <a:rPr sz="1500" b="1" i="0">
+                <a:solidFill>
+                  <a:srgbClr val="FB7048"/>
+                </a:solidFill>
+                <a:latin typeface="Arial Black"/>
+              </a:rPr>
+              <a:t>↓</a:t>
+            </a:r>
+          </a:p>
+        </p:txBody>
+      </p:sp>
+      <p:sp>
+        <p:nvSpPr>
+          <p:cNvPr id="24" name="TextBox 23"/>
+          <p:cNvSpPr txBox="1"/>
+          <p:nvPr/>
+        </p:nvSpPr>
+        <p:spPr>
+          <a:xfrm>
+            <a:off x="582930" y="3669029"/>
+            <a:ext cx="8229600" cy="342900"/>
+          </a:xfrm>
+          <a:prstGeom prst="rect">
+            <a:avLst/>
+          </a:prstGeom>
+          <a:noFill/>
+        </p:spPr>
+        <p:txBody>
+          <a:bodyPr wrap="square" lIns="27432" rIns="27432" tIns="13716" bIns="13716" anchor="t">
+            <a:spAutoFit/>
+          </a:bodyPr>
+          <a:lstStyle/>
+          <a:p>
+            <a:pPr algn="ctr"/>
+            <a:r>
+              <a:rPr sz="1200" b="1" i="0">
+                <a:solidFill>
+                  <a:srgbClr val="0F766E"/>
+                </a:solidFill>
+                <a:latin typeface="Calibri"/>
+              </a:rPr>
+              <a:t>5 個查詢 並行執行(Promise.all)</a:t>
+            </a:r>
+          </a:p>
+        </p:txBody>
+      </p:sp>
+      <p:sp>
+        <p:nvSpPr>
+          <p:cNvPr id="25" name="Rounded Rectangle 24"/>
+          <p:cNvSpPr/>
+          <p:nvPr/>
+        </p:nvSpPr>
+        <p:spPr>
+          <a:xfrm>
+            <a:off x="582930" y="4389120"/>
+            <a:ext cx="8229600" cy="377190"/>
+          </a:xfrm>
+          <a:prstGeom prst="roundRect">
+            <a:avLst>
+              <a:gd name="adj" fmla="val 10000"/>
+            </a:avLst>
+          </a:prstGeom>
+          <a:solidFill>
+            <a:srgbClr val="D4F7F0"/>
+          </a:solidFill>
+          <a:ln w="19050">
+            <a:solidFill>
+              <a:srgbClr val="0EA594"/>
+            </a:solidFill>
+          </a:ln>
+          <a:effectLst/>
+        </p:spPr>
+        <p:style>
+          <a:lnRef idx="1">
+            <a:schemeClr val="accent1"/>
+          </a:lnRef>
+          <a:fillRef idx="3">
+            <a:schemeClr val="accent1"/>
+          </a:fillRef>
+          <a:effectRef idx="2">
+            <a:schemeClr val="accent1"/>
+          </a:effectRef>
+          <a:fontRef idx="minor">
+            <a:schemeClr val="lt1"/>
+          </a:fontRef>
+        </p:style>
+        <p:txBody>
+          <a:bodyPr rtlCol="0" anchor="ctr"/>
+          <a:lstStyle/>
+          <a:p>
+            <a:pPr algn="ctr"/>
+          </a:p>
+        </p:txBody>
+      </p:sp>
+      <p:sp>
+        <p:nvSpPr>
+          <p:cNvPr id="26" name="TextBox 25"/>
+          <p:cNvSpPr txBox="1"/>
+          <p:nvPr/>
+        </p:nvSpPr>
+        <p:spPr>
+          <a:xfrm>
+            <a:off x="788669" y="4389120"/>
             <a:ext cx="7818120" cy="377190"/>
           </a:xfrm>
           <a:prstGeom prst="rect">
@@ -10391,18 +12990,18 @@
             <a:r>
               <a:rPr sz="1050" b="1" i="0">
                 <a:solidFill>
-                  <a:srgbClr val="FB7048"/>
+                  <a:srgbClr val="0EA594"/>
                 </a:solidFill>
                 <a:latin typeface="Calibri"/>
               </a:rPr>
-              <a:t>▶  從『單輪答話』到『多輪自主』 —— Segment 4 你會親手跑一個 mini-project</a:t>
-            </a:r>
-          </a:p>
-        </p:txBody>
-      </p:sp>
-      <p:sp>
-        <p:nvSpPr>
-          <p:cNvPr id="24" name="TextBox 23"/>
+              <a:t>▶  並行 → 1 秒搞定 5 個查詢,不用等 5 倍時間;5 個 tool_result 一起回給 LLM</a:t>
+            </a:r>
+          </a:p>
+        </p:txBody>
+      </p:sp>
+      <p:sp>
+        <p:nvSpPr>
+          <p:cNvPr id="27" name="TextBox 26"/>
           <p:cNvSpPr txBox="1"/>
           <p:nvPr/>
         </p:nvSpPr>
@@ -10430,7 +13029,624 @@
                 </a:solidFill>
                 <a:latin typeface="Calibri"/>
               </a:rPr>
-              <a:t>8 / 8</a:t>
+              <a:t>8 / 11</a:t>
+            </a:r>
+          </a:p>
+        </p:txBody>
+      </p:sp>
+    </p:spTree>
+  </p:cSld>
+  <p:clrMapOvr>
+    <a:masterClrMapping/>
+  </p:clrMapOvr>
+</p:sld>
+</file>
+
+<file path=ppt/slides/slide9.xml><?xml version="1.0" encoding="utf-8"?>
+<p:sld xmlns:a="http://schemas.openxmlformats.org/drawingml/2006/main" xmlns:p="http://schemas.openxmlformats.org/presentationml/2006/main" xmlns:r="http://schemas.openxmlformats.org/officeDocument/2006/relationships">
+  <p:cSld>
+    <p:spTree>
+      <p:nvGrpSpPr>
+        <p:cNvPr id="1" name=""/>
+        <p:cNvGrpSpPr/>
+        <p:nvPr/>
+      </p:nvGrpSpPr>
+      <p:grpSpPr/>
+      <p:sp>
+        <p:nvSpPr>
+          <p:cNvPr id="2" name="Rectangle 1"/>
+          <p:cNvSpPr/>
+          <p:nvPr/>
+        </p:nvSpPr>
+        <p:spPr>
+          <a:xfrm>
+            <a:off x="0" y="0"/>
+            <a:ext cx="9144000" cy="5143500"/>
+          </a:xfrm>
+          <a:prstGeom prst="rect">
+            <a:avLst/>
+          </a:prstGeom>
+          <a:solidFill>
+            <a:srgbClr val="FFFFFF"/>
+          </a:solidFill>
+          <a:ln>
+            <a:noFill/>
+          </a:ln>
+        </p:spPr>
+        <p:style>
+          <a:lnRef idx="1">
+            <a:schemeClr val="accent1"/>
+          </a:lnRef>
+          <a:fillRef idx="3">
+            <a:schemeClr val="accent1"/>
+          </a:fillRef>
+          <a:effectRef idx="2">
+            <a:schemeClr val="accent1"/>
+          </a:effectRef>
+          <a:fontRef idx="minor">
+            <a:schemeClr val="lt1"/>
+          </a:fontRef>
+        </p:style>
+        <p:txBody>
+          <a:bodyPr rtlCol="0" anchor="ctr"/>
+          <a:lstStyle/>
+          <a:p>
+            <a:pPr algn="ctr"/>
+          </a:p>
+        </p:txBody>
+      </p:sp>
+      <p:sp>
+        <p:nvSpPr>
+          <p:cNvPr id="3" name="Oval 2"/>
+          <p:cNvSpPr/>
+          <p:nvPr/>
+        </p:nvSpPr>
+        <p:spPr>
+          <a:xfrm>
+            <a:off x="445769" y="240030"/>
+            <a:ext cx="274320" cy="274320"/>
+          </a:xfrm>
+          <a:prstGeom prst="ellipse">
+            <a:avLst/>
+          </a:prstGeom>
+          <a:solidFill>
+            <a:srgbClr val="0EA594"/>
+          </a:solidFill>
+          <a:ln>
+            <a:noFill/>
+          </a:ln>
+          <a:effectLst/>
+        </p:spPr>
+        <p:style>
+          <a:lnRef idx="1">
+            <a:schemeClr val="accent1"/>
+          </a:lnRef>
+          <a:fillRef idx="3">
+            <a:schemeClr val="accent1"/>
+          </a:fillRef>
+          <a:effectRef idx="2">
+            <a:schemeClr val="accent1"/>
+          </a:effectRef>
+          <a:fontRef idx="minor">
+            <a:schemeClr val="lt1"/>
+          </a:fontRef>
+        </p:style>
+        <p:txBody>
+          <a:bodyPr rtlCol="0" anchor="ctr"/>
+          <a:lstStyle/>
+          <a:p>
+            <a:pPr algn="ctr"/>
+          </a:p>
+        </p:txBody>
+      </p:sp>
+      <p:sp>
+        <p:nvSpPr>
+          <p:cNvPr id="4" name="TextBox 3"/>
+          <p:cNvSpPr txBox="1"/>
+          <p:nvPr/>
+        </p:nvSpPr>
+        <p:spPr>
+          <a:xfrm>
+            <a:off x="822959" y="205739"/>
+            <a:ext cx="8229600" cy="377190"/>
+          </a:xfrm>
+          <a:prstGeom prst="rect">
+            <a:avLst/>
+          </a:prstGeom>
+          <a:noFill/>
+        </p:spPr>
+        <p:txBody>
+          <a:bodyPr wrap="square" lIns="27432" rIns="27432" tIns="13716" bIns="13716" anchor="ctr">
+            <a:spAutoFit/>
+          </a:bodyPr>
+          <a:lstStyle/>
+          <a:p>
+            <a:pPr algn="l"/>
+            <a:r>
+              <a:rPr sz="1125" b="1" i="0">
+                <a:solidFill>
+                  <a:srgbClr val="9CA3AF"/>
+                </a:solidFill>
+                <a:latin typeface="Calibri"/>
+              </a:rPr>
+              <a:t>03 · ①   M A X _ I T E R A T I O N S · 強制回覆</a:t>
+            </a:r>
+          </a:p>
+        </p:txBody>
+      </p:sp>
+      <p:sp>
+        <p:nvSpPr>
+          <p:cNvPr id="5" name="TextBox 4"/>
+          <p:cNvSpPr txBox="1"/>
+          <p:nvPr/>
+        </p:nvSpPr>
+        <p:spPr>
+          <a:xfrm>
+            <a:off x="582930" y="651509"/>
+            <a:ext cx="8229600" cy="651509"/>
+          </a:xfrm>
+          <a:prstGeom prst="rect">
+            <a:avLst/>
+          </a:prstGeom>
+          <a:noFill/>
+        </p:spPr>
+        <p:txBody>
+          <a:bodyPr wrap="square" lIns="27432" rIns="27432" tIns="13716" bIns="13716" anchor="t">
+            <a:spAutoFit/>
+          </a:bodyPr>
+          <a:lstStyle/>
+          <a:p>
+            <a:pPr algn="l"/>
+            <a:r>
+              <a:rPr sz="3150" b="1" i="0">
+                <a:solidFill>
+                  <a:srgbClr val="1F2937"/>
+                </a:solidFill>
+                <a:latin typeface="Arial Black"/>
+              </a:rPr>
+              <a:t>maxIterations 與強制回覆機制</a:t>
+            </a:r>
+          </a:p>
+        </p:txBody>
+      </p:sp>
+      <p:sp>
+        <p:nvSpPr>
+          <p:cNvPr id="6" name="TextBox 5"/>
+          <p:cNvSpPr txBox="1"/>
+          <p:nvPr/>
+        </p:nvSpPr>
+        <p:spPr>
+          <a:xfrm>
+            <a:off x="582930" y="1268730"/>
+            <a:ext cx="8229600" cy="377190"/>
+          </a:xfrm>
+          <a:prstGeom prst="rect">
+            <a:avLst/>
+          </a:prstGeom>
+          <a:noFill/>
+        </p:spPr>
+        <p:txBody>
+          <a:bodyPr wrap="square" lIns="27432" rIns="27432" tIns="13716" bIns="13716" anchor="t">
+            <a:spAutoFit/>
+          </a:bodyPr>
+          <a:lstStyle/>
+          <a:p>
+            <a:pPr algn="l"/>
+            <a:r>
+              <a:rPr sz="1500" b="0" i="1">
+                <a:solidFill>
+                  <a:srgbClr val="6B7280"/>
+                </a:solidFill>
+                <a:latin typeface="Calibri"/>
+              </a:rPr>
+              <a:t>避免 LLM 無限呼叫工具 —— 設上限 + 最後一輪強制總結</a:t>
+            </a:r>
+          </a:p>
+        </p:txBody>
+      </p:sp>
+      <p:sp>
+        <p:nvSpPr>
+          <p:cNvPr id="7" name="Rounded Rectangle 6"/>
+          <p:cNvSpPr/>
+          <p:nvPr/>
+        </p:nvSpPr>
+        <p:spPr>
+          <a:xfrm>
+            <a:off x="582930" y="1851660"/>
+            <a:ext cx="4080510" cy="2743200"/>
+          </a:xfrm>
+          <a:prstGeom prst="roundRect">
+            <a:avLst>
+              <a:gd name="adj" fmla="val 10000"/>
+            </a:avLst>
+          </a:prstGeom>
+          <a:solidFill>
+            <a:srgbClr val="FEE2E2"/>
+          </a:solidFill>
+          <a:ln w="19050">
+            <a:solidFill>
+              <a:srgbClr val="EF4444"/>
+            </a:solidFill>
+          </a:ln>
+          <a:effectLst/>
+        </p:spPr>
+        <p:style>
+          <a:lnRef idx="1">
+            <a:schemeClr val="accent1"/>
+          </a:lnRef>
+          <a:fillRef idx="3">
+            <a:schemeClr val="accent1"/>
+          </a:fillRef>
+          <a:effectRef idx="2">
+            <a:schemeClr val="accent1"/>
+          </a:effectRef>
+          <a:fontRef idx="minor">
+            <a:schemeClr val="lt1"/>
+          </a:fontRef>
+        </p:style>
+        <p:txBody>
+          <a:bodyPr rtlCol="0" anchor="ctr"/>
+          <a:lstStyle/>
+          <a:p>
+            <a:pPr algn="ctr"/>
+          </a:p>
+        </p:txBody>
+      </p:sp>
+      <p:sp>
+        <p:nvSpPr>
+          <p:cNvPr id="8" name="TextBox 7"/>
+          <p:cNvSpPr txBox="1"/>
+          <p:nvPr/>
+        </p:nvSpPr>
+        <p:spPr>
+          <a:xfrm>
+            <a:off x="754380" y="1975104"/>
+            <a:ext cx="3737610" cy="377190"/>
+          </a:xfrm>
+          <a:prstGeom prst="rect">
+            <a:avLst/>
+          </a:prstGeom>
+          <a:noFill/>
+        </p:spPr>
+        <p:txBody>
+          <a:bodyPr wrap="square" lIns="27432" rIns="27432" tIns="13716" bIns="13716" anchor="t">
+            <a:spAutoFit/>
+          </a:bodyPr>
+          <a:lstStyle/>
+          <a:p>
+            <a:pPr algn="l"/>
+            <a:r>
+              <a:rPr sz="1650" b="1" i="0">
+                <a:solidFill>
+                  <a:srgbClr val="EF4444"/>
+                </a:solidFill>
+                <a:latin typeface="Arial Black"/>
+              </a:rPr>
+              <a:t>問題:無限迴圈風險</a:t>
+            </a:r>
+          </a:p>
+        </p:txBody>
+      </p:sp>
+      <p:sp>
+        <p:nvSpPr>
+          <p:cNvPr id="9" name="TextBox 8"/>
+          <p:cNvSpPr txBox="1"/>
+          <p:nvPr/>
+        </p:nvSpPr>
+        <p:spPr>
+          <a:xfrm>
+            <a:off x="754380" y="2263139"/>
+            <a:ext cx="3771900" cy="2263139"/>
+          </a:xfrm>
+          <a:prstGeom prst="rect">
+            <a:avLst/>
+          </a:prstGeom>
+          <a:noFill/>
+        </p:spPr>
+        <p:txBody>
+          <a:bodyPr wrap="square" lIns="27432" rIns="27432" tIns="13716" bIns="13716" anchor="t">
+            <a:spAutoFit/>
+          </a:bodyPr>
+          <a:lstStyle/>
+          <a:p>
+            <a:pPr algn="l">
+              <a:spcAft>
+                <a:spcPts val="750"/>
+              </a:spcAft>
+            </a:pPr>
+            <a:r>
+              <a:rPr sz="1050" b="0" i="0">
+                <a:solidFill>
+                  <a:srgbClr val="1F2937"/>
+                </a:solidFill>
+                <a:latin typeface="Calibri"/>
+              </a:rPr>
+              <a:t>LLM 可能不斷呼叫工具而永遠不回覆使用者,造成:</a:t>
+            </a:r>
+          </a:p>
+          <a:p>
+            <a:pPr algn="l">
+              <a:spcAft>
+                <a:spcPts val="450"/>
+              </a:spcAft>
+            </a:pPr>
+            <a:r>
+              <a:rPr sz="1050" b="0" i="0">
+                <a:solidFill>
+                  <a:srgbClr val="B91C1C"/>
+                </a:solidFill>
+                <a:latin typeface="Calibri"/>
+              </a:rPr>
+              <a:t>✗  Token 成本無限增長</a:t>
+            </a:r>
+          </a:p>
+          <a:p>
+            <a:pPr algn="l">
+              <a:spcAft>
+                <a:spcPts val="450"/>
+              </a:spcAft>
+            </a:pPr>
+            <a:r>
+              <a:rPr sz="1050" b="0" i="0">
+                <a:solidFill>
+                  <a:srgbClr val="B91C1C"/>
+                </a:solidFill>
+                <a:latin typeface="Calibri"/>
+              </a:rPr>
+              <a:t>✗  回應時間過長</a:t>
+            </a:r>
+          </a:p>
+          <a:p>
+            <a:pPr algn="l">
+              <a:spcAft>
+                <a:spcPts val="0"/>
+              </a:spcAft>
+            </a:pPr>
+            <a:r>
+              <a:rPr sz="1050" b="0" i="0">
+                <a:solidFill>
+                  <a:srgbClr val="B91C1C"/>
+                </a:solidFill>
+                <a:latin typeface="Calibri"/>
+              </a:rPr>
+              <a:t>✗  使用者體驗極差</a:t>
+            </a:r>
+          </a:p>
+        </p:txBody>
+      </p:sp>
+      <p:sp>
+        <p:nvSpPr>
+          <p:cNvPr id="10" name="Rounded Rectangle 9"/>
+          <p:cNvSpPr/>
+          <p:nvPr/>
+        </p:nvSpPr>
+        <p:spPr>
+          <a:xfrm>
+            <a:off x="4834890" y="1851660"/>
+            <a:ext cx="4011929" cy="2743200"/>
+          </a:xfrm>
+          <a:prstGeom prst="roundRect">
+            <a:avLst>
+              <a:gd name="adj" fmla="val 10000"/>
+            </a:avLst>
+          </a:prstGeom>
+          <a:solidFill>
+            <a:srgbClr val="D4F7F0"/>
+          </a:solidFill>
+          <a:ln w="19050">
+            <a:solidFill>
+              <a:srgbClr val="0EA594"/>
+            </a:solidFill>
+          </a:ln>
+          <a:effectLst/>
+        </p:spPr>
+        <p:style>
+          <a:lnRef idx="1">
+            <a:schemeClr val="accent1"/>
+          </a:lnRef>
+          <a:fillRef idx="3">
+            <a:schemeClr val="accent1"/>
+          </a:fillRef>
+          <a:effectRef idx="2">
+            <a:schemeClr val="accent1"/>
+          </a:effectRef>
+          <a:fontRef idx="minor">
+            <a:schemeClr val="lt1"/>
+          </a:fontRef>
+        </p:style>
+        <p:txBody>
+          <a:bodyPr rtlCol="0" anchor="ctr"/>
+          <a:lstStyle/>
+          <a:p>
+            <a:pPr algn="ctr"/>
+          </a:p>
+        </p:txBody>
+      </p:sp>
+      <p:sp>
+        <p:nvSpPr>
+          <p:cNvPr id="11" name="TextBox 10"/>
+          <p:cNvSpPr txBox="1"/>
+          <p:nvPr/>
+        </p:nvSpPr>
+        <p:spPr>
+          <a:xfrm>
+            <a:off x="5006340" y="1975104"/>
+            <a:ext cx="3669029" cy="377190"/>
+          </a:xfrm>
+          <a:prstGeom prst="rect">
+            <a:avLst/>
+          </a:prstGeom>
+          <a:noFill/>
+        </p:spPr>
+        <p:txBody>
+          <a:bodyPr wrap="square" lIns="27432" rIns="27432" tIns="13716" bIns="13716" anchor="t">
+            <a:spAutoFit/>
+          </a:bodyPr>
+          <a:lstStyle/>
+          <a:p>
+            <a:pPr algn="l"/>
+            <a:r>
+              <a:rPr sz="1650" b="1" i="0">
+                <a:solidFill>
+                  <a:srgbClr val="0EA594"/>
+                </a:solidFill>
+                <a:latin typeface="Arial Black"/>
+              </a:rPr>
+              <a:t>解法:maxIterations = 7</a:t>
+            </a:r>
+          </a:p>
+        </p:txBody>
+      </p:sp>
+      <p:sp>
+        <p:nvSpPr>
+          <p:cNvPr id="12" name="TextBox 11"/>
+          <p:cNvSpPr txBox="1"/>
+          <p:nvPr/>
+        </p:nvSpPr>
+        <p:spPr>
+          <a:xfrm>
+            <a:off x="5006340" y="2263139"/>
+            <a:ext cx="3703320" cy="2263139"/>
+          </a:xfrm>
+          <a:prstGeom prst="rect">
+            <a:avLst/>
+          </a:prstGeom>
+          <a:noFill/>
+        </p:spPr>
+        <p:txBody>
+          <a:bodyPr wrap="square" lIns="27432" rIns="27432" tIns="13716" bIns="13716" anchor="t">
+            <a:spAutoFit/>
+          </a:bodyPr>
+          <a:lstStyle/>
+          <a:p>
+            <a:pPr algn="l">
+              <a:spcAft>
+                <a:spcPts val="450"/>
+              </a:spcAft>
+            </a:pPr>
+            <a:r>
+              <a:rPr sz="1050" b="0" i="0">
+                <a:solidFill>
+                  <a:srgbClr val="1F2937"/>
+                </a:solidFill>
+                <a:latin typeface="Calibri"/>
+              </a:rPr>
+              <a:t>✓  設定最大迭代次數上限</a:t>
+            </a:r>
+          </a:p>
+          <a:p>
+            <a:pPr algn="l">
+              <a:spcAft>
+                <a:spcPts val="150"/>
+              </a:spcAft>
+            </a:pPr>
+            <a:r>
+              <a:rPr sz="1050" b="0" i="0">
+                <a:solidFill>
+                  <a:srgbClr val="1F2937"/>
+                </a:solidFill>
+                <a:latin typeface="Calibri"/>
+              </a:rPr>
+              <a:t>✓  第 7 輪(最後一輪)時注入臨時</a:t>
+            </a:r>
+          </a:p>
+          <a:p>
+            <a:pPr algn="l">
+              <a:spcAft>
+                <a:spcPts val="150"/>
+              </a:spcAft>
+            </a:pPr>
+            <a:r>
+              <a:rPr sz="1050" b="0" i="0">
+                <a:solidFill>
+                  <a:srgbClr val="1F2937"/>
+                </a:solidFill>
+                <a:latin typeface="Calibri"/>
+              </a:rPr>
+              <a:t>    user message 強制模型停止使用</a:t>
+            </a:r>
+          </a:p>
+          <a:p>
+            <a:pPr algn="l">
+              <a:spcAft>
+                <a:spcPts val="1050"/>
+              </a:spcAft>
+            </a:pPr>
+            <a:r>
+              <a:rPr sz="1050" b="0" i="0">
+                <a:solidFill>
+                  <a:srgbClr val="1F2937"/>
+                </a:solidFill>
+                <a:latin typeface="Calibri"/>
+              </a:rPr>
+              <a:t>    工具,直接整理回覆</a:t>
+            </a:r>
+          </a:p>
+          <a:p>
+            <a:pPr algn="l">
+              <a:spcAft>
+                <a:spcPts val="150"/>
+              </a:spcAft>
+            </a:pPr>
+            <a:r>
+              <a:rPr sz="975" b="0" i="1">
+                <a:solidFill>
+                  <a:srgbClr val="0F766E"/>
+                </a:solidFill>
+                <a:latin typeface="Calibri"/>
+              </a:rPr>
+              <a:t>「請不要再使用任何工具,</a:t>
+            </a:r>
+          </a:p>
+          <a:p>
+            <a:pPr algn="l">
+              <a:spcAft>
+                <a:spcPts val="0"/>
+              </a:spcAft>
+            </a:pPr>
+            <a:r>
+              <a:rPr sz="975" b="0" i="1">
+                <a:solidFill>
+                  <a:srgbClr val="0F766E"/>
+                </a:solidFill>
+                <a:latin typeface="Calibri"/>
+              </a:rPr>
+              <a:t>  直接根據工具回傳的資料整理 Markdown 回覆。」</a:t>
+            </a:r>
+          </a:p>
+        </p:txBody>
+      </p:sp>
+      <p:sp>
+        <p:nvSpPr>
+          <p:cNvPr id="13" name="TextBox 12"/>
+          <p:cNvSpPr txBox="1"/>
+          <p:nvPr/>
+        </p:nvSpPr>
+        <p:spPr>
+          <a:xfrm>
+            <a:off x="7955279" y="4766310"/>
+            <a:ext cx="1028700" cy="240029"/>
+          </a:xfrm>
+          <a:prstGeom prst="rect">
+            <a:avLst/>
+          </a:prstGeom>
+          <a:noFill/>
+        </p:spPr>
+        <p:txBody>
+          <a:bodyPr wrap="square" lIns="27432" rIns="27432" tIns="13716" bIns="13716" anchor="t">
+            <a:spAutoFit/>
+          </a:bodyPr>
+          <a:lstStyle/>
+          <a:p>
+            <a:pPr algn="r"/>
+            <a:r>
+              <a:rPr sz="1050" b="0" i="0">
+                <a:solidFill>
+                  <a:srgbClr val="9CA3AF"/>
+                </a:solidFill>
+                <a:latin typeface="Calibri"/>
+              </a:rPr>
+              <a:t>9 / 11</a:t>
             </a:r>
           </a:p>
         </p:txBody>

--- a/slides/03-agentic-tool-loop.pptx
+++ b/slides/03-agentic-tool-loop.pptx
@@ -16,6 +16,8 @@
     <p:sldId id="264" r:id="rId15"/>
     <p:sldId id="265" r:id="rId16"/>
     <p:sldId id="266" r:id="rId17"/>
+    <p:sldId id="267" r:id="rId18"/>
+    <p:sldId id="268" r:id="rId19"/>
   </p:sldIdLst>
   <p:sldSz cx="9144000" cy="5143500" type="screen4x3"/>
   <p:notesSz cx="6858000" cy="9144000"/>
@@ -3511,7 +3513,7 @@
             <a:avLst/>
           </a:prstGeom>
           <a:solidFill>
-            <a:srgbClr val="0F1429"/>
+            <a:srgbClr val="FFFFFF"/>
           </a:solidFill>
           <a:ln>
             <a:noFill/>
@@ -3607,13 +3609,13 @@
           <a:p>
             <a:pPr algn="l"/>
             <a:r>
-              <a:rPr sz="1050" b="1" i="0">
-                <a:solidFill>
-                  <a:srgbClr val="CBD5E1"/>
+              <a:rPr sz="1125" b="1" i="0">
+                <a:solidFill>
+                  <a:srgbClr val="9CA3AF"/>
                 </a:solidFill>
                 <a:latin typeface="Calibri"/>
               </a:rPr>
-              <a:t>04   L I V E   D E M O</a:t>
+              <a:t>01 · ⑤   A G E N T   =   2 0   行 迴 圈</a:t>
             </a:r>
           </a:p>
         </p:txBody>
@@ -3626,8 +3628,8 @@
         </p:nvSpPr>
         <p:spPr>
           <a:xfrm>
-            <a:off x="582930" y="720090"/>
-            <a:ext cx="8229600" cy="582930"/>
+            <a:off x="582930" y="651509"/>
+            <a:ext cx="8229600" cy="651509"/>
           </a:xfrm>
           <a:prstGeom prst="rect">
             <a:avLst/>
@@ -3642,13 +3644,13 @@
           <a:p>
             <a:pPr algn="l"/>
             <a:r>
-              <a:rPr sz="3300" b="1" i="0">
-                <a:solidFill>
-                  <a:srgbClr val="FB7048"/>
+              <a:rPr sz="2400" b="1" i="0">
+                <a:solidFill>
+                  <a:srgbClr val="1F2937"/>
                 </a:solidFill>
                 <a:latin typeface="Arial Black"/>
               </a:rPr>
-              <a:t>▶  切換到 Live Demo</a:t>
+              <a:t>拆穿魔法:agent 就是一個 while 迴圈</a:t>
             </a:r>
           </a:p>
         </p:txBody>
@@ -3661,8 +3663,8 @@
         </p:nvSpPr>
         <p:spPr>
           <a:xfrm>
-            <a:off x="582930" y="1405889"/>
-            <a:ext cx="8229600" cy="308610"/>
+            <a:off x="582930" y="1268730"/>
+            <a:ext cx="8229600" cy="377190"/>
           </a:xfrm>
           <a:prstGeom prst="rect">
             <a:avLst/>
@@ -3677,75 +3679,36 @@
           <a:p>
             <a:pPr algn="l"/>
             <a:r>
-              <a:rPr sz="1350" b="0" i="1">
-                <a:solidFill>
-                  <a:srgbClr val="CBD5E1"/>
+              <a:rPr sz="1500" b="0" i="1">
+                <a:solidFill>
+                  <a:srgbClr val="6B7280"/>
                 </a:solidFill>
                 <a:latin typeface="Calibri"/>
               </a:rPr>
-              <a:t>25 分鐘 · 興大 AI 學伴實機</a:t>
-            </a:r>
-          </a:p>
-        </p:txBody>
-      </p:sp>
-      <p:sp>
-        <p:nvSpPr>
-          <p:cNvPr id="7" name="TextBox 6"/>
-          <p:cNvSpPr txBox="1"/>
-          <p:nvPr/>
-        </p:nvSpPr>
-        <p:spPr>
-          <a:xfrm>
-            <a:off x="582930" y="1851660"/>
-            <a:ext cx="8229600" cy="274320"/>
-          </a:xfrm>
-          <a:prstGeom prst="rect">
-            <a:avLst/>
-          </a:prstGeom>
-          <a:noFill/>
-        </p:spPr>
-        <p:txBody>
-          <a:bodyPr wrap="square" lIns="27432" rIns="27432" tIns="13716" bIns="13716" anchor="t">
-            <a:spAutoFit/>
-          </a:bodyPr>
-          <a:lstStyle/>
-          <a:p>
-            <a:pPr algn="l"/>
-            <a:r>
-              <a:rPr sz="1050" b="1" i="0">
-                <a:solidFill>
-                  <a:srgbClr val="EEE8FF"/>
-                </a:solidFill>
-                <a:latin typeface="Calibri"/>
-              </a:rPr>
-              <a:t>5 個示範問題(從淺到深,完整腳本見 03-live-demo-script.md)</a:t>
-            </a:r>
-          </a:p>
-        </p:txBody>
-      </p:sp>
-      <p:sp>
-        <p:nvSpPr>
-          <p:cNvPr id="8" name="Rounded Rectangle 7"/>
+              <a:t>llm-client.js 的核心 —— 沒有黑魔法,就是 for-loop + if-else</a:t>
+            </a:r>
+          </a:p>
+        </p:txBody>
+      </p:sp>
+      <p:sp>
+        <p:nvSpPr>
+          <p:cNvPr id="7" name="Rectangle 6"/>
           <p:cNvSpPr/>
           <p:nvPr/>
         </p:nvSpPr>
         <p:spPr>
           <a:xfrm>
-            <a:off x="685800" y="2194560"/>
-            <a:ext cx="8126729" cy="445770"/>
-          </a:xfrm>
-          <a:prstGeom prst="roundRect">
-            <a:avLst>
-              <a:gd name="adj" fmla="val 10000"/>
-            </a:avLst>
+            <a:off x="582930" y="1714500"/>
+            <a:ext cx="8229600" cy="2606039"/>
+          </a:xfrm>
+          <a:prstGeom prst="rect">
+            <a:avLst/>
           </a:prstGeom>
           <a:solidFill>
-            <a:srgbClr val="242A44"/>
+            <a:srgbClr val="1A2138"/>
           </a:solidFill>
-          <a:ln w="14287">
-            <a:solidFill>
-              <a:srgbClr val="0EA594"/>
-            </a:solidFill>
+          <a:ln>
+            <a:noFill/>
           </a:ln>
           <a:effectLst/>
         </p:spPr>
@@ -3773,189 +3736,261 @@
       </p:sp>
       <p:sp>
         <p:nvSpPr>
-          <p:cNvPr id="9" name="TextBox 8"/>
-          <p:cNvSpPr txBox="1"/>
-          <p:nvPr/>
-        </p:nvSpPr>
-        <p:spPr>
-          <a:xfrm>
-            <a:off x="822959" y="2194560"/>
-            <a:ext cx="480059" cy="445770"/>
-          </a:xfrm>
-          <a:prstGeom prst="rect">
-            <a:avLst/>
-          </a:prstGeom>
-          <a:noFill/>
-        </p:spPr>
-        <p:txBody>
-          <a:bodyPr wrap="square" lIns="27432" rIns="27432" tIns="13716" bIns="13716" anchor="ctr">
-            <a:spAutoFit/>
-          </a:bodyPr>
-          <a:lstStyle/>
-          <a:p>
-            <a:pPr algn="l"/>
-            <a:r>
-              <a:rPr sz="1050" b="1" i="0">
-                <a:solidFill>
-                  <a:srgbClr val="0EA594"/>
+          <p:cNvPr id="8" name="TextBox 7"/>
+          <p:cNvSpPr txBox="1"/>
+          <p:nvPr/>
+        </p:nvSpPr>
+        <p:spPr>
+          <a:xfrm>
+            <a:off x="802386" y="1865376"/>
+            <a:ext cx="7852409" cy="2318004"/>
+          </a:xfrm>
+          <a:prstGeom prst="rect">
+            <a:avLst/>
+          </a:prstGeom>
+          <a:noFill/>
+        </p:spPr>
+        <p:txBody>
+          <a:bodyPr wrap="square" lIns="27432" rIns="27432" tIns="13716" bIns="13716" anchor="t">
+            <a:spAutoFit/>
+          </a:bodyPr>
+          <a:lstStyle/>
+          <a:p>
+            <a:pPr algn="l">
+              <a:spcAft>
+                <a:spcPts val="75"/>
+              </a:spcAft>
+            </a:pPr>
+            <a:r>
+              <a:rPr sz="975" b="0" i="0">
+                <a:solidFill>
+                  <a:srgbClr val="FB924D"/>
                 </a:solidFill>
                 <a:latin typeface="Consolas"/>
               </a:rPr>
-              <a:t>Q1</a:t>
-            </a:r>
-          </a:p>
-        </p:txBody>
-      </p:sp>
-      <p:sp>
-        <p:nvSpPr>
-          <p:cNvPr id="10" name="TextBox 9"/>
-          <p:cNvSpPr txBox="1"/>
-          <p:nvPr/>
-        </p:nvSpPr>
-        <p:spPr>
-          <a:xfrm>
-            <a:off x="1337310" y="2194560"/>
-            <a:ext cx="3086100" cy="445770"/>
-          </a:xfrm>
-          <a:prstGeom prst="rect">
-            <a:avLst/>
-          </a:prstGeom>
-          <a:noFill/>
-        </p:spPr>
-        <p:txBody>
-          <a:bodyPr wrap="square" lIns="27432" rIns="27432" tIns="13716" bIns="13716" anchor="ctr">
-            <a:spAutoFit/>
-          </a:bodyPr>
-          <a:lstStyle/>
-          <a:p>
-            <a:pPr algn="l"/>
-            <a:r>
-              <a:rPr sz="1125" b="1" i="0">
+              <a:t>for (let i = 0; i &lt; maxIterations; i++) {        // ← 護欄</a:t>
+            </a:r>
+          </a:p>
+          <a:p>
+            <a:pPr algn="l">
+              <a:spcAft>
+                <a:spcPts val="75"/>
+              </a:spcAft>
+            </a:pPr>
+            <a:r>
+              <a:rPr sz="975" b="0" i="0">
                 <a:solidFill>
                   <a:srgbClr val="E5E7EB"/>
                 </a:solidFill>
-                <a:latin typeface="Calibri"/>
-              </a:rPr>
-              <a:t>圖書館 AI 書多少</a:t>
-            </a:r>
-          </a:p>
-        </p:txBody>
-      </p:sp>
-      <p:sp>
-        <p:nvSpPr>
-          <p:cNvPr id="11" name="TextBox 10"/>
-          <p:cNvSpPr txBox="1"/>
-          <p:nvPr/>
-        </p:nvSpPr>
-        <p:spPr>
-          <a:xfrm>
-            <a:off x="4457700" y="2194560"/>
-            <a:ext cx="2331720" cy="445770"/>
-          </a:xfrm>
-          <a:prstGeom prst="rect">
-            <a:avLst/>
-          </a:prstGeom>
-          <a:noFill/>
-        </p:spPr>
-        <p:txBody>
-          <a:bodyPr wrap="square" lIns="27432" rIns="27432" tIns="13716" bIns="13716" anchor="ctr">
-            <a:spAutoFit/>
-          </a:bodyPr>
-          <a:lstStyle/>
-          <a:p>
-            <a:pPr algn="l"/>
-            <a:r>
-              <a:rPr sz="937" b="0" i="1">
+                <a:latin typeface="Consolas"/>
+              </a:rPr>
+              <a:t>  const resp = await llm.create({ messages, tools });</a:t>
+            </a:r>
+          </a:p>
+          <a:p>
+            <a:pPr algn="l">
+              <a:spcAft>
+                <a:spcPts val="75"/>
+              </a:spcAft>
+            </a:pPr>
+            <a:r>
+              <a:rPr sz="975" b="0" i="0">
+                <a:solidFill>
+                  <a:srgbClr val="E5E7EB"/>
+                </a:solidFill>
+                <a:latin typeface="Consolas"/>
+              </a:rPr>
+              <a:t> </a:t>
+            </a:r>
+          </a:p>
+          <a:p>
+            <a:pPr algn="l">
+              <a:spcAft>
+                <a:spcPts val="75"/>
+              </a:spcAft>
+            </a:pPr>
+            <a:r>
+              <a:rPr sz="975" b="0" i="0">
                 <a:solidFill>
                   <a:srgbClr val="9CA3AF"/>
                 </a:solidFill>
-                <a:latin typeface="Calibri"/>
-              </a:rPr>
-              <a:t>single tool</a:t>
-            </a:r>
-          </a:p>
-        </p:txBody>
-      </p:sp>
-      <p:sp>
-        <p:nvSpPr>
-          <p:cNvPr id="12" name="TextBox 11"/>
-          <p:cNvSpPr txBox="1"/>
-          <p:nvPr/>
-        </p:nvSpPr>
-        <p:spPr>
-          <a:xfrm>
-            <a:off x="6858000" y="2194560"/>
-            <a:ext cx="1062990" cy="445770"/>
-          </a:xfrm>
-          <a:prstGeom prst="rect">
-            <a:avLst/>
-          </a:prstGeom>
-          <a:noFill/>
-        </p:spPr>
-        <p:txBody>
-          <a:bodyPr wrap="square" lIns="27432" rIns="27432" tIns="13716" bIns="13716" anchor="ctr">
-            <a:spAutoFit/>
-          </a:bodyPr>
-          <a:lstStyle/>
-          <a:p>
-            <a:pPr algn="ctr"/>
-            <a:r>
-              <a:rPr sz="1050" b="1" i="0">
-                <a:solidFill>
-                  <a:srgbClr val="0EA594"/>
-                </a:solidFill>
-                <a:latin typeface="Calibri"/>
-              </a:rPr>
-              <a:t>★</a:t>
-            </a:r>
-          </a:p>
-        </p:txBody>
-      </p:sp>
-      <p:sp>
-        <p:nvSpPr>
-          <p:cNvPr id="13" name="TextBox 12"/>
-          <p:cNvSpPr txBox="1"/>
-          <p:nvPr/>
-        </p:nvSpPr>
-        <p:spPr>
-          <a:xfrm>
-            <a:off x="7920990" y="2194560"/>
-            <a:ext cx="857250" cy="445770"/>
-          </a:xfrm>
-          <a:prstGeom prst="rect">
-            <a:avLst/>
-          </a:prstGeom>
-          <a:noFill/>
-        </p:spPr>
-        <p:txBody>
-          <a:bodyPr wrap="square" lIns="27432" rIns="27432" tIns="13716" bIns="13716" anchor="ctr">
-            <a:spAutoFit/>
-          </a:bodyPr>
-          <a:lstStyle/>
-          <a:p>
-            <a:pPr algn="r"/>
-            <a:r>
-              <a:rPr sz="825" b="0" i="0">
+                <a:latin typeface="Consolas"/>
+              </a:rPr>
+              <a:t>  // 沒有要呼叫工具 → 收工,回最終文字</a:t>
+            </a:r>
+          </a:p>
+          <a:p>
+            <a:pPr algn="l">
+              <a:spcAft>
+                <a:spcPts val="75"/>
+              </a:spcAft>
+            </a:pPr>
+            <a:r>
+              <a:rPr sz="975" b="0" i="0">
+                <a:solidFill>
+                  <a:srgbClr val="E5E7EB"/>
+                </a:solidFill>
+                <a:latin typeface="Consolas"/>
+              </a:rPr>
+              <a:t>  if (resp.stop_reason !== 'tool_use') return resp.text;</a:t>
+            </a:r>
+          </a:p>
+          <a:p>
+            <a:pPr algn="l">
+              <a:spcAft>
+                <a:spcPts val="75"/>
+              </a:spcAft>
+            </a:pPr>
+            <a:r>
+              <a:rPr sz="975" b="0" i="0">
+                <a:solidFill>
+                  <a:srgbClr val="E5E7EB"/>
+                </a:solidFill>
+                <a:latin typeface="Consolas"/>
+              </a:rPr>
+              <a:t> </a:t>
+            </a:r>
+          </a:p>
+          <a:p>
+            <a:pPr algn="l">
+              <a:spcAft>
+                <a:spcPts val="75"/>
+              </a:spcAft>
+            </a:pPr>
+            <a:r>
+              <a:rPr sz="975" b="0" i="0">
                 <a:solidFill>
                   <a:srgbClr val="9CA3AF"/>
                 </a:solidFill>
                 <a:latin typeface="Consolas"/>
               </a:rPr>
-              <a:t>~30s</a:t>
-            </a:r>
-          </a:p>
-        </p:txBody>
-      </p:sp>
-      <p:sp>
-        <p:nvSpPr>
-          <p:cNvPr id="14" name="Rounded Rectangle 13"/>
+              <a:t>  // 有 tool_use → 全部並行執行</a:t>
+            </a:r>
+          </a:p>
+          <a:p>
+            <a:pPr algn="l">
+              <a:spcAft>
+                <a:spcPts val="75"/>
+              </a:spcAft>
+            </a:pPr>
+            <a:r>
+              <a:rPr sz="975" b="0" i="0">
+                <a:solidFill>
+                  <a:srgbClr val="E5E7EB"/>
+                </a:solidFill>
+                <a:latin typeface="Consolas"/>
+              </a:rPr>
+              <a:t>  const toolUses = resp.content.filter(b =&gt; b.type==='tool_use');</a:t>
+            </a:r>
+          </a:p>
+          <a:p>
+            <a:pPr algn="l">
+              <a:spcAft>
+                <a:spcPts val="75"/>
+              </a:spcAft>
+            </a:pPr>
+            <a:r>
+              <a:rPr sz="975" b="0" i="0">
+                <a:solidFill>
+                  <a:srgbClr val="E5E7EB"/>
+                </a:solidFill>
+                <a:latin typeface="Consolas"/>
+              </a:rPr>
+              <a:t>  const results = await Promise.all(</a:t>
+            </a:r>
+          </a:p>
+          <a:p>
+            <a:pPr algn="l">
+              <a:spcAft>
+                <a:spcPts val="75"/>
+              </a:spcAft>
+            </a:pPr>
+            <a:r>
+              <a:rPr sz="975" b="0" i="0">
+                <a:solidFill>
+                  <a:srgbClr val="E5E7EB"/>
+                </a:solidFill>
+                <a:latin typeface="Consolas"/>
+              </a:rPr>
+              <a:t>    toolUses.map(t =&gt; callTool(t.name, t.input)));</a:t>
+            </a:r>
+          </a:p>
+          <a:p>
+            <a:pPr algn="l">
+              <a:spcAft>
+                <a:spcPts val="75"/>
+              </a:spcAft>
+            </a:pPr>
+            <a:r>
+              <a:rPr sz="975" b="0" i="0">
+                <a:solidFill>
+                  <a:srgbClr val="E5E7EB"/>
+                </a:solidFill>
+                <a:latin typeface="Consolas"/>
+              </a:rPr>
+              <a:t> </a:t>
+            </a:r>
+          </a:p>
+          <a:p>
+            <a:pPr algn="l">
+              <a:spcAft>
+                <a:spcPts val="75"/>
+              </a:spcAft>
+            </a:pPr>
+            <a:r>
+              <a:rPr sz="975" b="0" i="0">
+                <a:solidFill>
+                  <a:srgbClr val="9CA3AF"/>
+                </a:solidFill>
+                <a:latin typeface="Consolas"/>
+              </a:rPr>
+              <a:t>  // 結果接回 messages → 下一輪 LLM 看得到</a:t>
+            </a:r>
+          </a:p>
+          <a:p>
+            <a:pPr algn="l">
+              <a:spcAft>
+                <a:spcPts val="75"/>
+              </a:spcAft>
+            </a:pPr>
+            <a:r>
+              <a:rPr sz="975" b="0" i="0">
+                <a:solidFill>
+                  <a:srgbClr val="E5E7EB"/>
+                </a:solidFill>
+                <a:latin typeface="Consolas"/>
+              </a:rPr>
+              <a:t>  messages.push(assistantMsg, { role:'user', content: results });</a:t>
+            </a:r>
+          </a:p>
+          <a:p>
+            <a:pPr algn="l">
+              <a:spcAft>
+                <a:spcPts val="75"/>
+              </a:spcAft>
+            </a:pPr>
+            <a:r>
+              <a:rPr sz="975" b="0" i="0">
+                <a:solidFill>
+                  <a:srgbClr val="E5E7EB"/>
+                </a:solidFill>
+                <a:latin typeface="Consolas"/>
+              </a:rPr>
+              <a:t>}</a:t>
+            </a:r>
+          </a:p>
+        </p:txBody>
+      </p:sp>
+      <p:sp>
+        <p:nvSpPr>
+          <p:cNvPr id="9" name="Rounded Rectangle 8"/>
           <p:cNvSpPr/>
           <p:nvPr/>
         </p:nvSpPr>
         <p:spPr>
           <a:xfrm>
-            <a:off x="685800" y="2695194"/>
-            <a:ext cx="8126729" cy="445770"/>
+            <a:off x="582930" y="4457700"/>
+            <a:ext cx="8229600" cy="342900"/>
           </a:xfrm>
           <a:prstGeom prst="roundRect">
             <a:avLst>
@@ -3963,11 +3998,11 @@
             </a:avLst>
           </a:prstGeom>
           <a:solidFill>
-            <a:srgbClr val="242A44"/>
+            <a:srgbClr val="EEE8FF"/>
           </a:solidFill>
-          <a:ln w="14287">
+          <a:ln w="19050">
             <a:solidFill>
-              <a:srgbClr val="0EA594"/>
+              <a:srgbClr val="7B5CF5"/>
             </a:solidFill>
           </a:ln>
           <a:effectLst/>
@@ -3996,14 +4031,14 @@
       </p:sp>
       <p:sp>
         <p:nvSpPr>
-          <p:cNvPr id="15" name="TextBox 14"/>
-          <p:cNvSpPr txBox="1"/>
-          <p:nvPr/>
-        </p:nvSpPr>
-        <p:spPr>
-          <a:xfrm>
-            <a:off x="822959" y="2695194"/>
-            <a:ext cx="480059" cy="445770"/>
+          <p:cNvPr id="10" name="TextBox 9"/>
+          <p:cNvSpPr txBox="1"/>
+          <p:nvPr/>
+        </p:nvSpPr>
+        <p:spPr>
+          <a:xfrm>
+            <a:off x="788669" y="4457700"/>
+            <a:ext cx="7818120" cy="342900"/>
           </a:xfrm>
           <a:prstGeom prst="rect">
             <a:avLst/>
@@ -4020,855 +4055,46 @@
             <a:r>
               <a:rPr sz="1050" b="1" i="0">
                 <a:solidFill>
-                  <a:srgbClr val="0EA594"/>
-                </a:solidFill>
-                <a:latin typeface="Consolas"/>
-              </a:rPr>
-              <a:t>Q2</a:t>
-            </a:r>
-          </a:p>
-        </p:txBody>
-      </p:sp>
-      <p:sp>
-        <p:nvSpPr>
-          <p:cNvPr id="16" name="TextBox 15"/>
-          <p:cNvSpPr txBox="1"/>
-          <p:nvPr/>
-        </p:nvSpPr>
-        <p:spPr>
-          <a:xfrm>
-            <a:off x="1337310" y="2695194"/>
-            <a:ext cx="3086100" cy="445770"/>
-          </a:xfrm>
-          <a:prstGeom prst="rect">
-            <a:avLst/>
-          </a:prstGeom>
-          <a:noFill/>
-        </p:spPr>
-        <p:txBody>
-          <a:bodyPr wrap="square" lIns="27432" rIns="27432" tIns="13716" bIns="13716" anchor="ctr">
-            <a:spAutoFit/>
-          </a:bodyPr>
-          <a:lstStyle/>
-          <a:p>
-            <a:pPr algn="l"/>
-            <a:r>
-              <a:rPr sz="1125" b="1" i="0">
-                <a:solidFill>
-                  <a:srgbClr val="E5E7EB"/>
+                  <a:srgbClr val="7B5CF5"/>
                 </a:solidFill>
                 <a:latin typeface="Calibri"/>
               </a:rPr>
-              <a:t>資工系深度學習老師</a:t>
-            </a:r>
-          </a:p>
-        </p:txBody>
-      </p:sp>
-      <p:sp>
-        <p:nvSpPr>
-          <p:cNvPr id="17" name="TextBox 16"/>
-          <p:cNvSpPr txBox="1"/>
-          <p:nvPr/>
-        </p:nvSpPr>
-        <p:spPr>
-          <a:xfrm>
-            <a:off x="4457700" y="2695194"/>
-            <a:ext cx="2331720" cy="445770"/>
-          </a:xfrm>
-          <a:prstGeom prst="rect">
-            <a:avLst/>
-          </a:prstGeom>
-          <a:noFill/>
-        </p:spPr>
-        <p:txBody>
-          <a:bodyPr wrap="square" lIns="27432" rIns="27432" tIns="13716" bIns="13716" anchor="ctr">
-            <a:spAutoFit/>
-          </a:bodyPr>
-          <a:lstStyle/>
-          <a:p>
-            <a:pPr algn="l"/>
-            <a:r>
-              <a:rPr sz="937" b="0" i="1">
+              <a:t>▶  整個「自主 agent」= for-loop + if-else + 一個一直長大的 messages 陣列</a:t>
+            </a:r>
+          </a:p>
+        </p:txBody>
+      </p:sp>
+      <p:sp>
+        <p:nvSpPr>
+          <p:cNvPr id="11" name="TextBox 10"/>
+          <p:cNvSpPr txBox="1"/>
+          <p:nvPr/>
+        </p:nvSpPr>
+        <p:spPr>
+          <a:xfrm>
+            <a:off x="7955279" y="4766310"/>
+            <a:ext cx="1028700" cy="240029"/>
+          </a:xfrm>
+          <a:prstGeom prst="rect">
+            <a:avLst/>
+          </a:prstGeom>
+          <a:noFill/>
+        </p:spPr>
+        <p:txBody>
+          <a:bodyPr wrap="square" lIns="27432" rIns="27432" tIns="13716" bIns="13716" anchor="t">
+            <a:spAutoFit/>
+          </a:bodyPr>
+          <a:lstStyle/>
+          <a:p>
+            <a:pPr algn="r"/>
+            <a:r>
+              <a:rPr sz="1050" b="0" i="0">
                 <a:solidFill>
                   <a:srgbClr val="9CA3AF"/>
                 </a:solidFill>
                 <a:latin typeface="Calibri"/>
               </a:rPr>
-              <a:t>single tool + 參數</a:t>
-            </a:r>
-          </a:p>
-        </p:txBody>
-      </p:sp>
-      <p:sp>
-        <p:nvSpPr>
-          <p:cNvPr id="18" name="TextBox 17"/>
-          <p:cNvSpPr txBox="1"/>
-          <p:nvPr/>
-        </p:nvSpPr>
-        <p:spPr>
-          <a:xfrm>
-            <a:off x="6858000" y="2695194"/>
-            <a:ext cx="1062990" cy="445770"/>
-          </a:xfrm>
-          <a:prstGeom prst="rect">
-            <a:avLst/>
-          </a:prstGeom>
-          <a:noFill/>
-        </p:spPr>
-        <p:txBody>
-          <a:bodyPr wrap="square" lIns="27432" rIns="27432" tIns="13716" bIns="13716" anchor="ctr">
-            <a:spAutoFit/>
-          </a:bodyPr>
-          <a:lstStyle/>
-          <a:p>
-            <a:pPr algn="ctr"/>
-            <a:r>
-              <a:rPr sz="1050" b="1" i="0">
-                <a:solidFill>
-                  <a:srgbClr val="0EA594"/>
-                </a:solidFill>
-                <a:latin typeface="Calibri"/>
-              </a:rPr>
-              <a:t>★</a:t>
-            </a:r>
-          </a:p>
-        </p:txBody>
-      </p:sp>
-      <p:sp>
-        <p:nvSpPr>
-          <p:cNvPr id="19" name="TextBox 18"/>
-          <p:cNvSpPr txBox="1"/>
-          <p:nvPr/>
-        </p:nvSpPr>
-        <p:spPr>
-          <a:xfrm>
-            <a:off x="7920990" y="2695194"/>
-            <a:ext cx="857250" cy="445770"/>
-          </a:xfrm>
-          <a:prstGeom prst="rect">
-            <a:avLst/>
-          </a:prstGeom>
-          <a:noFill/>
-        </p:spPr>
-        <p:txBody>
-          <a:bodyPr wrap="square" lIns="27432" rIns="27432" tIns="13716" bIns="13716" anchor="ctr">
-            <a:spAutoFit/>
-          </a:bodyPr>
-          <a:lstStyle/>
-          <a:p>
-            <a:pPr algn="r"/>
-            <a:r>
-              <a:rPr sz="825" b="0" i="0">
-                <a:solidFill>
-                  <a:srgbClr val="9CA3AF"/>
-                </a:solidFill>
-                <a:latin typeface="Consolas"/>
-              </a:rPr>
-              <a:t>~30s</a:t>
-            </a:r>
-          </a:p>
-        </p:txBody>
-      </p:sp>
-      <p:sp>
-        <p:nvSpPr>
-          <p:cNvPr id="20" name="Rounded Rectangle 19"/>
-          <p:cNvSpPr/>
-          <p:nvPr/>
-        </p:nvSpPr>
-        <p:spPr>
-          <a:xfrm>
-            <a:off x="685800" y="3195828"/>
-            <a:ext cx="8126729" cy="445770"/>
-          </a:xfrm>
-          <a:prstGeom prst="roundRect">
-            <a:avLst>
-              <a:gd name="adj" fmla="val 10000"/>
-            </a:avLst>
-          </a:prstGeom>
-          <a:solidFill>
-            <a:srgbClr val="242A44"/>
-          </a:solidFill>
-          <a:ln w="14287">
-            <a:solidFill>
-              <a:srgbClr val="7B5CF5"/>
-            </a:solidFill>
-          </a:ln>
-          <a:effectLst/>
-        </p:spPr>
-        <p:style>
-          <a:lnRef idx="1">
-            <a:schemeClr val="accent1"/>
-          </a:lnRef>
-          <a:fillRef idx="3">
-            <a:schemeClr val="accent1"/>
-          </a:fillRef>
-          <a:effectRef idx="2">
-            <a:schemeClr val="accent1"/>
-          </a:effectRef>
-          <a:fontRef idx="minor">
-            <a:schemeClr val="lt1"/>
-          </a:fontRef>
-        </p:style>
-        <p:txBody>
-          <a:bodyPr rtlCol="0" anchor="ctr"/>
-          <a:lstStyle/>
-          <a:p>
-            <a:pPr algn="ctr"/>
-          </a:p>
-        </p:txBody>
-      </p:sp>
-      <p:sp>
-        <p:nvSpPr>
-          <p:cNvPr id="21" name="TextBox 20"/>
-          <p:cNvSpPr txBox="1"/>
-          <p:nvPr/>
-        </p:nvSpPr>
-        <p:spPr>
-          <a:xfrm>
-            <a:off x="822959" y="3195828"/>
-            <a:ext cx="480059" cy="445770"/>
-          </a:xfrm>
-          <a:prstGeom prst="rect">
-            <a:avLst/>
-          </a:prstGeom>
-          <a:noFill/>
-        </p:spPr>
-        <p:txBody>
-          <a:bodyPr wrap="square" lIns="27432" rIns="27432" tIns="13716" bIns="13716" anchor="ctr">
-            <a:spAutoFit/>
-          </a:bodyPr>
-          <a:lstStyle/>
-          <a:p>
-            <a:pPr algn="l"/>
-            <a:r>
-              <a:rPr sz="1050" b="1" i="0">
-                <a:solidFill>
-                  <a:srgbClr val="7B5CF5"/>
-                </a:solidFill>
-                <a:latin typeface="Consolas"/>
-              </a:rPr>
-              <a:t>Q3</a:t>
-            </a:r>
-          </a:p>
-        </p:txBody>
-      </p:sp>
-      <p:sp>
-        <p:nvSpPr>
-          <p:cNvPr id="22" name="TextBox 21"/>
-          <p:cNvSpPr txBox="1"/>
-          <p:nvPr/>
-        </p:nvSpPr>
-        <p:spPr>
-          <a:xfrm>
-            <a:off x="1337310" y="3195828"/>
-            <a:ext cx="3086100" cy="445770"/>
-          </a:xfrm>
-          <a:prstGeom prst="rect">
-            <a:avLst/>
-          </a:prstGeom>
-          <a:noFill/>
-        </p:spPr>
-        <p:txBody>
-          <a:bodyPr wrap="square" lIns="27432" rIns="27432" tIns="13716" bIns="13716" anchor="ctr">
-            <a:spAutoFit/>
-          </a:bodyPr>
-          <a:lstStyle/>
-          <a:p>
-            <a:pPr algn="l"/>
-            <a:r>
-              <a:rPr sz="1125" b="1" i="0">
-                <a:solidFill>
-                  <a:srgbClr val="E5E7EB"/>
-                </a:solidFill>
-                <a:latin typeface="Calibri"/>
-              </a:rPr>
-              <a:t>AI 課程 + 教授介紹</a:t>
-            </a:r>
-          </a:p>
-        </p:txBody>
-      </p:sp>
-      <p:sp>
-        <p:nvSpPr>
-          <p:cNvPr id="23" name="TextBox 22"/>
-          <p:cNvSpPr txBox="1"/>
-          <p:nvPr/>
-        </p:nvSpPr>
-        <p:spPr>
-          <a:xfrm>
-            <a:off x="4457700" y="3195828"/>
-            <a:ext cx="2331720" cy="445770"/>
-          </a:xfrm>
-          <a:prstGeom prst="rect">
-            <a:avLst/>
-          </a:prstGeom>
-          <a:noFill/>
-        </p:spPr>
-        <p:txBody>
-          <a:bodyPr wrap="square" lIns="27432" rIns="27432" tIns="13716" bIns="13716" anchor="ctr">
-            <a:spAutoFit/>
-          </a:bodyPr>
-          <a:lstStyle/>
-          <a:p>
-            <a:pPr algn="l"/>
-            <a:r>
-              <a:rPr sz="937" b="0" i="1">
-                <a:solidFill>
-                  <a:srgbClr val="9CA3AF"/>
-                </a:solidFill>
-                <a:latin typeface="Calibri"/>
-              </a:rPr>
-              <a:t>multi-turn 主菜</a:t>
-            </a:r>
-          </a:p>
-        </p:txBody>
-      </p:sp>
-      <p:sp>
-        <p:nvSpPr>
-          <p:cNvPr id="24" name="TextBox 23"/>
-          <p:cNvSpPr txBox="1"/>
-          <p:nvPr/>
-        </p:nvSpPr>
-        <p:spPr>
-          <a:xfrm>
-            <a:off x="6858000" y="3195828"/>
-            <a:ext cx="1062990" cy="445770"/>
-          </a:xfrm>
-          <a:prstGeom prst="rect">
-            <a:avLst/>
-          </a:prstGeom>
-          <a:noFill/>
-        </p:spPr>
-        <p:txBody>
-          <a:bodyPr wrap="square" lIns="27432" rIns="27432" tIns="13716" bIns="13716" anchor="ctr">
-            <a:spAutoFit/>
-          </a:bodyPr>
-          <a:lstStyle/>
-          <a:p>
-            <a:pPr algn="ctr"/>
-            <a:r>
-              <a:rPr sz="1050" b="1" i="0">
-                <a:solidFill>
-                  <a:srgbClr val="7B5CF5"/>
-                </a:solidFill>
-                <a:latin typeface="Calibri"/>
-              </a:rPr>
-              <a:t>★★</a:t>
-            </a:r>
-          </a:p>
-        </p:txBody>
-      </p:sp>
-      <p:sp>
-        <p:nvSpPr>
-          <p:cNvPr id="25" name="TextBox 24"/>
-          <p:cNvSpPr txBox="1"/>
-          <p:nvPr/>
-        </p:nvSpPr>
-        <p:spPr>
-          <a:xfrm>
-            <a:off x="7920990" y="3195828"/>
-            <a:ext cx="857250" cy="445770"/>
-          </a:xfrm>
-          <a:prstGeom prst="rect">
-            <a:avLst/>
-          </a:prstGeom>
-          <a:noFill/>
-        </p:spPr>
-        <p:txBody>
-          <a:bodyPr wrap="square" lIns="27432" rIns="27432" tIns="13716" bIns="13716" anchor="ctr">
-            <a:spAutoFit/>
-          </a:bodyPr>
-          <a:lstStyle/>
-          <a:p>
-            <a:pPr algn="r"/>
-            <a:r>
-              <a:rPr sz="825" b="0" i="0">
-                <a:solidFill>
-                  <a:srgbClr val="9CA3AF"/>
-                </a:solidFill>
-                <a:latin typeface="Consolas"/>
-              </a:rPr>
-              <a:t>~60-90s</a:t>
-            </a:r>
-          </a:p>
-        </p:txBody>
-      </p:sp>
-      <p:sp>
-        <p:nvSpPr>
-          <p:cNvPr id="26" name="Rounded Rectangle 25"/>
-          <p:cNvSpPr/>
-          <p:nvPr/>
-        </p:nvSpPr>
-        <p:spPr>
-          <a:xfrm>
-            <a:off x="685800" y="3696462"/>
-            <a:ext cx="8126729" cy="445770"/>
-          </a:xfrm>
-          <a:prstGeom prst="roundRect">
-            <a:avLst>
-              <a:gd name="adj" fmla="val 10000"/>
-            </a:avLst>
-          </a:prstGeom>
-          <a:solidFill>
-            <a:srgbClr val="242A44"/>
-          </a:solidFill>
-          <a:ln w="14287">
-            <a:solidFill>
-              <a:srgbClr val="FB7048"/>
-            </a:solidFill>
-          </a:ln>
-          <a:effectLst/>
-        </p:spPr>
-        <p:style>
-          <a:lnRef idx="1">
-            <a:schemeClr val="accent1"/>
-          </a:lnRef>
-          <a:fillRef idx="3">
-            <a:schemeClr val="accent1"/>
-          </a:fillRef>
-          <a:effectRef idx="2">
-            <a:schemeClr val="accent1"/>
-          </a:effectRef>
-          <a:fontRef idx="minor">
-            <a:schemeClr val="lt1"/>
-          </a:fontRef>
-        </p:style>
-        <p:txBody>
-          <a:bodyPr rtlCol="0" anchor="ctr"/>
-          <a:lstStyle/>
-          <a:p>
-            <a:pPr algn="ctr"/>
-          </a:p>
-        </p:txBody>
-      </p:sp>
-      <p:sp>
-        <p:nvSpPr>
-          <p:cNvPr id="27" name="TextBox 26"/>
-          <p:cNvSpPr txBox="1"/>
-          <p:nvPr/>
-        </p:nvSpPr>
-        <p:spPr>
-          <a:xfrm>
-            <a:off x="822959" y="3696462"/>
-            <a:ext cx="480059" cy="445770"/>
-          </a:xfrm>
-          <a:prstGeom prst="rect">
-            <a:avLst/>
-          </a:prstGeom>
-          <a:noFill/>
-        </p:spPr>
-        <p:txBody>
-          <a:bodyPr wrap="square" lIns="27432" rIns="27432" tIns="13716" bIns="13716" anchor="ctr">
-            <a:spAutoFit/>
-          </a:bodyPr>
-          <a:lstStyle/>
-          <a:p>
-            <a:pPr algn="l"/>
-            <a:r>
-              <a:rPr sz="1050" b="1" i="0">
-                <a:solidFill>
-                  <a:srgbClr val="FB7048"/>
-                </a:solidFill>
-                <a:latin typeface="Consolas"/>
-              </a:rPr>
-              <a:t>Q4</a:t>
-            </a:r>
-          </a:p>
-        </p:txBody>
-      </p:sp>
-      <p:sp>
-        <p:nvSpPr>
-          <p:cNvPr id="28" name="TextBox 27"/>
-          <p:cNvSpPr txBox="1"/>
-          <p:nvPr/>
-        </p:nvSpPr>
-        <p:spPr>
-          <a:xfrm>
-            <a:off x="1337310" y="3696462"/>
-            <a:ext cx="3086100" cy="445770"/>
-          </a:xfrm>
-          <a:prstGeom prst="rect">
-            <a:avLst/>
-          </a:prstGeom>
-          <a:noFill/>
-        </p:spPr>
-        <p:txBody>
-          <a:bodyPr wrap="square" lIns="27432" rIns="27432" tIns="13716" bIns="13716" anchor="ctr">
-            <a:spAutoFit/>
-          </a:bodyPr>
-          <a:lstStyle/>
-          <a:p>
-            <a:pPr algn="l"/>
-            <a:r>
-              <a:rPr sz="1125" b="1" i="0">
-                <a:solidFill>
-                  <a:srgbClr val="E5E7EB"/>
-                </a:solidFill>
-                <a:latin typeface="Calibri"/>
-              </a:rPr>
-              <a:t>新書 + 天氣</a:t>
-            </a:r>
-          </a:p>
-        </p:txBody>
-      </p:sp>
-      <p:sp>
-        <p:nvSpPr>
-          <p:cNvPr id="29" name="TextBox 28"/>
-          <p:cNvSpPr txBox="1"/>
-          <p:nvPr/>
-        </p:nvSpPr>
-        <p:spPr>
-          <a:xfrm>
-            <a:off x="4457700" y="3696462"/>
-            <a:ext cx="2331720" cy="445770"/>
-          </a:xfrm>
-          <a:prstGeom prst="rect">
-            <a:avLst/>
-          </a:prstGeom>
-          <a:noFill/>
-        </p:spPr>
-        <p:txBody>
-          <a:bodyPr wrap="square" lIns="27432" rIns="27432" tIns="13716" bIns="13716" anchor="ctr">
-            <a:spAutoFit/>
-          </a:bodyPr>
-          <a:lstStyle/>
-          <a:p>
-            <a:pPr algn="l"/>
-            <a:r>
-              <a:rPr sz="937" b="0" i="1">
-                <a:solidFill>
-                  <a:srgbClr val="9CA3AF"/>
-                </a:solidFill>
-                <a:latin typeface="Calibri"/>
-              </a:rPr>
-              <a:t>parallel call</a:t>
-            </a:r>
-          </a:p>
-        </p:txBody>
-      </p:sp>
-      <p:sp>
-        <p:nvSpPr>
-          <p:cNvPr id="30" name="TextBox 29"/>
-          <p:cNvSpPr txBox="1"/>
-          <p:nvPr/>
-        </p:nvSpPr>
-        <p:spPr>
-          <a:xfrm>
-            <a:off x="6858000" y="3696462"/>
-            <a:ext cx="1062990" cy="445770"/>
-          </a:xfrm>
-          <a:prstGeom prst="rect">
-            <a:avLst/>
-          </a:prstGeom>
-          <a:noFill/>
-        </p:spPr>
-        <p:txBody>
-          <a:bodyPr wrap="square" lIns="27432" rIns="27432" tIns="13716" bIns="13716" anchor="ctr">
-            <a:spAutoFit/>
-          </a:bodyPr>
-          <a:lstStyle/>
-          <a:p>
-            <a:pPr algn="ctr"/>
-            <a:r>
-              <a:rPr sz="1050" b="1" i="0">
-                <a:solidFill>
-                  <a:srgbClr val="FB7048"/>
-                </a:solidFill>
-                <a:latin typeface="Calibri"/>
-              </a:rPr>
-              <a:t>★★</a:t>
-            </a:r>
-          </a:p>
-        </p:txBody>
-      </p:sp>
-      <p:sp>
-        <p:nvSpPr>
-          <p:cNvPr id="31" name="TextBox 30"/>
-          <p:cNvSpPr txBox="1"/>
-          <p:nvPr/>
-        </p:nvSpPr>
-        <p:spPr>
-          <a:xfrm>
-            <a:off x="7920990" y="3696462"/>
-            <a:ext cx="857250" cy="445770"/>
-          </a:xfrm>
-          <a:prstGeom prst="rect">
-            <a:avLst/>
-          </a:prstGeom>
-          <a:noFill/>
-        </p:spPr>
-        <p:txBody>
-          <a:bodyPr wrap="square" lIns="27432" rIns="27432" tIns="13716" bIns="13716" anchor="ctr">
-            <a:spAutoFit/>
-          </a:bodyPr>
-          <a:lstStyle/>
-          <a:p>
-            <a:pPr algn="r"/>
-            <a:r>
-              <a:rPr sz="825" b="0" i="0">
-                <a:solidFill>
-                  <a:srgbClr val="9CA3AF"/>
-                </a:solidFill>
-                <a:latin typeface="Consolas"/>
-              </a:rPr>
-              <a:t>~45s</a:t>
-            </a:r>
-          </a:p>
-        </p:txBody>
-      </p:sp>
-      <p:sp>
-        <p:nvSpPr>
-          <p:cNvPr id="32" name="Rounded Rectangle 31"/>
-          <p:cNvSpPr/>
-          <p:nvPr/>
-        </p:nvSpPr>
-        <p:spPr>
-          <a:xfrm>
-            <a:off x="685800" y="4197096"/>
-            <a:ext cx="8126729" cy="445770"/>
-          </a:xfrm>
-          <a:prstGeom prst="roundRect">
-            <a:avLst>
-              <a:gd name="adj" fmla="val 10000"/>
-            </a:avLst>
-          </a:prstGeom>
-          <a:solidFill>
-            <a:srgbClr val="242A44"/>
-          </a:solidFill>
-          <a:ln w="14287">
-            <a:solidFill>
-              <a:srgbClr val="EF4444"/>
-            </a:solidFill>
-          </a:ln>
-          <a:effectLst/>
-        </p:spPr>
-        <p:style>
-          <a:lnRef idx="1">
-            <a:schemeClr val="accent1"/>
-          </a:lnRef>
-          <a:fillRef idx="3">
-            <a:schemeClr val="accent1"/>
-          </a:fillRef>
-          <a:effectRef idx="2">
-            <a:schemeClr val="accent1"/>
-          </a:effectRef>
-          <a:fontRef idx="minor">
-            <a:schemeClr val="lt1"/>
-          </a:fontRef>
-        </p:style>
-        <p:txBody>
-          <a:bodyPr rtlCol="0" anchor="ctr"/>
-          <a:lstStyle/>
-          <a:p>
-            <a:pPr algn="ctr"/>
-          </a:p>
-        </p:txBody>
-      </p:sp>
-      <p:sp>
-        <p:nvSpPr>
-          <p:cNvPr id="33" name="TextBox 32"/>
-          <p:cNvSpPr txBox="1"/>
-          <p:nvPr/>
-        </p:nvSpPr>
-        <p:spPr>
-          <a:xfrm>
-            <a:off x="822959" y="4197096"/>
-            <a:ext cx="480059" cy="445770"/>
-          </a:xfrm>
-          <a:prstGeom prst="rect">
-            <a:avLst/>
-          </a:prstGeom>
-          <a:noFill/>
-        </p:spPr>
-        <p:txBody>
-          <a:bodyPr wrap="square" lIns="27432" rIns="27432" tIns="13716" bIns="13716" anchor="ctr">
-            <a:spAutoFit/>
-          </a:bodyPr>
-          <a:lstStyle/>
-          <a:p>
-            <a:pPr algn="l"/>
-            <a:r>
-              <a:rPr sz="1050" b="1" i="0">
-                <a:solidFill>
-                  <a:srgbClr val="EF4444"/>
-                </a:solidFill>
-                <a:latin typeface="Consolas"/>
-              </a:rPr>
-              <a:t>Q5</a:t>
-            </a:r>
-          </a:p>
-        </p:txBody>
-      </p:sp>
-      <p:sp>
-        <p:nvSpPr>
-          <p:cNvPr id="34" name="TextBox 33"/>
-          <p:cNvSpPr txBox="1"/>
-          <p:nvPr/>
-        </p:nvSpPr>
-        <p:spPr>
-          <a:xfrm>
-            <a:off x="1337310" y="4197096"/>
-            <a:ext cx="3086100" cy="445770"/>
-          </a:xfrm>
-          <a:prstGeom prst="rect">
-            <a:avLst/>
-          </a:prstGeom>
-          <a:noFill/>
-        </p:spPr>
-        <p:txBody>
-          <a:bodyPr wrap="square" lIns="27432" rIns="27432" tIns="13716" bIns="13716" anchor="ctr">
-            <a:spAutoFit/>
-          </a:bodyPr>
-          <a:lstStyle/>
-          <a:p>
-            <a:pPr algn="l"/>
-            <a:r>
-              <a:rPr sz="1125" b="1" i="0">
-                <a:solidFill>
-                  <a:srgbClr val="E5E7EB"/>
-                </a:solidFill>
-                <a:latin typeface="Calibri"/>
-              </a:rPr>
-              <a:t>課程 + 論文 + 推薦</a:t>
-            </a:r>
-          </a:p>
-        </p:txBody>
-      </p:sp>
-      <p:sp>
-        <p:nvSpPr>
-          <p:cNvPr id="35" name="TextBox 34"/>
-          <p:cNvSpPr txBox="1"/>
-          <p:nvPr/>
-        </p:nvSpPr>
-        <p:spPr>
-          <a:xfrm>
-            <a:off x="4457700" y="4197096"/>
-            <a:ext cx="2331720" cy="445770"/>
-          </a:xfrm>
-          <a:prstGeom prst="rect">
-            <a:avLst/>
-          </a:prstGeom>
-          <a:noFill/>
-        </p:spPr>
-        <p:txBody>
-          <a:bodyPr wrap="square" lIns="27432" rIns="27432" tIns="13716" bIns="13716" anchor="ctr">
-            <a:spAutoFit/>
-          </a:bodyPr>
-          <a:lstStyle/>
-          <a:p>
-            <a:pPr algn="l"/>
-            <a:r>
-              <a:rPr sz="937" b="0" i="1">
-                <a:solidFill>
-                  <a:srgbClr val="9CA3AF"/>
-                </a:solidFill>
-                <a:latin typeface="Calibri"/>
-              </a:rPr>
-              <a:t>maxIter 挑戰</a:t>
-            </a:r>
-          </a:p>
-        </p:txBody>
-      </p:sp>
-      <p:sp>
-        <p:nvSpPr>
-          <p:cNvPr id="36" name="TextBox 35"/>
-          <p:cNvSpPr txBox="1"/>
-          <p:nvPr/>
-        </p:nvSpPr>
-        <p:spPr>
-          <a:xfrm>
-            <a:off x="6858000" y="4197096"/>
-            <a:ext cx="1062990" cy="445770"/>
-          </a:xfrm>
-          <a:prstGeom prst="rect">
-            <a:avLst/>
-          </a:prstGeom>
-          <a:noFill/>
-        </p:spPr>
-        <p:txBody>
-          <a:bodyPr wrap="square" lIns="27432" rIns="27432" tIns="13716" bIns="13716" anchor="ctr">
-            <a:spAutoFit/>
-          </a:bodyPr>
-          <a:lstStyle/>
-          <a:p>
-            <a:pPr algn="ctr"/>
-            <a:r>
-              <a:rPr sz="1050" b="1" i="0">
-                <a:solidFill>
-                  <a:srgbClr val="EF4444"/>
-                </a:solidFill>
-                <a:latin typeface="Calibri"/>
-              </a:rPr>
-              <a:t>★★★</a:t>
-            </a:r>
-          </a:p>
-        </p:txBody>
-      </p:sp>
-      <p:sp>
-        <p:nvSpPr>
-          <p:cNvPr id="37" name="TextBox 36"/>
-          <p:cNvSpPr txBox="1"/>
-          <p:nvPr/>
-        </p:nvSpPr>
-        <p:spPr>
-          <a:xfrm>
-            <a:off x="7920990" y="4197096"/>
-            <a:ext cx="857250" cy="445770"/>
-          </a:xfrm>
-          <a:prstGeom prst="rect">
-            <a:avLst/>
-          </a:prstGeom>
-          <a:noFill/>
-        </p:spPr>
-        <p:txBody>
-          <a:bodyPr wrap="square" lIns="27432" rIns="27432" tIns="13716" bIns="13716" anchor="ctr">
-            <a:spAutoFit/>
-          </a:bodyPr>
-          <a:lstStyle/>
-          <a:p>
-            <a:pPr algn="r"/>
-            <a:r>
-              <a:rPr sz="825" b="0" i="0">
-                <a:solidFill>
-                  <a:srgbClr val="9CA3AF"/>
-                </a:solidFill>
-                <a:latin typeface="Consolas"/>
-              </a:rPr>
-              <a:t>~90-120s</a:t>
-            </a:r>
-          </a:p>
-        </p:txBody>
-      </p:sp>
-      <p:sp>
-        <p:nvSpPr>
-          <p:cNvPr id="38" name="TextBox 37"/>
-          <p:cNvSpPr txBox="1"/>
-          <p:nvPr/>
-        </p:nvSpPr>
-        <p:spPr>
-          <a:xfrm>
-            <a:off x="7543800" y="4800600"/>
-            <a:ext cx="1371600" cy="274320"/>
-          </a:xfrm>
-          <a:prstGeom prst="rect">
-            <a:avLst/>
-          </a:prstGeom>
-          <a:noFill/>
-        </p:spPr>
-        <p:txBody>
-          <a:bodyPr wrap="square" lIns="27432" rIns="27432" tIns="13716" bIns="13716" anchor="t">
-            <a:spAutoFit/>
-          </a:bodyPr>
-          <a:lstStyle/>
-          <a:p>
-            <a:pPr algn="r"/>
-            <a:r>
-              <a:rPr sz="900" b="0" i="0">
-                <a:solidFill>
-                  <a:srgbClr val="CBD5E1"/>
-                </a:solidFill>
-                <a:latin typeface="Consolas"/>
-              </a:rPr>
-              <a:t>7 / 8</a:t>
+              <a:t>10 / 13</a:t>
             </a:r>
           </a:p>
         </p:txBody>
@@ -4949,6 +4175,2018 @@
             <a:avLst/>
           </a:prstGeom>
           <a:solidFill>
+            <a:srgbClr val="0EA594"/>
+          </a:solidFill>
+          <a:ln>
+            <a:noFill/>
+          </a:ln>
+          <a:effectLst/>
+        </p:spPr>
+        <p:style>
+          <a:lnRef idx="1">
+            <a:schemeClr val="accent1"/>
+          </a:lnRef>
+          <a:fillRef idx="3">
+            <a:schemeClr val="accent1"/>
+          </a:fillRef>
+          <a:effectRef idx="2">
+            <a:schemeClr val="accent1"/>
+          </a:effectRef>
+          <a:fontRef idx="minor">
+            <a:schemeClr val="lt1"/>
+          </a:fontRef>
+        </p:style>
+        <p:txBody>
+          <a:bodyPr rtlCol="0" anchor="ctr"/>
+          <a:lstStyle/>
+          <a:p>
+            <a:pPr algn="ctr"/>
+          </a:p>
+        </p:txBody>
+      </p:sp>
+      <p:sp>
+        <p:nvSpPr>
+          <p:cNvPr id="4" name="TextBox 3"/>
+          <p:cNvSpPr txBox="1"/>
+          <p:nvPr/>
+        </p:nvSpPr>
+        <p:spPr>
+          <a:xfrm>
+            <a:off x="822959" y="205739"/>
+            <a:ext cx="8229600" cy="377190"/>
+          </a:xfrm>
+          <a:prstGeom prst="rect">
+            <a:avLst/>
+          </a:prstGeom>
+          <a:noFill/>
+        </p:spPr>
+        <p:txBody>
+          <a:bodyPr wrap="square" lIns="27432" rIns="27432" tIns="13716" bIns="13716" anchor="ctr">
+            <a:spAutoFit/>
+          </a:bodyPr>
+          <a:lstStyle/>
+          <a:p>
+            <a:pPr algn="l"/>
+            <a:r>
+              <a:rPr sz="1125" b="1" i="0">
+                <a:solidFill>
+                  <a:srgbClr val="9CA3AF"/>
+                </a:solidFill>
+                <a:latin typeface="Calibri"/>
+              </a:rPr>
+              <a:t>03 · ①   M A X _ I T E R A T I O N S · 強制回覆</a:t>
+            </a:r>
+          </a:p>
+        </p:txBody>
+      </p:sp>
+      <p:sp>
+        <p:nvSpPr>
+          <p:cNvPr id="5" name="TextBox 4"/>
+          <p:cNvSpPr txBox="1"/>
+          <p:nvPr/>
+        </p:nvSpPr>
+        <p:spPr>
+          <a:xfrm>
+            <a:off x="582930" y="651509"/>
+            <a:ext cx="8229600" cy="651509"/>
+          </a:xfrm>
+          <a:prstGeom prst="rect">
+            <a:avLst/>
+          </a:prstGeom>
+          <a:noFill/>
+        </p:spPr>
+        <p:txBody>
+          <a:bodyPr wrap="square" lIns="27432" rIns="27432" tIns="13716" bIns="13716" anchor="t">
+            <a:spAutoFit/>
+          </a:bodyPr>
+          <a:lstStyle/>
+          <a:p>
+            <a:pPr algn="l"/>
+            <a:r>
+              <a:rPr sz="3150" b="1" i="0">
+                <a:solidFill>
+                  <a:srgbClr val="1F2937"/>
+                </a:solidFill>
+                <a:latin typeface="Arial Black"/>
+              </a:rPr>
+              <a:t>maxIterations 與強制回覆機制</a:t>
+            </a:r>
+          </a:p>
+        </p:txBody>
+      </p:sp>
+      <p:sp>
+        <p:nvSpPr>
+          <p:cNvPr id="6" name="TextBox 5"/>
+          <p:cNvSpPr txBox="1"/>
+          <p:nvPr/>
+        </p:nvSpPr>
+        <p:spPr>
+          <a:xfrm>
+            <a:off x="582930" y="1268730"/>
+            <a:ext cx="8229600" cy="377190"/>
+          </a:xfrm>
+          <a:prstGeom prst="rect">
+            <a:avLst/>
+          </a:prstGeom>
+          <a:noFill/>
+        </p:spPr>
+        <p:txBody>
+          <a:bodyPr wrap="square" lIns="27432" rIns="27432" tIns="13716" bIns="13716" anchor="t">
+            <a:spAutoFit/>
+          </a:bodyPr>
+          <a:lstStyle/>
+          <a:p>
+            <a:pPr algn="l"/>
+            <a:r>
+              <a:rPr sz="1500" b="0" i="1">
+                <a:solidFill>
+                  <a:srgbClr val="6B7280"/>
+                </a:solidFill>
+                <a:latin typeface="Calibri"/>
+              </a:rPr>
+              <a:t>避免 LLM 無限呼叫工具 —— 設上限 + 最後一輪強制總結</a:t>
+            </a:r>
+          </a:p>
+        </p:txBody>
+      </p:sp>
+      <p:sp>
+        <p:nvSpPr>
+          <p:cNvPr id="7" name="Rounded Rectangle 6"/>
+          <p:cNvSpPr/>
+          <p:nvPr/>
+        </p:nvSpPr>
+        <p:spPr>
+          <a:xfrm>
+            <a:off x="582930" y="1851660"/>
+            <a:ext cx="4080510" cy="2743200"/>
+          </a:xfrm>
+          <a:prstGeom prst="roundRect">
+            <a:avLst>
+              <a:gd name="adj" fmla="val 10000"/>
+            </a:avLst>
+          </a:prstGeom>
+          <a:solidFill>
+            <a:srgbClr val="FEE2E2"/>
+          </a:solidFill>
+          <a:ln w="19050">
+            <a:solidFill>
+              <a:srgbClr val="EF4444"/>
+            </a:solidFill>
+          </a:ln>
+          <a:effectLst/>
+        </p:spPr>
+        <p:style>
+          <a:lnRef idx="1">
+            <a:schemeClr val="accent1"/>
+          </a:lnRef>
+          <a:fillRef idx="3">
+            <a:schemeClr val="accent1"/>
+          </a:fillRef>
+          <a:effectRef idx="2">
+            <a:schemeClr val="accent1"/>
+          </a:effectRef>
+          <a:fontRef idx="minor">
+            <a:schemeClr val="lt1"/>
+          </a:fontRef>
+        </p:style>
+        <p:txBody>
+          <a:bodyPr rtlCol="0" anchor="ctr"/>
+          <a:lstStyle/>
+          <a:p>
+            <a:pPr algn="ctr"/>
+          </a:p>
+        </p:txBody>
+      </p:sp>
+      <p:sp>
+        <p:nvSpPr>
+          <p:cNvPr id="8" name="TextBox 7"/>
+          <p:cNvSpPr txBox="1"/>
+          <p:nvPr/>
+        </p:nvSpPr>
+        <p:spPr>
+          <a:xfrm>
+            <a:off x="754380" y="1975104"/>
+            <a:ext cx="3737610" cy="377190"/>
+          </a:xfrm>
+          <a:prstGeom prst="rect">
+            <a:avLst/>
+          </a:prstGeom>
+          <a:noFill/>
+        </p:spPr>
+        <p:txBody>
+          <a:bodyPr wrap="square" lIns="27432" rIns="27432" tIns="13716" bIns="13716" anchor="t">
+            <a:spAutoFit/>
+          </a:bodyPr>
+          <a:lstStyle/>
+          <a:p>
+            <a:pPr algn="l"/>
+            <a:r>
+              <a:rPr sz="1650" b="1" i="0">
+                <a:solidFill>
+                  <a:srgbClr val="EF4444"/>
+                </a:solidFill>
+                <a:latin typeface="Arial Black"/>
+              </a:rPr>
+              <a:t>問題:無限迴圈風險</a:t>
+            </a:r>
+          </a:p>
+        </p:txBody>
+      </p:sp>
+      <p:sp>
+        <p:nvSpPr>
+          <p:cNvPr id="9" name="TextBox 8"/>
+          <p:cNvSpPr txBox="1"/>
+          <p:nvPr/>
+        </p:nvSpPr>
+        <p:spPr>
+          <a:xfrm>
+            <a:off x="754380" y="2263139"/>
+            <a:ext cx="3771900" cy="2263139"/>
+          </a:xfrm>
+          <a:prstGeom prst="rect">
+            <a:avLst/>
+          </a:prstGeom>
+          <a:noFill/>
+        </p:spPr>
+        <p:txBody>
+          <a:bodyPr wrap="square" lIns="27432" rIns="27432" tIns="13716" bIns="13716" anchor="t">
+            <a:spAutoFit/>
+          </a:bodyPr>
+          <a:lstStyle/>
+          <a:p>
+            <a:pPr algn="l">
+              <a:spcAft>
+                <a:spcPts val="750"/>
+              </a:spcAft>
+            </a:pPr>
+            <a:r>
+              <a:rPr sz="1050" b="0" i="0">
+                <a:solidFill>
+                  <a:srgbClr val="1F2937"/>
+                </a:solidFill>
+                <a:latin typeface="Calibri"/>
+              </a:rPr>
+              <a:t>LLM 可能不斷呼叫工具而永遠不回覆使用者,造成:</a:t>
+            </a:r>
+          </a:p>
+          <a:p>
+            <a:pPr algn="l">
+              <a:spcAft>
+                <a:spcPts val="450"/>
+              </a:spcAft>
+            </a:pPr>
+            <a:r>
+              <a:rPr sz="1050" b="0" i="0">
+                <a:solidFill>
+                  <a:srgbClr val="B91C1C"/>
+                </a:solidFill>
+                <a:latin typeface="Calibri"/>
+              </a:rPr>
+              <a:t>✗  Token 成本無限增長</a:t>
+            </a:r>
+          </a:p>
+          <a:p>
+            <a:pPr algn="l">
+              <a:spcAft>
+                <a:spcPts val="450"/>
+              </a:spcAft>
+            </a:pPr>
+            <a:r>
+              <a:rPr sz="1050" b="0" i="0">
+                <a:solidFill>
+                  <a:srgbClr val="B91C1C"/>
+                </a:solidFill>
+                <a:latin typeface="Calibri"/>
+              </a:rPr>
+              <a:t>✗  回應時間過長</a:t>
+            </a:r>
+          </a:p>
+          <a:p>
+            <a:pPr algn="l">
+              <a:spcAft>
+                <a:spcPts val="0"/>
+              </a:spcAft>
+            </a:pPr>
+            <a:r>
+              <a:rPr sz="1050" b="0" i="0">
+                <a:solidFill>
+                  <a:srgbClr val="B91C1C"/>
+                </a:solidFill>
+                <a:latin typeface="Calibri"/>
+              </a:rPr>
+              <a:t>✗  使用者體驗極差</a:t>
+            </a:r>
+          </a:p>
+        </p:txBody>
+      </p:sp>
+      <p:sp>
+        <p:nvSpPr>
+          <p:cNvPr id="10" name="Rounded Rectangle 9"/>
+          <p:cNvSpPr/>
+          <p:nvPr/>
+        </p:nvSpPr>
+        <p:spPr>
+          <a:xfrm>
+            <a:off x="4834890" y="1851660"/>
+            <a:ext cx="4011929" cy="2743200"/>
+          </a:xfrm>
+          <a:prstGeom prst="roundRect">
+            <a:avLst>
+              <a:gd name="adj" fmla="val 10000"/>
+            </a:avLst>
+          </a:prstGeom>
+          <a:solidFill>
+            <a:srgbClr val="D4F7F0"/>
+          </a:solidFill>
+          <a:ln w="19050">
+            <a:solidFill>
+              <a:srgbClr val="0EA594"/>
+            </a:solidFill>
+          </a:ln>
+          <a:effectLst/>
+        </p:spPr>
+        <p:style>
+          <a:lnRef idx="1">
+            <a:schemeClr val="accent1"/>
+          </a:lnRef>
+          <a:fillRef idx="3">
+            <a:schemeClr val="accent1"/>
+          </a:fillRef>
+          <a:effectRef idx="2">
+            <a:schemeClr val="accent1"/>
+          </a:effectRef>
+          <a:fontRef idx="minor">
+            <a:schemeClr val="lt1"/>
+          </a:fontRef>
+        </p:style>
+        <p:txBody>
+          <a:bodyPr rtlCol="0" anchor="ctr"/>
+          <a:lstStyle/>
+          <a:p>
+            <a:pPr algn="ctr"/>
+          </a:p>
+        </p:txBody>
+      </p:sp>
+      <p:sp>
+        <p:nvSpPr>
+          <p:cNvPr id="11" name="TextBox 10"/>
+          <p:cNvSpPr txBox="1"/>
+          <p:nvPr/>
+        </p:nvSpPr>
+        <p:spPr>
+          <a:xfrm>
+            <a:off x="5006340" y="1975104"/>
+            <a:ext cx="3669029" cy="377190"/>
+          </a:xfrm>
+          <a:prstGeom prst="rect">
+            <a:avLst/>
+          </a:prstGeom>
+          <a:noFill/>
+        </p:spPr>
+        <p:txBody>
+          <a:bodyPr wrap="square" lIns="27432" rIns="27432" tIns="13716" bIns="13716" anchor="t">
+            <a:spAutoFit/>
+          </a:bodyPr>
+          <a:lstStyle/>
+          <a:p>
+            <a:pPr algn="l"/>
+            <a:r>
+              <a:rPr sz="1650" b="1" i="0">
+                <a:solidFill>
+                  <a:srgbClr val="0EA594"/>
+                </a:solidFill>
+                <a:latin typeface="Arial Black"/>
+              </a:rPr>
+              <a:t>解法:maxIterations = 7</a:t>
+            </a:r>
+          </a:p>
+        </p:txBody>
+      </p:sp>
+      <p:sp>
+        <p:nvSpPr>
+          <p:cNvPr id="12" name="TextBox 11"/>
+          <p:cNvSpPr txBox="1"/>
+          <p:nvPr/>
+        </p:nvSpPr>
+        <p:spPr>
+          <a:xfrm>
+            <a:off x="5006340" y="2263139"/>
+            <a:ext cx="3703320" cy="2263139"/>
+          </a:xfrm>
+          <a:prstGeom prst="rect">
+            <a:avLst/>
+          </a:prstGeom>
+          <a:noFill/>
+        </p:spPr>
+        <p:txBody>
+          <a:bodyPr wrap="square" lIns="27432" rIns="27432" tIns="13716" bIns="13716" anchor="t">
+            <a:spAutoFit/>
+          </a:bodyPr>
+          <a:lstStyle/>
+          <a:p>
+            <a:pPr algn="l">
+              <a:spcAft>
+                <a:spcPts val="450"/>
+              </a:spcAft>
+            </a:pPr>
+            <a:r>
+              <a:rPr sz="1050" b="0" i="0">
+                <a:solidFill>
+                  <a:srgbClr val="1F2937"/>
+                </a:solidFill>
+                <a:latin typeface="Calibri"/>
+              </a:rPr>
+              <a:t>✓  設定最大迭代次數上限</a:t>
+            </a:r>
+          </a:p>
+          <a:p>
+            <a:pPr algn="l">
+              <a:spcAft>
+                <a:spcPts val="150"/>
+              </a:spcAft>
+            </a:pPr>
+            <a:r>
+              <a:rPr sz="1050" b="0" i="0">
+                <a:solidFill>
+                  <a:srgbClr val="1F2937"/>
+                </a:solidFill>
+                <a:latin typeface="Calibri"/>
+              </a:rPr>
+              <a:t>✓  第 7 輪(最後一輪)時注入臨時</a:t>
+            </a:r>
+          </a:p>
+          <a:p>
+            <a:pPr algn="l">
+              <a:spcAft>
+                <a:spcPts val="150"/>
+              </a:spcAft>
+            </a:pPr>
+            <a:r>
+              <a:rPr sz="1050" b="0" i="0">
+                <a:solidFill>
+                  <a:srgbClr val="1F2937"/>
+                </a:solidFill>
+                <a:latin typeface="Calibri"/>
+              </a:rPr>
+              <a:t>    user message 強制模型停止使用</a:t>
+            </a:r>
+          </a:p>
+          <a:p>
+            <a:pPr algn="l">
+              <a:spcAft>
+                <a:spcPts val="1050"/>
+              </a:spcAft>
+            </a:pPr>
+            <a:r>
+              <a:rPr sz="1050" b="0" i="0">
+                <a:solidFill>
+                  <a:srgbClr val="1F2937"/>
+                </a:solidFill>
+                <a:latin typeface="Calibri"/>
+              </a:rPr>
+              <a:t>    工具,直接整理回覆</a:t>
+            </a:r>
+          </a:p>
+          <a:p>
+            <a:pPr algn="l">
+              <a:spcAft>
+                <a:spcPts val="150"/>
+              </a:spcAft>
+            </a:pPr>
+            <a:r>
+              <a:rPr sz="975" b="0" i="1">
+                <a:solidFill>
+                  <a:srgbClr val="0F766E"/>
+                </a:solidFill>
+                <a:latin typeface="Calibri"/>
+              </a:rPr>
+              <a:t>「請不要再使用任何工具,</a:t>
+            </a:r>
+          </a:p>
+          <a:p>
+            <a:pPr algn="l">
+              <a:spcAft>
+                <a:spcPts val="0"/>
+              </a:spcAft>
+            </a:pPr>
+            <a:r>
+              <a:rPr sz="975" b="0" i="1">
+                <a:solidFill>
+                  <a:srgbClr val="0F766E"/>
+                </a:solidFill>
+                <a:latin typeface="Calibri"/>
+              </a:rPr>
+              <a:t>  直接根據工具回傳的資料整理 Markdown 回覆。」</a:t>
+            </a:r>
+          </a:p>
+        </p:txBody>
+      </p:sp>
+      <p:sp>
+        <p:nvSpPr>
+          <p:cNvPr id="13" name="TextBox 12"/>
+          <p:cNvSpPr txBox="1"/>
+          <p:nvPr/>
+        </p:nvSpPr>
+        <p:spPr>
+          <a:xfrm>
+            <a:off x="7955279" y="4766310"/>
+            <a:ext cx="1028700" cy="240029"/>
+          </a:xfrm>
+          <a:prstGeom prst="rect">
+            <a:avLst/>
+          </a:prstGeom>
+          <a:noFill/>
+        </p:spPr>
+        <p:txBody>
+          <a:bodyPr wrap="square" lIns="27432" rIns="27432" tIns="13716" bIns="13716" anchor="t">
+            <a:spAutoFit/>
+          </a:bodyPr>
+          <a:lstStyle/>
+          <a:p>
+            <a:pPr algn="r"/>
+            <a:r>
+              <a:rPr sz="1050" b="0" i="0">
+                <a:solidFill>
+                  <a:srgbClr val="9CA3AF"/>
+                </a:solidFill>
+                <a:latin typeface="Calibri"/>
+              </a:rPr>
+              <a:t>11 / 13</a:t>
+            </a:r>
+          </a:p>
+        </p:txBody>
+      </p:sp>
+    </p:spTree>
+  </p:cSld>
+  <p:clrMapOvr>
+    <a:masterClrMapping/>
+  </p:clrMapOvr>
+</p:sld>
+</file>
+
+<file path=ppt/slides/slide12.xml><?xml version="1.0" encoding="utf-8"?>
+<p:sld xmlns:a="http://schemas.openxmlformats.org/drawingml/2006/main" xmlns:p="http://schemas.openxmlformats.org/presentationml/2006/main" xmlns:r="http://schemas.openxmlformats.org/officeDocument/2006/relationships">
+  <p:cSld>
+    <p:spTree>
+      <p:nvGrpSpPr>
+        <p:cNvPr id="1" name=""/>
+        <p:cNvGrpSpPr/>
+        <p:nvPr/>
+      </p:nvGrpSpPr>
+      <p:grpSpPr/>
+      <p:sp>
+        <p:nvSpPr>
+          <p:cNvPr id="2" name="Rectangle 1"/>
+          <p:cNvSpPr/>
+          <p:nvPr/>
+        </p:nvSpPr>
+        <p:spPr>
+          <a:xfrm>
+            <a:off x="0" y="0"/>
+            <a:ext cx="9144000" cy="5143500"/>
+          </a:xfrm>
+          <a:prstGeom prst="rect">
+            <a:avLst/>
+          </a:prstGeom>
+          <a:solidFill>
+            <a:srgbClr val="0F1429"/>
+          </a:solidFill>
+          <a:ln>
+            <a:noFill/>
+          </a:ln>
+        </p:spPr>
+        <p:style>
+          <a:lnRef idx="1">
+            <a:schemeClr val="accent1"/>
+          </a:lnRef>
+          <a:fillRef idx="3">
+            <a:schemeClr val="accent1"/>
+          </a:fillRef>
+          <a:effectRef idx="2">
+            <a:schemeClr val="accent1"/>
+          </a:effectRef>
+          <a:fontRef idx="minor">
+            <a:schemeClr val="lt1"/>
+          </a:fontRef>
+        </p:style>
+        <p:txBody>
+          <a:bodyPr rtlCol="0" anchor="ctr"/>
+          <a:lstStyle/>
+          <a:p>
+            <a:pPr algn="ctr"/>
+          </a:p>
+        </p:txBody>
+      </p:sp>
+      <p:sp>
+        <p:nvSpPr>
+          <p:cNvPr id="3" name="Oval 2"/>
+          <p:cNvSpPr/>
+          <p:nvPr/>
+        </p:nvSpPr>
+        <p:spPr>
+          <a:xfrm>
+            <a:off x="445769" y="240030"/>
+            <a:ext cx="274320" cy="274320"/>
+          </a:xfrm>
+          <a:prstGeom prst="ellipse">
+            <a:avLst/>
+          </a:prstGeom>
+          <a:solidFill>
+            <a:srgbClr val="FB7048"/>
+          </a:solidFill>
+          <a:ln>
+            <a:noFill/>
+          </a:ln>
+          <a:effectLst/>
+        </p:spPr>
+        <p:style>
+          <a:lnRef idx="1">
+            <a:schemeClr val="accent1"/>
+          </a:lnRef>
+          <a:fillRef idx="3">
+            <a:schemeClr val="accent1"/>
+          </a:fillRef>
+          <a:effectRef idx="2">
+            <a:schemeClr val="accent1"/>
+          </a:effectRef>
+          <a:fontRef idx="minor">
+            <a:schemeClr val="lt1"/>
+          </a:fontRef>
+        </p:style>
+        <p:txBody>
+          <a:bodyPr rtlCol="0" anchor="ctr"/>
+          <a:lstStyle/>
+          <a:p>
+            <a:pPr algn="ctr"/>
+          </a:p>
+        </p:txBody>
+      </p:sp>
+      <p:sp>
+        <p:nvSpPr>
+          <p:cNvPr id="4" name="TextBox 3"/>
+          <p:cNvSpPr txBox="1"/>
+          <p:nvPr/>
+        </p:nvSpPr>
+        <p:spPr>
+          <a:xfrm>
+            <a:off x="822959" y="205739"/>
+            <a:ext cx="8229600" cy="377190"/>
+          </a:xfrm>
+          <a:prstGeom prst="rect">
+            <a:avLst/>
+          </a:prstGeom>
+          <a:noFill/>
+        </p:spPr>
+        <p:txBody>
+          <a:bodyPr wrap="square" lIns="27432" rIns="27432" tIns="13716" bIns="13716" anchor="ctr">
+            <a:spAutoFit/>
+          </a:bodyPr>
+          <a:lstStyle/>
+          <a:p>
+            <a:pPr algn="l"/>
+            <a:r>
+              <a:rPr sz="1050" b="1" i="0">
+                <a:solidFill>
+                  <a:srgbClr val="CBD5E1"/>
+                </a:solidFill>
+                <a:latin typeface="Calibri"/>
+              </a:rPr>
+              <a:t>04   L I V E   D E M O</a:t>
+            </a:r>
+          </a:p>
+        </p:txBody>
+      </p:sp>
+      <p:sp>
+        <p:nvSpPr>
+          <p:cNvPr id="5" name="TextBox 4"/>
+          <p:cNvSpPr txBox="1"/>
+          <p:nvPr/>
+        </p:nvSpPr>
+        <p:spPr>
+          <a:xfrm>
+            <a:off x="582930" y="720090"/>
+            <a:ext cx="8229600" cy="582930"/>
+          </a:xfrm>
+          <a:prstGeom prst="rect">
+            <a:avLst/>
+          </a:prstGeom>
+          <a:noFill/>
+        </p:spPr>
+        <p:txBody>
+          <a:bodyPr wrap="square" lIns="27432" rIns="27432" tIns="13716" bIns="13716" anchor="t">
+            <a:spAutoFit/>
+          </a:bodyPr>
+          <a:lstStyle/>
+          <a:p>
+            <a:pPr algn="l"/>
+            <a:r>
+              <a:rPr sz="3300" b="1" i="0">
+                <a:solidFill>
+                  <a:srgbClr val="FB7048"/>
+                </a:solidFill>
+                <a:latin typeface="Arial Black"/>
+              </a:rPr>
+              <a:t>▶  切換到 Live Demo</a:t>
+            </a:r>
+          </a:p>
+        </p:txBody>
+      </p:sp>
+      <p:sp>
+        <p:nvSpPr>
+          <p:cNvPr id="6" name="TextBox 5"/>
+          <p:cNvSpPr txBox="1"/>
+          <p:nvPr/>
+        </p:nvSpPr>
+        <p:spPr>
+          <a:xfrm>
+            <a:off x="582930" y="1405889"/>
+            <a:ext cx="8229600" cy="308610"/>
+          </a:xfrm>
+          <a:prstGeom prst="rect">
+            <a:avLst/>
+          </a:prstGeom>
+          <a:noFill/>
+        </p:spPr>
+        <p:txBody>
+          <a:bodyPr wrap="square" lIns="27432" rIns="27432" tIns="13716" bIns="13716" anchor="t">
+            <a:spAutoFit/>
+          </a:bodyPr>
+          <a:lstStyle/>
+          <a:p>
+            <a:pPr algn="l"/>
+            <a:r>
+              <a:rPr sz="1350" b="0" i="1">
+                <a:solidFill>
+                  <a:srgbClr val="CBD5E1"/>
+                </a:solidFill>
+                <a:latin typeface="Calibri"/>
+              </a:rPr>
+              <a:t>25 分鐘 · 興大 AI 學伴實機</a:t>
+            </a:r>
+          </a:p>
+        </p:txBody>
+      </p:sp>
+      <p:sp>
+        <p:nvSpPr>
+          <p:cNvPr id="7" name="TextBox 6"/>
+          <p:cNvSpPr txBox="1"/>
+          <p:nvPr/>
+        </p:nvSpPr>
+        <p:spPr>
+          <a:xfrm>
+            <a:off x="582930" y="1851660"/>
+            <a:ext cx="8229600" cy="274320"/>
+          </a:xfrm>
+          <a:prstGeom prst="rect">
+            <a:avLst/>
+          </a:prstGeom>
+          <a:noFill/>
+        </p:spPr>
+        <p:txBody>
+          <a:bodyPr wrap="square" lIns="27432" rIns="27432" tIns="13716" bIns="13716" anchor="t">
+            <a:spAutoFit/>
+          </a:bodyPr>
+          <a:lstStyle/>
+          <a:p>
+            <a:pPr algn="l"/>
+            <a:r>
+              <a:rPr sz="1050" b="1" i="0">
+                <a:solidFill>
+                  <a:srgbClr val="EEE8FF"/>
+                </a:solidFill>
+                <a:latin typeface="Calibri"/>
+              </a:rPr>
+              <a:t>5 個示範問題(從淺到深,完整腳本見 03-live-demo-script.md)</a:t>
+            </a:r>
+          </a:p>
+        </p:txBody>
+      </p:sp>
+      <p:sp>
+        <p:nvSpPr>
+          <p:cNvPr id="8" name="Rounded Rectangle 7"/>
+          <p:cNvSpPr/>
+          <p:nvPr/>
+        </p:nvSpPr>
+        <p:spPr>
+          <a:xfrm>
+            <a:off x="685800" y="2194560"/>
+            <a:ext cx="8126729" cy="445770"/>
+          </a:xfrm>
+          <a:prstGeom prst="roundRect">
+            <a:avLst>
+              <a:gd name="adj" fmla="val 10000"/>
+            </a:avLst>
+          </a:prstGeom>
+          <a:solidFill>
+            <a:srgbClr val="242A44"/>
+          </a:solidFill>
+          <a:ln w="14287">
+            <a:solidFill>
+              <a:srgbClr val="0EA594"/>
+            </a:solidFill>
+          </a:ln>
+          <a:effectLst/>
+        </p:spPr>
+        <p:style>
+          <a:lnRef idx="1">
+            <a:schemeClr val="accent1"/>
+          </a:lnRef>
+          <a:fillRef idx="3">
+            <a:schemeClr val="accent1"/>
+          </a:fillRef>
+          <a:effectRef idx="2">
+            <a:schemeClr val="accent1"/>
+          </a:effectRef>
+          <a:fontRef idx="minor">
+            <a:schemeClr val="lt1"/>
+          </a:fontRef>
+        </p:style>
+        <p:txBody>
+          <a:bodyPr rtlCol="0" anchor="ctr"/>
+          <a:lstStyle/>
+          <a:p>
+            <a:pPr algn="ctr"/>
+          </a:p>
+        </p:txBody>
+      </p:sp>
+      <p:sp>
+        <p:nvSpPr>
+          <p:cNvPr id="9" name="TextBox 8"/>
+          <p:cNvSpPr txBox="1"/>
+          <p:nvPr/>
+        </p:nvSpPr>
+        <p:spPr>
+          <a:xfrm>
+            <a:off x="822959" y="2194560"/>
+            <a:ext cx="480059" cy="445770"/>
+          </a:xfrm>
+          <a:prstGeom prst="rect">
+            <a:avLst/>
+          </a:prstGeom>
+          <a:noFill/>
+        </p:spPr>
+        <p:txBody>
+          <a:bodyPr wrap="square" lIns="27432" rIns="27432" tIns="13716" bIns="13716" anchor="ctr">
+            <a:spAutoFit/>
+          </a:bodyPr>
+          <a:lstStyle/>
+          <a:p>
+            <a:pPr algn="l"/>
+            <a:r>
+              <a:rPr sz="1050" b="1" i="0">
+                <a:solidFill>
+                  <a:srgbClr val="0EA594"/>
+                </a:solidFill>
+                <a:latin typeface="Consolas"/>
+              </a:rPr>
+              <a:t>Q1</a:t>
+            </a:r>
+          </a:p>
+        </p:txBody>
+      </p:sp>
+      <p:sp>
+        <p:nvSpPr>
+          <p:cNvPr id="10" name="TextBox 9"/>
+          <p:cNvSpPr txBox="1"/>
+          <p:nvPr/>
+        </p:nvSpPr>
+        <p:spPr>
+          <a:xfrm>
+            <a:off x="1337310" y="2194560"/>
+            <a:ext cx="3086100" cy="445770"/>
+          </a:xfrm>
+          <a:prstGeom prst="rect">
+            <a:avLst/>
+          </a:prstGeom>
+          <a:noFill/>
+        </p:spPr>
+        <p:txBody>
+          <a:bodyPr wrap="square" lIns="27432" rIns="27432" tIns="13716" bIns="13716" anchor="ctr">
+            <a:spAutoFit/>
+          </a:bodyPr>
+          <a:lstStyle/>
+          <a:p>
+            <a:pPr algn="l"/>
+            <a:r>
+              <a:rPr sz="1125" b="1" i="0">
+                <a:solidFill>
+                  <a:srgbClr val="E5E7EB"/>
+                </a:solidFill>
+                <a:latin typeface="Calibri"/>
+              </a:rPr>
+              <a:t>圖書館 AI 書多少</a:t>
+            </a:r>
+          </a:p>
+        </p:txBody>
+      </p:sp>
+      <p:sp>
+        <p:nvSpPr>
+          <p:cNvPr id="11" name="TextBox 10"/>
+          <p:cNvSpPr txBox="1"/>
+          <p:nvPr/>
+        </p:nvSpPr>
+        <p:spPr>
+          <a:xfrm>
+            <a:off x="4457700" y="2194560"/>
+            <a:ext cx="2331720" cy="445770"/>
+          </a:xfrm>
+          <a:prstGeom prst="rect">
+            <a:avLst/>
+          </a:prstGeom>
+          <a:noFill/>
+        </p:spPr>
+        <p:txBody>
+          <a:bodyPr wrap="square" lIns="27432" rIns="27432" tIns="13716" bIns="13716" anchor="ctr">
+            <a:spAutoFit/>
+          </a:bodyPr>
+          <a:lstStyle/>
+          <a:p>
+            <a:pPr algn="l"/>
+            <a:r>
+              <a:rPr sz="937" b="0" i="1">
+                <a:solidFill>
+                  <a:srgbClr val="9CA3AF"/>
+                </a:solidFill>
+                <a:latin typeface="Calibri"/>
+              </a:rPr>
+              <a:t>single tool</a:t>
+            </a:r>
+          </a:p>
+        </p:txBody>
+      </p:sp>
+      <p:sp>
+        <p:nvSpPr>
+          <p:cNvPr id="12" name="TextBox 11"/>
+          <p:cNvSpPr txBox="1"/>
+          <p:nvPr/>
+        </p:nvSpPr>
+        <p:spPr>
+          <a:xfrm>
+            <a:off x="6858000" y="2194560"/>
+            <a:ext cx="1062990" cy="445770"/>
+          </a:xfrm>
+          <a:prstGeom prst="rect">
+            <a:avLst/>
+          </a:prstGeom>
+          <a:noFill/>
+        </p:spPr>
+        <p:txBody>
+          <a:bodyPr wrap="square" lIns="27432" rIns="27432" tIns="13716" bIns="13716" anchor="ctr">
+            <a:spAutoFit/>
+          </a:bodyPr>
+          <a:lstStyle/>
+          <a:p>
+            <a:pPr algn="ctr"/>
+            <a:r>
+              <a:rPr sz="1050" b="1" i="0">
+                <a:solidFill>
+                  <a:srgbClr val="0EA594"/>
+                </a:solidFill>
+                <a:latin typeface="Calibri"/>
+              </a:rPr>
+              <a:t>★</a:t>
+            </a:r>
+          </a:p>
+        </p:txBody>
+      </p:sp>
+      <p:sp>
+        <p:nvSpPr>
+          <p:cNvPr id="13" name="TextBox 12"/>
+          <p:cNvSpPr txBox="1"/>
+          <p:nvPr/>
+        </p:nvSpPr>
+        <p:spPr>
+          <a:xfrm>
+            <a:off x="7920990" y="2194560"/>
+            <a:ext cx="857250" cy="445770"/>
+          </a:xfrm>
+          <a:prstGeom prst="rect">
+            <a:avLst/>
+          </a:prstGeom>
+          <a:noFill/>
+        </p:spPr>
+        <p:txBody>
+          <a:bodyPr wrap="square" lIns="27432" rIns="27432" tIns="13716" bIns="13716" anchor="ctr">
+            <a:spAutoFit/>
+          </a:bodyPr>
+          <a:lstStyle/>
+          <a:p>
+            <a:pPr algn="r"/>
+            <a:r>
+              <a:rPr sz="825" b="0" i="0">
+                <a:solidFill>
+                  <a:srgbClr val="9CA3AF"/>
+                </a:solidFill>
+                <a:latin typeface="Consolas"/>
+              </a:rPr>
+              <a:t>~30s</a:t>
+            </a:r>
+          </a:p>
+        </p:txBody>
+      </p:sp>
+      <p:sp>
+        <p:nvSpPr>
+          <p:cNvPr id="14" name="Rounded Rectangle 13"/>
+          <p:cNvSpPr/>
+          <p:nvPr/>
+        </p:nvSpPr>
+        <p:spPr>
+          <a:xfrm>
+            <a:off x="685800" y="2695194"/>
+            <a:ext cx="8126729" cy="445770"/>
+          </a:xfrm>
+          <a:prstGeom prst="roundRect">
+            <a:avLst>
+              <a:gd name="adj" fmla="val 10000"/>
+            </a:avLst>
+          </a:prstGeom>
+          <a:solidFill>
+            <a:srgbClr val="242A44"/>
+          </a:solidFill>
+          <a:ln w="14287">
+            <a:solidFill>
+              <a:srgbClr val="0EA594"/>
+            </a:solidFill>
+          </a:ln>
+          <a:effectLst/>
+        </p:spPr>
+        <p:style>
+          <a:lnRef idx="1">
+            <a:schemeClr val="accent1"/>
+          </a:lnRef>
+          <a:fillRef idx="3">
+            <a:schemeClr val="accent1"/>
+          </a:fillRef>
+          <a:effectRef idx="2">
+            <a:schemeClr val="accent1"/>
+          </a:effectRef>
+          <a:fontRef idx="minor">
+            <a:schemeClr val="lt1"/>
+          </a:fontRef>
+        </p:style>
+        <p:txBody>
+          <a:bodyPr rtlCol="0" anchor="ctr"/>
+          <a:lstStyle/>
+          <a:p>
+            <a:pPr algn="ctr"/>
+          </a:p>
+        </p:txBody>
+      </p:sp>
+      <p:sp>
+        <p:nvSpPr>
+          <p:cNvPr id="15" name="TextBox 14"/>
+          <p:cNvSpPr txBox="1"/>
+          <p:nvPr/>
+        </p:nvSpPr>
+        <p:spPr>
+          <a:xfrm>
+            <a:off x="822959" y="2695194"/>
+            <a:ext cx="480059" cy="445770"/>
+          </a:xfrm>
+          <a:prstGeom prst="rect">
+            <a:avLst/>
+          </a:prstGeom>
+          <a:noFill/>
+        </p:spPr>
+        <p:txBody>
+          <a:bodyPr wrap="square" lIns="27432" rIns="27432" tIns="13716" bIns="13716" anchor="ctr">
+            <a:spAutoFit/>
+          </a:bodyPr>
+          <a:lstStyle/>
+          <a:p>
+            <a:pPr algn="l"/>
+            <a:r>
+              <a:rPr sz="1050" b="1" i="0">
+                <a:solidFill>
+                  <a:srgbClr val="0EA594"/>
+                </a:solidFill>
+                <a:latin typeface="Consolas"/>
+              </a:rPr>
+              <a:t>Q2</a:t>
+            </a:r>
+          </a:p>
+        </p:txBody>
+      </p:sp>
+      <p:sp>
+        <p:nvSpPr>
+          <p:cNvPr id="16" name="TextBox 15"/>
+          <p:cNvSpPr txBox="1"/>
+          <p:nvPr/>
+        </p:nvSpPr>
+        <p:spPr>
+          <a:xfrm>
+            <a:off x="1337310" y="2695194"/>
+            <a:ext cx="3086100" cy="445770"/>
+          </a:xfrm>
+          <a:prstGeom prst="rect">
+            <a:avLst/>
+          </a:prstGeom>
+          <a:noFill/>
+        </p:spPr>
+        <p:txBody>
+          <a:bodyPr wrap="square" lIns="27432" rIns="27432" tIns="13716" bIns="13716" anchor="ctr">
+            <a:spAutoFit/>
+          </a:bodyPr>
+          <a:lstStyle/>
+          <a:p>
+            <a:pPr algn="l"/>
+            <a:r>
+              <a:rPr sz="1125" b="1" i="0">
+                <a:solidFill>
+                  <a:srgbClr val="E5E7EB"/>
+                </a:solidFill>
+                <a:latin typeface="Calibri"/>
+              </a:rPr>
+              <a:t>資工系深度學習老師</a:t>
+            </a:r>
+          </a:p>
+        </p:txBody>
+      </p:sp>
+      <p:sp>
+        <p:nvSpPr>
+          <p:cNvPr id="17" name="TextBox 16"/>
+          <p:cNvSpPr txBox="1"/>
+          <p:nvPr/>
+        </p:nvSpPr>
+        <p:spPr>
+          <a:xfrm>
+            <a:off x="4457700" y="2695194"/>
+            <a:ext cx="2331720" cy="445770"/>
+          </a:xfrm>
+          <a:prstGeom prst="rect">
+            <a:avLst/>
+          </a:prstGeom>
+          <a:noFill/>
+        </p:spPr>
+        <p:txBody>
+          <a:bodyPr wrap="square" lIns="27432" rIns="27432" tIns="13716" bIns="13716" anchor="ctr">
+            <a:spAutoFit/>
+          </a:bodyPr>
+          <a:lstStyle/>
+          <a:p>
+            <a:pPr algn="l"/>
+            <a:r>
+              <a:rPr sz="937" b="0" i="1">
+                <a:solidFill>
+                  <a:srgbClr val="9CA3AF"/>
+                </a:solidFill>
+                <a:latin typeface="Calibri"/>
+              </a:rPr>
+              <a:t>single tool + 參數</a:t>
+            </a:r>
+          </a:p>
+        </p:txBody>
+      </p:sp>
+      <p:sp>
+        <p:nvSpPr>
+          <p:cNvPr id="18" name="TextBox 17"/>
+          <p:cNvSpPr txBox="1"/>
+          <p:nvPr/>
+        </p:nvSpPr>
+        <p:spPr>
+          <a:xfrm>
+            <a:off x="6858000" y="2695194"/>
+            <a:ext cx="1062990" cy="445770"/>
+          </a:xfrm>
+          <a:prstGeom prst="rect">
+            <a:avLst/>
+          </a:prstGeom>
+          <a:noFill/>
+        </p:spPr>
+        <p:txBody>
+          <a:bodyPr wrap="square" lIns="27432" rIns="27432" tIns="13716" bIns="13716" anchor="ctr">
+            <a:spAutoFit/>
+          </a:bodyPr>
+          <a:lstStyle/>
+          <a:p>
+            <a:pPr algn="ctr"/>
+            <a:r>
+              <a:rPr sz="1050" b="1" i="0">
+                <a:solidFill>
+                  <a:srgbClr val="0EA594"/>
+                </a:solidFill>
+                <a:latin typeface="Calibri"/>
+              </a:rPr>
+              <a:t>★</a:t>
+            </a:r>
+          </a:p>
+        </p:txBody>
+      </p:sp>
+      <p:sp>
+        <p:nvSpPr>
+          <p:cNvPr id="19" name="TextBox 18"/>
+          <p:cNvSpPr txBox="1"/>
+          <p:nvPr/>
+        </p:nvSpPr>
+        <p:spPr>
+          <a:xfrm>
+            <a:off x="7920990" y="2695194"/>
+            <a:ext cx="857250" cy="445770"/>
+          </a:xfrm>
+          <a:prstGeom prst="rect">
+            <a:avLst/>
+          </a:prstGeom>
+          <a:noFill/>
+        </p:spPr>
+        <p:txBody>
+          <a:bodyPr wrap="square" lIns="27432" rIns="27432" tIns="13716" bIns="13716" anchor="ctr">
+            <a:spAutoFit/>
+          </a:bodyPr>
+          <a:lstStyle/>
+          <a:p>
+            <a:pPr algn="r"/>
+            <a:r>
+              <a:rPr sz="825" b="0" i="0">
+                <a:solidFill>
+                  <a:srgbClr val="9CA3AF"/>
+                </a:solidFill>
+                <a:latin typeface="Consolas"/>
+              </a:rPr>
+              <a:t>~30s</a:t>
+            </a:r>
+          </a:p>
+        </p:txBody>
+      </p:sp>
+      <p:sp>
+        <p:nvSpPr>
+          <p:cNvPr id="20" name="Rounded Rectangle 19"/>
+          <p:cNvSpPr/>
+          <p:nvPr/>
+        </p:nvSpPr>
+        <p:spPr>
+          <a:xfrm>
+            <a:off x="685800" y="3195828"/>
+            <a:ext cx="8126729" cy="445770"/>
+          </a:xfrm>
+          <a:prstGeom prst="roundRect">
+            <a:avLst>
+              <a:gd name="adj" fmla="val 10000"/>
+            </a:avLst>
+          </a:prstGeom>
+          <a:solidFill>
+            <a:srgbClr val="242A44"/>
+          </a:solidFill>
+          <a:ln w="14287">
+            <a:solidFill>
+              <a:srgbClr val="7B5CF5"/>
+            </a:solidFill>
+          </a:ln>
+          <a:effectLst/>
+        </p:spPr>
+        <p:style>
+          <a:lnRef idx="1">
+            <a:schemeClr val="accent1"/>
+          </a:lnRef>
+          <a:fillRef idx="3">
+            <a:schemeClr val="accent1"/>
+          </a:fillRef>
+          <a:effectRef idx="2">
+            <a:schemeClr val="accent1"/>
+          </a:effectRef>
+          <a:fontRef idx="minor">
+            <a:schemeClr val="lt1"/>
+          </a:fontRef>
+        </p:style>
+        <p:txBody>
+          <a:bodyPr rtlCol="0" anchor="ctr"/>
+          <a:lstStyle/>
+          <a:p>
+            <a:pPr algn="ctr"/>
+          </a:p>
+        </p:txBody>
+      </p:sp>
+      <p:sp>
+        <p:nvSpPr>
+          <p:cNvPr id="21" name="TextBox 20"/>
+          <p:cNvSpPr txBox="1"/>
+          <p:nvPr/>
+        </p:nvSpPr>
+        <p:spPr>
+          <a:xfrm>
+            <a:off x="822959" y="3195828"/>
+            <a:ext cx="480059" cy="445770"/>
+          </a:xfrm>
+          <a:prstGeom prst="rect">
+            <a:avLst/>
+          </a:prstGeom>
+          <a:noFill/>
+        </p:spPr>
+        <p:txBody>
+          <a:bodyPr wrap="square" lIns="27432" rIns="27432" tIns="13716" bIns="13716" anchor="ctr">
+            <a:spAutoFit/>
+          </a:bodyPr>
+          <a:lstStyle/>
+          <a:p>
+            <a:pPr algn="l"/>
+            <a:r>
+              <a:rPr sz="1050" b="1" i="0">
+                <a:solidFill>
+                  <a:srgbClr val="7B5CF5"/>
+                </a:solidFill>
+                <a:latin typeface="Consolas"/>
+              </a:rPr>
+              <a:t>Q3</a:t>
+            </a:r>
+          </a:p>
+        </p:txBody>
+      </p:sp>
+      <p:sp>
+        <p:nvSpPr>
+          <p:cNvPr id="22" name="TextBox 21"/>
+          <p:cNvSpPr txBox="1"/>
+          <p:nvPr/>
+        </p:nvSpPr>
+        <p:spPr>
+          <a:xfrm>
+            <a:off x="1337310" y="3195828"/>
+            <a:ext cx="3086100" cy="445770"/>
+          </a:xfrm>
+          <a:prstGeom prst="rect">
+            <a:avLst/>
+          </a:prstGeom>
+          <a:noFill/>
+        </p:spPr>
+        <p:txBody>
+          <a:bodyPr wrap="square" lIns="27432" rIns="27432" tIns="13716" bIns="13716" anchor="ctr">
+            <a:spAutoFit/>
+          </a:bodyPr>
+          <a:lstStyle/>
+          <a:p>
+            <a:pPr algn="l"/>
+            <a:r>
+              <a:rPr sz="1125" b="1" i="0">
+                <a:solidFill>
+                  <a:srgbClr val="E5E7EB"/>
+                </a:solidFill>
+                <a:latin typeface="Calibri"/>
+              </a:rPr>
+              <a:t>AI 課程 + 教授介紹</a:t>
+            </a:r>
+          </a:p>
+        </p:txBody>
+      </p:sp>
+      <p:sp>
+        <p:nvSpPr>
+          <p:cNvPr id="23" name="TextBox 22"/>
+          <p:cNvSpPr txBox="1"/>
+          <p:nvPr/>
+        </p:nvSpPr>
+        <p:spPr>
+          <a:xfrm>
+            <a:off x="4457700" y="3195828"/>
+            <a:ext cx="2331720" cy="445770"/>
+          </a:xfrm>
+          <a:prstGeom prst="rect">
+            <a:avLst/>
+          </a:prstGeom>
+          <a:noFill/>
+        </p:spPr>
+        <p:txBody>
+          <a:bodyPr wrap="square" lIns="27432" rIns="27432" tIns="13716" bIns="13716" anchor="ctr">
+            <a:spAutoFit/>
+          </a:bodyPr>
+          <a:lstStyle/>
+          <a:p>
+            <a:pPr algn="l"/>
+            <a:r>
+              <a:rPr sz="937" b="0" i="1">
+                <a:solidFill>
+                  <a:srgbClr val="9CA3AF"/>
+                </a:solidFill>
+                <a:latin typeface="Calibri"/>
+              </a:rPr>
+              <a:t>multi-turn 主菜</a:t>
+            </a:r>
+          </a:p>
+        </p:txBody>
+      </p:sp>
+      <p:sp>
+        <p:nvSpPr>
+          <p:cNvPr id="24" name="TextBox 23"/>
+          <p:cNvSpPr txBox="1"/>
+          <p:nvPr/>
+        </p:nvSpPr>
+        <p:spPr>
+          <a:xfrm>
+            <a:off x="6858000" y="3195828"/>
+            <a:ext cx="1062990" cy="445770"/>
+          </a:xfrm>
+          <a:prstGeom prst="rect">
+            <a:avLst/>
+          </a:prstGeom>
+          <a:noFill/>
+        </p:spPr>
+        <p:txBody>
+          <a:bodyPr wrap="square" lIns="27432" rIns="27432" tIns="13716" bIns="13716" anchor="ctr">
+            <a:spAutoFit/>
+          </a:bodyPr>
+          <a:lstStyle/>
+          <a:p>
+            <a:pPr algn="ctr"/>
+            <a:r>
+              <a:rPr sz="1050" b="1" i="0">
+                <a:solidFill>
+                  <a:srgbClr val="7B5CF5"/>
+                </a:solidFill>
+                <a:latin typeface="Calibri"/>
+              </a:rPr>
+              <a:t>★★</a:t>
+            </a:r>
+          </a:p>
+        </p:txBody>
+      </p:sp>
+      <p:sp>
+        <p:nvSpPr>
+          <p:cNvPr id="25" name="TextBox 24"/>
+          <p:cNvSpPr txBox="1"/>
+          <p:nvPr/>
+        </p:nvSpPr>
+        <p:spPr>
+          <a:xfrm>
+            <a:off x="7920990" y="3195828"/>
+            <a:ext cx="857250" cy="445770"/>
+          </a:xfrm>
+          <a:prstGeom prst="rect">
+            <a:avLst/>
+          </a:prstGeom>
+          <a:noFill/>
+        </p:spPr>
+        <p:txBody>
+          <a:bodyPr wrap="square" lIns="27432" rIns="27432" tIns="13716" bIns="13716" anchor="ctr">
+            <a:spAutoFit/>
+          </a:bodyPr>
+          <a:lstStyle/>
+          <a:p>
+            <a:pPr algn="r"/>
+            <a:r>
+              <a:rPr sz="825" b="0" i="0">
+                <a:solidFill>
+                  <a:srgbClr val="9CA3AF"/>
+                </a:solidFill>
+                <a:latin typeface="Consolas"/>
+              </a:rPr>
+              <a:t>~60-90s</a:t>
+            </a:r>
+          </a:p>
+        </p:txBody>
+      </p:sp>
+      <p:sp>
+        <p:nvSpPr>
+          <p:cNvPr id="26" name="Rounded Rectangle 25"/>
+          <p:cNvSpPr/>
+          <p:nvPr/>
+        </p:nvSpPr>
+        <p:spPr>
+          <a:xfrm>
+            <a:off x="685800" y="3696462"/>
+            <a:ext cx="8126729" cy="445770"/>
+          </a:xfrm>
+          <a:prstGeom prst="roundRect">
+            <a:avLst>
+              <a:gd name="adj" fmla="val 10000"/>
+            </a:avLst>
+          </a:prstGeom>
+          <a:solidFill>
+            <a:srgbClr val="242A44"/>
+          </a:solidFill>
+          <a:ln w="14287">
+            <a:solidFill>
+              <a:srgbClr val="FB7048"/>
+            </a:solidFill>
+          </a:ln>
+          <a:effectLst/>
+        </p:spPr>
+        <p:style>
+          <a:lnRef idx="1">
+            <a:schemeClr val="accent1"/>
+          </a:lnRef>
+          <a:fillRef idx="3">
+            <a:schemeClr val="accent1"/>
+          </a:fillRef>
+          <a:effectRef idx="2">
+            <a:schemeClr val="accent1"/>
+          </a:effectRef>
+          <a:fontRef idx="minor">
+            <a:schemeClr val="lt1"/>
+          </a:fontRef>
+        </p:style>
+        <p:txBody>
+          <a:bodyPr rtlCol="0" anchor="ctr"/>
+          <a:lstStyle/>
+          <a:p>
+            <a:pPr algn="ctr"/>
+          </a:p>
+        </p:txBody>
+      </p:sp>
+      <p:sp>
+        <p:nvSpPr>
+          <p:cNvPr id="27" name="TextBox 26"/>
+          <p:cNvSpPr txBox="1"/>
+          <p:nvPr/>
+        </p:nvSpPr>
+        <p:spPr>
+          <a:xfrm>
+            <a:off x="822959" y="3696462"/>
+            <a:ext cx="480059" cy="445770"/>
+          </a:xfrm>
+          <a:prstGeom prst="rect">
+            <a:avLst/>
+          </a:prstGeom>
+          <a:noFill/>
+        </p:spPr>
+        <p:txBody>
+          <a:bodyPr wrap="square" lIns="27432" rIns="27432" tIns="13716" bIns="13716" anchor="ctr">
+            <a:spAutoFit/>
+          </a:bodyPr>
+          <a:lstStyle/>
+          <a:p>
+            <a:pPr algn="l"/>
+            <a:r>
+              <a:rPr sz="1050" b="1" i="0">
+                <a:solidFill>
+                  <a:srgbClr val="FB7048"/>
+                </a:solidFill>
+                <a:latin typeface="Consolas"/>
+              </a:rPr>
+              <a:t>Q4</a:t>
+            </a:r>
+          </a:p>
+        </p:txBody>
+      </p:sp>
+      <p:sp>
+        <p:nvSpPr>
+          <p:cNvPr id="28" name="TextBox 27"/>
+          <p:cNvSpPr txBox="1"/>
+          <p:nvPr/>
+        </p:nvSpPr>
+        <p:spPr>
+          <a:xfrm>
+            <a:off x="1337310" y="3696462"/>
+            <a:ext cx="3086100" cy="445770"/>
+          </a:xfrm>
+          <a:prstGeom prst="rect">
+            <a:avLst/>
+          </a:prstGeom>
+          <a:noFill/>
+        </p:spPr>
+        <p:txBody>
+          <a:bodyPr wrap="square" lIns="27432" rIns="27432" tIns="13716" bIns="13716" anchor="ctr">
+            <a:spAutoFit/>
+          </a:bodyPr>
+          <a:lstStyle/>
+          <a:p>
+            <a:pPr algn="l"/>
+            <a:r>
+              <a:rPr sz="1125" b="1" i="0">
+                <a:solidFill>
+                  <a:srgbClr val="E5E7EB"/>
+                </a:solidFill>
+                <a:latin typeface="Calibri"/>
+              </a:rPr>
+              <a:t>新書 + 天氣</a:t>
+            </a:r>
+          </a:p>
+        </p:txBody>
+      </p:sp>
+      <p:sp>
+        <p:nvSpPr>
+          <p:cNvPr id="29" name="TextBox 28"/>
+          <p:cNvSpPr txBox="1"/>
+          <p:nvPr/>
+        </p:nvSpPr>
+        <p:spPr>
+          <a:xfrm>
+            <a:off x="4457700" y="3696462"/>
+            <a:ext cx="2331720" cy="445770"/>
+          </a:xfrm>
+          <a:prstGeom prst="rect">
+            <a:avLst/>
+          </a:prstGeom>
+          <a:noFill/>
+        </p:spPr>
+        <p:txBody>
+          <a:bodyPr wrap="square" lIns="27432" rIns="27432" tIns="13716" bIns="13716" anchor="ctr">
+            <a:spAutoFit/>
+          </a:bodyPr>
+          <a:lstStyle/>
+          <a:p>
+            <a:pPr algn="l"/>
+            <a:r>
+              <a:rPr sz="937" b="0" i="1">
+                <a:solidFill>
+                  <a:srgbClr val="9CA3AF"/>
+                </a:solidFill>
+                <a:latin typeface="Calibri"/>
+              </a:rPr>
+              <a:t>parallel call</a:t>
+            </a:r>
+          </a:p>
+        </p:txBody>
+      </p:sp>
+      <p:sp>
+        <p:nvSpPr>
+          <p:cNvPr id="30" name="TextBox 29"/>
+          <p:cNvSpPr txBox="1"/>
+          <p:nvPr/>
+        </p:nvSpPr>
+        <p:spPr>
+          <a:xfrm>
+            <a:off x="6858000" y="3696462"/>
+            <a:ext cx="1062990" cy="445770"/>
+          </a:xfrm>
+          <a:prstGeom prst="rect">
+            <a:avLst/>
+          </a:prstGeom>
+          <a:noFill/>
+        </p:spPr>
+        <p:txBody>
+          <a:bodyPr wrap="square" lIns="27432" rIns="27432" tIns="13716" bIns="13716" anchor="ctr">
+            <a:spAutoFit/>
+          </a:bodyPr>
+          <a:lstStyle/>
+          <a:p>
+            <a:pPr algn="ctr"/>
+            <a:r>
+              <a:rPr sz="1050" b="1" i="0">
+                <a:solidFill>
+                  <a:srgbClr val="FB7048"/>
+                </a:solidFill>
+                <a:latin typeface="Calibri"/>
+              </a:rPr>
+              <a:t>★★</a:t>
+            </a:r>
+          </a:p>
+        </p:txBody>
+      </p:sp>
+      <p:sp>
+        <p:nvSpPr>
+          <p:cNvPr id="31" name="TextBox 30"/>
+          <p:cNvSpPr txBox="1"/>
+          <p:nvPr/>
+        </p:nvSpPr>
+        <p:spPr>
+          <a:xfrm>
+            <a:off x="7920990" y="3696462"/>
+            <a:ext cx="857250" cy="445770"/>
+          </a:xfrm>
+          <a:prstGeom prst="rect">
+            <a:avLst/>
+          </a:prstGeom>
+          <a:noFill/>
+        </p:spPr>
+        <p:txBody>
+          <a:bodyPr wrap="square" lIns="27432" rIns="27432" tIns="13716" bIns="13716" anchor="ctr">
+            <a:spAutoFit/>
+          </a:bodyPr>
+          <a:lstStyle/>
+          <a:p>
+            <a:pPr algn="r"/>
+            <a:r>
+              <a:rPr sz="825" b="0" i="0">
+                <a:solidFill>
+                  <a:srgbClr val="9CA3AF"/>
+                </a:solidFill>
+                <a:latin typeface="Consolas"/>
+              </a:rPr>
+              <a:t>~45s</a:t>
+            </a:r>
+          </a:p>
+        </p:txBody>
+      </p:sp>
+      <p:sp>
+        <p:nvSpPr>
+          <p:cNvPr id="32" name="Rounded Rectangle 31"/>
+          <p:cNvSpPr/>
+          <p:nvPr/>
+        </p:nvSpPr>
+        <p:spPr>
+          <a:xfrm>
+            <a:off x="685800" y="4197096"/>
+            <a:ext cx="8126729" cy="445770"/>
+          </a:xfrm>
+          <a:prstGeom prst="roundRect">
+            <a:avLst>
+              <a:gd name="adj" fmla="val 10000"/>
+            </a:avLst>
+          </a:prstGeom>
+          <a:solidFill>
+            <a:srgbClr val="242A44"/>
+          </a:solidFill>
+          <a:ln w="14287">
+            <a:solidFill>
+              <a:srgbClr val="EF4444"/>
+            </a:solidFill>
+          </a:ln>
+          <a:effectLst/>
+        </p:spPr>
+        <p:style>
+          <a:lnRef idx="1">
+            <a:schemeClr val="accent1"/>
+          </a:lnRef>
+          <a:fillRef idx="3">
+            <a:schemeClr val="accent1"/>
+          </a:fillRef>
+          <a:effectRef idx="2">
+            <a:schemeClr val="accent1"/>
+          </a:effectRef>
+          <a:fontRef idx="minor">
+            <a:schemeClr val="lt1"/>
+          </a:fontRef>
+        </p:style>
+        <p:txBody>
+          <a:bodyPr rtlCol="0" anchor="ctr"/>
+          <a:lstStyle/>
+          <a:p>
+            <a:pPr algn="ctr"/>
+          </a:p>
+        </p:txBody>
+      </p:sp>
+      <p:sp>
+        <p:nvSpPr>
+          <p:cNvPr id="33" name="TextBox 32"/>
+          <p:cNvSpPr txBox="1"/>
+          <p:nvPr/>
+        </p:nvSpPr>
+        <p:spPr>
+          <a:xfrm>
+            <a:off x="822959" y="4197096"/>
+            <a:ext cx="480059" cy="445770"/>
+          </a:xfrm>
+          <a:prstGeom prst="rect">
+            <a:avLst/>
+          </a:prstGeom>
+          <a:noFill/>
+        </p:spPr>
+        <p:txBody>
+          <a:bodyPr wrap="square" lIns="27432" rIns="27432" tIns="13716" bIns="13716" anchor="ctr">
+            <a:spAutoFit/>
+          </a:bodyPr>
+          <a:lstStyle/>
+          <a:p>
+            <a:pPr algn="l"/>
+            <a:r>
+              <a:rPr sz="1050" b="1" i="0">
+                <a:solidFill>
+                  <a:srgbClr val="EF4444"/>
+                </a:solidFill>
+                <a:latin typeface="Consolas"/>
+              </a:rPr>
+              <a:t>Q5</a:t>
+            </a:r>
+          </a:p>
+        </p:txBody>
+      </p:sp>
+      <p:sp>
+        <p:nvSpPr>
+          <p:cNvPr id="34" name="TextBox 33"/>
+          <p:cNvSpPr txBox="1"/>
+          <p:nvPr/>
+        </p:nvSpPr>
+        <p:spPr>
+          <a:xfrm>
+            <a:off x="1337310" y="4197096"/>
+            <a:ext cx="3086100" cy="445770"/>
+          </a:xfrm>
+          <a:prstGeom prst="rect">
+            <a:avLst/>
+          </a:prstGeom>
+          <a:noFill/>
+        </p:spPr>
+        <p:txBody>
+          <a:bodyPr wrap="square" lIns="27432" rIns="27432" tIns="13716" bIns="13716" anchor="ctr">
+            <a:spAutoFit/>
+          </a:bodyPr>
+          <a:lstStyle/>
+          <a:p>
+            <a:pPr algn="l"/>
+            <a:r>
+              <a:rPr sz="1125" b="1" i="0">
+                <a:solidFill>
+                  <a:srgbClr val="E5E7EB"/>
+                </a:solidFill>
+                <a:latin typeface="Calibri"/>
+              </a:rPr>
+              <a:t>課程 + 論文 + 推薦</a:t>
+            </a:r>
+          </a:p>
+        </p:txBody>
+      </p:sp>
+      <p:sp>
+        <p:nvSpPr>
+          <p:cNvPr id="35" name="TextBox 34"/>
+          <p:cNvSpPr txBox="1"/>
+          <p:nvPr/>
+        </p:nvSpPr>
+        <p:spPr>
+          <a:xfrm>
+            <a:off x="4457700" y="4197096"/>
+            <a:ext cx="2331720" cy="445770"/>
+          </a:xfrm>
+          <a:prstGeom prst="rect">
+            <a:avLst/>
+          </a:prstGeom>
+          <a:noFill/>
+        </p:spPr>
+        <p:txBody>
+          <a:bodyPr wrap="square" lIns="27432" rIns="27432" tIns="13716" bIns="13716" anchor="ctr">
+            <a:spAutoFit/>
+          </a:bodyPr>
+          <a:lstStyle/>
+          <a:p>
+            <a:pPr algn="l"/>
+            <a:r>
+              <a:rPr sz="937" b="0" i="1">
+                <a:solidFill>
+                  <a:srgbClr val="9CA3AF"/>
+                </a:solidFill>
+                <a:latin typeface="Calibri"/>
+              </a:rPr>
+              <a:t>maxIter 挑戰</a:t>
+            </a:r>
+          </a:p>
+        </p:txBody>
+      </p:sp>
+      <p:sp>
+        <p:nvSpPr>
+          <p:cNvPr id="36" name="TextBox 35"/>
+          <p:cNvSpPr txBox="1"/>
+          <p:nvPr/>
+        </p:nvSpPr>
+        <p:spPr>
+          <a:xfrm>
+            <a:off x="6858000" y="4197096"/>
+            <a:ext cx="1062990" cy="445770"/>
+          </a:xfrm>
+          <a:prstGeom prst="rect">
+            <a:avLst/>
+          </a:prstGeom>
+          <a:noFill/>
+        </p:spPr>
+        <p:txBody>
+          <a:bodyPr wrap="square" lIns="27432" rIns="27432" tIns="13716" bIns="13716" anchor="ctr">
+            <a:spAutoFit/>
+          </a:bodyPr>
+          <a:lstStyle/>
+          <a:p>
+            <a:pPr algn="ctr"/>
+            <a:r>
+              <a:rPr sz="1050" b="1" i="0">
+                <a:solidFill>
+                  <a:srgbClr val="EF4444"/>
+                </a:solidFill>
+                <a:latin typeface="Calibri"/>
+              </a:rPr>
+              <a:t>★★★</a:t>
+            </a:r>
+          </a:p>
+        </p:txBody>
+      </p:sp>
+      <p:sp>
+        <p:nvSpPr>
+          <p:cNvPr id="37" name="TextBox 36"/>
+          <p:cNvSpPr txBox="1"/>
+          <p:nvPr/>
+        </p:nvSpPr>
+        <p:spPr>
+          <a:xfrm>
+            <a:off x="7920990" y="4197096"/>
+            <a:ext cx="857250" cy="445770"/>
+          </a:xfrm>
+          <a:prstGeom prst="rect">
+            <a:avLst/>
+          </a:prstGeom>
+          <a:noFill/>
+        </p:spPr>
+        <p:txBody>
+          <a:bodyPr wrap="square" lIns="27432" rIns="27432" tIns="13716" bIns="13716" anchor="ctr">
+            <a:spAutoFit/>
+          </a:bodyPr>
+          <a:lstStyle/>
+          <a:p>
+            <a:pPr algn="r"/>
+            <a:r>
+              <a:rPr sz="825" b="0" i="0">
+                <a:solidFill>
+                  <a:srgbClr val="9CA3AF"/>
+                </a:solidFill>
+                <a:latin typeface="Consolas"/>
+              </a:rPr>
+              <a:t>~90-120s</a:t>
+            </a:r>
+          </a:p>
+        </p:txBody>
+      </p:sp>
+      <p:sp>
+        <p:nvSpPr>
+          <p:cNvPr id="38" name="TextBox 37"/>
+          <p:cNvSpPr txBox="1"/>
+          <p:nvPr/>
+        </p:nvSpPr>
+        <p:spPr>
+          <a:xfrm>
+            <a:off x="7543800" y="4800600"/>
+            <a:ext cx="1371600" cy="274320"/>
+          </a:xfrm>
+          <a:prstGeom prst="rect">
+            <a:avLst/>
+          </a:prstGeom>
+          <a:noFill/>
+        </p:spPr>
+        <p:txBody>
+          <a:bodyPr wrap="square" lIns="27432" rIns="27432" tIns="13716" bIns="13716" anchor="t">
+            <a:spAutoFit/>
+          </a:bodyPr>
+          <a:lstStyle/>
+          <a:p>
+            <a:pPr algn="r"/>
+            <a:r>
+              <a:rPr sz="900" b="0" i="0">
+                <a:solidFill>
+                  <a:srgbClr val="CBD5E1"/>
+                </a:solidFill>
+                <a:latin typeface="Consolas"/>
+              </a:rPr>
+              <a:t>12 / 13</a:t>
+            </a:r>
+          </a:p>
+        </p:txBody>
+      </p:sp>
+    </p:spTree>
+  </p:cSld>
+  <p:clrMapOvr>
+    <a:masterClrMapping/>
+  </p:clrMapOvr>
+</p:sld>
+</file>
+
+<file path=ppt/slides/slide13.xml><?xml version="1.0" encoding="utf-8"?>
+<p:sld xmlns:a="http://schemas.openxmlformats.org/drawingml/2006/main" xmlns:p="http://schemas.openxmlformats.org/presentationml/2006/main" xmlns:r="http://schemas.openxmlformats.org/officeDocument/2006/relationships">
+  <p:cSld>
+    <p:spTree>
+      <p:nvGrpSpPr>
+        <p:cNvPr id="1" name=""/>
+        <p:cNvGrpSpPr/>
+        <p:nvPr/>
+      </p:nvGrpSpPr>
+      <p:grpSpPr/>
+      <p:sp>
+        <p:nvSpPr>
+          <p:cNvPr id="2" name="Rectangle 1"/>
+          <p:cNvSpPr/>
+          <p:nvPr/>
+        </p:nvSpPr>
+        <p:spPr>
+          <a:xfrm>
+            <a:off x="0" y="0"/>
+            <a:ext cx="9144000" cy="5143500"/>
+          </a:xfrm>
+          <a:prstGeom prst="rect">
+            <a:avLst/>
+          </a:prstGeom>
+          <a:solidFill>
+            <a:srgbClr val="FFFFFF"/>
+          </a:solidFill>
+          <a:ln>
+            <a:noFill/>
+          </a:ln>
+        </p:spPr>
+        <p:style>
+          <a:lnRef idx="1">
+            <a:schemeClr val="accent1"/>
+          </a:lnRef>
+          <a:fillRef idx="3">
+            <a:schemeClr val="accent1"/>
+          </a:fillRef>
+          <a:effectRef idx="2">
+            <a:schemeClr val="accent1"/>
+          </a:effectRef>
+          <a:fontRef idx="minor">
+            <a:schemeClr val="lt1"/>
+          </a:fontRef>
+        </p:style>
+        <p:txBody>
+          <a:bodyPr rtlCol="0" anchor="ctr"/>
+          <a:lstStyle/>
+          <a:p>
+            <a:pPr algn="ctr"/>
+          </a:p>
+        </p:txBody>
+      </p:sp>
+      <p:sp>
+        <p:nvSpPr>
+          <p:cNvPr id="3" name="Oval 2"/>
+          <p:cNvSpPr/>
+          <p:nvPr/>
+        </p:nvSpPr>
+        <p:spPr>
+          <a:xfrm>
+            <a:off x="445769" y="240030"/>
+            <a:ext cx="274320" cy="274320"/>
+          </a:xfrm>
+          <a:prstGeom prst="ellipse">
+            <a:avLst/>
+          </a:prstGeom>
+          <a:solidFill>
             <a:srgbClr val="7B5CF5"/>
           </a:solidFill>
           <a:ln>
@@ -5766,7 +7004,7 @@
                 </a:solidFill>
                 <a:latin typeface="Calibri"/>
               </a:rPr>
-              <a:t>11 / 11</a:t>
+              <a:t>13 / 13</a:t>
             </a:r>
           </a:p>
         </p:txBody>
@@ -6773,7 +8011,7 @@
                 </a:solidFill>
                 <a:latin typeface="Calibri"/>
               </a:rPr>
-              <a:t>2 / 11</a:t>
+              <a:t>2 / 13</a:t>
             </a:r>
           </a:p>
         </p:txBody>
@@ -7560,7 +8798,7 @@
                 </a:solidFill>
                 <a:latin typeface="Calibri"/>
               </a:rPr>
-              <a:t>3 / 11</a:t>
+              <a:t>3 / 13</a:t>
             </a:r>
           </a:p>
         </p:txBody>
@@ -8740,7 +9978,7 @@
                 </a:solidFill>
                 <a:latin typeface="Calibri"/>
               </a:rPr>
-              <a:t>4 / 11</a:t>
+              <a:t>4 / 13</a:t>
             </a:r>
           </a:p>
         </p:txBody>
@@ -9816,7 +11054,7 @@
                 </a:solidFill>
                 <a:latin typeface="Calibri"/>
               </a:rPr>
-              <a:t>5 / 11</a:t>
+              <a:t>5 / 13</a:t>
             </a:r>
           </a:p>
         </p:txBody>
@@ -10747,7 +11985,7 @@
                 </a:solidFill>
                 <a:latin typeface="Calibri"/>
               </a:rPr>
-              <a:t>6 / 11</a:t>
+              <a:t>6 / 13</a:t>
             </a:r>
           </a:p>
         </p:txBody>
@@ -10828,7 +12066,7 @@
             <a:avLst/>
           </a:prstGeom>
           <a:solidFill>
-            <a:srgbClr val="7B5CF5"/>
+            <a:srgbClr val="0EA594"/>
           </a:solidFill>
           <a:ln>
             <a:noFill/>
@@ -10887,7 +12125,7 @@
                 </a:solidFill>
                 <a:latin typeface="Calibri"/>
               </a:rPr>
-              <a:t>01 · ③   M E S S A G E S   陣 列</a:t>
+              <a:t>01 · ②   T O O L _ U S E   /   T O O L _ R E S U L T</a:t>
             </a:r>
           </a:p>
         </p:txBody>
@@ -10922,7 +12160,7 @@
                 </a:solidFill>
                 <a:latin typeface="Arial Black"/>
               </a:rPr>
-              <a:t>messages 陣列怎麼長大</a:t>
+              <a:t>tool_use / tool_result 長什麼樣</a:t>
             </a:r>
           </a:p>
         </p:txBody>
@@ -10951,40 +12189,71 @@
           <a:p>
             <a:pPr algn="l"/>
             <a:r>
-              <a:rPr sz="1500" b="0" i="1">
+              <a:rPr sz="1275" b="0" i="1">
                 <a:solidFill>
                   <a:srgbClr val="6B7280"/>
                 </a:solidFill>
                 <a:latin typeface="Calibri"/>
               </a:rPr>
-              <a:t>loop 的「記憶」就在這個一直變長的陣列 —— LLM 每輪都看到完整脈絡</a:t>
-            </a:r>
-          </a:p>
-        </p:txBody>
-      </p:sp>
-      <p:sp>
-        <p:nvSpPr>
-          <p:cNvPr id="7" name="Rounded Rectangle 6"/>
+              <a:t>Segment 2 說「LLM 只吐字串」—— tool_use 就是那段字串,tool_result 是你塞回去的</a:t>
+            </a:r>
+          </a:p>
+        </p:txBody>
+      </p:sp>
+      <p:sp>
+        <p:nvSpPr>
+          <p:cNvPr id="7" name="TextBox 6"/>
+          <p:cNvSpPr txBox="1"/>
+          <p:nvPr/>
+        </p:nvSpPr>
+        <p:spPr>
+          <a:xfrm>
+            <a:off x="582930" y="1680210"/>
+            <a:ext cx="8229600" cy="274320"/>
+          </a:xfrm>
+          <a:prstGeom prst="rect">
+            <a:avLst/>
+          </a:prstGeom>
+          <a:noFill/>
+        </p:spPr>
+        <p:txBody>
+          <a:bodyPr wrap="square" lIns="27432" rIns="27432" tIns="13716" bIns="13716" anchor="t">
+            <a:spAutoFit/>
+          </a:bodyPr>
+          <a:lstStyle/>
+          <a:p>
+            <a:pPr algn="l"/>
+            <a:r>
+              <a:rPr sz="1125" b="1" i="0">
+                <a:solidFill>
+                  <a:srgbClr val="7B5CF5"/>
+                </a:solidFill>
+                <a:latin typeface="Calibri"/>
+              </a:rPr>
+              <a:t>①  LLM 吐出（assistant 的 content 裡）</a:t>
+            </a:r>
+          </a:p>
+        </p:txBody>
+      </p:sp>
+      <p:sp>
+        <p:nvSpPr>
+          <p:cNvPr id="8" name="Rectangle 7"/>
           <p:cNvSpPr/>
           <p:nvPr/>
         </p:nvSpPr>
         <p:spPr>
           <a:xfrm>
-            <a:off x="582930" y="1748789"/>
-            <a:ext cx="8229600" cy="384048"/>
-          </a:xfrm>
-          <a:prstGeom prst="roundRect">
-            <a:avLst>
-              <a:gd name="adj" fmla="val 10000"/>
-            </a:avLst>
+            <a:off x="582930" y="1988819"/>
+            <a:ext cx="8229600" cy="1062990"/>
+          </a:xfrm>
+          <a:prstGeom prst="rect">
+            <a:avLst/>
           </a:prstGeom>
           <a:solidFill>
-            <a:srgbClr val="DBEAFE"/>
+            <a:srgbClr val="1A2138"/>
           </a:solidFill>
-          <a:ln w="14287">
-            <a:solidFill>
-              <a:srgbClr val="3B82F6"/>
-            </a:solidFill>
+          <a:ln>
+            <a:noFill/>
           </a:ln>
           <a:effectLst/>
         </p:spPr>
@@ -11012,132 +12281,129 @@
       </p:sp>
       <p:sp>
         <p:nvSpPr>
-          <p:cNvPr id="8" name="TextBox 7"/>
-          <p:cNvSpPr txBox="1"/>
-          <p:nvPr/>
-        </p:nvSpPr>
-        <p:spPr>
-          <a:xfrm>
-            <a:off x="720090" y="1748789"/>
-            <a:ext cx="617220" cy="384048"/>
-          </a:xfrm>
-          <a:prstGeom prst="rect">
-            <a:avLst/>
-          </a:prstGeom>
-          <a:noFill/>
-        </p:spPr>
-        <p:txBody>
-          <a:bodyPr wrap="square" lIns="27432" rIns="27432" tIns="13716" bIns="13716" anchor="ctr">
+          <p:cNvPr id="9" name="TextBox 8"/>
+          <p:cNvSpPr txBox="1"/>
+          <p:nvPr/>
+        </p:nvSpPr>
+        <p:spPr>
+          <a:xfrm>
+            <a:off x="802386" y="2139696"/>
+            <a:ext cx="7852409" cy="774954"/>
+          </a:xfrm>
+          <a:prstGeom prst="rect">
+            <a:avLst/>
+          </a:prstGeom>
+          <a:noFill/>
+        </p:spPr>
+        <p:txBody>
+          <a:bodyPr wrap="square" lIns="27432" rIns="27432" tIns="13716" bIns="13716" anchor="t">
+            <a:spAutoFit/>
+          </a:bodyPr>
+          <a:lstStyle/>
+          <a:p>
+            <a:pPr algn="l">
+              <a:spcAft>
+                <a:spcPts val="75"/>
+              </a:spcAft>
+            </a:pPr>
+            <a:r>
+              <a:rPr sz="1050" b="0" i="0">
+                <a:solidFill>
+                  <a:srgbClr val="E5E7EB"/>
+                </a:solidFill>
+                <a:latin typeface="Consolas"/>
+              </a:rPr>
+              <a:t>{ "type": "tool_use", "id": "toolu_01",</a:t>
+            </a:r>
+          </a:p>
+          <a:p>
+            <a:pPr algn="l">
+              <a:spcAft>
+                <a:spcPts val="75"/>
+              </a:spcAft>
+            </a:pPr>
+            <a:r>
+              <a:rPr sz="1050" b="0" i="0">
+                <a:solidFill>
+                  <a:srgbClr val="A8E1B4"/>
+                </a:solidFill>
+                <a:latin typeface="Consolas"/>
+              </a:rPr>
+              <a:t>  "name": "search_courses",</a:t>
+            </a:r>
+          </a:p>
+          <a:p>
+            <a:pPr algn="l">
+              <a:spcAft>
+                <a:spcPts val="75"/>
+              </a:spcAft>
+            </a:pPr>
+            <a:r>
+              <a:rPr sz="1050" b="0" i="0">
+                <a:solidFill>
+                  <a:srgbClr val="E5E7EB"/>
+                </a:solidFill>
+                <a:latin typeface="Consolas"/>
+              </a:rPr>
+              <a:t>  "input": { "keyword": "深度學習", "department": "資工" } }</a:t>
+            </a:r>
+          </a:p>
+        </p:txBody>
+      </p:sp>
+      <p:sp>
+        <p:nvSpPr>
+          <p:cNvPr id="10" name="TextBox 9"/>
+          <p:cNvSpPr txBox="1"/>
+          <p:nvPr/>
+        </p:nvSpPr>
+        <p:spPr>
+          <a:xfrm>
+            <a:off x="582930" y="3223260"/>
+            <a:ext cx="8229600" cy="274320"/>
+          </a:xfrm>
+          <a:prstGeom prst="rect">
+            <a:avLst/>
+          </a:prstGeom>
+          <a:noFill/>
+        </p:spPr>
+        <p:txBody>
+          <a:bodyPr wrap="square" lIns="27432" rIns="27432" tIns="13716" bIns="13716" anchor="t">
             <a:spAutoFit/>
           </a:bodyPr>
           <a:lstStyle/>
           <a:p>
             <a:pPr algn="l"/>
             <a:r>
-              <a:rPr sz="1050" b="1" i="0">
-                <a:solidFill>
-                  <a:srgbClr val="3B82F6"/>
-                </a:solidFill>
-                <a:latin typeface="Consolas"/>
-              </a:rPr>
-              <a:t>[0]</a:t>
-            </a:r>
-          </a:p>
-        </p:txBody>
-      </p:sp>
-      <p:sp>
-        <p:nvSpPr>
-          <p:cNvPr id="9" name="TextBox 8"/>
-          <p:cNvSpPr txBox="1"/>
-          <p:nvPr/>
-        </p:nvSpPr>
-        <p:spPr>
-          <a:xfrm>
-            <a:off x="1371600" y="1748789"/>
-            <a:ext cx="1508760" cy="384048"/>
-          </a:xfrm>
-          <a:prstGeom prst="rect">
-            <a:avLst/>
-          </a:prstGeom>
-          <a:noFill/>
-        </p:spPr>
-        <p:txBody>
-          <a:bodyPr wrap="square" lIns="27432" rIns="27432" tIns="13716" bIns="13716" anchor="ctr">
-            <a:spAutoFit/>
-          </a:bodyPr>
-          <a:lstStyle/>
-          <a:p>
-            <a:pPr algn="l"/>
-            <a:r>
-              <a:rPr sz="1050" b="1" i="0">
-                <a:solidFill>
-                  <a:srgbClr val="3B82F6"/>
-                </a:solidFill>
-                <a:latin typeface="Consolas"/>
-              </a:rPr>
-              <a:t>user</a:t>
-            </a:r>
-          </a:p>
-        </p:txBody>
-      </p:sp>
-      <p:sp>
-        <p:nvSpPr>
-          <p:cNvPr id="10" name="TextBox 9"/>
-          <p:cNvSpPr txBox="1"/>
-          <p:nvPr/>
-        </p:nvSpPr>
-        <p:spPr>
-          <a:xfrm>
-            <a:off x="2948939" y="1748789"/>
-            <a:ext cx="5760720" cy="384048"/>
-          </a:xfrm>
-          <a:prstGeom prst="rect">
-            <a:avLst/>
-          </a:prstGeom>
-          <a:noFill/>
-        </p:spPr>
-        <p:txBody>
-          <a:bodyPr wrap="square" lIns="27432" rIns="27432" tIns="13716" bIns="13716" anchor="ctr">
-            <a:spAutoFit/>
-          </a:bodyPr>
-          <a:lstStyle/>
-          <a:p>
-            <a:pPr algn="l"/>
-            <a:r>
-              <a:rPr sz="1050" b="0" i="0">
-                <a:solidFill>
-                  <a:srgbClr val="1F2937"/>
+              <a:rPr sz="1125" b="1" i="0">
+                <a:solidFill>
+                  <a:srgbClr val="0F766E"/>
                 </a:solidFill>
                 <a:latin typeface="Calibri"/>
               </a:rPr>
-              <a:t>「資工系深度學習的課,老師論文?」</a:t>
-            </a:r>
-          </a:p>
-        </p:txBody>
-      </p:sp>
-      <p:sp>
-        <p:nvSpPr>
-          <p:cNvPr id="11" name="Rounded Rectangle 10"/>
+              <a:t>②  你執行完,把結果塞回去（下一則 user 訊息）</a:t>
+            </a:r>
+          </a:p>
+        </p:txBody>
+      </p:sp>
+      <p:sp>
+        <p:nvSpPr>
+          <p:cNvPr id="11" name="Rectangle 10"/>
           <p:cNvSpPr/>
           <p:nvPr/>
         </p:nvSpPr>
         <p:spPr>
           <a:xfrm>
-            <a:off x="582930" y="2173986"/>
-            <a:ext cx="8229600" cy="384048"/>
-          </a:xfrm>
-          <a:prstGeom prst="roundRect">
-            <a:avLst>
-              <a:gd name="adj" fmla="val 10000"/>
-            </a:avLst>
+            <a:off x="582930" y="3531870"/>
+            <a:ext cx="8229600" cy="891540"/>
+          </a:xfrm>
+          <a:prstGeom prst="rect">
+            <a:avLst/>
           </a:prstGeom>
           <a:solidFill>
-            <a:srgbClr val="EEE8FF"/>
+            <a:srgbClr val="1A2138"/>
           </a:solidFill>
-          <a:ln w="14287">
-            <a:solidFill>
-              <a:srgbClr val="7B5CF5"/>
-            </a:solidFill>
+          <a:ln>
+            <a:noFill/>
           </a:ln>
           <a:effectLst/>
         </p:spPr>
@@ -11171,724 +12437,62 @@
         </p:nvSpPr>
         <p:spPr>
           <a:xfrm>
-            <a:off x="720090" y="2173986"/>
-            <a:ext cx="617220" cy="384048"/>
-          </a:xfrm>
-          <a:prstGeom prst="rect">
-            <a:avLst/>
-          </a:prstGeom>
-          <a:noFill/>
-        </p:spPr>
-        <p:txBody>
-          <a:bodyPr wrap="square" lIns="27432" rIns="27432" tIns="13716" bIns="13716" anchor="ctr">
-            <a:spAutoFit/>
-          </a:bodyPr>
-          <a:lstStyle/>
-          <a:p>
-            <a:pPr algn="l"/>
-            <a:r>
-              <a:rPr sz="1050" b="1" i="0">
-                <a:solidFill>
-                  <a:srgbClr val="7B5CF5"/>
+            <a:off x="802386" y="3682746"/>
+            <a:ext cx="7852409" cy="603504"/>
+          </a:xfrm>
+          <a:prstGeom prst="rect">
+            <a:avLst/>
+          </a:prstGeom>
+          <a:noFill/>
+        </p:spPr>
+        <p:txBody>
+          <a:bodyPr wrap="square" lIns="27432" rIns="27432" tIns="13716" bIns="13716" anchor="t">
+            <a:spAutoFit/>
+          </a:bodyPr>
+          <a:lstStyle/>
+          <a:p>
+            <a:pPr algn="l">
+              <a:spcAft>
+                <a:spcPts val="75"/>
+              </a:spcAft>
+            </a:pPr>
+            <a:r>
+              <a:rPr sz="1050" b="0" i="0">
+                <a:solidFill>
+                  <a:srgbClr val="E5E7EB"/>
                 </a:solidFill>
                 <a:latin typeface="Consolas"/>
               </a:rPr>
-              <a:t>[1]</a:t>
-            </a:r>
-          </a:p>
-        </p:txBody>
-      </p:sp>
-      <p:sp>
-        <p:nvSpPr>
-          <p:cNvPr id="13" name="TextBox 12"/>
-          <p:cNvSpPr txBox="1"/>
-          <p:nvPr/>
-        </p:nvSpPr>
-        <p:spPr>
-          <a:xfrm>
-            <a:off x="1371600" y="2173986"/>
-            <a:ext cx="1508760" cy="384048"/>
-          </a:xfrm>
-          <a:prstGeom prst="rect">
-            <a:avLst/>
-          </a:prstGeom>
-          <a:noFill/>
-        </p:spPr>
-        <p:txBody>
-          <a:bodyPr wrap="square" lIns="27432" rIns="27432" tIns="13716" bIns="13716" anchor="ctr">
-            <a:spAutoFit/>
-          </a:bodyPr>
-          <a:lstStyle/>
-          <a:p>
-            <a:pPr algn="l"/>
-            <a:r>
-              <a:rPr sz="1050" b="1" i="0">
-                <a:solidFill>
-                  <a:srgbClr val="7B5CF5"/>
+              <a:t>{ "type": "tool_result", "tool_use_id": "toolu_01",</a:t>
+            </a:r>
+          </a:p>
+          <a:p>
+            <a:pPr algn="l">
+              <a:spcAft>
+                <a:spcPts val="75"/>
+              </a:spcAft>
+            </a:pPr>
+            <a:r>
+              <a:rPr sz="1050" b="0" i="0">
+                <a:solidFill>
+                  <a:srgbClr val="A8E1B4"/>
                 </a:solidFill>
                 <a:latin typeface="Consolas"/>
               </a:rPr>
-              <a:t>assistant</a:t>
-            </a:r>
-          </a:p>
-        </p:txBody>
-      </p:sp>
-      <p:sp>
-        <p:nvSpPr>
-          <p:cNvPr id="14" name="TextBox 13"/>
-          <p:cNvSpPr txBox="1"/>
-          <p:nvPr/>
-        </p:nvSpPr>
-        <p:spPr>
-          <a:xfrm>
-            <a:off x="2948939" y="2173986"/>
-            <a:ext cx="5760720" cy="384048"/>
-          </a:xfrm>
-          <a:prstGeom prst="rect">
-            <a:avLst/>
-          </a:prstGeom>
-          <a:noFill/>
-        </p:spPr>
-        <p:txBody>
-          <a:bodyPr wrap="square" lIns="27432" rIns="27432" tIns="13716" bIns="13716" anchor="ctr">
-            <a:spAutoFit/>
-          </a:bodyPr>
-          <a:lstStyle/>
-          <a:p>
-            <a:pPr algn="l"/>
-            <a:r>
-              <a:rPr sz="1050" b="0" i="0">
-                <a:solidFill>
-                  <a:srgbClr val="1F2937"/>
-                </a:solidFill>
-                <a:latin typeface="Calibri"/>
-              </a:rPr>
-              <a:t>tool_use  search_courses(...)</a:t>
-            </a:r>
-          </a:p>
-        </p:txBody>
-      </p:sp>
-      <p:sp>
-        <p:nvSpPr>
-          <p:cNvPr id="15" name="Rounded Rectangle 14"/>
+              <a:t>  "content": "5 門課,授課老師:范、林、王…" }</a:t>
+            </a:r>
+          </a:p>
+        </p:txBody>
+      </p:sp>
+      <p:sp>
+        <p:nvSpPr>
+          <p:cNvPr id="13" name="Rounded Rectangle 12"/>
           <p:cNvSpPr/>
           <p:nvPr/>
         </p:nvSpPr>
         <p:spPr>
           <a:xfrm>
-            <a:off x="582930" y="2599182"/>
-            <a:ext cx="8229600" cy="384048"/>
-          </a:xfrm>
-          <a:prstGeom prst="roundRect">
-            <a:avLst>
-              <a:gd name="adj" fmla="val 10000"/>
-            </a:avLst>
-          </a:prstGeom>
-          <a:solidFill>
-            <a:srgbClr val="D4F7F0"/>
-          </a:solidFill>
-          <a:ln w="14287">
-            <a:solidFill>
-              <a:srgbClr val="0EA594"/>
-            </a:solidFill>
-          </a:ln>
-          <a:effectLst/>
-        </p:spPr>
-        <p:style>
-          <a:lnRef idx="1">
-            <a:schemeClr val="accent1"/>
-          </a:lnRef>
-          <a:fillRef idx="3">
-            <a:schemeClr val="accent1"/>
-          </a:fillRef>
-          <a:effectRef idx="2">
-            <a:schemeClr val="accent1"/>
-          </a:effectRef>
-          <a:fontRef idx="minor">
-            <a:schemeClr val="lt1"/>
-          </a:fontRef>
-        </p:style>
-        <p:txBody>
-          <a:bodyPr rtlCol="0" anchor="ctr"/>
-          <a:lstStyle/>
-          <a:p>
-            <a:pPr algn="ctr"/>
-          </a:p>
-        </p:txBody>
-      </p:sp>
-      <p:sp>
-        <p:nvSpPr>
-          <p:cNvPr id="16" name="TextBox 15"/>
-          <p:cNvSpPr txBox="1"/>
-          <p:nvPr/>
-        </p:nvSpPr>
-        <p:spPr>
-          <a:xfrm>
-            <a:off x="720090" y="2599182"/>
-            <a:ext cx="617220" cy="384048"/>
-          </a:xfrm>
-          <a:prstGeom prst="rect">
-            <a:avLst/>
-          </a:prstGeom>
-          <a:noFill/>
-        </p:spPr>
-        <p:txBody>
-          <a:bodyPr wrap="square" lIns="27432" rIns="27432" tIns="13716" bIns="13716" anchor="ctr">
-            <a:spAutoFit/>
-          </a:bodyPr>
-          <a:lstStyle/>
-          <a:p>
-            <a:pPr algn="l"/>
-            <a:r>
-              <a:rPr sz="1050" b="1" i="0">
-                <a:solidFill>
-                  <a:srgbClr val="0EA594"/>
-                </a:solidFill>
-                <a:latin typeface="Consolas"/>
-              </a:rPr>
-              <a:t>[2]</a:t>
-            </a:r>
-          </a:p>
-        </p:txBody>
-      </p:sp>
-      <p:sp>
-        <p:nvSpPr>
-          <p:cNvPr id="17" name="TextBox 16"/>
-          <p:cNvSpPr txBox="1"/>
-          <p:nvPr/>
-        </p:nvSpPr>
-        <p:spPr>
-          <a:xfrm>
-            <a:off x="1371600" y="2599182"/>
-            <a:ext cx="1508760" cy="384048"/>
-          </a:xfrm>
-          <a:prstGeom prst="rect">
-            <a:avLst/>
-          </a:prstGeom>
-          <a:noFill/>
-        </p:spPr>
-        <p:txBody>
-          <a:bodyPr wrap="square" lIns="27432" rIns="27432" tIns="13716" bIns="13716" anchor="ctr">
-            <a:spAutoFit/>
-          </a:bodyPr>
-          <a:lstStyle/>
-          <a:p>
-            <a:pPr algn="l"/>
-            <a:r>
-              <a:rPr sz="1050" b="1" i="0">
-                <a:solidFill>
-                  <a:srgbClr val="0EA594"/>
-                </a:solidFill>
-                <a:latin typeface="Consolas"/>
-              </a:rPr>
-              <a:t>user</a:t>
-            </a:r>
-          </a:p>
-        </p:txBody>
-      </p:sp>
-      <p:sp>
-        <p:nvSpPr>
-          <p:cNvPr id="18" name="TextBox 17"/>
-          <p:cNvSpPr txBox="1"/>
-          <p:nvPr/>
-        </p:nvSpPr>
-        <p:spPr>
-          <a:xfrm>
-            <a:off x="2948939" y="2599182"/>
-            <a:ext cx="5760720" cy="384048"/>
-          </a:xfrm>
-          <a:prstGeom prst="rect">
-            <a:avLst/>
-          </a:prstGeom>
-          <a:noFill/>
-        </p:spPr>
-        <p:txBody>
-          <a:bodyPr wrap="square" lIns="27432" rIns="27432" tIns="13716" bIns="13716" anchor="ctr">
-            <a:spAutoFit/>
-          </a:bodyPr>
-          <a:lstStyle/>
-          <a:p>
-            <a:pPr algn="l"/>
-            <a:r>
-              <a:rPr sz="1050" b="0" i="0">
-                <a:solidFill>
-                  <a:srgbClr val="1F2937"/>
-                </a:solidFill>
-                <a:latin typeface="Calibri"/>
-              </a:rPr>
-              <a:t>tool_result  「5 門課,老師:范…」</a:t>
-            </a:r>
-          </a:p>
-        </p:txBody>
-      </p:sp>
-      <p:sp>
-        <p:nvSpPr>
-          <p:cNvPr id="19" name="Rounded Rectangle 18"/>
-          <p:cNvSpPr/>
-          <p:nvPr/>
-        </p:nvSpPr>
-        <p:spPr>
-          <a:xfrm>
-            <a:off x="582930" y="3024378"/>
-            <a:ext cx="8229600" cy="384048"/>
-          </a:xfrm>
-          <a:prstGeom prst="roundRect">
-            <a:avLst>
-              <a:gd name="adj" fmla="val 10000"/>
-            </a:avLst>
-          </a:prstGeom>
-          <a:solidFill>
-            <a:srgbClr val="EEE8FF"/>
-          </a:solidFill>
-          <a:ln w="14287">
-            <a:solidFill>
-              <a:srgbClr val="7B5CF5"/>
-            </a:solidFill>
-          </a:ln>
-          <a:effectLst/>
-        </p:spPr>
-        <p:style>
-          <a:lnRef idx="1">
-            <a:schemeClr val="accent1"/>
-          </a:lnRef>
-          <a:fillRef idx="3">
-            <a:schemeClr val="accent1"/>
-          </a:fillRef>
-          <a:effectRef idx="2">
-            <a:schemeClr val="accent1"/>
-          </a:effectRef>
-          <a:fontRef idx="minor">
-            <a:schemeClr val="lt1"/>
-          </a:fontRef>
-        </p:style>
-        <p:txBody>
-          <a:bodyPr rtlCol="0" anchor="ctr"/>
-          <a:lstStyle/>
-          <a:p>
-            <a:pPr algn="ctr"/>
-          </a:p>
-        </p:txBody>
-      </p:sp>
-      <p:sp>
-        <p:nvSpPr>
-          <p:cNvPr id="20" name="TextBox 19"/>
-          <p:cNvSpPr txBox="1"/>
-          <p:nvPr/>
-        </p:nvSpPr>
-        <p:spPr>
-          <a:xfrm>
-            <a:off x="720090" y="3024378"/>
-            <a:ext cx="617220" cy="384048"/>
-          </a:xfrm>
-          <a:prstGeom prst="rect">
-            <a:avLst/>
-          </a:prstGeom>
-          <a:noFill/>
-        </p:spPr>
-        <p:txBody>
-          <a:bodyPr wrap="square" lIns="27432" rIns="27432" tIns="13716" bIns="13716" anchor="ctr">
-            <a:spAutoFit/>
-          </a:bodyPr>
-          <a:lstStyle/>
-          <a:p>
-            <a:pPr algn="l"/>
-            <a:r>
-              <a:rPr sz="1050" b="1" i="0">
-                <a:solidFill>
-                  <a:srgbClr val="7B5CF5"/>
-                </a:solidFill>
-                <a:latin typeface="Consolas"/>
-              </a:rPr>
-              <a:t>[3]</a:t>
-            </a:r>
-          </a:p>
-        </p:txBody>
-      </p:sp>
-      <p:sp>
-        <p:nvSpPr>
-          <p:cNvPr id="21" name="TextBox 20"/>
-          <p:cNvSpPr txBox="1"/>
-          <p:nvPr/>
-        </p:nvSpPr>
-        <p:spPr>
-          <a:xfrm>
-            <a:off x="1371600" y="3024378"/>
-            <a:ext cx="1508760" cy="384048"/>
-          </a:xfrm>
-          <a:prstGeom prst="rect">
-            <a:avLst/>
-          </a:prstGeom>
-          <a:noFill/>
-        </p:spPr>
-        <p:txBody>
-          <a:bodyPr wrap="square" lIns="27432" rIns="27432" tIns="13716" bIns="13716" anchor="ctr">
-            <a:spAutoFit/>
-          </a:bodyPr>
-          <a:lstStyle/>
-          <a:p>
-            <a:pPr algn="l"/>
-            <a:r>
-              <a:rPr sz="1050" b="1" i="0">
-                <a:solidFill>
-                  <a:srgbClr val="7B5CF5"/>
-                </a:solidFill>
-                <a:latin typeface="Consolas"/>
-              </a:rPr>
-              <a:t>assistant</a:t>
-            </a:r>
-          </a:p>
-        </p:txBody>
-      </p:sp>
-      <p:sp>
-        <p:nvSpPr>
-          <p:cNvPr id="22" name="TextBox 21"/>
-          <p:cNvSpPr txBox="1"/>
-          <p:nvPr/>
-        </p:nvSpPr>
-        <p:spPr>
-          <a:xfrm>
-            <a:off x="2948939" y="3024378"/>
-            <a:ext cx="5760720" cy="384048"/>
-          </a:xfrm>
-          <a:prstGeom prst="rect">
-            <a:avLst/>
-          </a:prstGeom>
-          <a:noFill/>
-        </p:spPr>
-        <p:txBody>
-          <a:bodyPr wrap="square" lIns="27432" rIns="27432" tIns="13716" bIns="13716" anchor="ctr">
-            <a:spAutoFit/>
-          </a:bodyPr>
-          <a:lstStyle/>
-          <a:p>
-            <a:pPr algn="l"/>
-            <a:r>
-              <a:rPr sz="1050" b="0" i="0">
-                <a:solidFill>
-                  <a:srgbClr val="1F2937"/>
-                </a:solidFill>
-                <a:latin typeface="Calibri"/>
-              </a:rPr>
-              <a:t>tool_use  search_arxiv(范)</a:t>
-            </a:r>
-          </a:p>
-        </p:txBody>
-      </p:sp>
-      <p:sp>
-        <p:nvSpPr>
-          <p:cNvPr id="23" name="Rounded Rectangle 22"/>
-          <p:cNvSpPr/>
-          <p:nvPr/>
-        </p:nvSpPr>
-        <p:spPr>
-          <a:xfrm>
-            <a:off x="582930" y="3449574"/>
-            <a:ext cx="8229600" cy="384048"/>
-          </a:xfrm>
-          <a:prstGeom prst="roundRect">
-            <a:avLst>
-              <a:gd name="adj" fmla="val 10000"/>
-            </a:avLst>
-          </a:prstGeom>
-          <a:solidFill>
-            <a:srgbClr val="D4F7F0"/>
-          </a:solidFill>
-          <a:ln w="14287">
-            <a:solidFill>
-              <a:srgbClr val="0EA594"/>
-            </a:solidFill>
-          </a:ln>
-          <a:effectLst/>
-        </p:spPr>
-        <p:style>
-          <a:lnRef idx="1">
-            <a:schemeClr val="accent1"/>
-          </a:lnRef>
-          <a:fillRef idx="3">
-            <a:schemeClr val="accent1"/>
-          </a:fillRef>
-          <a:effectRef idx="2">
-            <a:schemeClr val="accent1"/>
-          </a:effectRef>
-          <a:fontRef idx="minor">
-            <a:schemeClr val="lt1"/>
-          </a:fontRef>
-        </p:style>
-        <p:txBody>
-          <a:bodyPr rtlCol="0" anchor="ctr"/>
-          <a:lstStyle/>
-          <a:p>
-            <a:pPr algn="ctr"/>
-          </a:p>
-        </p:txBody>
-      </p:sp>
-      <p:sp>
-        <p:nvSpPr>
-          <p:cNvPr id="24" name="TextBox 23"/>
-          <p:cNvSpPr txBox="1"/>
-          <p:nvPr/>
-        </p:nvSpPr>
-        <p:spPr>
-          <a:xfrm>
-            <a:off x="720090" y="3449574"/>
-            <a:ext cx="617220" cy="384048"/>
-          </a:xfrm>
-          <a:prstGeom prst="rect">
-            <a:avLst/>
-          </a:prstGeom>
-          <a:noFill/>
-        </p:spPr>
-        <p:txBody>
-          <a:bodyPr wrap="square" lIns="27432" rIns="27432" tIns="13716" bIns="13716" anchor="ctr">
-            <a:spAutoFit/>
-          </a:bodyPr>
-          <a:lstStyle/>
-          <a:p>
-            <a:pPr algn="l"/>
-            <a:r>
-              <a:rPr sz="1050" b="1" i="0">
-                <a:solidFill>
-                  <a:srgbClr val="0EA594"/>
-                </a:solidFill>
-                <a:latin typeface="Consolas"/>
-              </a:rPr>
-              <a:t>[4]</a:t>
-            </a:r>
-          </a:p>
-        </p:txBody>
-      </p:sp>
-      <p:sp>
-        <p:nvSpPr>
-          <p:cNvPr id="25" name="TextBox 24"/>
-          <p:cNvSpPr txBox="1"/>
-          <p:nvPr/>
-        </p:nvSpPr>
-        <p:spPr>
-          <a:xfrm>
-            <a:off x="1371600" y="3449574"/>
-            <a:ext cx="1508760" cy="384048"/>
-          </a:xfrm>
-          <a:prstGeom prst="rect">
-            <a:avLst/>
-          </a:prstGeom>
-          <a:noFill/>
-        </p:spPr>
-        <p:txBody>
-          <a:bodyPr wrap="square" lIns="27432" rIns="27432" tIns="13716" bIns="13716" anchor="ctr">
-            <a:spAutoFit/>
-          </a:bodyPr>
-          <a:lstStyle/>
-          <a:p>
-            <a:pPr algn="l"/>
-            <a:r>
-              <a:rPr sz="1050" b="1" i="0">
-                <a:solidFill>
-                  <a:srgbClr val="0EA594"/>
-                </a:solidFill>
-                <a:latin typeface="Consolas"/>
-              </a:rPr>
-              <a:t>user</a:t>
-            </a:r>
-          </a:p>
-        </p:txBody>
-      </p:sp>
-      <p:sp>
-        <p:nvSpPr>
-          <p:cNvPr id="26" name="TextBox 25"/>
-          <p:cNvSpPr txBox="1"/>
-          <p:nvPr/>
-        </p:nvSpPr>
-        <p:spPr>
-          <a:xfrm>
-            <a:off x="2948939" y="3449574"/>
-            <a:ext cx="5760720" cy="384048"/>
-          </a:xfrm>
-          <a:prstGeom prst="rect">
-            <a:avLst/>
-          </a:prstGeom>
-          <a:noFill/>
-        </p:spPr>
-        <p:txBody>
-          <a:bodyPr wrap="square" lIns="27432" rIns="27432" tIns="13716" bIns="13716" anchor="ctr">
-            <a:spAutoFit/>
-          </a:bodyPr>
-          <a:lstStyle/>
-          <a:p>
-            <a:pPr algn="l"/>
-            <a:r>
-              <a:rPr sz="1050" b="0" i="0">
-                <a:solidFill>
-                  <a:srgbClr val="1F2937"/>
-                </a:solidFill>
-                <a:latin typeface="Calibri"/>
-              </a:rPr>
-              <a:t>tool_result  「3 篇論文…」</a:t>
-            </a:r>
-          </a:p>
-        </p:txBody>
-      </p:sp>
-      <p:sp>
-        <p:nvSpPr>
-          <p:cNvPr id="27" name="Rounded Rectangle 26"/>
-          <p:cNvSpPr/>
-          <p:nvPr/>
-        </p:nvSpPr>
-        <p:spPr>
-          <a:xfrm>
-            <a:off x="582930" y="3874770"/>
-            <a:ext cx="8229600" cy="384048"/>
-          </a:xfrm>
-          <a:prstGeom prst="roundRect">
-            <a:avLst>
-              <a:gd name="adj" fmla="val 10000"/>
-            </a:avLst>
-          </a:prstGeom>
-          <a:solidFill>
-            <a:srgbClr val="FFE7DB"/>
-          </a:solidFill>
-          <a:ln w="14287">
-            <a:solidFill>
-              <a:srgbClr val="FB7048"/>
-            </a:solidFill>
-          </a:ln>
-          <a:effectLst/>
-        </p:spPr>
-        <p:style>
-          <a:lnRef idx="1">
-            <a:schemeClr val="accent1"/>
-          </a:lnRef>
-          <a:fillRef idx="3">
-            <a:schemeClr val="accent1"/>
-          </a:fillRef>
-          <a:effectRef idx="2">
-            <a:schemeClr val="accent1"/>
-          </a:effectRef>
-          <a:fontRef idx="minor">
-            <a:schemeClr val="lt1"/>
-          </a:fontRef>
-        </p:style>
-        <p:txBody>
-          <a:bodyPr rtlCol="0" anchor="ctr"/>
-          <a:lstStyle/>
-          <a:p>
-            <a:pPr algn="ctr"/>
-          </a:p>
-        </p:txBody>
-      </p:sp>
-      <p:sp>
-        <p:nvSpPr>
-          <p:cNvPr id="28" name="TextBox 27"/>
-          <p:cNvSpPr txBox="1"/>
-          <p:nvPr/>
-        </p:nvSpPr>
-        <p:spPr>
-          <a:xfrm>
-            <a:off x="720090" y="3874770"/>
-            <a:ext cx="617220" cy="384048"/>
-          </a:xfrm>
-          <a:prstGeom prst="rect">
-            <a:avLst/>
-          </a:prstGeom>
-          <a:noFill/>
-        </p:spPr>
-        <p:txBody>
-          <a:bodyPr wrap="square" lIns="27432" rIns="27432" tIns="13716" bIns="13716" anchor="ctr">
-            <a:spAutoFit/>
-          </a:bodyPr>
-          <a:lstStyle/>
-          <a:p>
-            <a:pPr algn="l"/>
-            <a:r>
-              <a:rPr sz="1050" b="1" i="0">
-                <a:solidFill>
-                  <a:srgbClr val="FB7048"/>
-                </a:solidFill>
-                <a:latin typeface="Consolas"/>
-              </a:rPr>
-              <a:t>[5]</a:t>
-            </a:r>
-          </a:p>
-        </p:txBody>
-      </p:sp>
-      <p:sp>
-        <p:nvSpPr>
-          <p:cNvPr id="29" name="TextBox 28"/>
-          <p:cNvSpPr txBox="1"/>
-          <p:nvPr/>
-        </p:nvSpPr>
-        <p:spPr>
-          <a:xfrm>
-            <a:off x="1371600" y="3874770"/>
-            <a:ext cx="1508760" cy="384048"/>
-          </a:xfrm>
-          <a:prstGeom prst="rect">
-            <a:avLst/>
-          </a:prstGeom>
-          <a:noFill/>
-        </p:spPr>
-        <p:txBody>
-          <a:bodyPr wrap="square" lIns="27432" rIns="27432" tIns="13716" bIns="13716" anchor="ctr">
-            <a:spAutoFit/>
-          </a:bodyPr>
-          <a:lstStyle/>
-          <a:p>
-            <a:pPr algn="l"/>
-            <a:r>
-              <a:rPr sz="1050" b="1" i="0">
-                <a:solidFill>
-                  <a:srgbClr val="FB7048"/>
-                </a:solidFill>
-                <a:latin typeface="Consolas"/>
-              </a:rPr>
-              <a:t>assistant</a:t>
-            </a:r>
-          </a:p>
-        </p:txBody>
-      </p:sp>
-      <p:sp>
-        <p:nvSpPr>
-          <p:cNvPr id="30" name="TextBox 29"/>
-          <p:cNvSpPr txBox="1"/>
-          <p:nvPr/>
-        </p:nvSpPr>
-        <p:spPr>
-          <a:xfrm>
-            <a:off x="2948939" y="3874770"/>
-            <a:ext cx="5760720" cy="384048"/>
-          </a:xfrm>
-          <a:prstGeom prst="rect">
-            <a:avLst/>
-          </a:prstGeom>
-          <a:noFill/>
-        </p:spPr>
-        <p:txBody>
-          <a:bodyPr wrap="square" lIns="27432" rIns="27432" tIns="13716" bIns="13716" anchor="ctr">
-            <a:spAutoFit/>
-          </a:bodyPr>
-          <a:lstStyle/>
-          <a:p>
-            <a:pPr algn="l"/>
-            <a:r>
-              <a:rPr sz="1050" b="0" i="0">
-                <a:solidFill>
-                  <a:srgbClr val="1F2937"/>
-                </a:solidFill>
-                <a:latin typeface="Calibri"/>
-              </a:rPr>
-              <a:t>text  「你可修這門…」  ✓ end_turn</a:t>
-            </a:r>
-          </a:p>
-        </p:txBody>
-      </p:sp>
-      <p:sp>
-        <p:nvSpPr>
-          <p:cNvPr id="31" name="Rounded Rectangle 30"/>
-          <p:cNvSpPr/>
-          <p:nvPr/>
-        </p:nvSpPr>
-        <p:spPr>
-          <a:xfrm>
-            <a:off x="582930" y="4766310"/>
+            <a:off x="582930" y="4560570"/>
             <a:ext cx="8229600" cy="274320"/>
           </a:xfrm>
           <a:prstGeom prst="roundRect">
@@ -11930,13 +12534,13 @@
       </p:sp>
       <p:sp>
         <p:nvSpPr>
-          <p:cNvPr id="32" name="TextBox 31"/>
-          <p:cNvSpPr txBox="1"/>
-          <p:nvPr/>
-        </p:nvSpPr>
-        <p:spPr>
-          <a:xfrm>
-            <a:off x="788669" y="4766310"/>
+          <p:cNvPr id="14" name="TextBox 13"/>
+          <p:cNvSpPr txBox="1"/>
+          <p:nvPr/>
+        </p:nvSpPr>
+        <p:spPr>
+          <a:xfrm>
+            <a:off x="788669" y="4560570"/>
             <a:ext cx="7818120" cy="274320"/>
           </a:xfrm>
           <a:prstGeom prst="rect">
@@ -11958,14 +12562,14 @@
                 </a:solidFill>
                 <a:latin typeface="Calibri"/>
               </a:rPr>
-              <a:t>▶  每輪把上一輪結果接在後面 → 陣列越來越長 → 這就是「多輪記憶」的全部祕密</a:t>
-            </a:r>
-          </a:p>
-        </p:txBody>
-      </p:sp>
-      <p:sp>
-        <p:nvSpPr>
-          <p:cNvPr id="33" name="TextBox 32"/>
+              <a:t>▶  靠 id ↔ tool_use_id 配對,LLM 才知道這個結果是回應哪一次呼叫</a:t>
+            </a:r>
+          </a:p>
+        </p:txBody>
+      </p:sp>
+      <p:sp>
+        <p:nvSpPr>
+          <p:cNvPr id="15" name="TextBox 14"/>
           <p:cNvSpPr txBox="1"/>
           <p:nvPr/>
         </p:nvSpPr>
@@ -11993,7 +12597,7 @@
                 </a:solidFill>
                 <a:latin typeface="Calibri"/>
               </a:rPr>
-              <a:t>7 / 11</a:t>
+              <a:t>7 / 13</a:t>
             </a:r>
           </a:p>
         </p:txBody>
@@ -12074,7 +12678,7 @@
             <a:avLst/>
           </a:prstGeom>
           <a:solidFill>
-            <a:srgbClr val="0EA594"/>
+            <a:srgbClr val="7B5CF5"/>
           </a:solidFill>
           <a:ln>
             <a:noFill/>
@@ -12133,7 +12737,7 @@
                 </a:solidFill>
                 <a:latin typeface="Calibri"/>
               </a:rPr>
-              <a:t>01 · ④   P A R A L L E L   T O O L   C A L L S</a:t>
+              <a:t>01 · ③   M E S S A G E S   陣 列</a:t>
             </a:r>
           </a:p>
         </p:txBody>
@@ -12168,7 +12772,7 @@
                 </a:solidFill>
                 <a:latin typeface="Arial Black"/>
               </a:rPr>
-              <a:t>一回合可以同時開多支工具</a:t>
+              <a:t>messages 陣列怎麼長大</a:t>
             </a:r>
           </a:p>
         </p:txBody>
@@ -12203,7 +12807,7 @@
                 </a:solidFill>
                 <a:latin typeface="Calibri"/>
               </a:rPr>
-              <a:t>parallel tool calls —— 用 Promise.all 並行,不是一個接一個</a:t>
+              <a:t>loop 的「記憶」就在這個一直變長的陣列 —— LLM 每輪都看到完整脈絡</a:t>
             </a:r>
           </a:p>
         </p:txBody>
@@ -12216,8 +12820,926 @@
         </p:nvSpPr>
         <p:spPr>
           <a:xfrm>
-            <a:off x="3086100" y="1783080"/>
-            <a:ext cx="2948939" cy="617220"/>
+            <a:off x="582930" y="1748789"/>
+            <a:ext cx="8229600" cy="384048"/>
+          </a:xfrm>
+          <a:prstGeom prst="roundRect">
+            <a:avLst>
+              <a:gd name="adj" fmla="val 10000"/>
+            </a:avLst>
+          </a:prstGeom>
+          <a:solidFill>
+            <a:srgbClr val="DBEAFE"/>
+          </a:solidFill>
+          <a:ln w="14287">
+            <a:solidFill>
+              <a:srgbClr val="3B82F6"/>
+            </a:solidFill>
+          </a:ln>
+          <a:effectLst/>
+        </p:spPr>
+        <p:style>
+          <a:lnRef idx="1">
+            <a:schemeClr val="accent1"/>
+          </a:lnRef>
+          <a:fillRef idx="3">
+            <a:schemeClr val="accent1"/>
+          </a:fillRef>
+          <a:effectRef idx="2">
+            <a:schemeClr val="accent1"/>
+          </a:effectRef>
+          <a:fontRef idx="minor">
+            <a:schemeClr val="lt1"/>
+          </a:fontRef>
+        </p:style>
+        <p:txBody>
+          <a:bodyPr rtlCol="0" anchor="ctr"/>
+          <a:lstStyle/>
+          <a:p>
+            <a:pPr algn="ctr"/>
+          </a:p>
+        </p:txBody>
+      </p:sp>
+      <p:sp>
+        <p:nvSpPr>
+          <p:cNvPr id="8" name="TextBox 7"/>
+          <p:cNvSpPr txBox="1"/>
+          <p:nvPr/>
+        </p:nvSpPr>
+        <p:spPr>
+          <a:xfrm>
+            <a:off x="720090" y="1748789"/>
+            <a:ext cx="617220" cy="384048"/>
+          </a:xfrm>
+          <a:prstGeom prst="rect">
+            <a:avLst/>
+          </a:prstGeom>
+          <a:noFill/>
+        </p:spPr>
+        <p:txBody>
+          <a:bodyPr wrap="square" lIns="27432" rIns="27432" tIns="13716" bIns="13716" anchor="ctr">
+            <a:spAutoFit/>
+          </a:bodyPr>
+          <a:lstStyle/>
+          <a:p>
+            <a:pPr algn="l"/>
+            <a:r>
+              <a:rPr sz="1050" b="1" i="0">
+                <a:solidFill>
+                  <a:srgbClr val="3B82F6"/>
+                </a:solidFill>
+                <a:latin typeface="Consolas"/>
+              </a:rPr>
+              <a:t>[0]</a:t>
+            </a:r>
+          </a:p>
+        </p:txBody>
+      </p:sp>
+      <p:sp>
+        <p:nvSpPr>
+          <p:cNvPr id="9" name="TextBox 8"/>
+          <p:cNvSpPr txBox="1"/>
+          <p:nvPr/>
+        </p:nvSpPr>
+        <p:spPr>
+          <a:xfrm>
+            <a:off x="1371600" y="1748789"/>
+            <a:ext cx="1508760" cy="384048"/>
+          </a:xfrm>
+          <a:prstGeom prst="rect">
+            <a:avLst/>
+          </a:prstGeom>
+          <a:noFill/>
+        </p:spPr>
+        <p:txBody>
+          <a:bodyPr wrap="square" lIns="27432" rIns="27432" tIns="13716" bIns="13716" anchor="ctr">
+            <a:spAutoFit/>
+          </a:bodyPr>
+          <a:lstStyle/>
+          <a:p>
+            <a:pPr algn="l"/>
+            <a:r>
+              <a:rPr sz="1050" b="1" i="0">
+                <a:solidFill>
+                  <a:srgbClr val="3B82F6"/>
+                </a:solidFill>
+                <a:latin typeface="Consolas"/>
+              </a:rPr>
+              <a:t>user</a:t>
+            </a:r>
+          </a:p>
+        </p:txBody>
+      </p:sp>
+      <p:sp>
+        <p:nvSpPr>
+          <p:cNvPr id="10" name="TextBox 9"/>
+          <p:cNvSpPr txBox="1"/>
+          <p:nvPr/>
+        </p:nvSpPr>
+        <p:spPr>
+          <a:xfrm>
+            <a:off x="2948939" y="1748789"/>
+            <a:ext cx="5760720" cy="384048"/>
+          </a:xfrm>
+          <a:prstGeom prst="rect">
+            <a:avLst/>
+          </a:prstGeom>
+          <a:noFill/>
+        </p:spPr>
+        <p:txBody>
+          <a:bodyPr wrap="square" lIns="27432" rIns="27432" tIns="13716" bIns="13716" anchor="ctr">
+            <a:spAutoFit/>
+          </a:bodyPr>
+          <a:lstStyle/>
+          <a:p>
+            <a:pPr algn="l"/>
+            <a:r>
+              <a:rPr sz="1050" b="0" i="0">
+                <a:solidFill>
+                  <a:srgbClr val="1F2937"/>
+                </a:solidFill>
+                <a:latin typeface="Calibri"/>
+              </a:rPr>
+              <a:t>「資工系深度學習的課,老師論文?」</a:t>
+            </a:r>
+          </a:p>
+        </p:txBody>
+      </p:sp>
+      <p:sp>
+        <p:nvSpPr>
+          <p:cNvPr id="11" name="Rounded Rectangle 10"/>
+          <p:cNvSpPr/>
+          <p:nvPr/>
+        </p:nvSpPr>
+        <p:spPr>
+          <a:xfrm>
+            <a:off x="582930" y="2173986"/>
+            <a:ext cx="8229600" cy="384048"/>
+          </a:xfrm>
+          <a:prstGeom prst="roundRect">
+            <a:avLst>
+              <a:gd name="adj" fmla="val 10000"/>
+            </a:avLst>
+          </a:prstGeom>
+          <a:solidFill>
+            <a:srgbClr val="EEE8FF"/>
+          </a:solidFill>
+          <a:ln w="14287">
+            <a:solidFill>
+              <a:srgbClr val="7B5CF5"/>
+            </a:solidFill>
+          </a:ln>
+          <a:effectLst/>
+        </p:spPr>
+        <p:style>
+          <a:lnRef idx="1">
+            <a:schemeClr val="accent1"/>
+          </a:lnRef>
+          <a:fillRef idx="3">
+            <a:schemeClr val="accent1"/>
+          </a:fillRef>
+          <a:effectRef idx="2">
+            <a:schemeClr val="accent1"/>
+          </a:effectRef>
+          <a:fontRef idx="minor">
+            <a:schemeClr val="lt1"/>
+          </a:fontRef>
+        </p:style>
+        <p:txBody>
+          <a:bodyPr rtlCol="0" anchor="ctr"/>
+          <a:lstStyle/>
+          <a:p>
+            <a:pPr algn="ctr"/>
+          </a:p>
+        </p:txBody>
+      </p:sp>
+      <p:sp>
+        <p:nvSpPr>
+          <p:cNvPr id="12" name="TextBox 11"/>
+          <p:cNvSpPr txBox="1"/>
+          <p:nvPr/>
+        </p:nvSpPr>
+        <p:spPr>
+          <a:xfrm>
+            <a:off x="720090" y="2173986"/>
+            <a:ext cx="617220" cy="384048"/>
+          </a:xfrm>
+          <a:prstGeom prst="rect">
+            <a:avLst/>
+          </a:prstGeom>
+          <a:noFill/>
+        </p:spPr>
+        <p:txBody>
+          <a:bodyPr wrap="square" lIns="27432" rIns="27432" tIns="13716" bIns="13716" anchor="ctr">
+            <a:spAutoFit/>
+          </a:bodyPr>
+          <a:lstStyle/>
+          <a:p>
+            <a:pPr algn="l"/>
+            <a:r>
+              <a:rPr sz="1050" b="1" i="0">
+                <a:solidFill>
+                  <a:srgbClr val="7B5CF5"/>
+                </a:solidFill>
+                <a:latin typeface="Consolas"/>
+              </a:rPr>
+              <a:t>[1]</a:t>
+            </a:r>
+          </a:p>
+        </p:txBody>
+      </p:sp>
+      <p:sp>
+        <p:nvSpPr>
+          <p:cNvPr id="13" name="TextBox 12"/>
+          <p:cNvSpPr txBox="1"/>
+          <p:nvPr/>
+        </p:nvSpPr>
+        <p:spPr>
+          <a:xfrm>
+            <a:off x="1371600" y="2173986"/>
+            <a:ext cx="1508760" cy="384048"/>
+          </a:xfrm>
+          <a:prstGeom prst="rect">
+            <a:avLst/>
+          </a:prstGeom>
+          <a:noFill/>
+        </p:spPr>
+        <p:txBody>
+          <a:bodyPr wrap="square" lIns="27432" rIns="27432" tIns="13716" bIns="13716" anchor="ctr">
+            <a:spAutoFit/>
+          </a:bodyPr>
+          <a:lstStyle/>
+          <a:p>
+            <a:pPr algn="l"/>
+            <a:r>
+              <a:rPr sz="1050" b="1" i="0">
+                <a:solidFill>
+                  <a:srgbClr val="7B5CF5"/>
+                </a:solidFill>
+                <a:latin typeface="Consolas"/>
+              </a:rPr>
+              <a:t>assistant</a:t>
+            </a:r>
+          </a:p>
+        </p:txBody>
+      </p:sp>
+      <p:sp>
+        <p:nvSpPr>
+          <p:cNvPr id="14" name="TextBox 13"/>
+          <p:cNvSpPr txBox="1"/>
+          <p:nvPr/>
+        </p:nvSpPr>
+        <p:spPr>
+          <a:xfrm>
+            <a:off x="2948939" y="2173986"/>
+            <a:ext cx="5760720" cy="384048"/>
+          </a:xfrm>
+          <a:prstGeom prst="rect">
+            <a:avLst/>
+          </a:prstGeom>
+          <a:noFill/>
+        </p:spPr>
+        <p:txBody>
+          <a:bodyPr wrap="square" lIns="27432" rIns="27432" tIns="13716" bIns="13716" anchor="ctr">
+            <a:spAutoFit/>
+          </a:bodyPr>
+          <a:lstStyle/>
+          <a:p>
+            <a:pPr algn="l"/>
+            <a:r>
+              <a:rPr sz="1050" b="0" i="0">
+                <a:solidFill>
+                  <a:srgbClr val="1F2937"/>
+                </a:solidFill>
+                <a:latin typeface="Calibri"/>
+              </a:rPr>
+              <a:t>tool_use  search_courses(...)</a:t>
+            </a:r>
+          </a:p>
+        </p:txBody>
+      </p:sp>
+      <p:sp>
+        <p:nvSpPr>
+          <p:cNvPr id="15" name="Rounded Rectangle 14"/>
+          <p:cNvSpPr/>
+          <p:nvPr/>
+        </p:nvSpPr>
+        <p:spPr>
+          <a:xfrm>
+            <a:off x="582930" y="2599182"/>
+            <a:ext cx="8229600" cy="384048"/>
+          </a:xfrm>
+          <a:prstGeom prst="roundRect">
+            <a:avLst>
+              <a:gd name="adj" fmla="val 10000"/>
+            </a:avLst>
+          </a:prstGeom>
+          <a:solidFill>
+            <a:srgbClr val="D4F7F0"/>
+          </a:solidFill>
+          <a:ln w="14287">
+            <a:solidFill>
+              <a:srgbClr val="0EA594"/>
+            </a:solidFill>
+          </a:ln>
+          <a:effectLst/>
+        </p:spPr>
+        <p:style>
+          <a:lnRef idx="1">
+            <a:schemeClr val="accent1"/>
+          </a:lnRef>
+          <a:fillRef idx="3">
+            <a:schemeClr val="accent1"/>
+          </a:fillRef>
+          <a:effectRef idx="2">
+            <a:schemeClr val="accent1"/>
+          </a:effectRef>
+          <a:fontRef idx="minor">
+            <a:schemeClr val="lt1"/>
+          </a:fontRef>
+        </p:style>
+        <p:txBody>
+          <a:bodyPr rtlCol="0" anchor="ctr"/>
+          <a:lstStyle/>
+          <a:p>
+            <a:pPr algn="ctr"/>
+          </a:p>
+        </p:txBody>
+      </p:sp>
+      <p:sp>
+        <p:nvSpPr>
+          <p:cNvPr id="16" name="TextBox 15"/>
+          <p:cNvSpPr txBox="1"/>
+          <p:nvPr/>
+        </p:nvSpPr>
+        <p:spPr>
+          <a:xfrm>
+            <a:off x="720090" y="2599182"/>
+            <a:ext cx="617220" cy="384048"/>
+          </a:xfrm>
+          <a:prstGeom prst="rect">
+            <a:avLst/>
+          </a:prstGeom>
+          <a:noFill/>
+        </p:spPr>
+        <p:txBody>
+          <a:bodyPr wrap="square" lIns="27432" rIns="27432" tIns="13716" bIns="13716" anchor="ctr">
+            <a:spAutoFit/>
+          </a:bodyPr>
+          <a:lstStyle/>
+          <a:p>
+            <a:pPr algn="l"/>
+            <a:r>
+              <a:rPr sz="1050" b="1" i="0">
+                <a:solidFill>
+                  <a:srgbClr val="0EA594"/>
+                </a:solidFill>
+                <a:latin typeface="Consolas"/>
+              </a:rPr>
+              <a:t>[2]</a:t>
+            </a:r>
+          </a:p>
+        </p:txBody>
+      </p:sp>
+      <p:sp>
+        <p:nvSpPr>
+          <p:cNvPr id="17" name="TextBox 16"/>
+          <p:cNvSpPr txBox="1"/>
+          <p:nvPr/>
+        </p:nvSpPr>
+        <p:spPr>
+          <a:xfrm>
+            <a:off x="1371600" y="2599182"/>
+            <a:ext cx="1508760" cy="384048"/>
+          </a:xfrm>
+          <a:prstGeom prst="rect">
+            <a:avLst/>
+          </a:prstGeom>
+          <a:noFill/>
+        </p:spPr>
+        <p:txBody>
+          <a:bodyPr wrap="square" lIns="27432" rIns="27432" tIns="13716" bIns="13716" anchor="ctr">
+            <a:spAutoFit/>
+          </a:bodyPr>
+          <a:lstStyle/>
+          <a:p>
+            <a:pPr algn="l"/>
+            <a:r>
+              <a:rPr sz="1050" b="1" i="0">
+                <a:solidFill>
+                  <a:srgbClr val="0EA594"/>
+                </a:solidFill>
+                <a:latin typeface="Consolas"/>
+              </a:rPr>
+              <a:t>user</a:t>
+            </a:r>
+          </a:p>
+        </p:txBody>
+      </p:sp>
+      <p:sp>
+        <p:nvSpPr>
+          <p:cNvPr id="18" name="TextBox 17"/>
+          <p:cNvSpPr txBox="1"/>
+          <p:nvPr/>
+        </p:nvSpPr>
+        <p:spPr>
+          <a:xfrm>
+            <a:off x="2948939" y="2599182"/>
+            <a:ext cx="5760720" cy="384048"/>
+          </a:xfrm>
+          <a:prstGeom prst="rect">
+            <a:avLst/>
+          </a:prstGeom>
+          <a:noFill/>
+        </p:spPr>
+        <p:txBody>
+          <a:bodyPr wrap="square" lIns="27432" rIns="27432" tIns="13716" bIns="13716" anchor="ctr">
+            <a:spAutoFit/>
+          </a:bodyPr>
+          <a:lstStyle/>
+          <a:p>
+            <a:pPr algn="l"/>
+            <a:r>
+              <a:rPr sz="1050" b="0" i="0">
+                <a:solidFill>
+                  <a:srgbClr val="1F2937"/>
+                </a:solidFill>
+                <a:latin typeface="Calibri"/>
+              </a:rPr>
+              <a:t>tool_result  「5 門課,老師:范…」</a:t>
+            </a:r>
+          </a:p>
+        </p:txBody>
+      </p:sp>
+      <p:sp>
+        <p:nvSpPr>
+          <p:cNvPr id="19" name="Rounded Rectangle 18"/>
+          <p:cNvSpPr/>
+          <p:nvPr/>
+        </p:nvSpPr>
+        <p:spPr>
+          <a:xfrm>
+            <a:off x="582930" y="3024378"/>
+            <a:ext cx="8229600" cy="384048"/>
+          </a:xfrm>
+          <a:prstGeom prst="roundRect">
+            <a:avLst>
+              <a:gd name="adj" fmla="val 10000"/>
+            </a:avLst>
+          </a:prstGeom>
+          <a:solidFill>
+            <a:srgbClr val="EEE8FF"/>
+          </a:solidFill>
+          <a:ln w="14287">
+            <a:solidFill>
+              <a:srgbClr val="7B5CF5"/>
+            </a:solidFill>
+          </a:ln>
+          <a:effectLst/>
+        </p:spPr>
+        <p:style>
+          <a:lnRef idx="1">
+            <a:schemeClr val="accent1"/>
+          </a:lnRef>
+          <a:fillRef idx="3">
+            <a:schemeClr val="accent1"/>
+          </a:fillRef>
+          <a:effectRef idx="2">
+            <a:schemeClr val="accent1"/>
+          </a:effectRef>
+          <a:fontRef idx="minor">
+            <a:schemeClr val="lt1"/>
+          </a:fontRef>
+        </p:style>
+        <p:txBody>
+          <a:bodyPr rtlCol="0" anchor="ctr"/>
+          <a:lstStyle/>
+          <a:p>
+            <a:pPr algn="ctr"/>
+          </a:p>
+        </p:txBody>
+      </p:sp>
+      <p:sp>
+        <p:nvSpPr>
+          <p:cNvPr id="20" name="TextBox 19"/>
+          <p:cNvSpPr txBox="1"/>
+          <p:nvPr/>
+        </p:nvSpPr>
+        <p:spPr>
+          <a:xfrm>
+            <a:off x="720090" y="3024378"/>
+            <a:ext cx="617220" cy="384048"/>
+          </a:xfrm>
+          <a:prstGeom prst="rect">
+            <a:avLst/>
+          </a:prstGeom>
+          <a:noFill/>
+        </p:spPr>
+        <p:txBody>
+          <a:bodyPr wrap="square" lIns="27432" rIns="27432" tIns="13716" bIns="13716" anchor="ctr">
+            <a:spAutoFit/>
+          </a:bodyPr>
+          <a:lstStyle/>
+          <a:p>
+            <a:pPr algn="l"/>
+            <a:r>
+              <a:rPr sz="1050" b="1" i="0">
+                <a:solidFill>
+                  <a:srgbClr val="7B5CF5"/>
+                </a:solidFill>
+                <a:latin typeface="Consolas"/>
+              </a:rPr>
+              <a:t>[3]</a:t>
+            </a:r>
+          </a:p>
+        </p:txBody>
+      </p:sp>
+      <p:sp>
+        <p:nvSpPr>
+          <p:cNvPr id="21" name="TextBox 20"/>
+          <p:cNvSpPr txBox="1"/>
+          <p:nvPr/>
+        </p:nvSpPr>
+        <p:spPr>
+          <a:xfrm>
+            <a:off x="1371600" y="3024378"/>
+            <a:ext cx="1508760" cy="384048"/>
+          </a:xfrm>
+          <a:prstGeom prst="rect">
+            <a:avLst/>
+          </a:prstGeom>
+          <a:noFill/>
+        </p:spPr>
+        <p:txBody>
+          <a:bodyPr wrap="square" lIns="27432" rIns="27432" tIns="13716" bIns="13716" anchor="ctr">
+            <a:spAutoFit/>
+          </a:bodyPr>
+          <a:lstStyle/>
+          <a:p>
+            <a:pPr algn="l"/>
+            <a:r>
+              <a:rPr sz="1050" b="1" i="0">
+                <a:solidFill>
+                  <a:srgbClr val="7B5CF5"/>
+                </a:solidFill>
+                <a:latin typeface="Consolas"/>
+              </a:rPr>
+              <a:t>assistant</a:t>
+            </a:r>
+          </a:p>
+        </p:txBody>
+      </p:sp>
+      <p:sp>
+        <p:nvSpPr>
+          <p:cNvPr id="22" name="TextBox 21"/>
+          <p:cNvSpPr txBox="1"/>
+          <p:nvPr/>
+        </p:nvSpPr>
+        <p:spPr>
+          <a:xfrm>
+            <a:off x="2948939" y="3024378"/>
+            <a:ext cx="5760720" cy="384048"/>
+          </a:xfrm>
+          <a:prstGeom prst="rect">
+            <a:avLst/>
+          </a:prstGeom>
+          <a:noFill/>
+        </p:spPr>
+        <p:txBody>
+          <a:bodyPr wrap="square" lIns="27432" rIns="27432" tIns="13716" bIns="13716" anchor="ctr">
+            <a:spAutoFit/>
+          </a:bodyPr>
+          <a:lstStyle/>
+          <a:p>
+            <a:pPr algn="l"/>
+            <a:r>
+              <a:rPr sz="1050" b="0" i="0">
+                <a:solidFill>
+                  <a:srgbClr val="1F2937"/>
+                </a:solidFill>
+                <a:latin typeface="Calibri"/>
+              </a:rPr>
+              <a:t>tool_use  search_arxiv(范)</a:t>
+            </a:r>
+          </a:p>
+        </p:txBody>
+      </p:sp>
+      <p:sp>
+        <p:nvSpPr>
+          <p:cNvPr id="23" name="Rounded Rectangle 22"/>
+          <p:cNvSpPr/>
+          <p:nvPr/>
+        </p:nvSpPr>
+        <p:spPr>
+          <a:xfrm>
+            <a:off x="582930" y="3449574"/>
+            <a:ext cx="8229600" cy="384048"/>
+          </a:xfrm>
+          <a:prstGeom prst="roundRect">
+            <a:avLst>
+              <a:gd name="adj" fmla="val 10000"/>
+            </a:avLst>
+          </a:prstGeom>
+          <a:solidFill>
+            <a:srgbClr val="D4F7F0"/>
+          </a:solidFill>
+          <a:ln w="14287">
+            <a:solidFill>
+              <a:srgbClr val="0EA594"/>
+            </a:solidFill>
+          </a:ln>
+          <a:effectLst/>
+        </p:spPr>
+        <p:style>
+          <a:lnRef idx="1">
+            <a:schemeClr val="accent1"/>
+          </a:lnRef>
+          <a:fillRef idx="3">
+            <a:schemeClr val="accent1"/>
+          </a:fillRef>
+          <a:effectRef idx="2">
+            <a:schemeClr val="accent1"/>
+          </a:effectRef>
+          <a:fontRef idx="minor">
+            <a:schemeClr val="lt1"/>
+          </a:fontRef>
+        </p:style>
+        <p:txBody>
+          <a:bodyPr rtlCol="0" anchor="ctr"/>
+          <a:lstStyle/>
+          <a:p>
+            <a:pPr algn="ctr"/>
+          </a:p>
+        </p:txBody>
+      </p:sp>
+      <p:sp>
+        <p:nvSpPr>
+          <p:cNvPr id="24" name="TextBox 23"/>
+          <p:cNvSpPr txBox="1"/>
+          <p:nvPr/>
+        </p:nvSpPr>
+        <p:spPr>
+          <a:xfrm>
+            <a:off x="720090" y="3449574"/>
+            <a:ext cx="617220" cy="384048"/>
+          </a:xfrm>
+          <a:prstGeom prst="rect">
+            <a:avLst/>
+          </a:prstGeom>
+          <a:noFill/>
+        </p:spPr>
+        <p:txBody>
+          <a:bodyPr wrap="square" lIns="27432" rIns="27432" tIns="13716" bIns="13716" anchor="ctr">
+            <a:spAutoFit/>
+          </a:bodyPr>
+          <a:lstStyle/>
+          <a:p>
+            <a:pPr algn="l"/>
+            <a:r>
+              <a:rPr sz="1050" b="1" i="0">
+                <a:solidFill>
+                  <a:srgbClr val="0EA594"/>
+                </a:solidFill>
+                <a:latin typeface="Consolas"/>
+              </a:rPr>
+              <a:t>[4]</a:t>
+            </a:r>
+          </a:p>
+        </p:txBody>
+      </p:sp>
+      <p:sp>
+        <p:nvSpPr>
+          <p:cNvPr id="25" name="TextBox 24"/>
+          <p:cNvSpPr txBox="1"/>
+          <p:nvPr/>
+        </p:nvSpPr>
+        <p:spPr>
+          <a:xfrm>
+            <a:off x="1371600" y="3449574"/>
+            <a:ext cx="1508760" cy="384048"/>
+          </a:xfrm>
+          <a:prstGeom prst="rect">
+            <a:avLst/>
+          </a:prstGeom>
+          <a:noFill/>
+        </p:spPr>
+        <p:txBody>
+          <a:bodyPr wrap="square" lIns="27432" rIns="27432" tIns="13716" bIns="13716" anchor="ctr">
+            <a:spAutoFit/>
+          </a:bodyPr>
+          <a:lstStyle/>
+          <a:p>
+            <a:pPr algn="l"/>
+            <a:r>
+              <a:rPr sz="1050" b="1" i="0">
+                <a:solidFill>
+                  <a:srgbClr val="0EA594"/>
+                </a:solidFill>
+                <a:latin typeface="Consolas"/>
+              </a:rPr>
+              <a:t>user</a:t>
+            </a:r>
+          </a:p>
+        </p:txBody>
+      </p:sp>
+      <p:sp>
+        <p:nvSpPr>
+          <p:cNvPr id="26" name="TextBox 25"/>
+          <p:cNvSpPr txBox="1"/>
+          <p:nvPr/>
+        </p:nvSpPr>
+        <p:spPr>
+          <a:xfrm>
+            <a:off x="2948939" y="3449574"/>
+            <a:ext cx="5760720" cy="384048"/>
+          </a:xfrm>
+          <a:prstGeom prst="rect">
+            <a:avLst/>
+          </a:prstGeom>
+          <a:noFill/>
+        </p:spPr>
+        <p:txBody>
+          <a:bodyPr wrap="square" lIns="27432" rIns="27432" tIns="13716" bIns="13716" anchor="ctr">
+            <a:spAutoFit/>
+          </a:bodyPr>
+          <a:lstStyle/>
+          <a:p>
+            <a:pPr algn="l"/>
+            <a:r>
+              <a:rPr sz="1050" b="0" i="0">
+                <a:solidFill>
+                  <a:srgbClr val="1F2937"/>
+                </a:solidFill>
+                <a:latin typeface="Calibri"/>
+              </a:rPr>
+              <a:t>tool_result  「3 篇論文…」</a:t>
+            </a:r>
+          </a:p>
+        </p:txBody>
+      </p:sp>
+      <p:sp>
+        <p:nvSpPr>
+          <p:cNvPr id="27" name="Rounded Rectangle 26"/>
+          <p:cNvSpPr/>
+          <p:nvPr/>
+        </p:nvSpPr>
+        <p:spPr>
+          <a:xfrm>
+            <a:off x="582930" y="3874770"/>
+            <a:ext cx="8229600" cy="384048"/>
+          </a:xfrm>
+          <a:prstGeom prst="roundRect">
+            <a:avLst>
+              <a:gd name="adj" fmla="val 10000"/>
+            </a:avLst>
+          </a:prstGeom>
+          <a:solidFill>
+            <a:srgbClr val="FFE7DB"/>
+          </a:solidFill>
+          <a:ln w="14287">
+            <a:solidFill>
+              <a:srgbClr val="FB7048"/>
+            </a:solidFill>
+          </a:ln>
+          <a:effectLst/>
+        </p:spPr>
+        <p:style>
+          <a:lnRef idx="1">
+            <a:schemeClr val="accent1"/>
+          </a:lnRef>
+          <a:fillRef idx="3">
+            <a:schemeClr val="accent1"/>
+          </a:fillRef>
+          <a:effectRef idx="2">
+            <a:schemeClr val="accent1"/>
+          </a:effectRef>
+          <a:fontRef idx="minor">
+            <a:schemeClr val="lt1"/>
+          </a:fontRef>
+        </p:style>
+        <p:txBody>
+          <a:bodyPr rtlCol="0" anchor="ctr"/>
+          <a:lstStyle/>
+          <a:p>
+            <a:pPr algn="ctr"/>
+          </a:p>
+        </p:txBody>
+      </p:sp>
+      <p:sp>
+        <p:nvSpPr>
+          <p:cNvPr id="28" name="TextBox 27"/>
+          <p:cNvSpPr txBox="1"/>
+          <p:nvPr/>
+        </p:nvSpPr>
+        <p:spPr>
+          <a:xfrm>
+            <a:off x="720090" y="3874770"/>
+            <a:ext cx="617220" cy="384048"/>
+          </a:xfrm>
+          <a:prstGeom prst="rect">
+            <a:avLst/>
+          </a:prstGeom>
+          <a:noFill/>
+        </p:spPr>
+        <p:txBody>
+          <a:bodyPr wrap="square" lIns="27432" rIns="27432" tIns="13716" bIns="13716" anchor="ctr">
+            <a:spAutoFit/>
+          </a:bodyPr>
+          <a:lstStyle/>
+          <a:p>
+            <a:pPr algn="l"/>
+            <a:r>
+              <a:rPr sz="1050" b="1" i="0">
+                <a:solidFill>
+                  <a:srgbClr val="FB7048"/>
+                </a:solidFill>
+                <a:latin typeface="Consolas"/>
+              </a:rPr>
+              <a:t>[5]</a:t>
+            </a:r>
+          </a:p>
+        </p:txBody>
+      </p:sp>
+      <p:sp>
+        <p:nvSpPr>
+          <p:cNvPr id="29" name="TextBox 28"/>
+          <p:cNvSpPr txBox="1"/>
+          <p:nvPr/>
+        </p:nvSpPr>
+        <p:spPr>
+          <a:xfrm>
+            <a:off x="1371600" y="3874770"/>
+            <a:ext cx="1508760" cy="384048"/>
+          </a:xfrm>
+          <a:prstGeom prst="rect">
+            <a:avLst/>
+          </a:prstGeom>
+          <a:noFill/>
+        </p:spPr>
+        <p:txBody>
+          <a:bodyPr wrap="square" lIns="27432" rIns="27432" tIns="13716" bIns="13716" anchor="ctr">
+            <a:spAutoFit/>
+          </a:bodyPr>
+          <a:lstStyle/>
+          <a:p>
+            <a:pPr algn="l"/>
+            <a:r>
+              <a:rPr sz="1050" b="1" i="0">
+                <a:solidFill>
+                  <a:srgbClr val="FB7048"/>
+                </a:solidFill>
+                <a:latin typeface="Consolas"/>
+              </a:rPr>
+              <a:t>assistant</a:t>
+            </a:r>
+          </a:p>
+        </p:txBody>
+      </p:sp>
+      <p:sp>
+        <p:nvSpPr>
+          <p:cNvPr id="30" name="TextBox 29"/>
+          <p:cNvSpPr txBox="1"/>
+          <p:nvPr/>
+        </p:nvSpPr>
+        <p:spPr>
+          <a:xfrm>
+            <a:off x="2948939" y="3874770"/>
+            <a:ext cx="5760720" cy="384048"/>
+          </a:xfrm>
+          <a:prstGeom prst="rect">
+            <a:avLst/>
+          </a:prstGeom>
+          <a:noFill/>
+        </p:spPr>
+        <p:txBody>
+          <a:bodyPr wrap="square" lIns="27432" rIns="27432" tIns="13716" bIns="13716" anchor="ctr">
+            <a:spAutoFit/>
+          </a:bodyPr>
+          <a:lstStyle/>
+          <a:p>
+            <a:pPr algn="l"/>
+            <a:r>
+              <a:rPr sz="1050" b="0" i="0">
+                <a:solidFill>
+                  <a:srgbClr val="1F2937"/>
+                </a:solidFill>
+                <a:latin typeface="Calibri"/>
+              </a:rPr>
+              <a:t>text  「你可修這門…」  ✓ end_turn</a:t>
+            </a:r>
+          </a:p>
+        </p:txBody>
+      </p:sp>
+      <p:sp>
+        <p:nvSpPr>
+          <p:cNvPr id="31" name="Rounded Rectangle 30"/>
+          <p:cNvSpPr/>
+          <p:nvPr/>
+        </p:nvSpPr>
+        <p:spPr>
+          <a:xfrm>
+            <a:off x="582930" y="4766310"/>
+            <a:ext cx="8229600" cy="274320"/>
           </a:xfrm>
           <a:prstGeom prst="roundRect">
             <a:avLst>
@@ -12258,14 +13780,14 @@
       </p:sp>
       <p:sp>
         <p:nvSpPr>
-          <p:cNvPr id="8" name="TextBox 7"/>
-          <p:cNvSpPr txBox="1"/>
-          <p:nvPr/>
-        </p:nvSpPr>
-        <p:spPr>
-          <a:xfrm>
-            <a:off x="3086100" y="1783080"/>
-            <a:ext cx="2948939" cy="617220"/>
+          <p:cNvPr id="32" name="TextBox 31"/>
+          <p:cNvSpPr txBox="1"/>
+          <p:nvPr/>
+        </p:nvSpPr>
+        <p:spPr>
+          <a:xfrm>
+            <a:off x="788669" y="4766310"/>
+            <a:ext cx="7818120" cy="274320"/>
           </a:xfrm>
           <a:prstGeom prst="rect">
             <a:avLst/>
@@ -12278,730 +13800,22 @@
           </a:bodyPr>
           <a:lstStyle/>
           <a:p>
-            <a:pPr algn="ctr"/>
-            <a:r>
-              <a:rPr sz="1125" b="1" i="0">
+            <a:pPr algn="l"/>
+            <a:r>
+              <a:rPr sz="975" b="1" i="0">
                 <a:solidFill>
                   <a:srgbClr val="7B5CF5"/>
                 </a:solidFill>
                 <a:latin typeface="Calibri"/>
               </a:rPr>
-              <a:t>assistant:一次吐 5 個 tool_use</a:t>
-            </a:r>
-          </a:p>
-        </p:txBody>
-      </p:sp>
-      <p:sp>
-        <p:nvSpPr>
-          <p:cNvPr id="9" name="Rounded Rectangle 8"/>
-          <p:cNvSpPr/>
-          <p:nvPr/>
-        </p:nvSpPr>
-        <p:spPr>
-          <a:xfrm>
-            <a:off x="445770" y="2948939"/>
-            <a:ext cx="1508760" cy="582930"/>
-          </a:xfrm>
-          <a:prstGeom prst="roundRect">
-            <a:avLst>
-              <a:gd name="adj" fmla="val 10000"/>
-            </a:avLst>
-          </a:prstGeom>
-          <a:solidFill>
-            <a:srgbClr val="FFE7DB"/>
-          </a:solidFill>
-          <a:ln w="19050">
-            <a:solidFill>
-              <a:srgbClr val="FB7048"/>
-            </a:solidFill>
-          </a:ln>
-          <a:effectLst/>
-        </p:spPr>
-        <p:style>
-          <a:lnRef idx="1">
-            <a:schemeClr val="accent1"/>
-          </a:lnRef>
-          <a:fillRef idx="3">
-            <a:schemeClr val="accent1"/>
-          </a:fillRef>
-          <a:effectRef idx="2">
-            <a:schemeClr val="accent1"/>
-          </a:effectRef>
-          <a:fontRef idx="minor">
-            <a:schemeClr val="lt1"/>
-          </a:fontRef>
-        </p:style>
-        <p:txBody>
-          <a:bodyPr rtlCol="0" anchor="ctr"/>
-          <a:lstStyle/>
-          <a:p>
-            <a:pPr algn="ctr"/>
-          </a:p>
-        </p:txBody>
-      </p:sp>
-      <p:sp>
-        <p:nvSpPr>
-          <p:cNvPr id="10" name="TextBox 9"/>
-          <p:cNvSpPr txBox="1"/>
-          <p:nvPr/>
-        </p:nvSpPr>
-        <p:spPr>
-          <a:xfrm>
-            <a:off x="445770" y="2948939"/>
-            <a:ext cx="1508760" cy="582930"/>
-          </a:xfrm>
-          <a:prstGeom prst="rect">
-            <a:avLst/>
-          </a:prstGeom>
-          <a:noFill/>
-        </p:spPr>
-        <p:txBody>
-          <a:bodyPr wrap="square" lIns="27432" rIns="27432" tIns="13716" bIns="13716" anchor="ctr">
-            <a:spAutoFit/>
-          </a:bodyPr>
-          <a:lstStyle/>
-          <a:p>
-            <a:pPr algn="ctr"/>
-            <a:r>
-              <a:rPr sz="1050" b="1" i="0">
-                <a:solidFill>
-                  <a:srgbClr val="FB7048"/>
-                </a:solidFill>
-                <a:latin typeface="Consolas"/>
-              </a:rPr>
-              <a:t>arxiv(張)</a:t>
-            </a:r>
-          </a:p>
-        </p:txBody>
-      </p:sp>
-      <p:sp>
-        <p:nvSpPr>
-          <p:cNvPr id="11" name="TextBox 10"/>
-          <p:cNvSpPr txBox="1"/>
-          <p:nvPr/>
-        </p:nvSpPr>
-        <p:spPr>
-          <a:xfrm>
-            <a:off x="445770" y="2434589"/>
-            <a:ext cx="1508760" cy="411479"/>
-          </a:xfrm>
-          <a:prstGeom prst="rect">
-            <a:avLst/>
-          </a:prstGeom>
-          <a:noFill/>
-        </p:spPr>
-        <p:txBody>
-          <a:bodyPr wrap="square" lIns="27432" rIns="27432" tIns="13716" bIns="13716" anchor="t">
-            <a:spAutoFit/>
-          </a:bodyPr>
-          <a:lstStyle/>
-          <a:p>
-            <a:pPr algn="ctr"/>
-            <a:r>
-              <a:rPr sz="1500" b="1" i="0">
-                <a:solidFill>
-                  <a:srgbClr val="FB7048"/>
-                </a:solidFill>
-                <a:latin typeface="Arial Black"/>
-              </a:rPr>
-              <a:t>↓</a:t>
-            </a:r>
-          </a:p>
-        </p:txBody>
-      </p:sp>
-      <p:sp>
-        <p:nvSpPr>
-          <p:cNvPr id="12" name="Rounded Rectangle 11"/>
-          <p:cNvSpPr/>
-          <p:nvPr/>
-        </p:nvSpPr>
-        <p:spPr>
-          <a:xfrm>
-            <a:off x="2077974" y="2948939"/>
-            <a:ext cx="1508760" cy="582930"/>
-          </a:xfrm>
-          <a:prstGeom prst="roundRect">
-            <a:avLst>
-              <a:gd name="adj" fmla="val 10000"/>
-            </a:avLst>
-          </a:prstGeom>
-          <a:solidFill>
-            <a:srgbClr val="FFE7DB"/>
-          </a:solidFill>
-          <a:ln w="19050">
-            <a:solidFill>
-              <a:srgbClr val="FB7048"/>
-            </a:solidFill>
-          </a:ln>
-          <a:effectLst/>
-        </p:spPr>
-        <p:style>
-          <a:lnRef idx="1">
-            <a:schemeClr val="accent1"/>
-          </a:lnRef>
-          <a:fillRef idx="3">
-            <a:schemeClr val="accent1"/>
-          </a:fillRef>
-          <a:effectRef idx="2">
-            <a:schemeClr val="accent1"/>
-          </a:effectRef>
-          <a:fontRef idx="minor">
-            <a:schemeClr val="lt1"/>
-          </a:fontRef>
-        </p:style>
-        <p:txBody>
-          <a:bodyPr rtlCol="0" anchor="ctr"/>
-          <a:lstStyle/>
-          <a:p>
-            <a:pPr algn="ctr"/>
-          </a:p>
-        </p:txBody>
-      </p:sp>
-      <p:sp>
-        <p:nvSpPr>
-          <p:cNvPr id="13" name="TextBox 12"/>
-          <p:cNvSpPr txBox="1"/>
-          <p:nvPr/>
-        </p:nvSpPr>
-        <p:spPr>
-          <a:xfrm>
-            <a:off x="2077974" y="2948939"/>
-            <a:ext cx="1508760" cy="582930"/>
-          </a:xfrm>
-          <a:prstGeom prst="rect">
-            <a:avLst/>
-          </a:prstGeom>
-          <a:noFill/>
-        </p:spPr>
-        <p:txBody>
-          <a:bodyPr wrap="square" lIns="27432" rIns="27432" tIns="13716" bIns="13716" anchor="ctr">
-            <a:spAutoFit/>
-          </a:bodyPr>
-          <a:lstStyle/>
-          <a:p>
-            <a:pPr algn="ctr"/>
-            <a:r>
-              <a:rPr sz="1050" b="1" i="0">
-                <a:solidFill>
-                  <a:srgbClr val="FB7048"/>
-                </a:solidFill>
-                <a:latin typeface="Consolas"/>
-              </a:rPr>
-              <a:t>arxiv(李)</a:t>
-            </a:r>
-          </a:p>
-        </p:txBody>
-      </p:sp>
-      <p:sp>
-        <p:nvSpPr>
-          <p:cNvPr id="14" name="TextBox 13"/>
-          <p:cNvSpPr txBox="1"/>
-          <p:nvPr/>
-        </p:nvSpPr>
-        <p:spPr>
-          <a:xfrm>
-            <a:off x="2077974" y="2434589"/>
-            <a:ext cx="1508760" cy="411479"/>
-          </a:xfrm>
-          <a:prstGeom prst="rect">
-            <a:avLst/>
-          </a:prstGeom>
-          <a:noFill/>
-        </p:spPr>
-        <p:txBody>
-          <a:bodyPr wrap="square" lIns="27432" rIns="27432" tIns="13716" bIns="13716" anchor="t">
-            <a:spAutoFit/>
-          </a:bodyPr>
-          <a:lstStyle/>
-          <a:p>
-            <a:pPr algn="ctr"/>
-            <a:r>
-              <a:rPr sz="1500" b="1" i="0">
-                <a:solidFill>
-                  <a:srgbClr val="FB7048"/>
-                </a:solidFill>
-                <a:latin typeface="Arial Black"/>
-              </a:rPr>
-              <a:t>↓</a:t>
-            </a:r>
-          </a:p>
-        </p:txBody>
-      </p:sp>
-      <p:sp>
-        <p:nvSpPr>
-          <p:cNvPr id="15" name="Rounded Rectangle 14"/>
-          <p:cNvSpPr/>
-          <p:nvPr/>
-        </p:nvSpPr>
-        <p:spPr>
-          <a:xfrm>
-            <a:off x="3710178" y="2948939"/>
-            <a:ext cx="1508760" cy="582930"/>
-          </a:xfrm>
-          <a:prstGeom prst="roundRect">
-            <a:avLst>
-              <a:gd name="adj" fmla="val 10000"/>
-            </a:avLst>
-          </a:prstGeom>
-          <a:solidFill>
-            <a:srgbClr val="FFE7DB"/>
-          </a:solidFill>
-          <a:ln w="19050">
-            <a:solidFill>
-              <a:srgbClr val="FB7048"/>
-            </a:solidFill>
-          </a:ln>
-          <a:effectLst/>
-        </p:spPr>
-        <p:style>
-          <a:lnRef idx="1">
-            <a:schemeClr val="accent1"/>
-          </a:lnRef>
-          <a:fillRef idx="3">
-            <a:schemeClr val="accent1"/>
-          </a:fillRef>
-          <a:effectRef idx="2">
-            <a:schemeClr val="accent1"/>
-          </a:effectRef>
-          <a:fontRef idx="minor">
-            <a:schemeClr val="lt1"/>
-          </a:fontRef>
-        </p:style>
-        <p:txBody>
-          <a:bodyPr rtlCol="0" anchor="ctr"/>
-          <a:lstStyle/>
-          <a:p>
-            <a:pPr algn="ctr"/>
-          </a:p>
-        </p:txBody>
-      </p:sp>
-      <p:sp>
-        <p:nvSpPr>
-          <p:cNvPr id="16" name="TextBox 15"/>
-          <p:cNvSpPr txBox="1"/>
-          <p:nvPr/>
-        </p:nvSpPr>
-        <p:spPr>
-          <a:xfrm>
-            <a:off x="3710178" y="2948939"/>
-            <a:ext cx="1508760" cy="582930"/>
-          </a:xfrm>
-          <a:prstGeom prst="rect">
-            <a:avLst/>
-          </a:prstGeom>
-          <a:noFill/>
-        </p:spPr>
-        <p:txBody>
-          <a:bodyPr wrap="square" lIns="27432" rIns="27432" tIns="13716" bIns="13716" anchor="ctr">
-            <a:spAutoFit/>
-          </a:bodyPr>
-          <a:lstStyle/>
-          <a:p>
-            <a:pPr algn="ctr"/>
-            <a:r>
-              <a:rPr sz="1050" b="1" i="0">
-                <a:solidFill>
-                  <a:srgbClr val="FB7048"/>
-                </a:solidFill>
-                <a:latin typeface="Consolas"/>
-              </a:rPr>
-              <a:t>arxiv(范)</a:t>
-            </a:r>
-          </a:p>
-        </p:txBody>
-      </p:sp>
-      <p:sp>
-        <p:nvSpPr>
-          <p:cNvPr id="17" name="TextBox 16"/>
-          <p:cNvSpPr txBox="1"/>
-          <p:nvPr/>
-        </p:nvSpPr>
-        <p:spPr>
-          <a:xfrm>
-            <a:off x="3710178" y="2434589"/>
-            <a:ext cx="1508760" cy="411479"/>
-          </a:xfrm>
-          <a:prstGeom prst="rect">
-            <a:avLst/>
-          </a:prstGeom>
-          <a:noFill/>
-        </p:spPr>
-        <p:txBody>
-          <a:bodyPr wrap="square" lIns="27432" rIns="27432" tIns="13716" bIns="13716" anchor="t">
-            <a:spAutoFit/>
-          </a:bodyPr>
-          <a:lstStyle/>
-          <a:p>
-            <a:pPr algn="ctr"/>
-            <a:r>
-              <a:rPr sz="1500" b="1" i="0">
-                <a:solidFill>
-                  <a:srgbClr val="FB7048"/>
-                </a:solidFill>
-                <a:latin typeface="Arial Black"/>
-              </a:rPr>
-              <a:t>↓</a:t>
-            </a:r>
-          </a:p>
-        </p:txBody>
-      </p:sp>
-      <p:sp>
-        <p:nvSpPr>
-          <p:cNvPr id="18" name="Rounded Rectangle 17"/>
-          <p:cNvSpPr/>
-          <p:nvPr/>
-        </p:nvSpPr>
-        <p:spPr>
-          <a:xfrm>
-            <a:off x="5342382" y="2948939"/>
-            <a:ext cx="1508760" cy="582930"/>
-          </a:xfrm>
-          <a:prstGeom prst="roundRect">
-            <a:avLst>
-              <a:gd name="adj" fmla="val 10000"/>
-            </a:avLst>
-          </a:prstGeom>
-          <a:solidFill>
-            <a:srgbClr val="FFE7DB"/>
-          </a:solidFill>
-          <a:ln w="19050">
-            <a:solidFill>
-              <a:srgbClr val="FB7048"/>
-            </a:solidFill>
-          </a:ln>
-          <a:effectLst/>
-        </p:spPr>
-        <p:style>
-          <a:lnRef idx="1">
-            <a:schemeClr val="accent1"/>
-          </a:lnRef>
-          <a:fillRef idx="3">
-            <a:schemeClr val="accent1"/>
-          </a:fillRef>
-          <a:effectRef idx="2">
-            <a:schemeClr val="accent1"/>
-          </a:effectRef>
-          <a:fontRef idx="minor">
-            <a:schemeClr val="lt1"/>
-          </a:fontRef>
-        </p:style>
-        <p:txBody>
-          <a:bodyPr rtlCol="0" anchor="ctr"/>
-          <a:lstStyle/>
-          <a:p>
-            <a:pPr algn="ctr"/>
-          </a:p>
-        </p:txBody>
-      </p:sp>
-      <p:sp>
-        <p:nvSpPr>
-          <p:cNvPr id="19" name="TextBox 18"/>
-          <p:cNvSpPr txBox="1"/>
-          <p:nvPr/>
-        </p:nvSpPr>
-        <p:spPr>
-          <a:xfrm>
-            <a:off x="5342382" y="2948939"/>
-            <a:ext cx="1508760" cy="582930"/>
-          </a:xfrm>
-          <a:prstGeom prst="rect">
-            <a:avLst/>
-          </a:prstGeom>
-          <a:noFill/>
-        </p:spPr>
-        <p:txBody>
-          <a:bodyPr wrap="square" lIns="27432" rIns="27432" tIns="13716" bIns="13716" anchor="ctr">
-            <a:spAutoFit/>
-          </a:bodyPr>
-          <a:lstStyle/>
-          <a:p>
-            <a:pPr algn="ctr"/>
-            <a:r>
-              <a:rPr sz="1050" b="1" i="0">
-                <a:solidFill>
-                  <a:srgbClr val="FB7048"/>
-                </a:solidFill>
-                <a:latin typeface="Consolas"/>
-              </a:rPr>
-              <a:t>arxiv(林)</a:t>
-            </a:r>
-          </a:p>
-        </p:txBody>
-      </p:sp>
-      <p:sp>
-        <p:nvSpPr>
-          <p:cNvPr id="20" name="TextBox 19"/>
-          <p:cNvSpPr txBox="1"/>
-          <p:nvPr/>
-        </p:nvSpPr>
-        <p:spPr>
-          <a:xfrm>
-            <a:off x="5342382" y="2434589"/>
-            <a:ext cx="1508760" cy="411479"/>
-          </a:xfrm>
-          <a:prstGeom prst="rect">
-            <a:avLst/>
-          </a:prstGeom>
-          <a:noFill/>
-        </p:spPr>
-        <p:txBody>
-          <a:bodyPr wrap="square" lIns="27432" rIns="27432" tIns="13716" bIns="13716" anchor="t">
-            <a:spAutoFit/>
-          </a:bodyPr>
-          <a:lstStyle/>
-          <a:p>
-            <a:pPr algn="ctr"/>
-            <a:r>
-              <a:rPr sz="1500" b="1" i="0">
-                <a:solidFill>
-                  <a:srgbClr val="FB7048"/>
-                </a:solidFill>
-                <a:latin typeface="Arial Black"/>
-              </a:rPr>
-              <a:t>↓</a:t>
-            </a:r>
-          </a:p>
-        </p:txBody>
-      </p:sp>
-      <p:sp>
-        <p:nvSpPr>
-          <p:cNvPr id="21" name="Rounded Rectangle 20"/>
-          <p:cNvSpPr/>
-          <p:nvPr/>
-        </p:nvSpPr>
-        <p:spPr>
-          <a:xfrm>
-            <a:off x="6974586" y="2948939"/>
-            <a:ext cx="1508760" cy="582930"/>
-          </a:xfrm>
-          <a:prstGeom prst="roundRect">
-            <a:avLst>
-              <a:gd name="adj" fmla="val 10000"/>
-            </a:avLst>
-          </a:prstGeom>
-          <a:solidFill>
-            <a:srgbClr val="FFE7DB"/>
-          </a:solidFill>
-          <a:ln w="19050">
-            <a:solidFill>
-              <a:srgbClr val="FB7048"/>
-            </a:solidFill>
-          </a:ln>
-          <a:effectLst/>
-        </p:spPr>
-        <p:style>
-          <a:lnRef idx="1">
-            <a:schemeClr val="accent1"/>
-          </a:lnRef>
-          <a:fillRef idx="3">
-            <a:schemeClr val="accent1"/>
-          </a:fillRef>
-          <a:effectRef idx="2">
-            <a:schemeClr val="accent1"/>
-          </a:effectRef>
-          <a:fontRef idx="minor">
-            <a:schemeClr val="lt1"/>
-          </a:fontRef>
-        </p:style>
-        <p:txBody>
-          <a:bodyPr rtlCol="0" anchor="ctr"/>
-          <a:lstStyle/>
-          <a:p>
-            <a:pPr algn="ctr"/>
-          </a:p>
-        </p:txBody>
-      </p:sp>
-      <p:sp>
-        <p:nvSpPr>
-          <p:cNvPr id="22" name="TextBox 21"/>
-          <p:cNvSpPr txBox="1"/>
-          <p:nvPr/>
-        </p:nvSpPr>
-        <p:spPr>
-          <a:xfrm>
-            <a:off x="6974586" y="2948939"/>
-            <a:ext cx="1508760" cy="582930"/>
-          </a:xfrm>
-          <a:prstGeom prst="rect">
-            <a:avLst/>
-          </a:prstGeom>
-          <a:noFill/>
-        </p:spPr>
-        <p:txBody>
-          <a:bodyPr wrap="square" lIns="27432" rIns="27432" tIns="13716" bIns="13716" anchor="ctr">
-            <a:spAutoFit/>
-          </a:bodyPr>
-          <a:lstStyle/>
-          <a:p>
-            <a:pPr algn="ctr"/>
-            <a:r>
-              <a:rPr sz="1050" b="1" i="0">
-                <a:solidFill>
-                  <a:srgbClr val="FB7048"/>
-                </a:solidFill>
-                <a:latin typeface="Consolas"/>
-              </a:rPr>
-              <a:t>arxiv(王)</a:t>
-            </a:r>
-          </a:p>
-        </p:txBody>
-      </p:sp>
-      <p:sp>
-        <p:nvSpPr>
-          <p:cNvPr id="23" name="TextBox 22"/>
-          <p:cNvSpPr txBox="1"/>
-          <p:nvPr/>
-        </p:nvSpPr>
-        <p:spPr>
-          <a:xfrm>
-            <a:off x="6974586" y="2434589"/>
-            <a:ext cx="1508760" cy="411479"/>
-          </a:xfrm>
-          <a:prstGeom prst="rect">
-            <a:avLst/>
-          </a:prstGeom>
-          <a:noFill/>
-        </p:spPr>
-        <p:txBody>
-          <a:bodyPr wrap="square" lIns="27432" rIns="27432" tIns="13716" bIns="13716" anchor="t">
-            <a:spAutoFit/>
-          </a:bodyPr>
-          <a:lstStyle/>
-          <a:p>
-            <a:pPr algn="ctr"/>
-            <a:r>
-              <a:rPr sz="1500" b="1" i="0">
-                <a:solidFill>
-                  <a:srgbClr val="FB7048"/>
-                </a:solidFill>
-                <a:latin typeface="Arial Black"/>
-              </a:rPr>
-              <a:t>↓</a:t>
-            </a:r>
-          </a:p>
-        </p:txBody>
-      </p:sp>
-      <p:sp>
-        <p:nvSpPr>
-          <p:cNvPr id="24" name="TextBox 23"/>
-          <p:cNvSpPr txBox="1"/>
-          <p:nvPr/>
-        </p:nvSpPr>
-        <p:spPr>
-          <a:xfrm>
-            <a:off x="582930" y="3669029"/>
-            <a:ext cx="8229600" cy="342900"/>
-          </a:xfrm>
-          <a:prstGeom prst="rect">
-            <a:avLst/>
-          </a:prstGeom>
-          <a:noFill/>
-        </p:spPr>
-        <p:txBody>
-          <a:bodyPr wrap="square" lIns="27432" rIns="27432" tIns="13716" bIns="13716" anchor="t">
-            <a:spAutoFit/>
-          </a:bodyPr>
-          <a:lstStyle/>
-          <a:p>
-            <a:pPr algn="ctr"/>
-            <a:r>
-              <a:rPr sz="1200" b="1" i="0">
-                <a:solidFill>
-                  <a:srgbClr val="0F766E"/>
-                </a:solidFill>
-                <a:latin typeface="Calibri"/>
-              </a:rPr>
-              <a:t>5 個查詢 並行執行(Promise.all)</a:t>
-            </a:r>
-          </a:p>
-        </p:txBody>
-      </p:sp>
-      <p:sp>
-        <p:nvSpPr>
-          <p:cNvPr id="25" name="Rounded Rectangle 24"/>
-          <p:cNvSpPr/>
-          <p:nvPr/>
-        </p:nvSpPr>
-        <p:spPr>
-          <a:xfrm>
-            <a:off x="582930" y="4389120"/>
-            <a:ext cx="8229600" cy="377190"/>
-          </a:xfrm>
-          <a:prstGeom prst="roundRect">
-            <a:avLst>
-              <a:gd name="adj" fmla="val 10000"/>
-            </a:avLst>
-          </a:prstGeom>
-          <a:solidFill>
-            <a:srgbClr val="D4F7F0"/>
-          </a:solidFill>
-          <a:ln w="19050">
-            <a:solidFill>
-              <a:srgbClr val="0EA594"/>
-            </a:solidFill>
-          </a:ln>
-          <a:effectLst/>
-        </p:spPr>
-        <p:style>
-          <a:lnRef idx="1">
-            <a:schemeClr val="accent1"/>
-          </a:lnRef>
-          <a:fillRef idx="3">
-            <a:schemeClr val="accent1"/>
-          </a:fillRef>
-          <a:effectRef idx="2">
-            <a:schemeClr val="accent1"/>
-          </a:effectRef>
-          <a:fontRef idx="minor">
-            <a:schemeClr val="lt1"/>
-          </a:fontRef>
-        </p:style>
-        <p:txBody>
-          <a:bodyPr rtlCol="0" anchor="ctr"/>
-          <a:lstStyle/>
-          <a:p>
-            <a:pPr algn="ctr"/>
-          </a:p>
-        </p:txBody>
-      </p:sp>
-      <p:sp>
-        <p:nvSpPr>
-          <p:cNvPr id="26" name="TextBox 25"/>
-          <p:cNvSpPr txBox="1"/>
-          <p:nvPr/>
-        </p:nvSpPr>
-        <p:spPr>
-          <a:xfrm>
-            <a:off x="788669" y="4389120"/>
-            <a:ext cx="7818120" cy="377190"/>
-          </a:xfrm>
-          <a:prstGeom prst="rect">
-            <a:avLst/>
-          </a:prstGeom>
-          <a:noFill/>
-        </p:spPr>
-        <p:txBody>
-          <a:bodyPr wrap="square" lIns="27432" rIns="27432" tIns="13716" bIns="13716" anchor="ctr">
-            <a:spAutoFit/>
-          </a:bodyPr>
-          <a:lstStyle/>
-          <a:p>
-            <a:pPr algn="l"/>
-            <a:r>
-              <a:rPr sz="1050" b="1" i="0">
-                <a:solidFill>
-                  <a:srgbClr val="0EA594"/>
-                </a:solidFill>
-                <a:latin typeface="Calibri"/>
-              </a:rPr>
-              <a:t>▶  並行 → 1 秒搞定 5 個查詢,不用等 5 倍時間;5 個 tool_result 一起回給 LLM</a:t>
-            </a:r>
-          </a:p>
-        </p:txBody>
-      </p:sp>
-      <p:sp>
-        <p:nvSpPr>
-          <p:cNvPr id="27" name="TextBox 26"/>
+              <a:t>▶  每輪把上一輪結果接在後面 → 陣列越來越長 → 這就是「多輪記憶」的全部祕密</a:t>
+            </a:r>
+          </a:p>
+        </p:txBody>
+      </p:sp>
+      <p:sp>
+        <p:nvSpPr>
+          <p:cNvPr id="33" name="TextBox 32"/>
           <p:cNvSpPr txBox="1"/>
           <p:nvPr/>
         </p:nvSpPr>
@@ -13029,7 +13843,7 @@
                 </a:solidFill>
                 <a:latin typeface="Calibri"/>
               </a:rPr>
-              <a:t>8 / 11</a:t>
+              <a:t>7 / 13</a:t>
             </a:r>
           </a:p>
         </p:txBody>
@@ -13169,7 +13983,7 @@
                 </a:solidFill>
                 <a:latin typeface="Calibri"/>
               </a:rPr>
-              <a:t>03 · ①   M A X _ I T E R A T I O N S · 強制回覆</a:t>
+              <a:t>01 · ④   P A R A L L E L   T O O L   C A L L S</a:t>
             </a:r>
           </a:p>
         </p:txBody>
@@ -13204,7 +14018,7 @@
                 </a:solidFill>
                 <a:latin typeface="Arial Black"/>
               </a:rPr>
-              <a:t>maxIterations 與強制回覆機制</a:t>
+              <a:t>一回合可以同時開多支工具</a:t>
             </a:r>
           </a:p>
         </p:txBody>
@@ -13239,7 +14053,7 @@
                 </a:solidFill>
                 <a:latin typeface="Calibri"/>
               </a:rPr>
-              <a:t>避免 LLM 無限呼叫工具 —— 設上限 + 最後一輪強制總結</a:t>
+              <a:t>parallel tool calls —— 用 Promise.all 並行,不是一個接一個</a:t>
             </a:r>
           </a:p>
         </p:txBody>
@@ -13252,8 +14066,8 @@
         </p:nvSpPr>
         <p:spPr>
           <a:xfrm>
-            <a:off x="582930" y="1851660"/>
-            <a:ext cx="4080510" cy="2743200"/>
+            <a:off x="3086100" y="1783080"/>
+            <a:ext cx="2948939" cy="617220"/>
           </a:xfrm>
           <a:prstGeom prst="roundRect">
             <a:avLst>
@@ -13261,11 +14075,11 @@
             </a:avLst>
           </a:prstGeom>
           <a:solidFill>
-            <a:srgbClr val="FEE2E2"/>
+            <a:srgbClr val="EEE8FF"/>
           </a:solidFill>
           <a:ln w="19050">
             <a:solidFill>
-              <a:srgbClr val="EF4444"/>
+              <a:srgbClr val="7B5CF5"/>
             </a:solidFill>
           </a:ln>
           <a:effectLst/>
@@ -13300,8 +14114,126 @@
         </p:nvSpPr>
         <p:spPr>
           <a:xfrm>
-            <a:off x="754380" y="1975104"/>
-            <a:ext cx="3737610" cy="377190"/>
+            <a:off x="3086100" y="1783080"/>
+            <a:ext cx="2948939" cy="617220"/>
+          </a:xfrm>
+          <a:prstGeom prst="rect">
+            <a:avLst/>
+          </a:prstGeom>
+          <a:noFill/>
+        </p:spPr>
+        <p:txBody>
+          <a:bodyPr wrap="square" lIns="27432" rIns="27432" tIns="13716" bIns="13716" anchor="ctr">
+            <a:spAutoFit/>
+          </a:bodyPr>
+          <a:lstStyle/>
+          <a:p>
+            <a:pPr algn="ctr"/>
+            <a:r>
+              <a:rPr sz="1125" b="1" i="0">
+                <a:solidFill>
+                  <a:srgbClr val="7B5CF5"/>
+                </a:solidFill>
+                <a:latin typeface="Calibri"/>
+              </a:rPr>
+              <a:t>assistant:一次吐 5 個 tool_use</a:t>
+            </a:r>
+          </a:p>
+        </p:txBody>
+      </p:sp>
+      <p:sp>
+        <p:nvSpPr>
+          <p:cNvPr id="9" name="Rounded Rectangle 8"/>
+          <p:cNvSpPr/>
+          <p:nvPr/>
+        </p:nvSpPr>
+        <p:spPr>
+          <a:xfrm>
+            <a:off x="445770" y="2948939"/>
+            <a:ext cx="1508760" cy="582930"/>
+          </a:xfrm>
+          <a:prstGeom prst="roundRect">
+            <a:avLst>
+              <a:gd name="adj" fmla="val 10000"/>
+            </a:avLst>
+          </a:prstGeom>
+          <a:solidFill>
+            <a:srgbClr val="FFE7DB"/>
+          </a:solidFill>
+          <a:ln w="19050">
+            <a:solidFill>
+              <a:srgbClr val="FB7048"/>
+            </a:solidFill>
+          </a:ln>
+          <a:effectLst/>
+        </p:spPr>
+        <p:style>
+          <a:lnRef idx="1">
+            <a:schemeClr val="accent1"/>
+          </a:lnRef>
+          <a:fillRef idx="3">
+            <a:schemeClr val="accent1"/>
+          </a:fillRef>
+          <a:effectRef idx="2">
+            <a:schemeClr val="accent1"/>
+          </a:effectRef>
+          <a:fontRef idx="minor">
+            <a:schemeClr val="lt1"/>
+          </a:fontRef>
+        </p:style>
+        <p:txBody>
+          <a:bodyPr rtlCol="0" anchor="ctr"/>
+          <a:lstStyle/>
+          <a:p>
+            <a:pPr algn="ctr"/>
+          </a:p>
+        </p:txBody>
+      </p:sp>
+      <p:sp>
+        <p:nvSpPr>
+          <p:cNvPr id="10" name="TextBox 9"/>
+          <p:cNvSpPr txBox="1"/>
+          <p:nvPr/>
+        </p:nvSpPr>
+        <p:spPr>
+          <a:xfrm>
+            <a:off x="445770" y="2948939"/>
+            <a:ext cx="1508760" cy="582930"/>
+          </a:xfrm>
+          <a:prstGeom prst="rect">
+            <a:avLst/>
+          </a:prstGeom>
+          <a:noFill/>
+        </p:spPr>
+        <p:txBody>
+          <a:bodyPr wrap="square" lIns="27432" rIns="27432" tIns="13716" bIns="13716" anchor="ctr">
+            <a:spAutoFit/>
+          </a:bodyPr>
+          <a:lstStyle/>
+          <a:p>
+            <a:pPr algn="ctr"/>
+            <a:r>
+              <a:rPr sz="1050" b="1" i="0">
+                <a:solidFill>
+                  <a:srgbClr val="FB7048"/>
+                </a:solidFill>
+                <a:latin typeface="Consolas"/>
+              </a:rPr>
+              <a:t>arxiv(張)</a:t>
+            </a:r>
+          </a:p>
+        </p:txBody>
+      </p:sp>
+      <p:sp>
+        <p:nvSpPr>
+          <p:cNvPr id="11" name="TextBox 10"/>
+          <p:cNvSpPr txBox="1"/>
+          <p:nvPr/>
+        </p:nvSpPr>
+        <p:spPr>
+          <a:xfrm>
+            <a:off x="445770" y="2434589"/>
+            <a:ext cx="1508760" cy="411479"/>
           </a:xfrm>
           <a:prstGeom prst="rect">
             <a:avLst/>
@@ -13314,29 +14246,112 @@
           </a:bodyPr>
           <a:lstStyle/>
           <a:p>
-            <a:pPr algn="l"/>
-            <a:r>
-              <a:rPr sz="1650" b="1" i="0">
-                <a:solidFill>
-                  <a:srgbClr val="EF4444"/>
+            <a:pPr algn="ctr"/>
+            <a:r>
+              <a:rPr sz="1500" b="1" i="0">
+                <a:solidFill>
+                  <a:srgbClr val="FB7048"/>
                 </a:solidFill>
                 <a:latin typeface="Arial Black"/>
               </a:rPr>
-              <a:t>問題:無限迴圈風險</a:t>
-            </a:r>
-          </a:p>
-        </p:txBody>
-      </p:sp>
-      <p:sp>
-        <p:nvSpPr>
-          <p:cNvPr id="9" name="TextBox 8"/>
-          <p:cNvSpPr txBox="1"/>
-          <p:nvPr/>
-        </p:nvSpPr>
-        <p:spPr>
-          <a:xfrm>
-            <a:off x="754380" y="2263139"/>
-            <a:ext cx="3771900" cy="2263139"/>
+              <a:t>↓</a:t>
+            </a:r>
+          </a:p>
+        </p:txBody>
+      </p:sp>
+      <p:sp>
+        <p:nvSpPr>
+          <p:cNvPr id="12" name="Rounded Rectangle 11"/>
+          <p:cNvSpPr/>
+          <p:nvPr/>
+        </p:nvSpPr>
+        <p:spPr>
+          <a:xfrm>
+            <a:off x="2077974" y="2948939"/>
+            <a:ext cx="1508760" cy="582930"/>
+          </a:xfrm>
+          <a:prstGeom prst="roundRect">
+            <a:avLst>
+              <a:gd name="adj" fmla="val 10000"/>
+            </a:avLst>
+          </a:prstGeom>
+          <a:solidFill>
+            <a:srgbClr val="FFE7DB"/>
+          </a:solidFill>
+          <a:ln w="19050">
+            <a:solidFill>
+              <a:srgbClr val="FB7048"/>
+            </a:solidFill>
+          </a:ln>
+          <a:effectLst/>
+        </p:spPr>
+        <p:style>
+          <a:lnRef idx="1">
+            <a:schemeClr val="accent1"/>
+          </a:lnRef>
+          <a:fillRef idx="3">
+            <a:schemeClr val="accent1"/>
+          </a:fillRef>
+          <a:effectRef idx="2">
+            <a:schemeClr val="accent1"/>
+          </a:effectRef>
+          <a:fontRef idx="minor">
+            <a:schemeClr val="lt1"/>
+          </a:fontRef>
+        </p:style>
+        <p:txBody>
+          <a:bodyPr rtlCol="0" anchor="ctr"/>
+          <a:lstStyle/>
+          <a:p>
+            <a:pPr algn="ctr"/>
+          </a:p>
+        </p:txBody>
+      </p:sp>
+      <p:sp>
+        <p:nvSpPr>
+          <p:cNvPr id="13" name="TextBox 12"/>
+          <p:cNvSpPr txBox="1"/>
+          <p:nvPr/>
+        </p:nvSpPr>
+        <p:spPr>
+          <a:xfrm>
+            <a:off x="2077974" y="2948939"/>
+            <a:ext cx="1508760" cy="582930"/>
+          </a:xfrm>
+          <a:prstGeom prst="rect">
+            <a:avLst/>
+          </a:prstGeom>
+          <a:noFill/>
+        </p:spPr>
+        <p:txBody>
+          <a:bodyPr wrap="square" lIns="27432" rIns="27432" tIns="13716" bIns="13716" anchor="ctr">
+            <a:spAutoFit/>
+          </a:bodyPr>
+          <a:lstStyle/>
+          <a:p>
+            <a:pPr algn="ctr"/>
+            <a:r>
+              <a:rPr sz="1050" b="1" i="0">
+                <a:solidFill>
+                  <a:srgbClr val="FB7048"/>
+                </a:solidFill>
+                <a:latin typeface="Consolas"/>
+              </a:rPr>
+              <a:t>arxiv(李)</a:t>
+            </a:r>
+          </a:p>
+        </p:txBody>
+      </p:sp>
+      <p:sp>
+        <p:nvSpPr>
+          <p:cNvPr id="14" name="TextBox 13"/>
+          <p:cNvSpPr txBox="1"/>
+          <p:nvPr/>
+        </p:nvSpPr>
+        <p:spPr>
+          <a:xfrm>
+            <a:off x="2077974" y="2434589"/>
+            <a:ext cx="1508760" cy="411479"/>
           </a:xfrm>
           <a:prstGeom prst="rect">
             <a:avLst/>
@@ -13349,81 +14364,418 @@
           </a:bodyPr>
           <a:lstStyle/>
           <a:p>
-            <a:pPr algn="l">
-              <a:spcAft>
-                <a:spcPts val="750"/>
-              </a:spcAft>
-            </a:pPr>
-            <a:r>
-              <a:rPr sz="1050" b="0" i="0">
-                <a:solidFill>
-                  <a:srgbClr val="1F2937"/>
+            <a:pPr algn="ctr"/>
+            <a:r>
+              <a:rPr sz="1500" b="1" i="0">
+                <a:solidFill>
+                  <a:srgbClr val="FB7048"/>
+                </a:solidFill>
+                <a:latin typeface="Arial Black"/>
+              </a:rPr>
+              <a:t>↓</a:t>
+            </a:r>
+          </a:p>
+        </p:txBody>
+      </p:sp>
+      <p:sp>
+        <p:nvSpPr>
+          <p:cNvPr id="15" name="Rounded Rectangle 14"/>
+          <p:cNvSpPr/>
+          <p:nvPr/>
+        </p:nvSpPr>
+        <p:spPr>
+          <a:xfrm>
+            <a:off x="3710178" y="2948939"/>
+            <a:ext cx="1508760" cy="582930"/>
+          </a:xfrm>
+          <a:prstGeom prst="roundRect">
+            <a:avLst>
+              <a:gd name="adj" fmla="val 10000"/>
+            </a:avLst>
+          </a:prstGeom>
+          <a:solidFill>
+            <a:srgbClr val="FFE7DB"/>
+          </a:solidFill>
+          <a:ln w="19050">
+            <a:solidFill>
+              <a:srgbClr val="FB7048"/>
+            </a:solidFill>
+          </a:ln>
+          <a:effectLst/>
+        </p:spPr>
+        <p:style>
+          <a:lnRef idx="1">
+            <a:schemeClr val="accent1"/>
+          </a:lnRef>
+          <a:fillRef idx="3">
+            <a:schemeClr val="accent1"/>
+          </a:fillRef>
+          <a:effectRef idx="2">
+            <a:schemeClr val="accent1"/>
+          </a:effectRef>
+          <a:fontRef idx="minor">
+            <a:schemeClr val="lt1"/>
+          </a:fontRef>
+        </p:style>
+        <p:txBody>
+          <a:bodyPr rtlCol="0" anchor="ctr"/>
+          <a:lstStyle/>
+          <a:p>
+            <a:pPr algn="ctr"/>
+          </a:p>
+        </p:txBody>
+      </p:sp>
+      <p:sp>
+        <p:nvSpPr>
+          <p:cNvPr id="16" name="TextBox 15"/>
+          <p:cNvSpPr txBox="1"/>
+          <p:nvPr/>
+        </p:nvSpPr>
+        <p:spPr>
+          <a:xfrm>
+            <a:off x="3710178" y="2948939"/>
+            <a:ext cx="1508760" cy="582930"/>
+          </a:xfrm>
+          <a:prstGeom prst="rect">
+            <a:avLst/>
+          </a:prstGeom>
+          <a:noFill/>
+        </p:spPr>
+        <p:txBody>
+          <a:bodyPr wrap="square" lIns="27432" rIns="27432" tIns="13716" bIns="13716" anchor="ctr">
+            <a:spAutoFit/>
+          </a:bodyPr>
+          <a:lstStyle/>
+          <a:p>
+            <a:pPr algn="ctr"/>
+            <a:r>
+              <a:rPr sz="1050" b="1" i="0">
+                <a:solidFill>
+                  <a:srgbClr val="FB7048"/>
+                </a:solidFill>
+                <a:latin typeface="Consolas"/>
+              </a:rPr>
+              <a:t>arxiv(范)</a:t>
+            </a:r>
+          </a:p>
+        </p:txBody>
+      </p:sp>
+      <p:sp>
+        <p:nvSpPr>
+          <p:cNvPr id="17" name="TextBox 16"/>
+          <p:cNvSpPr txBox="1"/>
+          <p:nvPr/>
+        </p:nvSpPr>
+        <p:spPr>
+          <a:xfrm>
+            <a:off x="3710178" y="2434589"/>
+            <a:ext cx="1508760" cy="411479"/>
+          </a:xfrm>
+          <a:prstGeom prst="rect">
+            <a:avLst/>
+          </a:prstGeom>
+          <a:noFill/>
+        </p:spPr>
+        <p:txBody>
+          <a:bodyPr wrap="square" lIns="27432" rIns="27432" tIns="13716" bIns="13716" anchor="t">
+            <a:spAutoFit/>
+          </a:bodyPr>
+          <a:lstStyle/>
+          <a:p>
+            <a:pPr algn="ctr"/>
+            <a:r>
+              <a:rPr sz="1500" b="1" i="0">
+                <a:solidFill>
+                  <a:srgbClr val="FB7048"/>
+                </a:solidFill>
+                <a:latin typeface="Arial Black"/>
+              </a:rPr>
+              <a:t>↓</a:t>
+            </a:r>
+          </a:p>
+        </p:txBody>
+      </p:sp>
+      <p:sp>
+        <p:nvSpPr>
+          <p:cNvPr id="18" name="Rounded Rectangle 17"/>
+          <p:cNvSpPr/>
+          <p:nvPr/>
+        </p:nvSpPr>
+        <p:spPr>
+          <a:xfrm>
+            <a:off x="5342382" y="2948939"/>
+            <a:ext cx="1508760" cy="582930"/>
+          </a:xfrm>
+          <a:prstGeom prst="roundRect">
+            <a:avLst>
+              <a:gd name="adj" fmla="val 10000"/>
+            </a:avLst>
+          </a:prstGeom>
+          <a:solidFill>
+            <a:srgbClr val="FFE7DB"/>
+          </a:solidFill>
+          <a:ln w="19050">
+            <a:solidFill>
+              <a:srgbClr val="FB7048"/>
+            </a:solidFill>
+          </a:ln>
+          <a:effectLst/>
+        </p:spPr>
+        <p:style>
+          <a:lnRef idx="1">
+            <a:schemeClr val="accent1"/>
+          </a:lnRef>
+          <a:fillRef idx="3">
+            <a:schemeClr val="accent1"/>
+          </a:fillRef>
+          <a:effectRef idx="2">
+            <a:schemeClr val="accent1"/>
+          </a:effectRef>
+          <a:fontRef idx="minor">
+            <a:schemeClr val="lt1"/>
+          </a:fontRef>
+        </p:style>
+        <p:txBody>
+          <a:bodyPr rtlCol="0" anchor="ctr"/>
+          <a:lstStyle/>
+          <a:p>
+            <a:pPr algn="ctr"/>
+          </a:p>
+        </p:txBody>
+      </p:sp>
+      <p:sp>
+        <p:nvSpPr>
+          <p:cNvPr id="19" name="TextBox 18"/>
+          <p:cNvSpPr txBox="1"/>
+          <p:nvPr/>
+        </p:nvSpPr>
+        <p:spPr>
+          <a:xfrm>
+            <a:off x="5342382" y="2948939"/>
+            <a:ext cx="1508760" cy="582930"/>
+          </a:xfrm>
+          <a:prstGeom prst="rect">
+            <a:avLst/>
+          </a:prstGeom>
+          <a:noFill/>
+        </p:spPr>
+        <p:txBody>
+          <a:bodyPr wrap="square" lIns="27432" rIns="27432" tIns="13716" bIns="13716" anchor="ctr">
+            <a:spAutoFit/>
+          </a:bodyPr>
+          <a:lstStyle/>
+          <a:p>
+            <a:pPr algn="ctr"/>
+            <a:r>
+              <a:rPr sz="1050" b="1" i="0">
+                <a:solidFill>
+                  <a:srgbClr val="FB7048"/>
+                </a:solidFill>
+                <a:latin typeface="Consolas"/>
+              </a:rPr>
+              <a:t>arxiv(林)</a:t>
+            </a:r>
+          </a:p>
+        </p:txBody>
+      </p:sp>
+      <p:sp>
+        <p:nvSpPr>
+          <p:cNvPr id="20" name="TextBox 19"/>
+          <p:cNvSpPr txBox="1"/>
+          <p:nvPr/>
+        </p:nvSpPr>
+        <p:spPr>
+          <a:xfrm>
+            <a:off x="5342382" y="2434589"/>
+            <a:ext cx="1508760" cy="411479"/>
+          </a:xfrm>
+          <a:prstGeom prst="rect">
+            <a:avLst/>
+          </a:prstGeom>
+          <a:noFill/>
+        </p:spPr>
+        <p:txBody>
+          <a:bodyPr wrap="square" lIns="27432" rIns="27432" tIns="13716" bIns="13716" anchor="t">
+            <a:spAutoFit/>
+          </a:bodyPr>
+          <a:lstStyle/>
+          <a:p>
+            <a:pPr algn="ctr"/>
+            <a:r>
+              <a:rPr sz="1500" b="1" i="0">
+                <a:solidFill>
+                  <a:srgbClr val="FB7048"/>
+                </a:solidFill>
+                <a:latin typeface="Arial Black"/>
+              </a:rPr>
+              <a:t>↓</a:t>
+            </a:r>
+          </a:p>
+        </p:txBody>
+      </p:sp>
+      <p:sp>
+        <p:nvSpPr>
+          <p:cNvPr id="21" name="Rounded Rectangle 20"/>
+          <p:cNvSpPr/>
+          <p:nvPr/>
+        </p:nvSpPr>
+        <p:spPr>
+          <a:xfrm>
+            <a:off x="6974586" y="2948939"/>
+            <a:ext cx="1508760" cy="582930"/>
+          </a:xfrm>
+          <a:prstGeom prst="roundRect">
+            <a:avLst>
+              <a:gd name="adj" fmla="val 10000"/>
+            </a:avLst>
+          </a:prstGeom>
+          <a:solidFill>
+            <a:srgbClr val="FFE7DB"/>
+          </a:solidFill>
+          <a:ln w="19050">
+            <a:solidFill>
+              <a:srgbClr val="FB7048"/>
+            </a:solidFill>
+          </a:ln>
+          <a:effectLst/>
+        </p:spPr>
+        <p:style>
+          <a:lnRef idx="1">
+            <a:schemeClr val="accent1"/>
+          </a:lnRef>
+          <a:fillRef idx="3">
+            <a:schemeClr val="accent1"/>
+          </a:fillRef>
+          <a:effectRef idx="2">
+            <a:schemeClr val="accent1"/>
+          </a:effectRef>
+          <a:fontRef idx="minor">
+            <a:schemeClr val="lt1"/>
+          </a:fontRef>
+        </p:style>
+        <p:txBody>
+          <a:bodyPr rtlCol="0" anchor="ctr"/>
+          <a:lstStyle/>
+          <a:p>
+            <a:pPr algn="ctr"/>
+          </a:p>
+        </p:txBody>
+      </p:sp>
+      <p:sp>
+        <p:nvSpPr>
+          <p:cNvPr id="22" name="TextBox 21"/>
+          <p:cNvSpPr txBox="1"/>
+          <p:nvPr/>
+        </p:nvSpPr>
+        <p:spPr>
+          <a:xfrm>
+            <a:off x="6974586" y="2948939"/>
+            <a:ext cx="1508760" cy="582930"/>
+          </a:xfrm>
+          <a:prstGeom prst="rect">
+            <a:avLst/>
+          </a:prstGeom>
+          <a:noFill/>
+        </p:spPr>
+        <p:txBody>
+          <a:bodyPr wrap="square" lIns="27432" rIns="27432" tIns="13716" bIns="13716" anchor="ctr">
+            <a:spAutoFit/>
+          </a:bodyPr>
+          <a:lstStyle/>
+          <a:p>
+            <a:pPr algn="ctr"/>
+            <a:r>
+              <a:rPr sz="1050" b="1" i="0">
+                <a:solidFill>
+                  <a:srgbClr val="FB7048"/>
+                </a:solidFill>
+                <a:latin typeface="Consolas"/>
+              </a:rPr>
+              <a:t>arxiv(王)</a:t>
+            </a:r>
+          </a:p>
+        </p:txBody>
+      </p:sp>
+      <p:sp>
+        <p:nvSpPr>
+          <p:cNvPr id="23" name="TextBox 22"/>
+          <p:cNvSpPr txBox="1"/>
+          <p:nvPr/>
+        </p:nvSpPr>
+        <p:spPr>
+          <a:xfrm>
+            <a:off x="6974586" y="2434589"/>
+            <a:ext cx="1508760" cy="411479"/>
+          </a:xfrm>
+          <a:prstGeom prst="rect">
+            <a:avLst/>
+          </a:prstGeom>
+          <a:noFill/>
+        </p:spPr>
+        <p:txBody>
+          <a:bodyPr wrap="square" lIns="27432" rIns="27432" tIns="13716" bIns="13716" anchor="t">
+            <a:spAutoFit/>
+          </a:bodyPr>
+          <a:lstStyle/>
+          <a:p>
+            <a:pPr algn="ctr"/>
+            <a:r>
+              <a:rPr sz="1500" b="1" i="0">
+                <a:solidFill>
+                  <a:srgbClr val="FB7048"/>
+                </a:solidFill>
+                <a:latin typeface="Arial Black"/>
+              </a:rPr>
+              <a:t>↓</a:t>
+            </a:r>
+          </a:p>
+        </p:txBody>
+      </p:sp>
+      <p:sp>
+        <p:nvSpPr>
+          <p:cNvPr id="24" name="TextBox 23"/>
+          <p:cNvSpPr txBox="1"/>
+          <p:nvPr/>
+        </p:nvSpPr>
+        <p:spPr>
+          <a:xfrm>
+            <a:off x="582930" y="3669029"/>
+            <a:ext cx="8229600" cy="342900"/>
+          </a:xfrm>
+          <a:prstGeom prst="rect">
+            <a:avLst/>
+          </a:prstGeom>
+          <a:noFill/>
+        </p:spPr>
+        <p:txBody>
+          <a:bodyPr wrap="square" lIns="27432" rIns="27432" tIns="13716" bIns="13716" anchor="t">
+            <a:spAutoFit/>
+          </a:bodyPr>
+          <a:lstStyle/>
+          <a:p>
+            <a:pPr algn="ctr"/>
+            <a:r>
+              <a:rPr sz="1200" b="1" i="0">
+                <a:solidFill>
+                  <a:srgbClr val="0F766E"/>
                 </a:solidFill>
                 <a:latin typeface="Calibri"/>
               </a:rPr>
-              <a:t>LLM 可能不斷呼叫工具而永遠不回覆使用者,造成:</a:t>
-            </a:r>
-          </a:p>
-          <a:p>
-            <a:pPr algn="l">
-              <a:spcAft>
-                <a:spcPts val="450"/>
-              </a:spcAft>
-            </a:pPr>
-            <a:r>
-              <a:rPr sz="1050" b="0" i="0">
-                <a:solidFill>
-                  <a:srgbClr val="B91C1C"/>
-                </a:solidFill>
-                <a:latin typeface="Calibri"/>
-              </a:rPr>
-              <a:t>✗  Token 成本無限增長</a:t>
-            </a:r>
-          </a:p>
-          <a:p>
-            <a:pPr algn="l">
-              <a:spcAft>
-                <a:spcPts val="450"/>
-              </a:spcAft>
-            </a:pPr>
-            <a:r>
-              <a:rPr sz="1050" b="0" i="0">
-                <a:solidFill>
-                  <a:srgbClr val="B91C1C"/>
-                </a:solidFill>
-                <a:latin typeface="Calibri"/>
-              </a:rPr>
-              <a:t>✗  回應時間過長</a:t>
-            </a:r>
-          </a:p>
-          <a:p>
-            <a:pPr algn="l">
-              <a:spcAft>
-                <a:spcPts val="0"/>
-              </a:spcAft>
-            </a:pPr>
-            <a:r>
-              <a:rPr sz="1050" b="0" i="0">
-                <a:solidFill>
-                  <a:srgbClr val="B91C1C"/>
-                </a:solidFill>
-                <a:latin typeface="Calibri"/>
-              </a:rPr>
-              <a:t>✗  使用者體驗極差</a:t>
-            </a:r>
-          </a:p>
-        </p:txBody>
-      </p:sp>
-      <p:sp>
-        <p:nvSpPr>
-          <p:cNvPr id="10" name="Rounded Rectangle 9"/>
+              <a:t>5 個查詢 並行執行(Promise.all)</a:t>
+            </a:r>
+          </a:p>
+        </p:txBody>
+      </p:sp>
+      <p:sp>
+        <p:nvSpPr>
+          <p:cNvPr id="25" name="Rounded Rectangle 24"/>
           <p:cNvSpPr/>
           <p:nvPr/>
         </p:nvSpPr>
         <p:spPr>
           <a:xfrm>
-            <a:off x="4834890" y="1851660"/>
-            <a:ext cx="4011929" cy="2743200"/>
+            <a:off x="582930" y="4389120"/>
+            <a:ext cx="8229600" cy="377190"/>
           </a:xfrm>
           <a:prstGeom prst="roundRect">
             <a:avLst>
@@ -13464,161 +14816,42 @@
       </p:sp>
       <p:sp>
         <p:nvSpPr>
-          <p:cNvPr id="11" name="TextBox 10"/>
-          <p:cNvSpPr txBox="1"/>
-          <p:nvPr/>
-        </p:nvSpPr>
-        <p:spPr>
-          <a:xfrm>
-            <a:off x="5006340" y="1975104"/>
-            <a:ext cx="3669029" cy="377190"/>
-          </a:xfrm>
-          <a:prstGeom prst="rect">
-            <a:avLst/>
-          </a:prstGeom>
-          <a:noFill/>
-        </p:spPr>
-        <p:txBody>
-          <a:bodyPr wrap="square" lIns="27432" rIns="27432" tIns="13716" bIns="13716" anchor="t">
+          <p:cNvPr id="26" name="TextBox 25"/>
+          <p:cNvSpPr txBox="1"/>
+          <p:nvPr/>
+        </p:nvSpPr>
+        <p:spPr>
+          <a:xfrm>
+            <a:off x="788669" y="4389120"/>
+            <a:ext cx="7818120" cy="377190"/>
+          </a:xfrm>
+          <a:prstGeom prst="rect">
+            <a:avLst/>
+          </a:prstGeom>
+          <a:noFill/>
+        </p:spPr>
+        <p:txBody>
+          <a:bodyPr wrap="square" lIns="27432" rIns="27432" tIns="13716" bIns="13716" anchor="ctr">
             <a:spAutoFit/>
           </a:bodyPr>
           <a:lstStyle/>
           <a:p>
             <a:pPr algn="l"/>
             <a:r>
-              <a:rPr sz="1650" b="1" i="0">
+              <a:rPr sz="1050" b="1" i="0">
                 <a:solidFill>
                   <a:srgbClr val="0EA594"/>
                 </a:solidFill>
-                <a:latin typeface="Arial Black"/>
-              </a:rPr>
-              <a:t>解法:maxIterations = 7</a:t>
-            </a:r>
-          </a:p>
-        </p:txBody>
-      </p:sp>
-      <p:sp>
-        <p:nvSpPr>
-          <p:cNvPr id="12" name="TextBox 11"/>
-          <p:cNvSpPr txBox="1"/>
-          <p:nvPr/>
-        </p:nvSpPr>
-        <p:spPr>
-          <a:xfrm>
-            <a:off x="5006340" y="2263139"/>
-            <a:ext cx="3703320" cy="2263139"/>
-          </a:xfrm>
-          <a:prstGeom prst="rect">
-            <a:avLst/>
-          </a:prstGeom>
-          <a:noFill/>
-        </p:spPr>
-        <p:txBody>
-          <a:bodyPr wrap="square" lIns="27432" rIns="27432" tIns="13716" bIns="13716" anchor="t">
-            <a:spAutoFit/>
-          </a:bodyPr>
-          <a:lstStyle/>
-          <a:p>
-            <a:pPr algn="l">
-              <a:spcAft>
-                <a:spcPts val="450"/>
-              </a:spcAft>
-            </a:pPr>
-            <a:r>
-              <a:rPr sz="1050" b="0" i="0">
-                <a:solidFill>
-                  <a:srgbClr val="1F2937"/>
-                </a:solidFill>
                 <a:latin typeface="Calibri"/>
               </a:rPr>
-              <a:t>✓  設定最大迭代次數上限</a:t>
-            </a:r>
-          </a:p>
-          <a:p>
-            <a:pPr algn="l">
-              <a:spcAft>
-                <a:spcPts val="150"/>
-              </a:spcAft>
-            </a:pPr>
-            <a:r>
-              <a:rPr sz="1050" b="0" i="0">
-                <a:solidFill>
-                  <a:srgbClr val="1F2937"/>
-                </a:solidFill>
-                <a:latin typeface="Calibri"/>
-              </a:rPr>
-              <a:t>✓  第 7 輪(最後一輪)時注入臨時</a:t>
-            </a:r>
-          </a:p>
-          <a:p>
-            <a:pPr algn="l">
-              <a:spcAft>
-                <a:spcPts val="150"/>
-              </a:spcAft>
-            </a:pPr>
-            <a:r>
-              <a:rPr sz="1050" b="0" i="0">
-                <a:solidFill>
-                  <a:srgbClr val="1F2937"/>
-                </a:solidFill>
-                <a:latin typeface="Calibri"/>
-              </a:rPr>
-              <a:t>    user message 強制模型停止使用</a:t>
-            </a:r>
-          </a:p>
-          <a:p>
-            <a:pPr algn="l">
-              <a:spcAft>
-                <a:spcPts val="1050"/>
-              </a:spcAft>
-            </a:pPr>
-            <a:r>
-              <a:rPr sz="1050" b="0" i="0">
-                <a:solidFill>
-                  <a:srgbClr val="1F2937"/>
-                </a:solidFill>
-                <a:latin typeface="Calibri"/>
-              </a:rPr>
-              <a:t>    工具,直接整理回覆</a:t>
-            </a:r>
-          </a:p>
-          <a:p>
-            <a:pPr algn="l">
-              <a:spcAft>
-                <a:spcPts val="150"/>
-              </a:spcAft>
-            </a:pPr>
-            <a:r>
-              <a:rPr sz="975" b="0" i="1">
-                <a:solidFill>
-                  <a:srgbClr val="0F766E"/>
-                </a:solidFill>
-                <a:latin typeface="Calibri"/>
-              </a:rPr>
-              <a:t>「請不要再使用任何工具,</a:t>
-            </a:r>
-          </a:p>
-          <a:p>
-            <a:pPr algn="l">
-              <a:spcAft>
-                <a:spcPts val="0"/>
-              </a:spcAft>
-            </a:pPr>
-            <a:r>
-              <a:rPr sz="975" b="0" i="1">
-                <a:solidFill>
-                  <a:srgbClr val="0F766E"/>
-                </a:solidFill>
-                <a:latin typeface="Calibri"/>
-              </a:rPr>
-              <a:t>  直接根據工具回傳的資料整理 Markdown 回覆。」</a:t>
-            </a:r>
-          </a:p>
-        </p:txBody>
-      </p:sp>
-      <p:sp>
-        <p:nvSpPr>
-          <p:cNvPr id="13" name="TextBox 12"/>
+              <a:t>▶  並行 → 1 秒搞定 5 個查詢,不用等 5 倍時間;5 個 tool_result 一起回給 LLM</a:t>
+            </a:r>
+          </a:p>
+        </p:txBody>
+      </p:sp>
+      <p:sp>
+        <p:nvSpPr>
+          <p:cNvPr id="27" name="TextBox 26"/>
           <p:cNvSpPr txBox="1"/>
           <p:nvPr/>
         </p:nvSpPr>
@@ -13646,7 +14879,7 @@
                 </a:solidFill>
                 <a:latin typeface="Calibri"/>
               </a:rPr>
-              <a:t>9 / 11</a:t>
+              <a:t>9 / 13</a:t>
             </a:r>
           </a:p>
         </p:txBody>

--- a/slides/03-agentic-tool-loop.pptx
+++ b/slides/03-agentic-tool-loop.pptx
@@ -3615,7 +3615,7 @@
                 </a:solidFill>
                 <a:latin typeface="Calibri"/>
               </a:rPr>
-              <a:t>01 · ⑤   A G E N T   =   2 0   行 迴 圈</a:t>
+              <a:t>02 · ⑥   A G E N T   =   2 0   行 迴 圈</a:t>
             </a:r>
           </a:p>
         </p:txBody>
@@ -4234,7 +4234,7 @@
                 </a:solidFill>
                 <a:latin typeface="Calibri"/>
               </a:rPr>
-              <a:t>03 · ①   M A X _ I T E R A T I O N S · 強制回覆</a:t>
+              <a:t>02 · ⑦   M A X _ I T E R A T I O N S · 強制回覆</a:t>
             </a:r>
           </a:p>
         </p:txBody>
@@ -4464,17 +4464,49 @@
           <a:p>
             <a:pPr algn="l">
               <a:spcAft>
+                <a:spcPts val="1350"/>
+              </a:spcAft>
+            </a:pPr>
+            <a:r>
+              <a:rPr sz="1050" b="0" i="0">
+                <a:solidFill>
+                  <a:srgbClr val="B91C1C"/>
+                </a:solidFill>
+                <a:latin typeface="Calibri"/>
+              </a:rPr>
+              <a:t>✗  使用者體驗極差</a:t>
+            </a:r>
+          </a:p>
+          <a:p>
+            <a:pPr algn="l">
+              <a:spcAft>
+                <a:spcPts val="150"/>
+              </a:spcAft>
+            </a:pPr>
+            <a:r>
+              <a:rPr sz="975" b="0" i="1">
+                <a:solidFill>
+                  <a:srgbClr val="374151"/>
+                </a:solidFill>
+                <a:latin typeface="Calibri"/>
+              </a:rPr>
+              <a:t>情境:LLM 一直查課 → 查老師 → 查論文 →</a:t>
+            </a:r>
+          </a:p>
+          <a:p>
+            <a:pPr algn="l">
+              <a:spcAft>
                 <a:spcPts val="0"/>
               </a:spcAft>
             </a:pPr>
             <a:r>
-              <a:rPr sz="1050" b="0" i="0">
-                <a:solidFill>
-                  <a:srgbClr val="B91C1C"/>
+              <a:rPr sz="975" b="0" i="1">
+                <a:solidFill>
+                  <a:srgbClr val="374151"/>
                 </a:solidFill>
                 <a:latin typeface="Calibri"/>
               </a:rPr>
-              <a:t>✗  使用者體驗極差</a:t>
+              <a:t>再查… 30 秒過去,使用者還沒等到任何回答。</a:t>
             </a:r>
           </a:p>
         </p:txBody>
@@ -4557,7 +4589,7 @@
                 </a:solidFill>
                 <a:latin typeface="Arial Black"/>
               </a:rPr>
-              <a:t>解法:maxIterations = 7</a:t>
+              <a:t>解法:maxIterations = 5</a:t>
             </a:r>
           </a:p>
         </p:txBody>
@@ -4612,7 +4644,7 @@
                 </a:solidFill>
                 <a:latin typeface="Calibri"/>
               </a:rPr>
-              <a:t>✓  第 7 輪(最後一輪)時注入臨時</a:t>
+              <a:t>✓  第 5 輪(最後一輪)時注入臨時</a:t>
             </a:r>
           </a:p>
           <a:p>
@@ -4851,7 +4883,7 @@
                 </a:solidFill>
                 <a:latin typeface="Calibri"/>
               </a:rPr>
-              <a:t>04   L I V E   D E M O</a:t>
+              <a:t>03   L I V E   D E M O</a:t>
             </a:r>
           </a:p>
         </p:txBody>
@@ -6246,7 +6278,7 @@
                 </a:solidFill>
                 <a:latin typeface="Calibri"/>
               </a:rPr>
-              <a:t>05 · ①   S T R A T E G I E S · 回看</a:t>
+              <a:t>04 · ①   S T R A T E G I E S · 回看</a:t>
             </a:r>
           </a:p>
         </p:txBody>
@@ -8938,7 +8970,7 @@
                 </a:solidFill>
                 <a:latin typeface="Calibri"/>
               </a:rPr>
-              <a:t>01 · ③   A G E N T I C · 解法預覽</a:t>
+              <a:t>01 · ②   A G E N T I C · 解法預覽</a:t>
             </a:r>
           </a:p>
         </p:txBody>
@@ -8973,7 +9005,7 @@
                 </a:solidFill>
                 <a:latin typeface="Arial Black"/>
               </a:rPr>
-              <a:t>Agentic 怎麼解 — 一個 query 的 4 步走法</a:t>
+              <a:t>Agentic 怎麼解 — 4 步走法的骨架</a:t>
             </a:r>
           </a:p>
         </p:txBody>
@@ -9008,7 +9040,7 @@
                 </a:solidFill>
                 <a:latin typeface="Calibri"/>
               </a:rPr>
-              <a:t>範例:"找 AI 課程 + 看這些老師最近的論文"</a:t>
+              <a:t>不管什麼複合問題,都是這 4 步;具體走一遍見下一頁</a:t>
             </a:r>
           </a:p>
         </p:txBody>
@@ -9206,8 +9238,8 @@
                 <a:latin typeface="Calibri"/>
               </a:rPr>
               <a:t>LLM 看問題 →
-想到要做兩件事:
-找課程 + 找論文</a:t>
+拆成幾個子任務
+(自己想,你沒教)</a:t>
             </a:r>
           </a:p>
         </p:txBody>
@@ -9439,9 +9471,8 @@
                 </a:solidFill>
                 <a:latin typeface="Calibri"/>
               </a:rPr>
-              <a:t>search_courses
-  (keyword='AI')
-→ 拿到 5 門課</a:t>
+              <a:t>呼叫第一個工具
+→ 拿到中間結果</a:t>
             </a:r>
           </a:p>
         </p:txBody>
@@ -9638,7 +9669,7 @@
                 </a:solidFill>
                 <a:latin typeface="Arial Black"/>
               </a:rPr>
-              <a:t>第二輪 tool call</a:t>
+              <a:t>下一輪 tool call</a:t>
             </a:r>
           </a:p>
         </p:txBody>
@@ -9673,9 +9704,9 @@
                 </a:solidFill>
                 <a:latin typeface="Calibri"/>
               </a:rPr>
-              <a:t>看到課的老師後:
-for each 老師 →
-arxiv_search (parallel)</a:t>
+              <a:t>看上一輪結果
+→ 決定下一個工具
+(可多個並行)</a:t>
             </a:r>
           </a:p>
         </p:txBody>
@@ -10118,7 +10149,7 @@
                 </a:solidFill>
                 <a:latin typeface="Calibri"/>
               </a:rPr>
-              <a:t>01 · ①   A G E N T I C   L O O P · 概念圖</a:t>
+              <a:t>02 · ①   A G E N T I C   L O O P · 概念圖</a:t>
             </a:r>
           </a:p>
         </p:txBody>
@@ -10188,7 +10219,7 @@
                 </a:solidFill>
                 <a:latin typeface="Calibri"/>
               </a:rPr>
-              <a:t>每一輪稱為一個 iteration,最多 maxIterations(預設 7)輪</a:t>
+              <a:t>每一輪稱為一個 iteration,最多 maxIterations(預設 5)輪</a:t>
             </a:r>
           </a:p>
         </p:txBody>
@@ -11194,7 +11225,7 @@
                 </a:solidFill>
                 <a:latin typeface="Calibri"/>
               </a:rPr>
-              <a:t>01 · ②   A G E N T I C   L O O P · 實 例 走 查</a:t>
+              <a:t>02 · ②   A G E N T I C   L O O P · 實 例 走 查</a:t>
             </a:r>
           </a:p>
         </p:txBody>
@@ -12125,7 +12156,7 @@
                 </a:solidFill>
                 <a:latin typeface="Calibri"/>
               </a:rPr>
-              <a:t>01 · ②   T O O L _ U S E   /   T O O L _ R E S U L T</a:t>
+              <a:t>02 · ③   T O O L _ U S E   /   T O O L _ R E S U L T</a:t>
             </a:r>
           </a:p>
         </p:txBody>
@@ -12737,7 +12768,7 @@
                 </a:solidFill>
                 <a:latin typeface="Calibri"/>
               </a:rPr>
-              <a:t>01 · ③   M E S S A G E S   陣 列</a:t>
+              <a:t>02 · ④   M E S S A G E S   陣 列</a:t>
             </a:r>
           </a:p>
         </p:txBody>
@@ -13983,7 +14014,7 @@
                 </a:solidFill>
                 <a:latin typeface="Calibri"/>
               </a:rPr>
-              <a:t>01 · ④   P A R A L L E L   T O O L   C A L L S</a:t>
+              <a:t>02 · ⑤   P A R A L L E L   T O O L   C A L L S</a:t>
             </a:r>
           </a:p>
         </p:txBody>

--- a/slides/03-agentic-tool-loop.pptx
+++ b/slides/03-agentic-tool-loop.pptx
@@ -12226,305 +12226,21 @@
                 </a:solidFill>
                 <a:latin typeface="Calibri"/>
               </a:rPr>
-              <a:t>Segment 2 說「LLM 只吐字串」—— tool_use 就是那段字串,tool_result 是你塞回去的</a:t>
-            </a:r>
-          </a:p>
-        </p:txBody>
-      </p:sp>
-      <p:sp>
-        <p:nvSpPr>
-          <p:cNvPr id="7" name="TextBox 6"/>
-          <p:cNvSpPr txBox="1"/>
-          <p:nvPr/>
-        </p:nvSpPr>
-        <p:spPr>
-          <a:xfrm>
-            <a:off x="582930" y="1680210"/>
-            <a:ext cx="8229600" cy="274320"/>
-          </a:xfrm>
-          <a:prstGeom prst="rect">
-            <a:avLst/>
-          </a:prstGeom>
-          <a:noFill/>
-        </p:spPr>
-        <p:txBody>
-          <a:bodyPr wrap="square" lIns="27432" rIns="27432" tIns="13716" bIns="13716" anchor="t">
-            <a:spAutoFit/>
-          </a:bodyPr>
-          <a:lstStyle/>
-          <a:p>
-            <a:pPr algn="l"/>
-            <a:r>
-              <a:rPr sz="1125" b="1" i="0">
-                <a:solidFill>
-                  <a:srgbClr val="7B5CF5"/>
-                </a:solidFill>
-                <a:latin typeface="Calibri"/>
-              </a:rPr>
-              <a:t>①  LLM 吐出（assistant 的 content 裡）</a:t>
-            </a:r>
-          </a:p>
-        </p:txBody>
-      </p:sp>
-      <p:sp>
-        <p:nvSpPr>
-          <p:cNvPr id="8" name="Rectangle 7"/>
+              <a:t>Segment 2 說「LLM 只吐字串」—— 跟著一輪 loop 走一次:LLM 吐 → 你跑 → 塞回去</a:t>
+            </a:r>
+          </a:p>
+        </p:txBody>
+      </p:sp>
+      <p:sp>
+        <p:nvSpPr>
+          <p:cNvPr id="7" name="Rounded Rectangle 6"/>
           <p:cNvSpPr/>
           <p:nvPr/>
         </p:nvSpPr>
         <p:spPr>
           <a:xfrm>
-            <a:off x="582930" y="1988819"/>
-            <a:ext cx="8229600" cy="1062990"/>
-          </a:xfrm>
-          <a:prstGeom prst="rect">
-            <a:avLst/>
-          </a:prstGeom>
-          <a:solidFill>
-            <a:srgbClr val="1A2138"/>
-          </a:solidFill>
-          <a:ln>
-            <a:noFill/>
-          </a:ln>
-          <a:effectLst/>
-        </p:spPr>
-        <p:style>
-          <a:lnRef idx="1">
-            <a:schemeClr val="accent1"/>
-          </a:lnRef>
-          <a:fillRef idx="3">
-            <a:schemeClr val="accent1"/>
-          </a:fillRef>
-          <a:effectRef idx="2">
-            <a:schemeClr val="accent1"/>
-          </a:effectRef>
-          <a:fontRef idx="minor">
-            <a:schemeClr val="lt1"/>
-          </a:fontRef>
-        </p:style>
-        <p:txBody>
-          <a:bodyPr rtlCol="0" anchor="ctr"/>
-          <a:lstStyle/>
-          <a:p>
-            <a:pPr algn="ctr"/>
-          </a:p>
-        </p:txBody>
-      </p:sp>
-      <p:sp>
-        <p:nvSpPr>
-          <p:cNvPr id="9" name="TextBox 8"/>
-          <p:cNvSpPr txBox="1"/>
-          <p:nvPr/>
-        </p:nvSpPr>
-        <p:spPr>
-          <a:xfrm>
-            <a:off x="802386" y="2139696"/>
-            <a:ext cx="7852409" cy="774954"/>
-          </a:xfrm>
-          <a:prstGeom prst="rect">
-            <a:avLst/>
-          </a:prstGeom>
-          <a:noFill/>
-        </p:spPr>
-        <p:txBody>
-          <a:bodyPr wrap="square" lIns="27432" rIns="27432" tIns="13716" bIns="13716" anchor="t">
-            <a:spAutoFit/>
-          </a:bodyPr>
-          <a:lstStyle/>
-          <a:p>
-            <a:pPr algn="l">
-              <a:spcAft>
-                <a:spcPts val="75"/>
-              </a:spcAft>
-            </a:pPr>
-            <a:r>
-              <a:rPr sz="1050" b="0" i="0">
-                <a:solidFill>
-                  <a:srgbClr val="E5E7EB"/>
-                </a:solidFill>
-                <a:latin typeface="Consolas"/>
-              </a:rPr>
-              <a:t>{ "type": "tool_use", "id": "toolu_01",</a:t>
-            </a:r>
-          </a:p>
-          <a:p>
-            <a:pPr algn="l">
-              <a:spcAft>
-                <a:spcPts val="75"/>
-              </a:spcAft>
-            </a:pPr>
-            <a:r>
-              <a:rPr sz="1050" b="0" i="0">
-                <a:solidFill>
-                  <a:srgbClr val="A8E1B4"/>
-                </a:solidFill>
-                <a:latin typeface="Consolas"/>
-              </a:rPr>
-              <a:t>  "name": "search_courses",</a:t>
-            </a:r>
-          </a:p>
-          <a:p>
-            <a:pPr algn="l">
-              <a:spcAft>
-                <a:spcPts val="75"/>
-              </a:spcAft>
-            </a:pPr>
-            <a:r>
-              <a:rPr sz="1050" b="0" i="0">
-                <a:solidFill>
-                  <a:srgbClr val="E5E7EB"/>
-                </a:solidFill>
-                <a:latin typeface="Consolas"/>
-              </a:rPr>
-              <a:t>  "input": { "keyword": "深度學習", "department": "資工" } }</a:t>
-            </a:r>
-          </a:p>
-        </p:txBody>
-      </p:sp>
-      <p:sp>
-        <p:nvSpPr>
-          <p:cNvPr id="10" name="TextBox 9"/>
-          <p:cNvSpPr txBox="1"/>
-          <p:nvPr/>
-        </p:nvSpPr>
-        <p:spPr>
-          <a:xfrm>
-            <a:off x="582930" y="3223260"/>
-            <a:ext cx="8229600" cy="274320"/>
-          </a:xfrm>
-          <a:prstGeom prst="rect">
-            <a:avLst/>
-          </a:prstGeom>
-          <a:noFill/>
-        </p:spPr>
-        <p:txBody>
-          <a:bodyPr wrap="square" lIns="27432" rIns="27432" tIns="13716" bIns="13716" anchor="t">
-            <a:spAutoFit/>
-          </a:bodyPr>
-          <a:lstStyle/>
-          <a:p>
-            <a:pPr algn="l"/>
-            <a:r>
-              <a:rPr sz="1125" b="1" i="0">
-                <a:solidFill>
-                  <a:srgbClr val="0F766E"/>
-                </a:solidFill>
-                <a:latin typeface="Calibri"/>
-              </a:rPr>
-              <a:t>②  你執行完,把結果塞回去（下一則 user 訊息）</a:t>
-            </a:r>
-          </a:p>
-        </p:txBody>
-      </p:sp>
-      <p:sp>
-        <p:nvSpPr>
-          <p:cNvPr id="11" name="Rectangle 10"/>
-          <p:cNvSpPr/>
-          <p:nvPr/>
-        </p:nvSpPr>
-        <p:spPr>
-          <a:xfrm>
-            <a:off x="582930" y="3531870"/>
-            <a:ext cx="8229600" cy="891540"/>
-          </a:xfrm>
-          <a:prstGeom prst="rect">
-            <a:avLst/>
-          </a:prstGeom>
-          <a:solidFill>
-            <a:srgbClr val="1A2138"/>
-          </a:solidFill>
-          <a:ln>
-            <a:noFill/>
-          </a:ln>
-          <a:effectLst/>
-        </p:spPr>
-        <p:style>
-          <a:lnRef idx="1">
-            <a:schemeClr val="accent1"/>
-          </a:lnRef>
-          <a:fillRef idx="3">
-            <a:schemeClr val="accent1"/>
-          </a:fillRef>
-          <a:effectRef idx="2">
-            <a:schemeClr val="accent1"/>
-          </a:effectRef>
-          <a:fontRef idx="minor">
-            <a:schemeClr val="lt1"/>
-          </a:fontRef>
-        </p:style>
-        <p:txBody>
-          <a:bodyPr rtlCol="0" anchor="ctr"/>
-          <a:lstStyle/>
-          <a:p>
-            <a:pPr algn="ctr"/>
-          </a:p>
-        </p:txBody>
-      </p:sp>
-      <p:sp>
-        <p:nvSpPr>
-          <p:cNvPr id="12" name="TextBox 11"/>
-          <p:cNvSpPr txBox="1"/>
-          <p:nvPr/>
-        </p:nvSpPr>
-        <p:spPr>
-          <a:xfrm>
-            <a:off x="802386" y="3682746"/>
-            <a:ext cx="7852409" cy="603504"/>
-          </a:xfrm>
-          <a:prstGeom prst="rect">
-            <a:avLst/>
-          </a:prstGeom>
-          <a:noFill/>
-        </p:spPr>
-        <p:txBody>
-          <a:bodyPr wrap="square" lIns="27432" rIns="27432" tIns="13716" bIns="13716" anchor="t">
-            <a:spAutoFit/>
-          </a:bodyPr>
-          <a:lstStyle/>
-          <a:p>
-            <a:pPr algn="l">
-              <a:spcAft>
-                <a:spcPts val="75"/>
-              </a:spcAft>
-            </a:pPr>
-            <a:r>
-              <a:rPr sz="1050" b="0" i="0">
-                <a:solidFill>
-                  <a:srgbClr val="E5E7EB"/>
-                </a:solidFill>
-                <a:latin typeface="Consolas"/>
-              </a:rPr>
-              <a:t>{ "type": "tool_result", "tool_use_id": "toolu_01",</a:t>
-            </a:r>
-          </a:p>
-          <a:p>
-            <a:pPr algn="l">
-              <a:spcAft>
-                <a:spcPts val="75"/>
-              </a:spcAft>
-            </a:pPr>
-            <a:r>
-              <a:rPr sz="1050" b="0" i="0">
-                <a:solidFill>
-                  <a:srgbClr val="A8E1B4"/>
-                </a:solidFill>
-                <a:latin typeface="Consolas"/>
-              </a:rPr>
-              <a:t>  "content": "5 門課,授課老師:范、林、王…" }</a:t>
-            </a:r>
-          </a:p>
-        </p:txBody>
-      </p:sp>
-      <p:sp>
-        <p:nvSpPr>
-          <p:cNvPr id="13" name="Rounded Rectangle 12"/>
-          <p:cNvSpPr/>
-          <p:nvPr/>
-        </p:nvSpPr>
-        <p:spPr>
-          <a:xfrm>
-            <a:off x="582930" y="4560570"/>
-            <a:ext cx="8229600" cy="274320"/>
+            <a:off x="582930" y="1748789"/>
+            <a:ext cx="2400300" cy="2160270"/>
           </a:xfrm>
           <a:prstGeom prst="roundRect">
             <a:avLst>
@@ -12565,14 +12281,661 @@
       </p:sp>
       <p:sp>
         <p:nvSpPr>
+          <p:cNvPr id="8" name="TextBox 7"/>
+          <p:cNvSpPr txBox="1"/>
+          <p:nvPr/>
+        </p:nvSpPr>
+        <p:spPr>
+          <a:xfrm>
+            <a:off x="754380" y="1872234"/>
+            <a:ext cx="2057400" cy="377190"/>
+          </a:xfrm>
+          <a:prstGeom prst="rect">
+            <a:avLst/>
+          </a:prstGeom>
+          <a:noFill/>
+        </p:spPr>
+        <p:txBody>
+          <a:bodyPr wrap="square" lIns="27432" rIns="27432" tIns="13716" bIns="13716" anchor="t">
+            <a:spAutoFit/>
+          </a:bodyPr>
+          <a:lstStyle/>
+          <a:p>
+            <a:pPr algn="l"/>
+            <a:r>
+              <a:rPr sz="1500" b="1" i="0">
+                <a:solidFill>
+                  <a:srgbClr val="7B5CF5"/>
+                </a:solidFill>
+                <a:latin typeface="Arial Black"/>
+              </a:rPr>
+              <a:t>① LLM 吐出</a:t>
+            </a:r>
+          </a:p>
+        </p:txBody>
+      </p:sp>
+      <p:sp>
+        <p:nvSpPr>
+          <p:cNvPr id="9" name="TextBox 8"/>
+          <p:cNvSpPr txBox="1"/>
+          <p:nvPr/>
+        </p:nvSpPr>
+        <p:spPr>
+          <a:xfrm>
+            <a:off x="774953" y="2173986"/>
+            <a:ext cx="2057400" cy="240029"/>
+          </a:xfrm>
+          <a:prstGeom prst="rect">
+            <a:avLst/>
+          </a:prstGeom>
+          <a:noFill/>
+        </p:spPr>
+        <p:txBody>
+          <a:bodyPr wrap="square" lIns="27432" rIns="27432" tIns="13716" bIns="13716" anchor="t">
+            <a:spAutoFit/>
+          </a:bodyPr>
+          <a:lstStyle/>
+          <a:p>
+            <a:pPr algn="l"/>
+            <a:r>
+              <a:rPr sz="900" b="0" i="1">
+                <a:solidFill>
+                  <a:srgbClr val="9CA3AF"/>
+                </a:solidFill>
+                <a:latin typeface="Calibri"/>
+              </a:rPr>
+              <a:t>assistant 的 content</a:t>
+            </a:r>
+          </a:p>
+        </p:txBody>
+      </p:sp>
+      <p:sp>
+        <p:nvSpPr>
+          <p:cNvPr id="10" name="TextBox 9"/>
+          <p:cNvSpPr txBox="1"/>
+          <p:nvPr/>
+        </p:nvSpPr>
+        <p:spPr>
+          <a:xfrm>
+            <a:off x="774953" y="2434589"/>
+            <a:ext cx="2057400" cy="1337310"/>
+          </a:xfrm>
+          <a:prstGeom prst="rect">
+            <a:avLst/>
+          </a:prstGeom>
+          <a:noFill/>
+        </p:spPr>
+        <p:txBody>
+          <a:bodyPr wrap="square" lIns="27432" rIns="27432" tIns="13716" bIns="13716" anchor="t">
+            <a:spAutoFit/>
+          </a:bodyPr>
+          <a:lstStyle/>
+          <a:p>
+            <a:pPr algn="l">
+              <a:spcAft>
+                <a:spcPts val="225"/>
+              </a:spcAft>
+            </a:pPr>
+            <a:r>
+              <a:rPr sz="937" b="0" i="0">
+                <a:solidFill>
+                  <a:srgbClr val="374151"/>
+                </a:solidFill>
+                <a:latin typeface="Consolas"/>
+              </a:rPr>
+              <a:t>type: tool_use</a:t>
+            </a:r>
+          </a:p>
+          <a:p>
+            <a:pPr algn="l">
+              <a:spcAft>
+                <a:spcPts val="225"/>
+              </a:spcAft>
+            </a:pPr>
+            <a:r>
+              <a:rPr sz="937" b="1" i="0">
+                <a:solidFill>
+                  <a:srgbClr val="EF4444"/>
+                </a:solidFill>
+                <a:latin typeface="Consolas"/>
+              </a:rPr>
+              <a:t>id: "toolu_01"</a:t>
+            </a:r>
+          </a:p>
+          <a:p>
+            <a:pPr algn="l">
+              <a:spcAft>
+                <a:spcPts val="225"/>
+              </a:spcAft>
+            </a:pPr>
+            <a:r>
+              <a:rPr sz="937" b="0" i="0">
+                <a:solidFill>
+                  <a:srgbClr val="374151"/>
+                </a:solidFill>
+                <a:latin typeface="Consolas"/>
+              </a:rPr>
+              <a:t>name:</a:t>
+            </a:r>
+          </a:p>
+          <a:p>
+            <a:pPr algn="l">
+              <a:spcAft>
+                <a:spcPts val="225"/>
+              </a:spcAft>
+            </a:pPr>
+            <a:r>
+              <a:rPr sz="937" b="0" i="0">
+                <a:solidFill>
+                  <a:srgbClr val="1F2937"/>
+                </a:solidFill>
+                <a:latin typeface="Consolas"/>
+              </a:rPr>
+              <a:t>  search_courses</a:t>
+            </a:r>
+          </a:p>
+          <a:p>
+            <a:pPr algn="l">
+              <a:spcAft>
+                <a:spcPts val="225"/>
+              </a:spcAft>
+            </a:pPr>
+            <a:r>
+              <a:rPr sz="937" b="0" i="0">
+                <a:solidFill>
+                  <a:srgbClr val="374151"/>
+                </a:solidFill>
+                <a:latin typeface="Consolas"/>
+              </a:rPr>
+              <a:t>input:</a:t>
+            </a:r>
+          </a:p>
+          <a:p>
+            <a:pPr algn="l">
+              <a:spcAft>
+                <a:spcPts val="225"/>
+              </a:spcAft>
+            </a:pPr>
+            <a:r>
+              <a:rPr sz="937" b="0" i="0">
+                <a:solidFill>
+                  <a:srgbClr val="1F2937"/>
+                </a:solidFill>
+                <a:latin typeface="Consolas"/>
+              </a:rPr>
+              <a:t>  {keyword:"深度學習"}</a:t>
+            </a:r>
+          </a:p>
+        </p:txBody>
+      </p:sp>
+      <p:sp>
+        <p:nvSpPr>
+          <p:cNvPr id="11" name="Rounded Rectangle 10"/>
+          <p:cNvSpPr/>
+          <p:nvPr/>
+        </p:nvSpPr>
+        <p:spPr>
+          <a:xfrm>
+            <a:off x="3429000" y="1748789"/>
+            <a:ext cx="2400300" cy="2160270"/>
+          </a:xfrm>
+          <a:prstGeom prst="roundRect">
+            <a:avLst>
+              <a:gd name="adj" fmla="val 10000"/>
+            </a:avLst>
+          </a:prstGeom>
+          <a:solidFill>
+            <a:srgbClr val="FFE7DB"/>
+          </a:solidFill>
+          <a:ln w="19050">
+            <a:solidFill>
+              <a:srgbClr val="FB7048"/>
+            </a:solidFill>
+          </a:ln>
+          <a:effectLst/>
+        </p:spPr>
+        <p:style>
+          <a:lnRef idx="1">
+            <a:schemeClr val="accent1"/>
+          </a:lnRef>
+          <a:fillRef idx="3">
+            <a:schemeClr val="accent1"/>
+          </a:fillRef>
+          <a:effectRef idx="2">
+            <a:schemeClr val="accent1"/>
+          </a:effectRef>
+          <a:fontRef idx="minor">
+            <a:schemeClr val="lt1"/>
+          </a:fontRef>
+        </p:style>
+        <p:txBody>
+          <a:bodyPr rtlCol="0" anchor="ctr"/>
+          <a:lstStyle/>
+          <a:p>
+            <a:pPr algn="ctr"/>
+          </a:p>
+        </p:txBody>
+      </p:sp>
+      <p:sp>
+        <p:nvSpPr>
+          <p:cNvPr id="12" name="TextBox 11"/>
+          <p:cNvSpPr txBox="1"/>
+          <p:nvPr/>
+        </p:nvSpPr>
+        <p:spPr>
+          <a:xfrm>
+            <a:off x="3600450" y="1872234"/>
+            <a:ext cx="2057400" cy="377190"/>
+          </a:xfrm>
+          <a:prstGeom prst="rect">
+            <a:avLst/>
+          </a:prstGeom>
+          <a:noFill/>
+        </p:spPr>
+        <p:txBody>
+          <a:bodyPr wrap="square" lIns="27432" rIns="27432" tIns="13716" bIns="13716" anchor="t">
+            <a:spAutoFit/>
+          </a:bodyPr>
+          <a:lstStyle/>
+          <a:p>
+            <a:pPr algn="l"/>
+            <a:r>
+              <a:rPr sz="1500" b="1" i="0">
+                <a:solidFill>
+                  <a:srgbClr val="FB7048"/>
+                </a:solidFill>
+                <a:latin typeface="Arial Black"/>
+              </a:rPr>
+              <a:t>② 你的程式跑</a:t>
+            </a:r>
+          </a:p>
+        </p:txBody>
+      </p:sp>
+      <p:sp>
+        <p:nvSpPr>
+          <p:cNvPr id="13" name="TextBox 12"/>
+          <p:cNvSpPr txBox="1"/>
+          <p:nvPr/>
+        </p:nvSpPr>
+        <p:spPr>
+          <a:xfrm>
+            <a:off x="3621024" y="2173986"/>
+            <a:ext cx="2057400" cy="240029"/>
+          </a:xfrm>
+          <a:prstGeom prst="rect">
+            <a:avLst/>
+          </a:prstGeom>
+          <a:noFill/>
+        </p:spPr>
+        <p:txBody>
+          <a:bodyPr wrap="square" lIns="27432" rIns="27432" tIns="13716" bIns="13716" anchor="t">
+            <a:spAutoFit/>
+          </a:bodyPr>
+          <a:lstStyle/>
+          <a:p>
+            <a:pPr algn="l"/>
+            <a:r>
+              <a:rPr sz="900" b="0" i="1">
+                <a:solidFill>
+                  <a:srgbClr val="9CA3AF"/>
+                </a:solidFill>
+                <a:latin typeface="Calibri"/>
+              </a:rPr>
+              <a:t>harness / 你的 code</a:t>
+            </a:r>
+          </a:p>
+        </p:txBody>
+      </p:sp>
+      <p:sp>
+        <p:nvSpPr>
           <p:cNvPr id="14" name="TextBox 13"/>
           <p:cNvSpPr txBox="1"/>
           <p:nvPr/>
         </p:nvSpPr>
         <p:spPr>
           <a:xfrm>
-            <a:off x="788669" y="4560570"/>
-            <a:ext cx="7818120" cy="274320"/>
+            <a:off x="3621024" y="2434589"/>
+            <a:ext cx="2057400" cy="1337310"/>
+          </a:xfrm>
+          <a:prstGeom prst="rect">
+            <a:avLst/>
+          </a:prstGeom>
+          <a:noFill/>
+        </p:spPr>
+        <p:txBody>
+          <a:bodyPr wrap="square" lIns="27432" rIns="27432" tIns="13716" bIns="13716" anchor="t">
+            <a:spAutoFit/>
+          </a:bodyPr>
+          <a:lstStyle/>
+          <a:p>
+            <a:pPr algn="l">
+              <a:spcAft>
+                <a:spcPts val="225"/>
+              </a:spcAft>
+            </a:pPr>
+            <a:r>
+              <a:rPr sz="937" b="0" i="0">
+                <a:solidFill>
+                  <a:srgbClr val="374151"/>
+                </a:solidFill>
+                <a:latin typeface="Consolas"/>
+              </a:rPr>
+              <a:t>讀 name + input</a:t>
+            </a:r>
+          </a:p>
+          <a:p>
+            <a:pPr algn="l">
+              <a:spcAft>
+                <a:spcPts val="225"/>
+              </a:spcAft>
+            </a:pPr>
+            <a:r>
+              <a:rPr sz="937" b="0" i="0">
+                <a:solidFill>
+                  <a:srgbClr val="9CA3AF"/>
+                </a:solidFill>
+                <a:latin typeface="Consolas"/>
+              </a:rPr>
+              <a:t>↓ 真的去呼叫</a:t>
+            </a:r>
+          </a:p>
+          <a:p>
+            <a:pPr algn="l">
+              <a:spcAft>
+                <a:spcPts val="225"/>
+              </a:spcAft>
+            </a:pPr>
+            <a:r>
+              <a:rPr sz="937" b="0" i="0">
+                <a:solidFill>
+                  <a:srgbClr val="374151"/>
+                </a:solidFill>
+                <a:latin typeface="Consolas"/>
+              </a:rPr>
+              <a:t>search_courses(</a:t>
+            </a:r>
+          </a:p>
+          <a:p>
+            <a:pPr algn="l">
+              <a:spcAft>
+                <a:spcPts val="225"/>
+              </a:spcAft>
+            </a:pPr>
+            <a:r>
+              <a:rPr sz="937" b="0" i="0">
+                <a:solidFill>
+                  <a:srgbClr val="1F2937"/>
+                </a:solidFill>
+                <a:latin typeface="Consolas"/>
+              </a:rPr>
+              <a:t>  "深度學習")</a:t>
+            </a:r>
+          </a:p>
+          <a:p>
+            <a:pPr algn="l">
+              <a:spcAft>
+                <a:spcPts val="225"/>
+              </a:spcAft>
+            </a:pPr>
+            <a:r>
+              <a:rPr sz="937" b="0" i="0">
+                <a:solidFill>
+                  <a:srgbClr val="9CA3AF"/>
+                </a:solidFill>
+                <a:latin typeface="Consolas"/>
+              </a:rPr>
+              <a:t>↓</a:t>
+            </a:r>
+          </a:p>
+          <a:p>
+            <a:pPr algn="l">
+              <a:spcAft>
+                <a:spcPts val="225"/>
+              </a:spcAft>
+            </a:pPr>
+            <a:r>
+              <a:rPr sz="937" b="0" i="0">
+                <a:solidFill>
+                  <a:srgbClr val="374151"/>
+                </a:solidFill>
+                <a:latin typeface="Consolas"/>
+              </a:rPr>
+              <a:t>查資料庫 / API</a:t>
+            </a:r>
+          </a:p>
+        </p:txBody>
+      </p:sp>
+      <p:sp>
+        <p:nvSpPr>
+          <p:cNvPr id="15" name="Rounded Rectangle 14"/>
+          <p:cNvSpPr/>
+          <p:nvPr/>
+        </p:nvSpPr>
+        <p:spPr>
+          <a:xfrm>
+            <a:off x="6275070" y="1748789"/>
+            <a:ext cx="2400300" cy="2160270"/>
+          </a:xfrm>
+          <a:prstGeom prst="roundRect">
+            <a:avLst>
+              <a:gd name="adj" fmla="val 10000"/>
+            </a:avLst>
+          </a:prstGeom>
+          <a:solidFill>
+            <a:srgbClr val="D4F7F0"/>
+          </a:solidFill>
+          <a:ln w="19050">
+            <a:solidFill>
+              <a:srgbClr val="0EA594"/>
+            </a:solidFill>
+          </a:ln>
+          <a:effectLst/>
+        </p:spPr>
+        <p:style>
+          <a:lnRef idx="1">
+            <a:schemeClr val="accent1"/>
+          </a:lnRef>
+          <a:fillRef idx="3">
+            <a:schemeClr val="accent1"/>
+          </a:fillRef>
+          <a:effectRef idx="2">
+            <a:schemeClr val="accent1"/>
+          </a:effectRef>
+          <a:fontRef idx="minor">
+            <a:schemeClr val="lt1"/>
+          </a:fontRef>
+        </p:style>
+        <p:txBody>
+          <a:bodyPr rtlCol="0" anchor="ctr"/>
+          <a:lstStyle/>
+          <a:p>
+            <a:pPr algn="ctr"/>
+          </a:p>
+        </p:txBody>
+      </p:sp>
+      <p:sp>
+        <p:nvSpPr>
+          <p:cNvPr id="16" name="TextBox 15"/>
+          <p:cNvSpPr txBox="1"/>
+          <p:nvPr/>
+        </p:nvSpPr>
+        <p:spPr>
+          <a:xfrm>
+            <a:off x="6446520" y="1872234"/>
+            <a:ext cx="2057400" cy="377190"/>
+          </a:xfrm>
+          <a:prstGeom prst="rect">
+            <a:avLst/>
+          </a:prstGeom>
+          <a:noFill/>
+        </p:spPr>
+        <p:txBody>
+          <a:bodyPr wrap="square" lIns="27432" rIns="27432" tIns="13716" bIns="13716" anchor="t">
+            <a:spAutoFit/>
+          </a:bodyPr>
+          <a:lstStyle/>
+          <a:p>
+            <a:pPr algn="l"/>
+            <a:r>
+              <a:rPr sz="1500" b="1" i="0">
+                <a:solidFill>
+                  <a:srgbClr val="0EA594"/>
+                </a:solidFill>
+                <a:latin typeface="Arial Black"/>
+              </a:rPr>
+              <a:t>③ 塞回去</a:t>
+            </a:r>
+          </a:p>
+        </p:txBody>
+      </p:sp>
+      <p:sp>
+        <p:nvSpPr>
+          <p:cNvPr id="17" name="TextBox 16"/>
+          <p:cNvSpPr txBox="1"/>
+          <p:nvPr/>
+        </p:nvSpPr>
+        <p:spPr>
+          <a:xfrm>
+            <a:off x="6467094" y="2173986"/>
+            <a:ext cx="2057400" cy="240029"/>
+          </a:xfrm>
+          <a:prstGeom prst="rect">
+            <a:avLst/>
+          </a:prstGeom>
+          <a:noFill/>
+        </p:spPr>
+        <p:txBody>
+          <a:bodyPr wrap="square" lIns="27432" rIns="27432" tIns="13716" bIns="13716" anchor="t">
+            <a:spAutoFit/>
+          </a:bodyPr>
+          <a:lstStyle/>
+          <a:p>
+            <a:pPr algn="l"/>
+            <a:r>
+              <a:rPr sz="900" b="0" i="1">
+                <a:solidFill>
+                  <a:srgbClr val="9CA3AF"/>
+                </a:solidFill>
+                <a:latin typeface="Calibri"/>
+              </a:rPr>
+              <a:t>下一則 user 訊息</a:t>
+            </a:r>
+          </a:p>
+        </p:txBody>
+      </p:sp>
+      <p:sp>
+        <p:nvSpPr>
+          <p:cNvPr id="18" name="TextBox 17"/>
+          <p:cNvSpPr txBox="1"/>
+          <p:nvPr/>
+        </p:nvSpPr>
+        <p:spPr>
+          <a:xfrm>
+            <a:off x="6467094" y="2434589"/>
+            <a:ext cx="2057400" cy="1337310"/>
+          </a:xfrm>
+          <a:prstGeom prst="rect">
+            <a:avLst/>
+          </a:prstGeom>
+          <a:noFill/>
+        </p:spPr>
+        <p:txBody>
+          <a:bodyPr wrap="square" lIns="27432" rIns="27432" tIns="13716" bIns="13716" anchor="t">
+            <a:spAutoFit/>
+          </a:bodyPr>
+          <a:lstStyle/>
+          <a:p>
+            <a:pPr algn="l">
+              <a:spcAft>
+                <a:spcPts val="225"/>
+              </a:spcAft>
+            </a:pPr>
+            <a:r>
+              <a:rPr sz="937" b="0" i="0">
+                <a:solidFill>
+                  <a:srgbClr val="374151"/>
+                </a:solidFill>
+                <a:latin typeface="Consolas"/>
+              </a:rPr>
+              <a:t>type:</a:t>
+            </a:r>
+          </a:p>
+          <a:p>
+            <a:pPr algn="l">
+              <a:spcAft>
+                <a:spcPts val="225"/>
+              </a:spcAft>
+            </a:pPr>
+            <a:r>
+              <a:rPr sz="937" b="0" i="0">
+                <a:solidFill>
+                  <a:srgbClr val="1F2937"/>
+                </a:solidFill>
+                <a:latin typeface="Consolas"/>
+              </a:rPr>
+              <a:t>  tool_result</a:t>
+            </a:r>
+          </a:p>
+          <a:p>
+            <a:pPr algn="l">
+              <a:spcAft>
+                <a:spcPts val="225"/>
+              </a:spcAft>
+            </a:pPr>
+            <a:r>
+              <a:rPr sz="937" b="1" i="0">
+                <a:solidFill>
+                  <a:srgbClr val="EF4444"/>
+                </a:solidFill>
+                <a:latin typeface="Consolas"/>
+              </a:rPr>
+              <a:t>tool_use_id: "toolu_01"</a:t>
+            </a:r>
+          </a:p>
+          <a:p>
+            <a:pPr algn="l">
+              <a:spcAft>
+                <a:spcPts val="225"/>
+              </a:spcAft>
+            </a:pPr>
+            <a:r>
+              <a:rPr sz="937" b="0" i="0">
+                <a:solidFill>
+                  <a:srgbClr val="374151"/>
+                </a:solidFill>
+                <a:latin typeface="Consolas"/>
+              </a:rPr>
+              <a:t>content:</a:t>
+            </a:r>
+          </a:p>
+          <a:p>
+            <a:pPr algn="l">
+              <a:spcAft>
+                <a:spcPts val="225"/>
+              </a:spcAft>
+            </a:pPr>
+            <a:r>
+              <a:rPr sz="937" b="0" i="0">
+                <a:solidFill>
+                  <a:srgbClr val="1F2937"/>
+                </a:solidFill>
+                <a:latin typeface="Consolas"/>
+              </a:rPr>
+              <a:t>  "5 門課,范、林…"</a:t>
+            </a:r>
+          </a:p>
+        </p:txBody>
+      </p:sp>
+      <p:sp>
+        <p:nvSpPr>
+          <p:cNvPr id="19" name="TextBox 18"/>
+          <p:cNvSpPr txBox="1"/>
+          <p:nvPr/>
+        </p:nvSpPr>
+        <p:spPr>
+          <a:xfrm>
+            <a:off x="2948939" y="2636901"/>
+            <a:ext cx="514350" cy="377190"/>
           </a:xfrm>
           <a:prstGeom prst="rect">
             <a:avLst/>
@@ -12585,22 +12948,140 @@
           </a:bodyPr>
           <a:lstStyle/>
           <a:p>
+            <a:pPr algn="ctr"/>
+            <a:r>
+              <a:rPr sz="1950" b="1" i="0">
+                <a:solidFill>
+                  <a:srgbClr val="FB7048"/>
+                </a:solidFill>
+                <a:latin typeface="Calibri"/>
+              </a:rPr>
+              <a:t>▶</a:t>
+            </a:r>
+          </a:p>
+        </p:txBody>
+      </p:sp>
+      <p:sp>
+        <p:nvSpPr>
+          <p:cNvPr id="20" name="TextBox 19"/>
+          <p:cNvSpPr txBox="1"/>
+          <p:nvPr/>
+        </p:nvSpPr>
+        <p:spPr>
+          <a:xfrm>
+            <a:off x="5795009" y="2636901"/>
+            <a:ext cx="514350" cy="377190"/>
+          </a:xfrm>
+          <a:prstGeom prst="rect">
+            <a:avLst/>
+          </a:prstGeom>
+          <a:noFill/>
+        </p:spPr>
+        <p:txBody>
+          <a:bodyPr wrap="square" lIns="27432" rIns="27432" tIns="13716" bIns="13716" anchor="ctr">
+            <a:spAutoFit/>
+          </a:bodyPr>
+          <a:lstStyle/>
+          <a:p>
+            <a:pPr algn="ctr"/>
+            <a:r>
+              <a:rPr sz="1950" b="1" i="0">
+                <a:solidFill>
+                  <a:srgbClr val="FB7048"/>
+                </a:solidFill>
+                <a:latin typeface="Calibri"/>
+              </a:rPr>
+              <a:t>▶</a:t>
+            </a:r>
+          </a:p>
+        </p:txBody>
+      </p:sp>
+      <p:sp>
+        <p:nvSpPr>
+          <p:cNvPr id="21" name="Rounded Rectangle 20"/>
+          <p:cNvSpPr/>
+          <p:nvPr/>
+        </p:nvSpPr>
+        <p:spPr>
+          <a:xfrm>
+            <a:off x="582930" y="4457700"/>
+            <a:ext cx="8229600" cy="377190"/>
+          </a:xfrm>
+          <a:prstGeom prst="roundRect">
+            <a:avLst>
+              <a:gd name="adj" fmla="val 10000"/>
+            </a:avLst>
+          </a:prstGeom>
+          <a:solidFill>
+            <a:srgbClr val="FEE2E2"/>
+          </a:solidFill>
+          <a:ln w="19050">
+            <a:solidFill>
+              <a:srgbClr val="EF4444"/>
+            </a:solidFill>
+          </a:ln>
+          <a:effectLst/>
+        </p:spPr>
+        <p:style>
+          <a:lnRef idx="1">
+            <a:schemeClr val="accent1"/>
+          </a:lnRef>
+          <a:fillRef idx="3">
+            <a:schemeClr val="accent1"/>
+          </a:fillRef>
+          <a:effectRef idx="2">
+            <a:schemeClr val="accent1"/>
+          </a:effectRef>
+          <a:fontRef idx="minor">
+            <a:schemeClr val="lt1"/>
+          </a:fontRef>
+        </p:style>
+        <p:txBody>
+          <a:bodyPr rtlCol="0" anchor="ctr"/>
+          <a:lstStyle/>
+          <a:p>
+            <a:pPr algn="ctr"/>
+          </a:p>
+        </p:txBody>
+      </p:sp>
+      <p:sp>
+        <p:nvSpPr>
+          <p:cNvPr id="22" name="TextBox 21"/>
+          <p:cNvSpPr txBox="1"/>
+          <p:nvPr/>
+        </p:nvSpPr>
+        <p:spPr>
+          <a:xfrm>
+            <a:off x="788669" y="4457700"/>
+            <a:ext cx="7818120" cy="377190"/>
+          </a:xfrm>
+          <a:prstGeom prst="rect">
+            <a:avLst/>
+          </a:prstGeom>
+          <a:noFill/>
+        </p:spPr>
+        <p:txBody>
+          <a:bodyPr wrap="square" lIns="27432" rIns="27432" tIns="13716" bIns="13716" anchor="ctr">
+            <a:spAutoFit/>
+          </a:bodyPr>
+          <a:lstStyle/>
+          <a:p>
             <a:pPr algn="l"/>
             <a:r>
-              <a:rPr sz="975" b="1" i="0">
-                <a:solidFill>
-                  <a:srgbClr val="7B5CF5"/>
+              <a:rPr sz="1050" b="1" i="0">
+                <a:solidFill>
+                  <a:srgbClr val="EF4444"/>
                 </a:solidFill>
                 <a:latin typeface="Calibri"/>
               </a:rPr>
-              <a:t>▶  靠 id ↔ tool_use_id 配對,LLM 才知道這個結果是回應哪一次呼叫</a:t>
-            </a:r>
-          </a:p>
-        </p:txBody>
-      </p:sp>
-      <p:sp>
-        <p:nvSpPr>
-          <p:cNvPr id="15" name="TextBox 14"/>
+              <a:t>▶  ① 的 id 和 ③ 的 tool_use_id 必須相同 —— LLM 靠這個配對,才知道結果是回應哪一次呼叫</a:t>
+            </a:r>
+          </a:p>
+        </p:txBody>
+      </p:sp>
+      <p:sp>
+        <p:nvSpPr>
+          <p:cNvPr id="23" name="TextBox 22"/>
           <p:cNvSpPr txBox="1"/>
           <p:nvPr/>
         </p:nvSpPr>
